--- a/docs/public/course-assets/course-pptx/ov-003.pptx
+++ b/docs/public/course-assets/course-pptx/ov-003.pptx
@@ -2,26 +2,26 @@
 <file path=ppt/presentation.xml><?xml version="1.0" encoding="utf-8"?>
 <p:presentation xmlns:p="http://schemas.openxmlformats.org/presentationml/2006/main">
   <p:sldMasterIdLst>
-    <p:sldMasterId xmlns:r="http://schemas.openxmlformats.org/officeDocument/2006/relationships" id="2147483648" r:id="R9af52acc7e014065"/>
+    <p:sldMasterId xmlns:r="http://schemas.openxmlformats.org/officeDocument/2006/relationships" id="2147483648" r:id="R7ca35efcddb64ee1"/>
   </p:sldMasterIdLst>
   <p:notesMasterIdLst>
-    <p:notesMasterId xmlns:r="http://schemas.openxmlformats.org/officeDocument/2006/relationships" r:id="R1e11b808ce434130"/>
+    <p:notesMasterId xmlns:r="http://schemas.openxmlformats.org/officeDocument/2006/relationships" r:id="R0624a54418074c45"/>
   </p:notesMasterIdLst>
   <p:sldIdLst>
-    <p:sldId xmlns:r="http://schemas.openxmlformats.org/officeDocument/2006/relationships" id="256" r:id="R4035bff8998d4439"/>
-    <p:sldId xmlns:r="http://schemas.openxmlformats.org/officeDocument/2006/relationships" id="257" r:id="R017a136352114849"/>
-    <p:sldId xmlns:r="http://schemas.openxmlformats.org/officeDocument/2006/relationships" id="258" r:id="R458188a5bdd448f0"/>
-    <p:sldId xmlns:r="http://schemas.openxmlformats.org/officeDocument/2006/relationships" id="259" r:id="Re77ad543c6604dbe"/>
-    <p:sldId xmlns:r="http://schemas.openxmlformats.org/officeDocument/2006/relationships" id="260" r:id="R8a1ece3a26b64517"/>
-    <p:sldId xmlns:r="http://schemas.openxmlformats.org/officeDocument/2006/relationships" id="261" r:id="R61f43325d09b44c4"/>
-    <p:sldId xmlns:r="http://schemas.openxmlformats.org/officeDocument/2006/relationships" id="262" r:id="R520634986fbf4868"/>
-    <p:sldId xmlns:r="http://schemas.openxmlformats.org/officeDocument/2006/relationships" id="263" r:id="R13fe9e05c74c412e"/>
-    <p:sldId xmlns:r="http://schemas.openxmlformats.org/officeDocument/2006/relationships" id="264" r:id="Rc24d36eff0bc46df"/>
-    <p:sldId xmlns:r="http://schemas.openxmlformats.org/officeDocument/2006/relationships" id="265" r:id="R2afc3c05385248d5"/>
-    <p:sldId xmlns:r="http://schemas.openxmlformats.org/officeDocument/2006/relationships" id="266" r:id="R4e89ec05e0824d41"/>
-    <p:sldId xmlns:r="http://schemas.openxmlformats.org/officeDocument/2006/relationships" id="267" r:id="R4e0a9d8eeab54b0d"/>
-    <p:sldId xmlns:r="http://schemas.openxmlformats.org/officeDocument/2006/relationships" id="268" r:id="Ra48350bf5d1d4d38"/>
-    <p:sldId xmlns:r="http://schemas.openxmlformats.org/officeDocument/2006/relationships" id="269" r:id="Rdd2d10d04d114a09"/>
+    <p:sldId xmlns:r="http://schemas.openxmlformats.org/officeDocument/2006/relationships" id="256" r:id="Rad31b300cb654bd4"/>
+    <p:sldId xmlns:r="http://schemas.openxmlformats.org/officeDocument/2006/relationships" id="257" r:id="R782196030baa451e"/>
+    <p:sldId xmlns:r="http://schemas.openxmlformats.org/officeDocument/2006/relationships" id="258" r:id="R571a517215734a99"/>
+    <p:sldId xmlns:r="http://schemas.openxmlformats.org/officeDocument/2006/relationships" id="259" r:id="R690efdf495ed4be8"/>
+    <p:sldId xmlns:r="http://schemas.openxmlformats.org/officeDocument/2006/relationships" id="260" r:id="Rf5052ead54eb4100"/>
+    <p:sldId xmlns:r="http://schemas.openxmlformats.org/officeDocument/2006/relationships" id="261" r:id="R3fec75785f0745bb"/>
+    <p:sldId xmlns:r="http://schemas.openxmlformats.org/officeDocument/2006/relationships" id="262" r:id="Rf5eb693a795b4674"/>
+    <p:sldId xmlns:r="http://schemas.openxmlformats.org/officeDocument/2006/relationships" id="263" r:id="R715ea7f2f6d64fcb"/>
+    <p:sldId xmlns:r="http://schemas.openxmlformats.org/officeDocument/2006/relationships" id="264" r:id="R7badad541b63423d"/>
+    <p:sldId xmlns:r="http://schemas.openxmlformats.org/officeDocument/2006/relationships" id="265" r:id="R3dbdf08154b84a88"/>
+    <p:sldId xmlns:r="http://schemas.openxmlformats.org/officeDocument/2006/relationships" id="266" r:id="R0dfc587114994f96"/>
+    <p:sldId xmlns:r="http://schemas.openxmlformats.org/officeDocument/2006/relationships" id="267" r:id="R8735ac366bb24801"/>
+    <p:sldId xmlns:r="http://schemas.openxmlformats.org/officeDocument/2006/relationships" id="268" r:id="Raf72093498de44ca"/>
+    <p:sldId xmlns:r="http://schemas.openxmlformats.org/officeDocument/2006/relationships" id="269" r:id="R89f783522ebb4c54"/>
   </p:sldIdLst>
   <p:sldSz cx="12192000" cy="6858000"/>
   <p:notesSz cx="6858000" cy="9144000"/>
@@ -1472,7 +1472,7 @@
   </p:cSld>
   <p:clrMap bg1="lt1" tx1="dk1" bg2="lt2" tx2="dk2" accent1="accent1" accent2="accent2" accent3="accent3" accent4="accent4" accent5="accent5" accent6="accent6" hlink="hlink" folHlink="folHlink"/>
   <p:sldLayoutIdLst>
-    <p:sldLayoutId xmlns:r="http://schemas.openxmlformats.org/officeDocument/2006/relationships" id="2147483649" r:id="Racf3a83fbc104d97"/>
+    <p:sldLayoutId xmlns:r="http://schemas.openxmlformats.org/officeDocument/2006/relationships" id="2147483649" r:id="R2291aef8f85e4ae0"/>
   </p:sldLayoutIdLst>
   <p:txStyles>
     <p:titleStyle>
@@ -2023,7 +2023,7 @@
           <p:cNvPr id="1" name="cover-rule">
             <a:extLst xmlns:a="http://schemas.openxmlformats.org/drawingml/2006/main">
               <a:ext uri="{FF2B5EF4-FFF2-40B4-BE49-F238E27FC236}">
-                <a16:creationId xmlns:a16="http://schemas.microsoft.com/office/drawing/2014/main" id="{AF4DDE63-B688-4E19-BE0E-28C086996028}"/>
+                <a16:creationId xmlns:a16="http://schemas.microsoft.com/office/drawing/2014/main" id="{13833AD7-E226-4158-AEAF-F6F4474F2356}"/>
               </a:ext>
             </a:extLst>
           </p:cNvPr>
@@ -2056,7 +2056,7 @@
           <p:cNvPr id="2" name="cover-ring-1">
             <a:extLst xmlns:a="http://schemas.openxmlformats.org/drawingml/2006/main">
               <a:ext uri="{FF2B5EF4-FFF2-40B4-BE49-F238E27FC236}">
-                <a16:creationId xmlns:a16="http://schemas.microsoft.com/office/drawing/2014/main" id="{866A12D4-1435-4D6B-9BD1-0F0982DD2A91}"/>
+                <a16:creationId xmlns:a16="http://schemas.microsoft.com/office/drawing/2014/main" id="{C6716A55-50D5-4234-B5AA-9274D39CFB34}"/>
               </a:ext>
             </a:extLst>
           </p:cNvPr>
@@ -2087,7 +2087,7 @@
           <p:cNvPr id="3" name="cover-ring-2">
             <a:extLst xmlns:a="http://schemas.openxmlformats.org/drawingml/2006/main">
               <a:ext uri="{FF2B5EF4-FFF2-40B4-BE49-F238E27FC236}">
-                <a16:creationId xmlns:a16="http://schemas.microsoft.com/office/drawing/2014/main" id="{8B6D5A03-F3E2-4D17-9463-AAC1850A315D}"/>
+                <a16:creationId xmlns:a16="http://schemas.microsoft.com/office/drawing/2014/main" id="{8AC8F716-4A80-4974-88B6-2C706C6F94F6}"/>
               </a:ext>
             </a:extLst>
           </p:cNvPr>
@@ -2118,7 +2118,7 @@
           <p:cNvPr id="4" name="cover-core">
             <a:extLst xmlns:a="http://schemas.openxmlformats.org/drawingml/2006/main">
               <a:ext uri="{FF2B5EF4-FFF2-40B4-BE49-F238E27FC236}">
-                <a16:creationId xmlns:a16="http://schemas.microsoft.com/office/drawing/2014/main" id="{397B8FC0-7D8A-4276-BDCA-B88BBA425FC7}"/>
+                <a16:creationId xmlns:a16="http://schemas.microsoft.com/office/drawing/2014/main" id="{E735F7BA-D034-431C-A559-8B2113B8224C}"/>
               </a:ext>
             </a:extLst>
           </p:cNvPr>
@@ -2151,7 +2151,7 @@
           <p:cNvPr id="5" name="cover-line-1">
             <a:extLst xmlns:a="http://schemas.openxmlformats.org/drawingml/2006/main">
               <a:ext uri="{FF2B5EF4-FFF2-40B4-BE49-F238E27FC236}">
-                <a16:creationId xmlns:a16="http://schemas.microsoft.com/office/drawing/2014/main" id="{5CB7B8EF-64E0-4F8C-A30F-B60FCB8C0933}"/>
+                <a16:creationId xmlns:a16="http://schemas.microsoft.com/office/drawing/2014/main" id="{5A2F03F1-55C3-48B7-A7DA-A0A798C23B0E}"/>
               </a:ext>
             </a:extLst>
           </p:cNvPr>
@@ -2182,7 +2182,7 @@
           <p:cNvPr id="6" name="cover-line-2">
             <a:extLst xmlns:a="http://schemas.openxmlformats.org/drawingml/2006/main">
               <a:ext uri="{FF2B5EF4-FFF2-40B4-BE49-F238E27FC236}">
-                <a16:creationId xmlns:a16="http://schemas.microsoft.com/office/drawing/2014/main" id="{F7B0B637-8231-4951-82DC-F16F57E19801}"/>
+                <a16:creationId xmlns:a16="http://schemas.microsoft.com/office/drawing/2014/main" id="{356C7C69-C946-4F0E-81BB-67B3FFB8E893}"/>
               </a:ext>
             </a:extLst>
           </p:cNvPr>
@@ -2213,7 +2213,7 @@
           <p:cNvPr id="7" name="cover-eyebrow">
             <a:extLst xmlns:a="http://schemas.openxmlformats.org/drawingml/2006/main">
               <a:ext uri="{FF2B5EF4-FFF2-40B4-BE49-F238E27FC236}">
-                <a16:creationId xmlns:a16="http://schemas.microsoft.com/office/drawing/2014/main" id="{09DB734D-B6CB-425E-950C-AD9B72670B86}"/>
+                <a16:creationId xmlns:a16="http://schemas.microsoft.com/office/drawing/2014/main" id="{6219719C-C608-4997-AA74-F1C1EE79A8C7}"/>
               </a:ext>
             </a:extLst>
           </p:cNvPr>
@@ -2271,7 +2271,7 @@
           <p:cNvPr id="8" name="cover-title">
             <a:extLst xmlns:a="http://schemas.openxmlformats.org/drawingml/2006/main">
               <a:ext uri="{FF2B5EF4-FFF2-40B4-BE49-F238E27FC236}">
-                <a16:creationId xmlns:a16="http://schemas.microsoft.com/office/drawing/2014/main" id="{362D85A1-4150-424F-A5BD-3CFA188BD84E}"/>
+                <a16:creationId xmlns:a16="http://schemas.microsoft.com/office/drawing/2014/main" id="{63FA1AA8-D58D-4C06-8588-8E261331CB1D}"/>
               </a:ext>
             </a:extLst>
           </p:cNvPr>
@@ -2329,7 +2329,7 @@
           <p:cNvPr id="9" name="cover-subtitle">
             <a:extLst xmlns:a="http://schemas.openxmlformats.org/drawingml/2006/main">
               <a:ext uri="{FF2B5EF4-FFF2-40B4-BE49-F238E27FC236}">
-                <a16:creationId xmlns:a16="http://schemas.microsoft.com/office/drawing/2014/main" id="{639011B9-54CA-4342-8680-64826600F2A2}"/>
+                <a16:creationId xmlns:a16="http://schemas.microsoft.com/office/drawing/2014/main" id="{3AF767F3-8F22-4ED8-9CDC-F7F03034A7D1}"/>
               </a:ext>
             </a:extLst>
           </p:cNvPr>
@@ -2391,7 +2391,7 @@
           <p:cNvPr id="10" name="cover-lead">
             <a:extLst xmlns:a="http://schemas.openxmlformats.org/drawingml/2006/main">
               <a:ext uri="{FF2B5EF4-FFF2-40B4-BE49-F238E27FC236}">
-                <a16:creationId xmlns:a16="http://schemas.microsoft.com/office/drawing/2014/main" id="{1BFEF3D0-C1AE-4E89-966D-309A314EE378}"/>
+                <a16:creationId xmlns:a16="http://schemas.microsoft.com/office/drawing/2014/main" id="{08222B5F-9E96-4927-86D6-6856BE875507}"/>
               </a:ext>
             </a:extLst>
           </p:cNvPr>
@@ -2439,7 +2439,7 @@
                 <a:ea typeface="PingFang SC"/>
                 <a:cs typeface="PingFang SC"/>
               </a:rPr>
-              <a:t>相册应用自动把家人的照片归到一组，输入法预测你要打的下一个词，地图软件预估到达时间——这些功能背后没有一条条人工写死的判断规则。支撑它们的是同一件事…</a:t>
+              <a:t>相册应用自动把家人的照片归到一组；输入法预测你要打的下一个词；地图软件预估到达时间——这些功能背后没有一条条人工写死的判断规则；支撑它们的是同一件事；让程序从数据中自己找出规律</a:t>
             </a:r>
           </a:p>
         </p:txBody>
@@ -2449,7 +2449,7 @@
           <p:cNvPr id="11" name="cover-course">
             <a:extLst xmlns:a="http://schemas.openxmlformats.org/drawingml/2006/main">
               <a:ext uri="{FF2B5EF4-FFF2-40B4-BE49-F238E27FC236}">
-                <a16:creationId xmlns:a16="http://schemas.microsoft.com/office/drawing/2014/main" id="{5E20B057-1CD5-43FC-9703-B212DD2BF090}"/>
+                <a16:creationId xmlns:a16="http://schemas.microsoft.com/office/drawing/2014/main" id="{4BB26E3C-8CD2-4E3D-AE30-BEE26B6FB615}"/>
               </a:ext>
             </a:extLst>
           </p:cNvPr>
@@ -2507,7 +2507,7 @@
           <p:cNvPr id="12" name="cover-id">
             <a:extLst xmlns:a="http://schemas.openxmlformats.org/drawingml/2006/main">
               <a:ext uri="{FF2B5EF4-FFF2-40B4-BE49-F238E27FC236}">
-                <a16:creationId xmlns:a16="http://schemas.microsoft.com/office/drawing/2014/main" id="{692D3477-2B2E-4023-A319-0804AEE9A29B}"/>
+                <a16:creationId xmlns:a16="http://schemas.microsoft.com/office/drawing/2014/main" id="{EB0C23D0-9058-4047-A3FA-9B079A5B4A4C}"/>
               </a:ext>
             </a:extLst>
           </p:cNvPr>
@@ -2563,7 +2563,7 @@
     </p:spTree>
     <p:extLst>
       <p:ext uri="{BB962C8B-B14F-4D97-AF65-F5344CB8AC3E}">
-        <p14:creationId xmlns:p14="http://schemas.microsoft.com/office/powerpoint/2010/main" val="1308744202"/>
+        <p14:creationId xmlns:p14="http://schemas.microsoft.com/office/powerpoint/2010/main" val="129982315"/>
       </p:ext>
     </p:extLst>
   </p:cSld>
@@ -2594,7 +2594,7 @@
           <p:cNvPr id="1" name="s10-rule">
             <a:extLst xmlns:a="http://schemas.openxmlformats.org/drawingml/2006/main">
               <a:ext uri="{FF2B5EF4-FFF2-40B4-BE49-F238E27FC236}">
-                <a16:creationId xmlns:a16="http://schemas.microsoft.com/office/drawing/2014/main" id="{29295A5C-4EE9-4476-A0DC-013123206936}"/>
+                <a16:creationId xmlns:a16="http://schemas.microsoft.com/office/drawing/2014/main" id="{66731149-D2F9-4A7C-B316-B81D43D94EED}"/>
               </a:ext>
             </a:extLst>
           </p:cNvPr>
@@ -2627,7 +2627,7 @@
           <p:cNvPr id="2" name="s10-eyebrow">
             <a:extLst xmlns:a="http://schemas.openxmlformats.org/drawingml/2006/main">
               <a:ext uri="{FF2B5EF4-FFF2-40B4-BE49-F238E27FC236}">
-                <a16:creationId xmlns:a16="http://schemas.microsoft.com/office/drawing/2014/main" id="{6BCD414D-0556-4DB3-8D1A-A517479901E3}"/>
+                <a16:creationId xmlns:a16="http://schemas.microsoft.com/office/drawing/2014/main" id="{A6383310-E14C-4954-874C-5BBD912FBD17}"/>
               </a:ext>
             </a:extLst>
           </p:cNvPr>
@@ -2685,7 +2685,7 @@
           <p:cNvPr id="3" name="s10-title">
             <a:extLst xmlns:a="http://schemas.openxmlformats.org/drawingml/2006/main">
               <a:ext uri="{FF2B5EF4-FFF2-40B4-BE49-F238E27FC236}">
-                <a16:creationId xmlns:a16="http://schemas.microsoft.com/office/drawing/2014/main" id="{80F81C89-0417-4DD0-8466-3FECE51A9DE4}"/>
+                <a16:creationId xmlns:a16="http://schemas.microsoft.com/office/drawing/2014/main" id="{D9BF1102-2309-4D11-8CCC-8FF7A265CC6C}"/>
               </a:ext>
             </a:extLst>
           </p:cNvPr>
@@ -2710,7 +2710,7 @@
         </p:spPr>
         <p:txBody>
           <a:bodyPr xmlns:a="http://schemas.openxmlformats.org/drawingml/2006/main" lIns="0" tIns="0" rIns="0" bIns="0" anchor="ctr">
-            <a:normAutofit fontScale="84097"/>
+            <a:normAutofit fontScale="100000"/>
           </a:bodyPr>
           <a:lstStyle xmlns:a="http://schemas.openxmlformats.org/drawingml/2006/main"/>
           <a:p xmlns:a="http://schemas.openxmlformats.org/drawingml/2006/main">
@@ -2733,7 +2733,7 @@
                 <a:ea typeface="PingFang SC"/>
                 <a:cs typeface="PingFang SC"/>
               </a:rPr>
-              <a:t>误拦正常邮件代价高，需要保留申诉通道，并定期用新样本重新训练</a:t>
+              <a:t>分类与回归都要为高代价错误保留人工判断</a:t>
             </a:r>
           </a:p>
         </p:txBody>
@@ -2743,7 +2743,7 @@
           <p:cNvPr id="4" name="s10-footer">
             <a:extLst xmlns:a="http://schemas.openxmlformats.org/drawingml/2006/main">
               <a:ext uri="{FF2B5EF4-FFF2-40B4-BE49-F238E27FC236}">
-                <a16:creationId xmlns:a16="http://schemas.microsoft.com/office/drawing/2014/main" id="{4D191B66-45A3-482D-A9D0-4B7EF58207F1}"/>
+                <a16:creationId xmlns:a16="http://schemas.microsoft.com/office/drawing/2014/main" id="{709A5B9A-7999-4F51-BDB0-76A4F936C7D0}"/>
               </a:ext>
             </a:extLst>
           </p:cNvPr>
@@ -2774,7 +2774,7 @@
           <p:cNvPr id="5" name="s10-identity">
             <a:extLst xmlns:a="http://schemas.openxmlformats.org/drawingml/2006/main">
               <a:ext uri="{FF2B5EF4-FFF2-40B4-BE49-F238E27FC236}">
-                <a16:creationId xmlns:a16="http://schemas.microsoft.com/office/drawing/2014/main" id="{85A29EBC-7B34-4201-A18A-B29C62A3FF13}"/>
+                <a16:creationId xmlns:a16="http://schemas.microsoft.com/office/drawing/2014/main" id="{94ED7DC0-D3B9-49B7-B5C2-E4A18F55E847}"/>
               </a:ext>
             </a:extLst>
           </p:cNvPr>
@@ -2832,7 +2832,7 @@
           <p:cNvPr id="6" name="case-label-0">
             <a:extLst xmlns:a="http://schemas.openxmlformats.org/drawingml/2006/main">
               <a:ext uri="{FF2B5EF4-FFF2-40B4-BE49-F238E27FC236}">
-                <a16:creationId xmlns:a16="http://schemas.microsoft.com/office/drawing/2014/main" id="{0CFB8EBD-2870-4086-A1A3-EC7EA037C24C}"/>
+                <a16:creationId xmlns:a16="http://schemas.microsoft.com/office/drawing/2014/main" id="{A045E74E-B2C5-42A2-B0F7-EAB4376E652F}"/>
               </a:ext>
             </a:extLst>
           </p:cNvPr>
@@ -2890,7 +2890,7 @@
           <p:cNvPr id="7" name="case-0-row-0">
             <a:extLst xmlns:a="http://schemas.openxmlformats.org/drawingml/2006/main">
               <a:ext uri="{FF2B5EF4-FFF2-40B4-BE49-F238E27FC236}">
-                <a16:creationId xmlns:a16="http://schemas.microsoft.com/office/drawing/2014/main" id="{5E4402D4-1623-4881-B880-80C74E904BA5}"/>
+                <a16:creationId xmlns:a16="http://schemas.microsoft.com/office/drawing/2014/main" id="{378828D1-1560-44C1-8E4B-AB4283601BCB}"/>
               </a:ext>
             </a:extLst>
           </p:cNvPr>
@@ -2977,7 +2977,7 @@
           <p:cNvPr id="8" name="case-0-row-1">
             <a:extLst xmlns:a="http://schemas.openxmlformats.org/drawingml/2006/main">
               <a:ext uri="{FF2B5EF4-FFF2-40B4-BE49-F238E27FC236}">
-                <a16:creationId xmlns:a16="http://schemas.microsoft.com/office/drawing/2014/main" id="{FAC09FE0-C545-422A-81B4-475F96706215}"/>
+                <a16:creationId xmlns:a16="http://schemas.microsoft.com/office/drawing/2014/main" id="{A674FBEE-3F30-4C54-9A44-553126CD0D82}"/>
               </a:ext>
             </a:extLst>
           </p:cNvPr>
@@ -3064,7 +3064,7 @@
           <p:cNvPr id="9" name="case-0-row-2">
             <a:extLst xmlns:a="http://schemas.openxmlformats.org/drawingml/2006/main">
               <a:ext uri="{FF2B5EF4-FFF2-40B4-BE49-F238E27FC236}">
-                <a16:creationId xmlns:a16="http://schemas.microsoft.com/office/drawing/2014/main" id="{035B5026-194C-4D44-9D31-F33D5F0C0742}"/>
+                <a16:creationId xmlns:a16="http://schemas.microsoft.com/office/drawing/2014/main" id="{86088E53-204E-4ECB-BEB6-16C78D0DF713}"/>
               </a:ext>
             </a:extLst>
           </p:cNvPr>
@@ -3088,7 +3088,7 @@
           </a:solidFill>
           <a:ln xmlns:a="http://schemas.openxmlformats.org/drawingml/2006/main" w="9525">
             <a:solidFill>
-              <a:srgbClr val="D6A33A"/>
+              <a:srgbClr val="8A5A00"/>
             </a:solidFill>
             <a:prstDash val="solid"/>
           </a:ln>
@@ -3151,7 +3151,7 @@
           <p:cNvPr id="10" name="case-label-1">
             <a:extLst xmlns:a="http://schemas.openxmlformats.org/drawingml/2006/main">
               <a:ext uri="{FF2B5EF4-FFF2-40B4-BE49-F238E27FC236}">
-                <a16:creationId xmlns:a16="http://schemas.microsoft.com/office/drawing/2014/main" id="{1B67BB7B-8AA7-4898-B114-4F80A83CFF7B}"/>
+                <a16:creationId xmlns:a16="http://schemas.microsoft.com/office/drawing/2014/main" id="{A93FBEAD-81FB-4DE0-A840-E7813A7B6D70}"/>
               </a:ext>
             </a:extLst>
           </p:cNvPr>
@@ -3209,7 +3209,7 @@
           <p:cNvPr id="11" name="case-1-row-0">
             <a:extLst xmlns:a="http://schemas.openxmlformats.org/drawingml/2006/main">
               <a:ext uri="{FF2B5EF4-FFF2-40B4-BE49-F238E27FC236}">
-                <a16:creationId xmlns:a16="http://schemas.microsoft.com/office/drawing/2014/main" id="{33D2FB51-81F0-4E1E-B8AB-C15C3E46EE00}"/>
+                <a16:creationId xmlns:a16="http://schemas.microsoft.com/office/drawing/2014/main" id="{F41E2DBE-61CF-4DB8-897C-773FA2BB4EC3}"/>
               </a:ext>
             </a:extLst>
           </p:cNvPr>
@@ -3296,7 +3296,7 @@
           <p:cNvPr id="12" name="case-1-row-1">
             <a:extLst xmlns:a="http://schemas.openxmlformats.org/drawingml/2006/main">
               <a:ext uri="{FF2B5EF4-FFF2-40B4-BE49-F238E27FC236}">
-                <a16:creationId xmlns:a16="http://schemas.microsoft.com/office/drawing/2014/main" id="{98A036C8-3242-4C6F-A445-0CEA5E8BD890}"/>
+                <a16:creationId xmlns:a16="http://schemas.microsoft.com/office/drawing/2014/main" id="{1F24C317-7DF1-4C2E-A77B-B51F8A5B852D}"/>
               </a:ext>
             </a:extLst>
           </p:cNvPr>
@@ -3383,7 +3383,7 @@
           <p:cNvPr id="13" name="case-1-row-2">
             <a:extLst xmlns:a="http://schemas.openxmlformats.org/drawingml/2006/main">
               <a:ext uri="{FF2B5EF4-FFF2-40B4-BE49-F238E27FC236}">
-                <a16:creationId xmlns:a16="http://schemas.microsoft.com/office/drawing/2014/main" id="{16A85497-A51A-4EA8-A5D6-8A8188F03358}"/>
+                <a16:creationId xmlns:a16="http://schemas.microsoft.com/office/drawing/2014/main" id="{95B9BE56-5234-4DEE-BF6E-EE301624301F}"/>
               </a:ext>
             </a:extLst>
           </p:cNvPr>
@@ -3407,7 +3407,7 @@
           </a:solidFill>
           <a:ln xmlns:a="http://schemas.openxmlformats.org/drawingml/2006/main" w="9525">
             <a:solidFill>
-              <a:srgbClr val="D6A33A"/>
+              <a:srgbClr val="8A5A00"/>
             </a:solidFill>
             <a:prstDash val="solid"/>
           </a:ln>
@@ -3470,7 +3470,7 @@
           <p:cNvPr id="14" name="s10-takeaway-rule">
             <a:extLst xmlns:a="http://schemas.openxmlformats.org/drawingml/2006/main">
               <a:ext uri="{FF2B5EF4-FFF2-40B4-BE49-F238E27FC236}">
-                <a16:creationId xmlns:a16="http://schemas.microsoft.com/office/drawing/2014/main" id="{39C3B8B1-3905-46D0-90CA-4BE305663E7C}"/>
+                <a16:creationId xmlns:a16="http://schemas.microsoft.com/office/drawing/2014/main" id="{791DE177-DC11-4911-8582-C65032E1D8AD}"/>
               </a:ext>
             </a:extLst>
           </p:cNvPr>
@@ -3503,7 +3503,7 @@
           <p:cNvPr id="15" name="s10-takeaway">
             <a:extLst xmlns:a="http://schemas.openxmlformats.org/drawingml/2006/main">
               <a:ext uri="{FF2B5EF4-FFF2-40B4-BE49-F238E27FC236}">
-                <a16:creationId xmlns:a16="http://schemas.microsoft.com/office/drawing/2014/main" id="{0738DA90-E1E8-4346-9D67-8D31E1F2F4E2}"/>
+                <a16:creationId xmlns:a16="http://schemas.microsoft.com/office/drawing/2014/main" id="{7ED04938-6822-4FDC-BC4F-AF6BECCD8C47}"/>
               </a:ext>
             </a:extLst>
           </p:cNvPr>
@@ -3551,7 +3551,7 @@
                 <a:ea typeface="PingFang SC"/>
                 <a:cs typeface="PingFang SC"/>
               </a:rPr>
-              <a:t>误拦正常邮件代价高，需要保留申诉通道，并定期用新样本重新训练</a:t>
+              <a:t>分类与回归都要为高代价错误保留人工判断</a:t>
             </a:r>
           </a:p>
         </p:txBody>
@@ -3559,7 +3559,7 @@
     </p:spTree>
     <p:extLst>
       <p:ext uri="{BB962C8B-B14F-4D97-AF65-F5344CB8AC3E}">
-        <p14:creationId xmlns:p14="http://schemas.microsoft.com/office/powerpoint/2010/main" val="283708648"/>
+        <p14:creationId xmlns:p14="http://schemas.microsoft.com/office/powerpoint/2010/main" val="222683805"/>
       </p:ext>
     </p:extLst>
   </p:cSld>
@@ -3590,7 +3590,7 @@
           <p:cNvPr id="1" name="s11-rule">
             <a:extLst xmlns:a="http://schemas.openxmlformats.org/drawingml/2006/main">
               <a:ext uri="{FF2B5EF4-FFF2-40B4-BE49-F238E27FC236}">
-                <a16:creationId xmlns:a16="http://schemas.microsoft.com/office/drawing/2014/main" id="{046526A4-4720-4E28-A0C3-C41DF9B84783}"/>
+                <a16:creationId xmlns:a16="http://schemas.microsoft.com/office/drawing/2014/main" id="{4A209369-0659-4781-BE31-097E3CAA433C}"/>
               </a:ext>
             </a:extLst>
           </p:cNvPr>
@@ -3623,7 +3623,7 @@
           <p:cNvPr id="2" name="s11-eyebrow">
             <a:extLst xmlns:a="http://schemas.openxmlformats.org/drawingml/2006/main">
               <a:ext uri="{FF2B5EF4-FFF2-40B4-BE49-F238E27FC236}">
-                <a16:creationId xmlns:a16="http://schemas.microsoft.com/office/drawing/2014/main" id="{66C914B6-C716-4027-8E12-0FF20306E5D7}"/>
+                <a16:creationId xmlns:a16="http://schemas.microsoft.com/office/drawing/2014/main" id="{162F3B8B-043E-4937-B87B-05C3ED1A0D26}"/>
               </a:ext>
             </a:extLst>
           </p:cNvPr>
@@ -3681,7 +3681,7 @@
           <p:cNvPr id="3" name="s11-title">
             <a:extLst xmlns:a="http://schemas.openxmlformats.org/drawingml/2006/main">
               <a:ext uri="{FF2B5EF4-FFF2-40B4-BE49-F238E27FC236}">
-                <a16:creationId xmlns:a16="http://schemas.microsoft.com/office/drawing/2014/main" id="{9474F873-E600-434C-BDCC-772647410B3D}"/>
+                <a16:creationId xmlns:a16="http://schemas.microsoft.com/office/drawing/2014/main" id="{F5275C2F-87DE-44EE-A68B-0B1B83BD5048}"/>
               </a:ext>
             </a:extLst>
           </p:cNvPr>
@@ -3706,7 +3706,7 @@
         </p:spPr>
         <p:txBody>
           <a:bodyPr xmlns:a="http://schemas.openxmlformats.org/drawingml/2006/main" lIns="0" tIns="0" rIns="0" bIns="0" anchor="ctr">
-            <a:normAutofit fontScale="76449"/>
+            <a:normAutofit fontScale="100000"/>
           </a:bodyPr>
           <a:lstStyle xmlns:a="http://schemas.openxmlformats.org/drawingml/2006/main"/>
           <a:p xmlns:a="http://schemas.openxmlformats.org/drawingml/2006/main">
@@ -3729,7 +3729,7 @@
                 <a:ea typeface="PingFang SC"/>
                 <a:cs typeface="PingFang SC"/>
               </a:rPr>
-              <a:t>低置信度样本转人工录入，识别错误会直接造成金额差错，阈值设置要保守</a:t>
+              <a:t>低置信度识别必须转人工，避免金额差错</a:t>
             </a:r>
           </a:p>
         </p:txBody>
@@ -3739,7 +3739,7 @@
           <p:cNvPr id="4" name="s11-footer">
             <a:extLst xmlns:a="http://schemas.openxmlformats.org/drawingml/2006/main">
               <a:ext uri="{FF2B5EF4-FFF2-40B4-BE49-F238E27FC236}">
-                <a16:creationId xmlns:a16="http://schemas.microsoft.com/office/drawing/2014/main" id="{0C89EF0D-F37B-4942-ADED-46BF126FC1BE}"/>
+                <a16:creationId xmlns:a16="http://schemas.microsoft.com/office/drawing/2014/main" id="{3C0126CA-D9C8-4FED-843E-7E7B46E49126}"/>
               </a:ext>
             </a:extLst>
           </p:cNvPr>
@@ -3770,7 +3770,7 @@
           <p:cNvPr id="5" name="s11-identity">
             <a:extLst xmlns:a="http://schemas.openxmlformats.org/drawingml/2006/main">
               <a:ext uri="{FF2B5EF4-FFF2-40B4-BE49-F238E27FC236}">
-                <a16:creationId xmlns:a16="http://schemas.microsoft.com/office/drawing/2014/main" id="{C89DAE98-81F0-4646-B4E8-1890B8600443}"/>
+                <a16:creationId xmlns:a16="http://schemas.microsoft.com/office/drawing/2014/main" id="{01773B70-FC00-4F6F-A517-F56E9630C83F}"/>
               </a:ext>
             </a:extLst>
           </p:cNvPr>
@@ -3828,7 +3828,7 @@
           <p:cNvPr id="6" name="case-title">
             <a:extLst xmlns:a="http://schemas.openxmlformats.org/drawingml/2006/main">
               <a:ext uri="{FF2B5EF4-FFF2-40B4-BE49-F238E27FC236}">
-                <a16:creationId xmlns:a16="http://schemas.microsoft.com/office/drawing/2014/main" id="{9C528C76-8484-46BD-AE5E-B9B467C55EA8}"/>
+                <a16:creationId xmlns:a16="http://schemas.microsoft.com/office/drawing/2014/main" id="{F0959CC6-AD8E-424C-8F6A-1C464F87DE04}"/>
               </a:ext>
             </a:extLst>
           </p:cNvPr>
@@ -3892,7 +3892,7 @@
           <p:cNvPr id="7" name="case-row-0">
             <a:extLst xmlns:a="http://schemas.openxmlformats.org/drawingml/2006/main">
               <a:ext uri="{FF2B5EF4-FFF2-40B4-BE49-F238E27FC236}">
-                <a16:creationId xmlns:a16="http://schemas.microsoft.com/office/drawing/2014/main" id="{4212CF9C-63B9-4DC5-B5BE-0B8364E87827}"/>
+                <a16:creationId xmlns:a16="http://schemas.microsoft.com/office/drawing/2014/main" id="{823967E4-A67C-49EC-B520-AAFBA4F9EC31}"/>
               </a:ext>
             </a:extLst>
           </p:cNvPr>
@@ -3956,7 +3956,7 @@
           <p:cNvPr id="8" name="case-row-1">
             <a:extLst xmlns:a="http://schemas.openxmlformats.org/drawingml/2006/main">
               <a:ext uri="{FF2B5EF4-FFF2-40B4-BE49-F238E27FC236}">
-                <a16:creationId xmlns:a16="http://schemas.microsoft.com/office/drawing/2014/main" id="{570EA3A0-9FAE-4137-AC44-96BE69C26BD7}"/>
+                <a16:creationId xmlns:a16="http://schemas.microsoft.com/office/drawing/2014/main" id="{10A3ADA6-957F-42E7-AA27-50C662060C7F}"/>
               </a:ext>
             </a:extLst>
           </p:cNvPr>
@@ -4020,7 +4020,7 @@
           <p:cNvPr id="9" name="case-row-2">
             <a:extLst xmlns:a="http://schemas.openxmlformats.org/drawingml/2006/main">
               <a:ext uri="{FF2B5EF4-FFF2-40B4-BE49-F238E27FC236}">
-                <a16:creationId xmlns:a16="http://schemas.microsoft.com/office/drawing/2014/main" id="{B0694853-D4DB-41E0-9120-CDF24F825D58}"/>
+                <a16:creationId xmlns:a16="http://schemas.microsoft.com/office/drawing/2014/main" id="{3C9A07BB-A6EE-4B60-B7D2-C8D8B4967E88}"/>
               </a:ext>
             </a:extLst>
           </p:cNvPr>
@@ -4084,7 +4084,7 @@
           <p:cNvPr id="10" name="case-row-3">
             <a:extLst xmlns:a="http://schemas.openxmlformats.org/drawingml/2006/main">
               <a:ext uri="{FF2B5EF4-FFF2-40B4-BE49-F238E27FC236}">
-                <a16:creationId xmlns:a16="http://schemas.microsoft.com/office/drawing/2014/main" id="{30213B50-8F0D-41D9-9A13-471443C68927}"/>
+                <a16:creationId xmlns:a16="http://schemas.microsoft.com/office/drawing/2014/main" id="{68975DE1-7C6E-4298-B724-78114CF7CF19}"/>
               </a:ext>
             </a:extLst>
           </p:cNvPr>
@@ -4148,7 +4148,7 @@
           <p:cNvPr id="11" name="case-row-4">
             <a:extLst xmlns:a="http://schemas.openxmlformats.org/drawingml/2006/main">
               <a:ext uri="{FF2B5EF4-FFF2-40B4-BE49-F238E27FC236}">
-                <a16:creationId xmlns:a16="http://schemas.microsoft.com/office/drawing/2014/main" id="{B800D2AB-2219-4800-8F01-574ED769F216}"/>
+                <a16:creationId xmlns:a16="http://schemas.microsoft.com/office/drawing/2014/main" id="{F42EB87F-E131-41B7-B8A9-FAAB4B699CD7}"/>
               </a:ext>
             </a:extLst>
           </p:cNvPr>
@@ -4172,7 +4172,7 @@
           </a:solidFill>
           <a:ln xmlns:a="http://schemas.openxmlformats.org/drawingml/2006/main" w="9525">
             <a:solidFill>
-              <a:srgbClr val="D6A33A"/>
+              <a:srgbClr val="8A5A00"/>
             </a:solidFill>
             <a:prstDash val="solid"/>
           </a:ln>
@@ -4212,7 +4212,7 @@
           <p:cNvPr id="12" name="s11-takeaway-rule">
             <a:extLst xmlns:a="http://schemas.openxmlformats.org/drawingml/2006/main">
               <a:ext uri="{FF2B5EF4-FFF2-40B4-BE49-F238E27FC236}">
-                <a16:creationId xmlns:a16="http://schemas.microsoft.com/office/drawing/2014/main" id="{EE0684F7-5521-476B-BF8F-7A327F925E00}"/>
+                <a16:creationId xmlns:a16="http://schemas.microsoft.com/office/drawing/2014/main" id="{68690E42-CD1F-4BF7-B43D-0574917DA673}"/>
               </a:ext>
             </a:extLst>
           </p:cNvPr>
@@ -4245,7 +4245,7 @@
           <p:cNvPr id="13" name="s11-takeaway">
             <a:extLst xmlns:a="http://schemas.openxmlformats.org/drawingml/2006/main">
               <a:ext uri="{FF2B5EF4-FFF2-40B4-BE49-F238E27FC236}">
-                <a16:creationId xmlns:a16="http://schemas.microsoft.com/office/drawing/2014/main" id="{5E26C4B5-94DE-4961-855A-3C97BB6ED048}"/>
+                <a16:creationId xmlns:a16="http://schemas.microsoft.com/office/drawing/2014/main" id="{C470F0F3-AF97-41FD-9F39-B19516765C9C}"/>
               </a:ext>
             </a:extLst>
           </p:cNvPr>
@@ -4293,7 +4293,7 @@
                 <a:ea typeface="PingFang SC"/>
                 <a:cs typeface="PingFang SC"/>
               </a:rPr>
-              <a:t>低置信度样本转人工录入，识别错误会直接造成金额差错，阈值设置要保守</a:t>
+              <a:t>低置信度识别必须转人工，避免金额差错</a:t>
             </a:r>
           </a:p>
         </p:txBody>
@@ -4301,7 +4301,7 @@
     </p:spTree>
     <p:extLst>
       <p:ext uri="{BB962C8B-B14F-4D97-AF65-F5344CB8AC3E}">
-        <p14:creationId xmlns:p14="http://schemas.microsoft.com/office/powerpoint/2010/main" val="170066946"/>
+        <p14:creationId xmlns:p14="http://schemas.microsoft.com/office/powerpoint/2010/main" val="1029969899"/>
       </p:ext>
     </p:extLst>
   </p:cSld>
@@ -4332,7 +4332,7 @@
           <p:cNvPr id="1" name="s12-rule">
             <a:extLst xmlns:a="http://schemas.openxmlformats.org/drawingml/2006/main">
               <a:ext uri="{FF2B5EF4-FFF2-40B4-BE49-F238E27FC236}">
-                <a16:creationId xmlns:a16="http://schemas.microsoft.com/office/drawing/2014/main" id="{C6845BF4-9471-45CE-B64B-BA20DCAEE072}"/>
+                <a16:creationId xmlns:a16="http://schemas.microsoft.com/office/drawing/2014/main" id="{D145F63C-FC71-4331-B08E-69A1320CA8E5}"/>
               </a:ext>
             </a:extLst>
           </p:cNvPr>
@@ -4365,7 +4365,7 @@
           <p:cNvPr id="2" name="s12-eyebrow">
             <a:extLst xmlns:a="http://schemas.openxmlformats.org/drawingml/2006/main">
               <a:ext uri="{FF2B5EF4-FFF2-40B4-BE49-F238E27FC236}">
-                <a16:creationId xmlns:a16="http://schemas.microsoft.com/office/drawing/2014/main" id="{9FAB96FD-150A-4FDC-8A8D-11E2F9C9E6B5}"/>
+                <a16:creationId xmlns:a16="http://schemas.microsoft.com/office/drawing/2014/main" id="{E1555771-5741-4DAB-A5CF-BA77FE9A1A28}"/>
               </a:ext>
             </a:extLst>
           </p:cNvPr>
@@ -4423,7 +4423,7 @@
           <p:cNvPr id="3" name="s12-title">
             <a:extLst xmlns:a="http://schemas.openxmlformats.org/drawingml/2006/main">
               <a:ext uri="{FF2B5EF4-FFF2-40B4-BE49-F238E27FC236}">
-                <a16:creationId xmlns:a16="http://schemas.microsoft.com/office/drawing/2014/main" id="{C5A33246-4CDE-45BB-9591-BCA1AB9048A3}"/>
+                <a16:creationId xmlns:a16="http://schemas.microsoft.com/office/drawing/2014/main" id="{148435BD-AB44-45D7-9426-6D13737A0405}"/>
               </a:ext>
             </a:extLst>
           </p:cNvPr>
@@ -4471,7 +4471,7 @@
                 <a:ea typeface="PingFang SC"/>
                 <a:cs typeface="PingFang SC"/>
               </a:rPr>
-              <a:t>把方法落实为可验证的行动</a:t>
+              <a:t>机器学习与深度学习：一次可验收练习</a:t>
             </a:r>
           </a:p>
         </p:txBody>
@@ -4481,7 +4481,7 @@
           <p:cNvPr id="4" name="s12-footer">
             <a:extLst xmlns:a="http://schemas.openxmlformats.org/drawingml/2006/main">
               <a:ext uri="{FF2B5EF4-FFF2-40B4-BE49-F238E27FC236}">
-                <a16:creationId xmlns:a16="http://schemas.microsoft.com/office/drawing/2014/main" id="{200BAE91-ECDB-4394-B191-87B36A599F8A}"/>
+                <a16:creationId xmlns:a16="http://schemas.microsoft.com/office/drawing/2014/main" id="{38695893-09E2-4CF6-A941-D5FF7F6428A5}"/>
               </a:ext>
             </a:extLst>
           </p:cNvPr>
@@ -4512,7 +4512,7 @@
           <p:cNvPr id="5" name="s12-identity">
             <a:extLst xmlns:a="http://schemas.openxmlformats.org/drawingml/2006/main">
               <a:ext uri="{FF2B5EF4-FFF2-40B4-BE49-F238E27FC236}">
-                <a16:creationId xmlns:a16="http://schemas.microsoft.com/office/drawing/2014/main" id="{40C9A061-88BD-4844-A3C9-A2A1709A0C26}"/>
+                <a16:creationId xmlns:a16="http://schemas.microsoft.com/office/drawing/2014/main" id="{7F67BBDF-7666-4E95-AE70-5FA64D3B50C0}"/>
               </a:ext>
             </a:extLst>
           </p:cNvPr>
@@ -4570,7 +4570,7 @@
           <p:cNvPr id="6" name="practice-circle-0">
             <a:extLst xmlns:a="http://schemas.openxmlformats.org/drawingml/2006/main">
               <a:ext uri="{FF2B5EF4-FFF2-40B4-BE49-F238E27FC236}">
-                <a16:creationId xmlns:a16="http://schemas.microsoft.com/office/drawing/2014/main" id="{92BD791D-4297-4A89-B19B-9A39A49B09FE}"/>
+                <a16:creationId xmlns:a16="http://schemas.microsoft.com/office/drawing/2014/main" id="{48EE1544-9C31-45A7-9DC3-2C05D4817403}"/>
               </a:ext>
             </a:extLst>
           </p:cNvPr>
@@ -4603,7 +4603,7 @@
           <p:cNvPr id="7" name="practice-number-0">
             <a:extLst xmlns:a="http://schemas.openxmlformats.org/drawingml/2006/main">
               <a:ext uri="{FF2B5EF4-FFF2-40B4-BE49-F238E27FC236}">
-                <a16:creationId xmlns:a16="http://schemas.microsoft.com/office/drawing/2014/main" id="{C9EF262C-8D6E-46BC-B655-8B35883799F4}"/>
+                <a16:creationId xmlns:a16="http://schemas.microsoft.com/office/drawing/2014/main" id="{B0CF24DF-8FEC-4C6A-B2AE-A4F1F3436EB4}"/>
               </a:ext>
             </a:extLst>
           </p:cNvPr>
@@ -4661,7 +4661,7 @@
           <p:cNvPr id="8" name="practice-item-0">
             <a:extLst xmlns:a="http://schemas.openxmlformats.org/drawingml/2006/main">
               <a:ext uri="{FF2B5EF4-FFF2-40B4-BE49-F238E27FC236}">
-                <a16:creationId xmlns:a16="http://schemas.microsoft.com/office/drawing/2014/main" id="{1CEA1AC9-EC32-44E9-B1F0-28259DE71657}"/>
+                <a16:creationId xmlns:a16="http://schemas.microsoft.com/office/drawing/2014/main" id="{02A6C3D3-B9DC-406D-973E-C9D41142ED6C}"/>
               </a:ext>
             </a:extLst>
           </p:cNvPr>
@@ -4692,7 +4692,7 @@
         </p:spPr>
         <p:txBody>
           <a:bodyPr xmlns:a="http://schemas.openxmlformats.org/drawingml/2006/main" lIns="152400" tIns="133350" rIns="152400" bIns="133350" anchor="ctr">
-            <a:normAutofit fontScale="85750"/>
+            <a:normAutofit fontScale="93921"/>
           </a:bodyPr>
           <a:lstStyle xmlns:a="http://schemas.openxmlformats.org/drawingml/2006/main"/>
           <a:p xmlns:a="http://schemas.openxmlformats.org/drawingml/2006/main">
@@ -4715,7 +4715,7 @@
                 <a:ea typeface="PingFang SC"/>
                 <a:cs typeface="PingFang SC"/>
               </a:rPr>
-              <a:t>用表格软件对 10 组"气温—用电量"数据画散点图并添加线性趋势线，读出斜率和截距，说明它们各自的现实含义。；把你工作中的一个真实问题改写成监督学习任务：写清输入特征是什么、标签是什么…</a:t>
+              <a:t>用表格软件对 10 组"气温—用电量"数据画散点图并添加线性趋势线；读出斜率和截距，说明它们各自的现实含义；把你工作中的一个真实问题改写成监督学习任务</a:t>
             </a:r>
           </a:p>
         </p:txBody>
@@ -4725,7 +4725,7 @@
           <p:cNvPr id="9" name="practice-connector-0">
             <a:extLst xmlns:a="http://schemas.openxmlformats.org/drawingml/2006/main">
               <a:ext uri="{FF2B5EF4-FFF2-40B4-BE49-F238E27FC236}">
-                <a16:creationId xmlns:a16="http://schemas.microsoft.com/office/drawing/2014/main" id="{900C6D8D-D250-450E-AA38-D140207C4D08}"/>
+                <a16:creationId xmlns:a16="http://schemas.microsoft.com/office/drawing/2014/main" id="{9DBF33AD-1CCF-4C9A-BFB5-A26DE0DD624C}"/>
               </a:ext>
             </a:extLst>
           </p:cNvPr>
@@ -4745,7 +4745,7 @@
           <a:noFill xmlns:a="http://schemas.openxmlformats.org/drawingml/2006/main"/>
           <a:ln xmlns:a="http://schemas.openxmlformats.org/drawingml/2006/main" w="28575">
             <a:solidFill>
-              <a:srgbClr val="D6A33A"/>
+              <a:srgbClr val="8A5A00"/>
             </a:solidFill>
             <a:prstDash val="solid"/>
           </a:ln>
@@ -4756,7 +4756,7 @@
           <p:cNvPr id="10" name="practice-circle-1">
             <a:extLst xmlns:a="http://schemas.openxmlformats.org/drawingml/2006/main">
               <a:ext uri="{FF2B5EF4-FFF2-40B4-BE49-F238E27FC236}">
-                <a16:creationId xmlns:a16="http://schemas.microsoft.com/office/drawing/2014/main" id="{02B91D8B-96B9-4290-8936-8F5D89075598}"/>
+                <a16:creationId xmlns:a16="http://schemas.microsoft.com/office/drawing/2014/main" id="{01E34527-1082-435E-8F91-4C0C303F84FF}"/>
               </a:ext>
             </a:extLst>
           </p:cNvPr>
@@ -4789,7 +4789,7 @@
           <p:cNvPr id="11" name="practice-number-1">
             <a:extLst xmlns:a="http://schemas.openxmlformats.org/drawingml/2006/main">
               <a:ext uri="{FF2B5EF4-FFF2-40B4-BE49-F238E27FC236}">
-                <a16:creationId xmlns:a16="http://schemas.microsoft.com/office/drawing/2014/main" id="{54A1E3E3-6FF0-421C-B493-04667E29C2AF}"/>
+                <a16:creationId xmlns:a16="http://schemas.microsoft.com/office/drawing/2014/main" id="{E6EA2892-AE49-44AE-90F2-056E59E97E62}"/>
               </a:ext>
             </a:extLst>
           </p:cNvPr>
@@ -4847,7 +4847,7 @@
           <p:cNvPr id="12" name="practice-item-1">
             <a:extLst xmlns:a="http://schemas.openxmlformats.org/drawingml/2006/main">
               <a:ext uri="{FF2B5EF4-FFF2-40B4-BE49-F238E27FC236}">
-                <a16:creationId xmlns:a16="http://schemas.microsoft.com/office/drawing/2014/main" id="{B298968A-11A0-4C02-A8A6-911A92CCE8BA}"/>
+                <a16:creationId xmlns:a16="http://schemas.microsoft.com/office/drawing/2014/main" id="{5FAF3CD4-8719-4638-B376-4407C1275838}"/>
               </a:ext>
             </a:extLst>
           </p:cNvPr>
@@ -4901,7 +4901,7 @@
                 <a:ea typeface="PingFang SC"/>
                 <a:cs typeface="PingFang SC"/>
               </a:rPr>
-              <a:t>打开浏览器版 Teachable Machine，训练一个两类图像分类器：先每类只给 5 张样本，再增加到 30 张，对比测试效果，体会数据量与过拟合的关系…</a:t>
+              <a:t>打开浏览器版 Teachable Machine；训练一个两类图像分类器；先每类只给 5 张样本；再增加到 30 张；对比测试效果，体会数据量与过拟合的关系</a:t>
             </a:r>
           </a:p>
         </p:txBody>
@@ -4911,7 +4911,7 @@
           <p:cNvPr id="13" name="practice-connector-1">
             <a:extLst xmlns:a="http://schemas.openxmlformats.org/drawingml/2006/main">
               <a:ext uri="{FF2B5EF4-FFF2-40B4-BE49-F238E27FC236}">
-                <a16:creationId xmlns:a16="http://schemas.microsoft.com/office/drawing/2014/main" id="{7D2C2852-B217-43DC-B0B4-C0E884EB9A1E}"/>
+                <a16:creationId xmlns:a16="http://schemas.microsoft.com/office/drawing/2014/main" id="{ADF20C3B-FC7B-4E86-A6B0-1551ABA28364}"/>
               </a:ext>
             </a:extLst>
           </p:cNvPr>
@@ -4931,7 +4931,7 @@
           <a:noFill xmlns:a="http://schemas.openxmlformats.org/drawingml/2006/main"/>
           <a:ln xmlns:a="http://schemas.openxmlformats.org/drawingml/2006/main" w="28575">
             <a:solidFill>
-              <a:srgbClr val="D6A33A"/>
+              <a:srgbClr val="8A5A00"/>
             </a:solidFill>
             <a:prstDash val="solid"/>
           </a:ln>
@@ -4942,7 +4942,7 @@
           <p:cNvPr id="14" name="practice-circle-2">
             <a:extLst xmlns:a="http://schemas.openxmlformats.org/drawingml/2006/main">
               <a:ext uri="{FF2B5EF4-FFF2-40B4-BE49-F238E27FC236}">
-                <a16:creationId xmlns:a16="http://schemas.microsoft.com/office/drawing/2014/main" id="{EFDDAA43-B0B6-414F-A925-365FE4EEA892}"/>
+                <a16:creationId xmlns:a16="http://schemas.microsoft.com/office/drawing/2014/main" id="{3BF2EC43-63B6-45DF-890E-0BAA159639DC}"/>
               </a:ext>
             </a:extLst>
           </p:cNvPr>
@@ -4960,7 +4960,7 @@
             <a:avLst/>
           </a:prstGeom>
           <a:solidFill xmlns:a="http://schemas.openxmlformats.org/drawingml/2006/main">
-            <a:srgbClr val="D6A33A"/>
+            <a:srgbClr val="8A5A00"/>
           </a:solidFill>
           <a:ln xmlns:a="http://schemas.openxmlformats.org/drawingml/2006/main" w="28575">
             <a:solidFill>
@@ -4975,7 +4975,7 @@
           <p:cNvPr id="15" name="practice-number-2">
             <a:extLst xmlns:a="http://schemas.openxmlformats.org/drawingml/2006/main">
               <a:ext uri="{FF2B5EF4-FFF2-40B4-BE49-F238E27FC236}">
-                <a16:creationId xmlns:a16="http://schemas.microsoft.com/office/drawing/2014/main" id="{29155D1D-43F8-4EFB-96D4-B2506803C32C}"/>
+                <a16:creationId xmlns:a16="http://schemas.microsoft.com/office/drawing/2014/main" id="{97F993F8-CBFA-42D5-8D2D-2BD723BBBCA8}"/>
               </a:ext>
             </a:extLst>
           </p:cNvPr>
@@ -5033,7 +5033,7 @@
           <p:cNvPr id="16" name="practice-item-2">
             <a:extLst xmlns:a="http://schemas.openxmlformats.org/drawingml/2006/main">
               <a:ext uri="{FF2B5EF4-FFF2-40B4-BE49-F238E27FC236}">
-                <a16:creationId xmlns:a16="http://schemas.microsoft.com/office/drawing/2014/main" id="{FD804C3E-9B2B-40B8-B8C9-900420D8D68B}"/>
+                <a16:creationId xmlns:a16="http://schemas.microsoft.com/office/drawing/2014/main" id="{8F0B7553-7950-42FB-A7AB-E2EAD0FE64B9}"/>
               </a:ext>
             </a:extLst>
           </p:cNvPr>
@@ -5057,7 +5057,7 @@
           </a:solidFill>
           <a:ln xmlns:a="http://schemas.openxmlformats.org/drawingml/2006/main" w="19050">
             <a:solidFill>
-              <a:srgbClr val="D6A33A"/>
+              <a:srgbClr val="8A5A00"/>
             </a:solidFill>
             <a:prstDash val="solid"/>
           </a:ln>
@@ -5095,7 +5095,7 @@
     </p:spTree>
     <p:extLst>
       <p:ext uri="{BB962C8B-B14F-4D97-AF65-F5344CB8AC3E}">
-        <p14:creationId xmlns:p14="http://schemas.microsoft.com/office/powerpoint/2010/main" val="826997103"/>
+        <p14:creationId xmlns:p14="http://schemas.microsoft.com/office/powerpoint/2010/main" val="500328212"/>
       </p:ext>
     </p:extLst>
   </p:cSld>
@@ -5126,7 +5126,7 @@
           <p:cNvPr id="1" name="s13-rule">
             <a:extLst xmlns:a="http://schemas.openxmlformats.org/drawingml/2006/main">
               <a:ext uri="{FF2B5EF4-FFF2-40B4-BE49-F238E27FC236}">
-                <a16:creationId xmlns:a16="http://schemas.microsoft.com/office/drawing/2014/main" id="{F77801C2-0EE4-4083-9B7E-3CAF845D6604}"/>
+                <a16:creationId xmlns:a16="http://schemas.microsoft.com/office/drawing/2014/main" id="{F8BEA273-80ED-4D42-8A0B-13345BC42E7D}"/>
               </a:ext>
             </a:extLst>
           </p:cNvPr>
@@ -5159,7 +5159,7 @@
           <p:cNvPr id="2" name="s13-eyebrow">
             <a:extLst xmlns:a="http://schemas.openxmlformats.org/drawingml/2006/main">
               <a:ext uri="{FF2B5EF4-FFF2-40B4-BE49-F238E27FC236}">
-                <a16:creationId xmlns:a16="http://schemas.microsoft.com/office/drawing/2014/main" id="{59B83421-9F0A-418C-92F5-5620C960C3E8}"/>
+                <a16:creationId xmlns:a16="http://schemas.microsoft.com/office/drawing/2014/main" id="{22BF3525-FF8E-41E8-9F5D-64B1D32F7A3D}"/>
               </a:ext>
             </a:extLst>
           </p:cNvPr>
@@ -5217,7 +5217,7 @@
           <p:cNvPr id="3" name="s13-title">
             <a:extLst xmlns:a="http://schemas.openxmlformats.org/drawingml/2006/main">
               <a:ext uri="{FF2B5EF4-FFF2-40B4-BE49-F238E27FC236}">
-                <a16:creationId xmlns:a16="http://schemas.microsoft.com/office/drawing/2014/main" id="{86F59A6C-E1B8-4185-86ED-0256C59F248A}"/>
+                <a16:creationId xmlns:a16="http://schemas.microsoft.com/office/drawing/2014/main" id="{98FAC361-335F-4808-B010-90E33934AB6C}"/>
               </a:ext>
             </a:extLst>
           </p:cNvPr>
@@ -5265,7 +5265,7 @@
                 <a:ea typeface="PingFang SC"/>
                 <a:cs typeface="PingFang SC"/>
               </a:rPr>
-              <a:t>带走三条可复用的判断原则</a:t>
+              <a:t>机器学习与深度学习：判断时先抓住三点</a:t>
             </a:r>
           </a:p>
         </p:txBody>
@@ -5275,7 +5275,7 @@
           <p:cNvPr id="4" name="s13-footer">
             <a:extLst xmlns:a="http://schemas.openxmlformats.org/drawingml/2006/main">
               <a:ext uri="{FF2B5EF4-FFF2-40B4-BE49-F238E27FC236}">
-                <a16:creationId xmlns:a16="http://schemas.microsoft.com/office/drawing/2014/main" id="{124DC41F-34B4-44B3-BF1E-7954B81A6EC1}"/>
+                <a16:creationId xmlns:a16="http://schemas.microsoft.com/office/drawing/2014/main" id="{E7529982-C941-43F7-9C54-95E89AE8CDC1}"/>
               </a:ext>
             </a:extLst>
           </p:cNvPr>
@@ -5306,7 +5306,7 @@
           <p:cNvPr id="5" name="s13-identity">
             <a:extLst xmlns:a="http://schemas.openxmlformats.org/drawingml/2006/main">
               <a:ext uri="{FF2B5EF4-FFF2-40B4-BE49-F238E27FC236}">
-                <a16:creationId xmlns:a16="http://schemas.microsoft.com/office/drawing/2014/main" id="{72B1DCC0-197C-4CB7-951D-F328150C77F9}"/>
+                <a16:creationId xmlns:a16="http://schemas.microsoft.com/office/drawing/2014/main" id="{FEC18911-FE26-4854-B3B8-76B5038D833C}"/>
               </a:ext>
             </a:extLst>
           </p:cNvPr>
@@ -5364,7 +5364,7 @@
           <p:cNvPr id="6" name="recap-circle-0">
             <a:extLst xmlns:a="http://schemas.openxmlformats.org/drawingml/2006/main">
               <a:ext uri="{FF2B5EF4-FFF2-40B4-BE49-F238E27FC236}">
-                <a16:creationId xmlns:a16="http://schemas.microsoft.com/office/drawing/2014/main" id="{B1255B09-972B-41AE-875A-99117518CF74}"/>
+                <a16:creationId xmlns:a16="http://schemas.microsoft.com/office/drawing/2014/main" id="{5DA3FAFE-F73D-4E24-9639-02B06B9620E0}"/>
               </a:ext>
             </a:extLst>
           </p:cNvPr>
@@ -5397,7 +5397,7 @@
           <p:cNvPr id="7" name="recap-number-0">
             <a:extLst xmlns:a="http://schemas.openxmlformats.org/drawingml/2006/main">
               <a:ext uri="{FF2B5EF4-FFF2-40B4-BE49-F238E27FC236}">
-                <a16:creationId xmlns:a16="http://schemas.microsoft.com/office/drawing/2014/main" id="{77475A53-6226-4B15-89D5-46B1B707170D}"/>
+                <a16:creationId xmlns:a16="http://schemas.microsoft.com/office/drawing/2014/main" id="{6C810821-49C1-43E9-9475-19481DFC376A}"/>
               </a:ext>
             </a:extLst>
           </p:cNvPr>
@@ -5455,7 +5455,7 @@
           <p:cNvPr id="8" name="recap-item-0">
             <a:extLst xmlns:a="http://schemas.openxmlformats.org/drawingml/2006/main">
               <a:ext uri="{FF2B5EF4-FFF2-40B4-BE49-F238E27FC236}">
-                <a16:creationId xmlns:a16="http://schemas.microsoft.com/office/drawing/2014/main" id="{2ABCFF48-0210-4780-ADE6-34F24633B580}"/>
+                <a16:creationId xmlns:a16="http://schemas.microsoft.com/office/drawing/2014/main" id="{177C7E18-1D4D-4CBB-B848-391AE1017BC1}"/>
               </a:ext>
             </a:extLst>
           </p:cNvPr>
@@ -5509,7 +5509,7 @@
                 <a:ea typeface="PingFang SC"/>
                 <a:cs typeface="PingFang SC"/>
               </a:rPr>
-              <a:t>传统程序的工作方式是"人定规则、机器执行"</a:t>
+              <a:t>机器学习用数据、模型与损失替代手写规则</a:t>
             </a:r>
           </a:p>
         </p:txBody>
@@ -5519,7 +5519,7 @@
           <p:cNvPr id="9" name="recap-connector-0">
             <a:extLst xmlns:a="http://schemas.openxmlformats.org/drawingml/2006/main">
               <a:ext uri="{FF2B5EF4-FFF2-40B4-BE49-F238E27FC236}">
-                <a16:creationId xmlns:a16="http://schemas.microsoft.com/office/drawing/2014/main" id="{C4494B81-74FD-447A-9303-58194B63F94D}"/>
+                <a16:creationId xmlns:a16="http://schemas.microsoft.com/office/drawing/2014/main" id="{A980F610-C750-40BE-ABD0-8185D206BAA4}"/>
               </a:ext>
             </a:extLst>
           </p:cNvPr>
@@ -5539,7 +5539,7 @@
           <a:noFill xmlns:a="http://schemas.openxmlformats.org/drawingml/2006/main"/>
           <a:ln xmlns:a="http://schemas.openxmlformats.org/drawingml/2006/main" w="28575">
             <a:solidFill>
-              <a:srgbClr val="D6A33A"/>
+              <a:srgbClr val="8A5A00"/>
             </a:solidFill>
             <a:prstDash val="solid"/>
           </a:ln>
@@ -5550,7 +5550,7 @@
           <p:cNvPr id="10" name="recap-circle-1">
             <a:extLst xmlns:a="http://schemas.openxmlformats.org/drawingml/2006/main">
               <a:ext uri="{FF2B5EF4-FFF2-40B4-BE49-F238E27FC236}">
-                <a16:creationId xmlns:a16="http://schemas.microsoft.com/office/drawing/2014/main" id="{466B831F-0D9F-44F3-AB3A-569966419E26}"/>
+                <a16:creationId xmlns:a16="http://schemas.microsoft.com/office/drawing/2014/main" id="{0A0297A8-8FBF-4308-9D80-467C2C22B807}"/>
               </a:ext>
             </a:extLst>
           </p:cNvPr>
@@ -5583,7 +5583,7 @@
           <p:cNvPr id="11" name="recap-number-1">
             <a:extLst xmlns:a="http://schemas.openxmlformats.org/drawingml/2006/main">
               <a:ext uri="{FF2B5EF4-FFF2-40B4-BE49-F238E27FC236}">
-                <a16:creationId xmlns:a16="http://schemas.microsoft.com/office/drawing/2014/main" id="{1E826D66-1183-4445-B37F-4DA31B23E697}"/>
+                <a16:creationId xmlns:a16="http://schemas.microsoft.com/office/drawing/2014/main" id="{57C3758C-1216-4AD0-86E7-2EB8864115EB}"/>
               </a:ext>
             </a:extLst>
           </p:cNvPr>
@@ -5641,7 +5641,7 @@
           <p:cNvPr id="12" name="recap-item-1">
             <a:extLst xmlns:a="http://schemas.openxmlformats.org/drawingml/2006/main">
               <a:ext uri="{FF2B5EF4-FFF2-40B4-BE49-F238E27FC236}">
-                <a16:creationId xmlns:a16="http://schemas.microsoft.com/office/drawing/2014/main" id="{24FB3A03-2658-4651-88F0-B889D9790D49}"/>
+                <a16:creationId xmlns:a16="http://schemas.microsoft.com/office/drawing/2014/main" id="{21665785-ED25-4210-89FC-DC2D361842FE}"/>
               </a:ext>
             </a:extLst>
           </p:cNvPr>
@@ -5705,7 +5705,7 @@
           <p:cNvPr id="13" name="recap-connector-1">
             <a:extLst xmlns:a="http://schemas.openxmlformats.org/drawingml/2006/main">
               <a:ext uri="{FF2B5EF4-FFF2-40B4-BE49-F238E27FC236}">
-                <a16:creationId xmlns:a16="http://schemas.microsoft.com/office/drawing/2014/main" id="{6DCF9D8B-343E-46CC-9470-22870BD45067}"/>
+                <a16:creationId xmlns:a16="http://schemas.microsoft.com/office/drawing/2014/main" id="{DE5C4FD0-4A2D-4D18-971B-04C7ABB22F34}"/>
               </a:ext>
             </a:extLst>
           </p:cNvPr>
@@ -5725,7 +5725,7 @@
           <a:noFill xmlns:a="http://schemas.openxmlformats.org/drawingml/2006/main"/>
           <a:ln xmlns:a="http://schemas.openxmlformats.org/drawingml/2006/main" w="28575">
             <a:solidFill>
-              <a:srgbClr val="D6A33A"/>
+              <a:srgbClr val="8A5A00"/>
             </a:solidFill>
             <a:prstDash val="solid"/>
           </a:ln>
@@ -5736,7 +5736,7 @@
           <p:cNvPr id="14" name="recap-circle-2">
             <a:extLst xmlns:a="http://schemas.openxmlformats.org/drawingml/2006/main">
               <a:ext uri="{FF2B5EF4-FFF2-40B4-BE49-F238E27FC236}">
-                <a16:creationId xmlns:a16="http://schemas.microsoft.com/office/drawing/2014/main" id="{42C97C7B-28CF-478C-B9EF-45107DE4A094}"/>
+                <a16:creationId xmlns:a16="http://schemas.microsoft.com/office/drawing/2014/main" id="{38E2F0C8-C250-4CC7-943C-B16E87577723}"/>
               </a:ext>
             </a:extLst>
           </p:cNvPr>
@@ -5754,7 +5754,7 @@
             <a:avLst/>
           </a:prstGeom>
           <a:solidFill xmlns:a="http://schemas.openxmlformats.org/drawingml/2006/main">
-            <a:srgbClr val="D6A33A"/>
+            <a:srgbClr val="8A5A00"/>
           </a:solidFill>
           <a:ln xmlns:a="http://schemas.openxmlformats.org/drawingml/2006/main" w="28575">
             <a:solidFill>
@@ -5769,7 +5769,7 @@
           <p:cNvPr id="15" name="recap-number-2">
             <a:extLst xmlns:a="http://schemas.openxmlformats.org/drawingml/2006/main">
               <a:ext uri="{FF2B5EF4-FFF2-40B4-BE49-F238E27FC236}">
-                <a16:creationId xmlns:a16="http://schemas.microsoft.com/office/drawing/2014/main" id="{156C9323-8433-4D70-9C1D-6182DD9CFCC6}"/>
+                <a16:creationId xmlns:a16="http://schemas.microsoft.com/office/drawing/2014/main" id="{FD211958-14CE-4CFC-9961-364AC549E117}"/>
               </a:ext>
             </a:extLst>
           </p:cNvPr>
@@ -5827,7 +5827,7 @@
           <p:cNvPr id="16" name="recap-item-2">
             <a:extLst xmlns:a="http://schemas.openxmlformats.org/drawingml/2006/main">
               <a:ext uri="{FF2B5EF4-FFF2-40B4-BE49-F238E27FC236}">
-                <a16:creationId xmlns:a16="http://schemas.microsoft.com/office/drawing/2014/main" id="{579B3C71-CF72-43A6-9DAE-3454BCDE525A}"/>
+                <a16:creationId xmlns:a16="http://schemas.microsoft.com/office/drawing/2014/main" id="{29C6B77E-BBB3-4611-AC0D-B2B9349068A7}"/>
               </a:ext>
             </a:extLst>
           </p:cNvPr>
@@ -5851,7 +5851,7 @@
           </a:solidFill>
           <a:ln xmlns:a="http://schemas.openxmlformats.org/drawingml/2006/main" w="19050">
             <a:solidFill>
-              <a:srgbClr val="D6A33A"/>
+              <a:srgbClr val="8A5A00"/>
             </a:solidFill>
             <a:prstDash val="solid"/>
           </a:ln>
@@ -5889,7 +5889,7 @@
     </p:spTree>
     <p:extLst>
       <p:ext uri="{BB962C8B-B14F-4D97-AF65-F5344CB8AC3E}">
-        <p14:creationId xmlns:p14="http://schemas.microsoft.com/office/powerpoint/2010/main" val="296465588"/>
+        <p14:creationId xmlns:p14="http://schemas.microsoft.com/office/powerpoint/2010/main" val="341549991"/>
       </p:ext>
     </p:extLst>
   </p:cSld>
@@ -5920,7 +5920,7 @@
           <p:cNvPr id="1" name="s14-rule">
             <a:extLst xmlns:a="http://schemas.openxmlformats.org/drawingml/2006/main">
               <a:ext uri="{FF2B5EF4-FFF2-40B4-BE49-F238E27FC236}">
-                <a16:creationId xmlns:a16="http://schemas.microsoft.com/office/drawing/2014/main" id="{DC6EA388-EE14-4E25-B60E-D28E13401D76}"/>
+                <a16:creationId xmlns:a16="http://schemas.microsoft.com/office/drawing/2014/main" id="{3ACE1727-656F-416D-95E6-F16C2D6E0C2D}"/>
               </a:ext>
             </a:extLst>
           </p:cNvPr>
@@ -5953,7 +5953,7 @@
           <p:cNvPr id="2" name="s14-eyebrow">
             <a:extLst xmlns:a="http://schemas.openxmlformats.org/drawingml/2006/main">
               <a:ext uri="{FF2B5EF4-FFF2-40B4-BE49-F238E27FC236}">
-                <a16:creationId xmlns:a16="http://schemas.microsoft.com/office/drawing/2014/main" id="{2DBEF101-AFDF-484F-8E60-CBBD0D0C2F27}"/>
+                <a16:creationId xmlns:a16="http://schemas.microsoft.com/office/drawing/2014/main" id="{DD15896E-DE17-4417-83FE-91D7CC340332}"/>
               </a:ext>
             </a:extLst>
           </p:cNvPr>
@@ -6011,7 +6011,7 @@
           <p:cNvPr id="3" name="s14-title">
             <a:extLst xmlns:a="http://schemas.openxmlformats.org/drawingml/2006/main">
               <a:ext uri="{FF2B5EF4-FFF2-40B4-BE49-F238E27FC236}">
-                <a16:creationId xmlns:a16="http://schemas.microsoft.com/office/drawing/2014/main" id="{7D62BF11-3A3A-4CEA-933B-3F54CD946A03}"/>
+                <a16:creationId xmlns:a16="http://schemas.microsoft.com/office/drawing/2014/main" id="{B9EE618C-1CE6-4E04-92AF-C81F83BF20C3}"/>
               </a:ext>
             </a:extLst>
           </p:cNvPr>
@@ -6059,7 +6059,7 @@
                 <a:ea typeface="PingFang SC"/>
                 <a:cs typeface="PingFang SC"/>
               </a:rPr>
-              <a:t>从公开重制课件回到可核对的学习资料</a:t>
+              <a:t>机器学习与深度学习：依据、边界与延伸</a:t>
             </a:r>
           </a:p>
         </p:txBody>
@@ -6069,7 +6069,7 @@
           <p:cNvPr id="4" name="s14-footer">
             <a:extLst xmlns:a="http://schemas.openxmlformats.org/drawingml/2006/main">
               <a:ext uri="{FF2B5EF4-FFF2-40B4-BE49-F238E27FC236}">
-                <a16:creationId xmlns:a16="http://schemas.microsoft.com/office/drawing/2014/main" id="{B69FDAB3-BA4F-4B57-9714-6094E03DD044}"/>
+                <a16:creationId xmlns:a16="http://schemas.microsoft.com/office/drawing/2014/main" id="{D5DFDE48-9DD3-4E37-8DA2-ED8539E4ED07}"/>
               </a:ext>
             </a:extLst>
           </p:cNvPr>
@@ -6100,7 +6100,7 @@
           <p:cNvPr id="5" name="s14-identity">
             <a:extLst xmlns:a="http://schemas.openxmlformats.org/drawingml/2006/main">
               <a:ext uri="{FF2B5EF4-FFF2-40B4-BE49-F238E27FC236}">
-                <a16:creationId xmlns:a16="http://schemas.microsoft.com/office/drawing/2014/main" id="{BC2D33C6-979B-49F9-809D-B18E646DE66D}"/>
+                <a16:creationId xmlns:a16="http://schemas.microsoft.com/office/drawing/2014/main" id="{9EC099BA-757C-49E3-90C6-240425B9E65A}"/>
               </a:ext>
             </a:extLst>
           </p:cNvPr>
@@ -6158,7 +6158,7 @@
           <p:cNvPr id="6" name="source-0">
             <a:extLst xmlns:a="http://schemas.openxmlformats.org/drawingml/2006/main">
               <a:ext uri="{FF2B5EF4-FFF2-40B4-BE49-F238E27FC236}">
-                <a16:creationId xmlns:a16="http://schemas.microsoft.com/office/drawing/2014/main" id="{6A907494-9B3E-4A3B-84B5-7D632DEEA6CE}"/>
+                <a16:creationId xmlns:a16="http://schemas.microsoft.com/office/drawing/2014/main" id="{53834092-B89B-4D6D-9B24-05F641D23776}"/>
               </a:ext>
             </a:extLst>
           </p:cNvPr>
@@ -6182,7 +6182,7 @@
           </a:solidFill>
           <a:ln xmlns:a="http://schemas.openxmlformats.org/drawingml/2006/main" w="9525">
             <a:solidFill>
-              <a:srgbClr val="D6A33A"/>
+              <a:srgbClr val="8A5A00"/>
             </a:solidFill>
             <a:prstDash val="solid"/>
           </a:ln>
@@ -6222,7 +6222,7 @@
           <p:cNvPr id="7" name="source-1">
             <a:extLst xmlns:a="http://schemas.openxmlformats.org/drawingml/2006/main">
               <a:ext uri="{FF2B5EF4-FFF2-40B4-BE49-F238E27FC236}">
-                <a16:creationId xmlns:a16="http://schemas.microsoft.com/office/drawing/2014/main" id="{CF0A814C-D249-4C61-B393-62ABB3352C38}"/>
+                <a16:creationId xmlns:a16="http://schemas.microsoft.com/office/drawing/2014/main" id="{921CB756-7762-4C00-AF2F-9A4D7506587F}"/>
               </a:ext>
             </a:extLst>
           </p:cNvPr>
@@ -6286,7 +6286,7 @@
           <p:cNvPr id="8" name="source-2">
             <a:extLst xmlns:a="http://schemas.openxmlformats.org/drawingml/2006/main">
               <a:ext uri="{FF2B5EF4-FFF2-40B4-BE49-F238E27FC236}">
-                <a16:creationId xmlns:a16="http://schemas.microsoft.com/office/drawing/2014/main" id="{88E400F2-6C32-4E2E-AD81-291764DFD020}"/>
+                <a16:creationId xmlns:a16="http://schemas.microsoft.com/office/drawing/2014/main" id="{A5B8534C-9E93-4265-9460-142F05199B64}"/>
               </a:ext>
             </a:extLst>
           </p:cNvPr>
@@ -6350,7 +6350,7 @@
           <p:cNvPr id="9" name="s14-takeaway-rule">
             <a:extLst xmlns:a="http://schemas.openxmlformats.org/drawingml/2006/main">
               <a:ext uri="{FF2B5EF4-FFF2-40B4-BE49-F238E27FC236}">
-                <a16:creationId xmlns:a16="http://schemas.microsoft.com/office/drawing/2014/main" id="{6D7E9676-A105-486A-8A04-7D64F7012C49}"/>
+                <a16:creationId xmlns:a16="http://schemas.microsoft.com/office/drawing/2014/main" id="{1C6986AE-DD4A-4C2F-85B6-781C63118B0D}"/>
               </a:ext>
             </a:extLst>
           </p:cNvPr>
@@ -6383,7 +6383,7 @@
           <p:cNvPr id="10" name="s14-takeaway">
             <a:extLst xmlns:a="http://schemas.openxmlformats.org/drawingml/2006/main">
               <a:ext uri="{FF2B5EF4-FFF2-40B4-BE49-F238E27FC236}">
-                <a16:creationId xmlns:a16="http://schemas.microsoft.com/office/drawing/2014/main" id="{0FE23EFF-1E15-48B9-B328-5B810F8B0E09}"/>
+                <a16:creationId xmlns:a16="http://schemas.microsoft.com/office/drawing/2014/main" id="{60A932A5-01CD-485B-8D28-FB1C80E75011}"/>
               </a:ext>
             </a:extLst>
           </p:cNvPr>
@@ -6439,7 +6439,7 @@
     </p:spTree>
     <p:extLst>
       <p:ext uri="{BB962C8B-B14F-4D97-AF65-F5344CB8AC3E}">
-        <p14:creationId xmlns:p14="http://schemas.microsoft.com/office/powerpoint/2010/main" val="1838347817"/>
+        <p14:creationId xmlns:p14="http://schemas.microsoft.com/office/powerpoint/2010/main" val="1163066044"/>
       </p:ext>
     </p:extLst>
   </p:cSld>
@@ -6470,7 +6470,7 @@
           <p:cNvPr id="1" name="s2-rule">
             <a:extLst xmlns:a="http://schemas.openxmlformats.org/drawingml/2006/main">
               <a:ext uri="{FF2B5EF4-FFF2-40B4-BE49-F238E27FC236}">
-                <a16:creationId xmlns:a16="http://schemas.microsoft.com/office/drawing/2014/main" id="{BA49A658-58A3-46CF-BDDA-6227D190CB4E}"/>
+                <a16:creationId xmlns:a16="http://schemas.microsoft.com/office/drawing/2014/main" id="{FF8ED62B-750C-48B1-AF0A-729914B593A2}"/>
               </a:ext>
             </a:extLst>
           </p:cNvPr>
@@ -6503,7 +6503,7 @@
           <p:cNvPr id="2" name="s2-eyebrow">
             <a:extLst xmlns:a="http://schemas.openxmlformats.org/drawingml/2006/main">
               <a:ext uri="{FF2B5EF4-FFF2-40B4-BE49-F238E27FC236}">
-                <a16:creationId xmlns:a16="http://schemas.microsoft.com/office/drawing/2014/main" id="{14C92F47-B338-4BF6-840A-BA7B6295D838}"/>
+                <a16:creationId xmlns:a16="http://schemas.microsoft.com/office/drawing/2014/main" id="{E2416F80-121D-4D0E-8E82-299A0CDB0D84}"/>
               </a:ext>
             </a:extLst>
           </p:cNvPr>
@@ -6561,7 +6561,7 @@
           <p:cNvPr id="3" name="s2-title">
             <a:extLst xmlns:a="http://schemas.openxmlformats.org/drawingml/2006/main">
               <a:ext uri="{FF2B5EF4-FFF2-40B4-BE49-F238E27FC236}">
-                <a16:creationId xmlns:a16="http://schemas.microsoft.com/office/drawing/2014/main" id="{FBE876CE-D01A-4EB7-B911-8A37C0503564}"/>
+                <a16:creationId xmlns:a16="http://schemas.microsoft.com/office/drawing/2014/main" id="{26FBF80D-19AF-42E2-85D0-1F32DF550AB8}"/>
               </a:ext>
             </a:extLst>
           </p:cNvPr>
@@ -6609,7 +6609,7 @@
                 <a:ea typeface="PingFang SC"/>
                 <a:cs typeface="PingFang SC"/>
               </a:rPr>
-              <a:t>学完这一节，你能完成这些判断与行动</a:t>
+              <a:t>机器学习与深度学习：3项学习结果</a:t>
             </a:r>
           </a:p>
         </p:txBody>
@@ -6619,7 +6619,7 @@
           <p:cNvPr id="4" name="s2-footer">
             <a:extLst xmlns:a="http://schemas.openxmlformats.org/drawingml/2006/main">
               <a:ext uri="{FF2B5EF4-FFF2-40B4-BE49-F238E27FC236}">
-                <a16:creationId xmlns:a16="http://schemas.microsoft.com/office/drawing/2014/main" id="{0D0436EB-640C-47B8-AEAC-B62FF4541D72}"/>
+                <a16:creationId xmlns:a16="http://schemas.microsoft.com/office/drawing/2014/main" id="{F5F03F2E-17B4-48DA-AEEC-54E14BA32B54}"/>
               </a:ext>
             </a:extLst>
           </p:cNvPr>
@@ -6650,7 +6650,7 @@
           <p:cNvPr id="5" name="s2-identity">
             <a:extLst xmlns:a="http://schemas.openxmlformats.org/drawingml/2006/main">
               <a:ext uri="{FF2B5EF4-FFF2-40B4-BE49-F238E27FC236}">
-                <a16:creationId xmlns:a16="http://schemas.microsoft.com/office/drawing/2014/main" id="{3E79BC69-40E1-4EBB-9891-39E342D48FC8}"/>
+                <a16:creationId xmlns:a16="http://schemas.microsoft.com/office/drawing/2014/main" id="{46C8DB43-35D6-48B8-A438-2D0BBDEAF03D}"/>
               </a:ext>
             </a:extLst>
           </p:cNvPr>
@@ -6708,7 +6708,7 @@
           <p:cNvPr id="6" name="objective-1">
             <a:extLst xmlns:a="http://schemas.openxmlformats.org/drawingml/2006/main">
               <a:ext uri="{FF2B5EF4-FFF2-40B4-BE49-F238E27FC236}">
-                <a16:creationId xmlns:a16="http://schemas.microsoft.com/office/drawing/2014/main" id="{7DE10436-8942-4CCD-AA2B-83953799578D}"/>
+                <a16:creationId xmlns:a16="http://schemas.microsoft.com/office/drawing/2014/main" id="{D8BDAF39-4D18-4B2A-A142-EF8899243D0B}"/>
               </a:ext>
             </a:extLst>
           </p:cNvPr>
@@ -6795,7 +6795,7 @@
           <p:cNvPr id="7" name="objective-2">
             <a:extLst xmlns:a="http://schemas.openxmlformats.org/drawingml/2006/main">
               <a:ext uri="{FF2B5EF4-FFF2-40B4-BE49-F238E27FC236}">
-                <a16:creationId xmlns:a16="http://schemas.microsoft.com/office/drawing/2014/main" id="{92FD8FA7-C2AA-47FE-A10A-0EE3F8E082D0}"/>
+                <a16:creationId xmlns:a16="http://schemas.microsoft.com/office/drawing/2014/main" id="{198F16A8-B816-4EDD-AFB5-403CDCE2EC61}"/>
               </a:ext>
             </a:extLst>
           </p:cNvPr>
@@ -6882,7 +6882,7 @@
           <p:cNvPr id="8" name="objective-3">
             <a:extLst xmlns:a="http://schemas.openxmlformats.org/drawingml/2006/main">
               <a:ext uri="{FF2B5EF4-FFF2-40B4-BE49-F238E27FC236}">
-                <a16:creationId xmlns:a16="http://schemas.microsoft.com/office/drawing/2014/main" id="{9995A4BB-1885-4F80-9519-D36342B03F1D}"/>
+                <a16:creationId xmlns:a16="http://schemas.microsoft.com/office/drawing/2014/main" id="{892FD4D5-6F5E-4D8A-838B-98FF95CC08C3}"/>
               </a:ext>
             </a:extLst>
           </p:cNvPr>
@@ -6906,7 +6906,7 @@
           </a:solidFill>
           <a:ln xmlns:a="http://schemas.openxmlformats.org/drawingml/2006/main" w="19050">
             <a:solidFill>
-              <a:srgbClr val="D6A33A"/>
+              <a:srgbClr val="8A5A00"/>
             </a:solidFill>
             <a:prstDash val="solid"/>
           </a:ln>
@@ -6967,7 +6967,7 @@
     </p:spTree>
     <p:extLst>
       <p:ext uri="{BB962C8B-B14F-4D97-AF65-F5344CB8AC3E}">
-        <p14:creationId xmlns:p14="http://schemas.microsoft.com/office/powerpoint/2010/main" val="24746936"/>
+        <p14:creationId xmlns:p14="http://schemas.microsoft.com/office/powerpoint/2010/main" val="178878780"/>
       </p:ext>
     </p:extLst>
   </p:cSld>
@@ -6998,7 +6998,7 @@
           <p:cNvPr id="1" name="s3-rule">
             <a:extLst xmlns:a="http://schemas.openxmlformats.org/drawingml/2006/main">
               <a:ext uri="{FF2B5EF4-FFF2-40B4-BE49-F238E27FC236}">
-                <a16:creationId xmlns:a16="http://schemas.microsoft.com/office/drawing/2014/main" id="{968B70A7-FB37-440C-B58C-95B698DBF18A}"/>
+                <a16:creationId xmlns:a16="http://schemas.microsoft.com/office/drawing/2014/main" id="{809F08FB-EB48-4764-B25A-B802E91253F8}"/>
               </a:ext>
             </a:extLst>
           </p:cNvPr>
@@ -7031,7 +7031,7 @@
           <p:cNvPr id="2" name="s3-eyebrow">
             <a:extLst xmlns:a="http://schemas.openxmlformats.org/drawingml/2006/main">
               <a:ext uri="{FF2B5EF4-FFF2-40B4-BE49-F238E27FC236}">
-                <a16:creationId xmlns:a16="http://schemas.microsoft.com/office/drawing/2014/main" id="{6E12E992-DD1C-4ECC-A0C2-792B18B45281}"/>
+                <a16:creationId xmlns:a16="http://schemas.microsoft.com/office/drawing/2014/main" id="{C4E6A21A-B861-4DA6-884E-30AD24315D27}"/>
               </a:ext>
             </a:extLst>
           </p:cNvPr>
@@ -7089,7 +7089,7 @@
           <p:cNvPr id="3" name="s3-title">
             <a:extLst xmlns:a="http://schemas.openxmlformats.org/drawingml/2006/main">
               <a:ext uri="{FF2B5EF4-FFF2-40B4-BE49-F238E27FC236}">
-                <a16:creationId xmlns:a16="http://schemas.microsoft.com/office/drawing/2014/main" id="{BB13FAA9-48B4-4B8C-82F1-64EFB7FC23B0}"/>
+                <a16:creationId xmlns:a16="http://schemas.microsoft.com/office/drawing/2014/main" id="{BFDFF999-B35C-47C0-BE41-729035BEF002}"/>
               </a:ext>
             </a:extLst>
           </p:cNvPr>
@@ -7137,7 +7137,7 @@
                 <a:ea typeface="PingFang SC"/>
                 <a:cs typeface="PingFang SC"/>
               </a:rPr>
-              <a:t>传统程序的工作方式是"人定规则、机器执行"</a:t>
+              <a:t>机器学习用数据、模型与损失替代手写规则</a:t>
             </a:r>
           </a:p>
         </p:txBody>
@@ -7147,7 +7147,7 @@
           <p:cNvPr id="4" name="s3-footer">
             <a:extLst xmlns:a="http://schemas.openxmlformats.org/drawingml/2006/main">
               <a:ext uri="{FF2B5EF4-FFF2-40B4-BE49-F238E27FC236}">
-                <a16:creationId xmlns:a16="http://schemas.microsoft.com/office/drawing/2014/main" id="{58644FB4-FF1E-41B6-879E-67994774A799}"/>
+                <a16:creationId xmlns:a16="http://schemas.microsoft.com/office/drawing/2014/main" id="{F57DD2F5-034E-47DD-BE33-F50C1448756E}"/>
               </a:ext>
             </a:extLst>
           </p:cNvPr>
@@ -7178,7 +7178,7 @@
           <p:cNvPr id="5" name="s3-identity">
             <a:extLst xmlns:a="http://schemas.openxmlformats.org/drawingml/2006/main">
               <a:ext uri="{FF2B5EF4-FFF2-40B4-BE49-F238E27FC236}">
-                <a16:creationId xmlns:a16="http://schemas.microsoft.com/office/drawing/2014/main" id="{509BA443-2CD4-455A-B019-A0F29089B81E}"/>
+                <a16:creationId xmlns:a16="http://schemas.microsoft.com/office/drawing/2014/main" id="{6745A473-A225-4EF2-8E62-CA0AA337DAB2}"/>
               </a:ext>
             </a:extLst>
           </p:cNvPr>
@@ -7236,7 +7236,7 @@
           <p:cNvPr id="6" name="core-no-0">
             <a:extLst xmlns:a="http://schemas.openxmlformats.org/drawingml/2006/main">
               <a:ext uri="{FF2B5EF4-FFF2-40B4-BE49-F238E27FC236}">
-                <a16:creationId xmlns:a16="http://schemas.microsoft.com/office/drawing/2014/main" id="{30B96FAE-AF1B-4957-9623-20C760A9271F}"/>
+                <a16:creationId xmlns:a16="http://schemas.microsoft.com/office/drawing/2014/main" id="{E32E102D-6662-4224-A213-62372B8C1CD5}"/>
               </a:ext>
             </a:extLst>
           </p:cNvPr>
@@ -7268,7 +7268,7 @@
             <a:pPr algn="l">
               <a:defRPr sz="2250" b="1">
                 <a:solidFill>
-                  <a:srgbClr val="D6A33A"/>
+                  <a:srgbClr val="8A5A00"/>
                 </a:solidFill>
                 <a:latin typeface="PingFang SC"/>
                 <a:ea typeface="PingFang SC"/>
@@ -7278,7 +7278,7 @@
             <a:r>
               <a:rPr sz="2250" b="1">
                 <a:solidFill>
-                  <a:srgbClr val="D6A33A"/>
+                  <a:srgbClr val="8A5A00"/>
                 </a:solidFill>
                 <a:latin typeface="PingFang SC"/>
                 <a:ea typeface="PingFang SC"/>
@@ -7294,7 +7294,7 @@
           <p:cNvPr id="7" name="core-label-0">
             <a:extLst xmlns:a="http://schemas.openxmlformats.org/drawingml/2006/main">
               <a:ext uri="{FF2B5EF4-FFF2-40B4-BE49-F238E27FC236}">
-                <a16:creationId xmlns:a16="http://schemas.microsoft.com/office/drawing/2014/main" id="{B318050E-5E0F-42AC-A609-B2AA05919A06}"/>
+                <a16:creationId xmlns:a16="http://schemas.microsoft.com/office/drawing/2014/main" id="{996BED72-85C5-42EF-A524-0EDCFC08D73F}"/>
               </a:ext>
             </a:extLst>
           </p:cNvPr>
@@ -7352,7 +7352,7 @@
           <p:cNvPr id="8" name="core-body-0">
             <a:extLst xmlns:a="http://schemas.openxmlformats.org/drawingml/2006/main">
               <a:ext uri="{FF2B5EF4-FFF2-40B4-BE49-F238E27FC236}">
-                <a16:creationId xmlns:a16="http://schemas.microsoft.com/office/drawing/2014/main" id="{0B8B6787-CA10-49C3-A238-1BFE2C32AFE8}"/>
+                <a16:creationId xmlns:a16="http://schemas.microsoft.com/office/drawing/2014/main" id="{EC6C0961-0F2D-4B7E-B8B9-FFD647C859AB}"/>
               </a:ext>
             </a:extLst>
           </p:cNvPr>
@@ -7376,14 +7376,14 @@
           </a:solidFill>
           <a:ln xmlns:a="http://schemas.openxmlformats.org/drawingml/2006/main" w="19050">
             <a:solidFill>
-              <a:srgbClr val="D6A33A"/>
+              <a:srgbClr val="8A5A00"/>
             </a:solidFill>
             <a:prstDash val="solid"/>
           </a:ln>
         </p:spPr>
         <p:txBody>
           <a:bodyPr xmlns:a="http://schemas.openxmlformats.org/drawingml/2006/main" lIns="152400" tIns="133350" rIns="152400" bIns="133350" anchor="ctr">
-            <a:normAutofit fontScale="98233"/>
+            <a:normAutofit fontScale="99219"/>
           </a:bodyPr>
           <a:lstStyle xmlns:a="http://schemas.openxmlformats.org/drawingml/2006/main"/>
           <a:p xmlns:a="http://schemas.openxmlformats.org/drawingml/2006/main">
@@ -7406,7 +7406,7 @@
                 <a:ea typeface="PingFang SC"/>
                 <a:cs typeface="PingFang SC"/>
               </a:rPr>
-              <a:t>传统程序的工作方式是"人定规则、机器执行"。机器学习颠倒了这个次序：先给机器大量"输入—答案"的样例，由算法从中归纳出一个映射函数 f，再用这个函数去处理没见过的新输入…</a:t>
+              <a:t>传统程序的工作方式是"人定规则、机器执行"；机器学习颠倒了这个次序；先给机器大量"输入—答案"的样例；由算法从中归纳出一个映射函数 f；再用这个函数去处理没见过的新输入</a:t>
             </a:r>
           </a:p>
         </p:txBody>
@@ -7416,7 +7416,7 @@
           <p:cNvPr id="9" name="core-no-1">
             <a:extLst xmlns:a="http://schemas.openxmlformats.org/drawingml/2006/main">
               <a:ext uri="{FF2B5EF4-FFF2-40B4-BE49-F238E27FC236}">
-                <a16:creationId xmlns:a16="http://schemas.microsoft.com/office/drawing/2014/main" id="{97DB7504-15B1-46F3-B605-5D770600C492}"/>
+                <a16:creationId xmlns:a16="http://schemas.microsoft.com/office/drawing/2014/main" id="{AF3E3B79-9988-4700-A250-73518B98F73B}"/>
               </a:ext>
             </a:extLst>
           </p:cNvPr>
@@ -7448,7 +7448,7 @@
             <a:pPr algn="l">
               <a:defRPr sz="2250" b="1">
                 <a:solidFill>
-                  <a:srgbClr val="D6A33A"/>
+                  <a:srgbClr val="8A5A00"/>
                 </a:solidFill>
                 <a:latin typeface="PingFang SC"/>
                 <a:ea typeface="PingFang SC"/>
@@ -7458,7 +7458,7 @@
             <a:r>
               <a:rPr sz="2250" b="1">
                 <a:solidFill>
-                  <a:srgbClr val="D6A33A"/>
+                  <a:srgbClr val="8A5A00"/>
                 </a:solidFill>
                 <a:latin typeface="PingFang SC"/>
                 <a:ea typeface="PingFang SC"/>
@@ -7474,7 +7474,7 @@
           <p:cNvPr id="10" name="core-label-1">
             <a:extLst xmlns:a="http://schemas.openxmlformats.org/drawingml/2006/main">
               <a:ext uri="{FF2B5EF4-FFF2-40B4-BE49-F238E27FC236}">
-                <a16:creationId xmlns:a16="http://schemas.microsoft.com/office/drawing/2014/main" id="{6A92D36C-2850-475A-AA22-D631726216A0}"/>
+                <a16:creationId xmlns:a16="http://schemas.microsoft.com/office/drawing/2014/main" id="{F3743CB5-3843-4EB9-B935-796B7DCEC0F8}"/>
               </a:ext>
             </a:extLst>
           </p:cNvPr>
@@ -7532,7 +7532,7 @@
           <p:cNvPr id="11" name="core-body-1">
             <a:extLst xmlns:a="http://schemas.openxmlformats.org/drawingml/2006/main">
               <a:ext uri="{FF2B5EF4-FFF2-40B4-BE49-F238E27FC236}">
-                <a16:creationId xmlns:a16="http://schemas.microsoft.com/office/drawing/2014/main" id="{7998C4EF-5900-45C3-BEFF-BFF754478DEF}"/>
+                <a16:creationId xmlns:a16="http://schemas.microsoft.com/office/drawing/2014/main" id="{39017744-CBEE-4D63-8F34-A63F54625186}"/>
               </a:ext>
             </a:extLst>
           </p:cNvPr>
@@ -7596,7 +7596,7 @@
           <p:cNvPr id="12" name="s3-takeaway-rule">
             <a:extLst xmlns:a="http://schemas.openxmlformats.org/drawingml/2006/main">
               <a:ext uri="{FF2B5EF4-FFF2-40B4-BE49-F238E27FC236}">
-                <a16:creationId xmlns:a16="http://schemas.microsoft.com/office/drawing/2014/main" id="{4B828FC8-3BC5-4AED-B7E7-FFC3B74C8108}"/>
+                <a16:creationId xmlns:a16="http://schemas.microsoft.com/office/drawing/2014/main" id="{8D8BBEE1-80AF-4EEA-B918-688D3809FB2E}"/>
               </a:ext>
             </a:extLst>
           </p:cNvPr>
@@ -7629,7 +7629,7 @@
           <p:cNvPr id="13" name="s3-takeaway">
             <a:extLst xmlns:a="http://schemas.openxmlformats.org/drawingml/2006/main">
               <a:ext uri="{FF2B5EF4-FFF2-40B4-BE49-F238E27FC236}">
-                <a16:creationId xmlns:a16="http://schemas.microsoft.com/office/drawing/2014/main" id="{D1BCAB57-6E50-4B0B-9B76-319758D79165}"/>
+                <a16:creationId xmlns:a16="http://schemas.microsoft.com/office/drawing/2014/main" id="{7A10A2A4-2481-40CB-A140-85CD04E6825C}"/>
               </a:ext>
             </a:extLst>
           </p:cNvPr>
@@ -7677,7 +7677,7 @@
                 <a:ea typeface="PingFang SC"/>
                 <a:cs typeface="PingFang SC"/>
               </a:rPr>
-              <a:t>传统程序的工作方式是"人定规则、机器执行"</a:t>
+              <a:t>机器学习用数据、模型与损失替代手写规则</a:t>
             </a:r>
           </a:p>
         </p:txBody>
@@ -7685,7 +7685,7 @@
     </p:spTree>
     <p:extLst>
       <p:ext uri="{BB962C8B-B14F-4D97-AF65-F5344CB8AC3E}">
-        <p14:creationId xmlns:p14="http://schemas.microsoft.com/office/powerpoint/2010/main" val="337056064"/>
+        <p14:creationId xmlns:p14="http://schemas.microsoft.com/office/powerpoint/2010/main" val="251995197"/>
       </p:ext>
     </p:extLst>
   </p:cSld>
@@ -7716,7 +7716,7 @@
           <p:cNvPr id="1" name="s4-rule">
             <a:extLst xmlns:a="http://schemas.openxmlformats.org/drawingml/2006/main">
               <a:ext uri="{FF2B5EF4-FFF2-40B4-BE49-F238E27FC236}">
-                <a16:creationId xmlns:a16="http://schemas.microsoft.com/office/drawing/2014/main" id="{1497EDF0-3821-4FBF-B379-C0927577D1FB}"/>
+                <a16:creationId xmlns:a16="http://schemas.microsoft.com/office/drawing/2014/main" id="{BD4EEB67-7158-4426-8CB0-C05157098741}"/>
               </a:ext>
             </a:extLst>
           </p:cNvPr>
@@ -7749,7 +7749,7 @@
           <p:cNvPr id="2" name="s4-eyebrow">
             <a:extLst xmlns:a="http://schemas.openxmlformats.org/drawingml/2006/main">
               <a:ext uri="{FF2B5EF4-FFF2-40B4-BE49-F238E27FC236}">
-                <a16:creationId xmlns:a16="http://schemas.microsoft.com/office/drawing/2014/main" id="{BCF24869-4719-4F41-AFCE-7BD13588F970}"/>
+                <a16:creationId xmlns:a16="http://schemas.microsoft.com/office/drawing/2014/main" id="{6CCF1760-38C3-4C21-BD5A-FCE3C20A9DC1}"/>
               </a:ext>
             </a:extLst>
           </p:cNvPr>
@@ -7807,7 +7807,7 @@
           <p:cNvPr id="3" name="s4-title">
             <a:extLst xmlns:a="http://schemas.openxmlformats.org/drawingml/2006/main">
               <a:ext uri="{FF2B5EF4-FFF2-40B4-BE49-F238E27FC236}">
-                <a16:creationId xmlns:a16="http://schemas.microsoft.com/office/drawing/2014/main" id="{1AF2A939-7C96-4788-BA52-B053D73BA247}"/>
+                <a16:creationId xmlns:a16="http://schemas.microsoft.com/office/drawing/2014/main" id="{CEAAB200-43CE-4832-ACD4-55240CD4E798}"/>
               </a:ext>
             </a:extLst>
           </p:cNvPr>
@@ -7855,7 +7855,7 @@
                 <a:ea typeface="PingFang SC"/>
                 <a:cs typeface="PingFang SC"/>
               </a:rPr>
-              <a:t>模型在见过的数据上表现好</a:t>
+              <a:t>数据划分检验泛化，线性回归提供基线</a:t>
             </a:r>
           </a:p>
         </p:txBody>
@@ -7865,7 +7865,7 @@
           <p:cNvPr id="4" name="s4-footer">
             <a:extLst xmlns:a="http://schemas.openxmlformats.org/drawingml/2006/main">
               <a:ext uri="{FF2B5EF4-FFF2-40B4-BE49-F238E27FC236}">
-                <a16:creationId xmlns:a16="http://schemas.microsoft.com/office/drawing/2014/main" id="{09CFEAA2-E06F-44FA-A529-542A32BAA707}"/>
+                <a16:creationId xmlns:a16="http://schemas.microsoft.com/office/drawing/2014/main" id="{935FD7A2-C434-4EF9-8691-26F35FF149FC}"/>
               </a:ext>
             </a:extLst>
           </p:cNvPr>
@@ -7896,7 +7896,7 @@
           <p:cNvPr id="5" name="s4-identity">
             <a:extLst xmlns:a="http://schemas.openxmlformats.org/drawingml/2006/main">
               <a:ext uri="{FF2B5EF4-FFF2-40B4-BE49-F238E27FC236}">
-                <a16:creationId xmlns:a16="http://schemas.microsoft.com/office/drawing/2014/main" id="{7A960367-FE4A-435A-A033-5F4C240802D4}"/>
+                <a16:creationId xmlns:a16="http://schemas.microsoft.com/office/drawing/2014/main" id="{4B761BA6-1E3D-4D9F-A98C-BDF29C2F374B}"/>
               </a:ext>
             </a:extLst>
           </p:cNvPr>
@@ -7954,7 +7954,7 @@
           <p:cNvPr id="6" name="core-no-0">
             <a:extLst xmlns:a="http://schemas.openxmlformats.org/drawingml/2006/main">
               <a:ext uri="{FF2B5EF4-FFF2-40B4-BE49-F238E27FC236}">
-                <a16:creationId xmlns:a16="http://schemas.microsoft.com/office/drawing/2014/main" id="{7D13AF2B-0104-4B67-BB6C-1502BF3095D7}"/>
+                <a16:creationId xmlns:a16="http://schemas.microsoft.com/office/drawing/2014/main" id="{047C0E3B-8600-4FF4-98CF-A059BDDE87F0}"/>
               </a:ext>
             </a:extLst>
           </p:cNvPr>
@@ -7986,7 +7986,7 @@
             <a:pPr algn="l">
               <a:defRPr sz="2250" b="1">
                 <a:solidFill>
-                  <a:srgbClr val="D6A33A"/>
+                  <a:srgbClr val="8A5A00"/>
                 </a:solidFill>
                 <a:latin typeface="PingFang SC"/>
                 <a:ea typeface="PingFang SC"/>
@@ -7996,7 +7996,7 @@
             <a:r>
               <a:rPr sz="2250" b="1">
                 <a:solidFill>
-                  <a:srgbClr val="D6A33A"/>
+                  <a:srgbClr val="8A5A00"/>
                 </a:solidFill>
                 <a:latin typeface="PingFang SC"/>
                 <a:ea typeface="PingFang SC"/>
@@ -8012,7 +8012,7 @@
           <p:cNvPr id="7" name="core-label-0">
             <a:extLst xmlns:a="http://schemas.openxmlformats.org/drawingml/2006/main">
               <a:ext uri="{FF2B5EF4-FFF2-40B4-BE49-F238E27FC236}">
-                <a16:creationId xmlns:a16="http://schemas.microsoft.com/office/drawing/2014/main" id="{F23BF4C8-7F03-4230-9EA8-462772CFBD40}"/>
+                <a16:creationId xmlns:a16="http://schemas.microsoft.com/office/drawing/2014/main" id="{B9BABC87-B444-4D04-963D-FBF211327E75}"/>
               </a:ext>
             </a:extLst>
           </p:cNvPr>
@@ -8070,7 +8070,7 @@
           <p:cNvPr id="8" name="core-body-0">
             <a:extLst xmlns:a="http://schemas.openxmlformats.org/drawingml/2006/main">
               <a:ext uri="{FF2B5EF4-FFF2-40B4-BE49-F238E27FC236}">
-                <a16:creationId xmlns:a16="http://schemas.microsoft.com/office/drawing/2014/main" id="{7FE9CC4F-E765-43CC-9B20-7ECB90D43694}"/>
+                <a16:creationId xmlns:a16="http://schemas.microsoft.com/office/drawing/2014/main" id="{AAD77BA2-8F2F-4FFC-9F62-59BE8390A729}"/>
               </a:ext>
             </a:extLst>
           </p:cNvPr>
@@ -8094,7 +8094,7 @@
           </a:solidFill>
           <a:ln xmlns:a="http://schemas.openxmlformats.org/drawingml/2006/main" w="19050">
             <a:solidFill>
-              <a:srgbClr val="D6A33A"/>
+              <a:srgbClr val="8A5A00"/>
             </a:solidFill>
             <a:prstDash val="solid"/>
           </a:ln>
@@ -8124,7 +8124,7 @@
                 <a:ea typeface="PingFang SC"/>
                 <a:cs typeface="PingFang SC"/>
               </a:rPr>
-              <a:t>一个关键追问随之而来：模型在见过的数据上表现好，能保证它遇到新数据还行吗？规范做法通常把数据分成三份： 训练集 用来学习参数， 验证集 用来选择模型、阈值和超参数…</a:t>
+              <a:t>一个关键追问随之而来；模型在见过的数据上表现好；能保证它遇到新数据还行吗；规范做法通常把数据分成三份；训练集 用来学习参数；验证集 用来选择模型、阈值和超参数</a:t>
             </a:r>
           </a:p>
         </p:txBody>
@@ -8134,7 +8134,7 @@
           <p:cNvPr id="9" name="core-no-1">
             <a:extLst xmlns:a="http://schemas.openxmlformats.org/drawingml/2006/main">
               <a:ext uri="{FF2B5EF4-FFF2-40B4-BE49-F238E27FC236}">
-                <a16:creationId xmlns:a16="http://schemas.microsoft.com/office/drawing/2014/main" id="{91E9E6B8-53A5-4F05-94D9-0B71E9CEE8DC}"/>
+                <a16:creationId xmlns:a16="http://schemas.microsoft.com/office/drawing/2014/main" id="{31C1AA8A-F17C-4108-B41B-6B5CC6483F68}"/>
               </a:ext>
             </a:extLst>
           </p:cNvPr>
@@ -8166,7 +8166,7 @@
             <a:pPr algn="l">
               <a:defRPr sz="2250" b="1">
                 <a:solidFill>
-                  <a:srgbClr val="D6A33A"/>
+                  <a:srgbClr val="8A5A00"/>
                 </a:solidFill>
                 <a:latin typeface="PingFang SC"/>
                 <a:ea typeface="PingFang SC"/>
@@ -8176,7 +8176,7 @@
             <a:r>
               <a:rPr sz="2250" b="1">
                 <a:solidFill>
-                  <a:srgbClr val="D6A33A"/>
+                  <a:srgbClr val="8A5A00"/>
                 </a:solidFill>
                 <a:latin typeface="PingFang SC"/>
                 <a:ea typeface="PingFang SC"/>
@@ -8192,7 +8192,7 @@
           <p:cNvPr id="10" name="core-label-1">
             <a:extLst xmlns:a="http://schemas.openxmlformats.org/drawingml/2006/main">
               <a:ext uri="{FF2B5EF4-FFF2-40B4-BE49-F238E27FC236}">
-                <a16:creationId xmlns:a16="http://schemas.microsoft.com/office/drawing/2014/main" id="{60E79C28-0EFF-4DDE-AA06-8FFBD4BC36E2}"/>
+                <a16:creationId xmlns:a16="http://schemas.microsoft.com/office/drawing/2014/main" id="{9455814E-02FB-4E2C-B39E-9D73E1B4C3DE}"/>
               </a:ext>
             </a:extLst>
           </p:cNvPr>
@@ -8250,7 +8250,7 @@
           <p:cNvPr id="11" name="core-body-1">
             <a:extLst xmlns:a="http://schemas.openxmlformats.org/drawingml/2006/main">
               <a:ext uri="{FF2B5EF4-FFF2-40B4-BE49-F238E27FC236}">
-                <a16:creationId xmlns:a16="http://schemas.microsoft.com/office/drawing/2014/main" id="{5F1DD324-4574-4D94-9759-633CA0A17EE5}"/>
+                <a16:creationId xmlns:a16="http://schemas.microsoft.com/office/drawing/2014/main" id="{D4EC7AC6-53FD-4C65-BE54-70C7C65D5F70}"/>
               </a:ext>
             </a:extLst>
           </p:cNvPr>
@@ -8281,7 +8281,7 @@
         </p:spPr>
         <p:txBody>
           <a:bodyPr xmlns:a="http://schemas.openxmlformats.org/drawingml/2006/main" lIns="152400" tIns="133350" rIns="152400" bIns="133350" anchor="ctr">
-            <a:normAutofit fontScale="98233"/>
+            <a:normAutofit fontScale="95010"/>
           </a:bodyPr>
           <a:lstStyle xmlns:a="http://schemas.openxmlformats.org/drawingml/2006/main"/>
           <a:p xmlns:a="http://schemas.openxmlformats.org/drawingml/2006/main">
@@ -8304,7 +8304,7 @@
                 <a:ea typeface="PingFang SC"/>
                 <a:cs typeface="PingFang SC"/>
               </a:rPr>
-              <a:t>最能把上面这套流程讲透的模型是 线性回归 。19 世纪，英国学者高尔顿研究父母身高与子女身高的关系时发现：高个子父母的子女平均而言也高…</a:t>
+              <a:t>最能把上面这套流程讲透的模型是 线性回归；19 世纪，英国学者高尔顿研究父母身高与子女身高的关系时发现；高个子父母的子女平均而言也高；但会向人群平均值靠拢——"回归"一词就源于这个现象</a:t>
             </a:r>
           </a:p>
         </p:txBody>
@@ -8314,7 +8314,7 @@
           <p:cNvPr id="12" name="s4-takeaway-rule">
             <a:extLst xmlns:a="http://schemas.openxmlformats.org/drawingml/2006/main">
               <a:ext uri="{FF2B5EF4-FFF2-40B4-BE49-F238E27FC236}">
-                <a16:creationId xmlns:a16="http://schemas.microsoft.com/office/drawing/2014/main" id="{BBF62BA6-3E12-4F23-9D5F-BEE9B76DAC78}"/>
+                <a16:creationId xmlns:a16="http://schemas.microsoft.com/office/drawing/2014/main" id="{94E113CB-095C-481C-B96E-B08B35D32DCF}"/>
               </a:ext>
             </a:extLst>
           </p:cNvPr>
@@ -8347,7 +8347,7 @@
           <p:cNvPr id="13" name="s4-takeaway">
             <a:extLst xmlns:a="http://schemas.openxmlformats.org/drawingml/2006/main">
               <a:ext uri="{FF2B5EF4-FFF2-40B4-BE49-F238E27FC236}">
-                <a16:creationId xmlns:a16="http://schemas.microsoft.com/office/drawing/2014/main" id="{4CE05360-EAAC-4126-B10A-9A91C42F37AE}"/>
+                <a16:creationId xmlns:a16="http://schemas.microsoft.com/office/drawing/2014/main" id="{DB835978-CBA8-404D-8D35-053646AFA6BC}"/>
               </a:ext>
             </a:extLst>
           </p:cNvPr>
@@ -8395,7 +8395,7 @@
                 <a:ea typeface="PingFang SC"/>
                 <a:cs typeface="PingFang SC"/>
               </a:rPr>
-              <a:t>模型在见过的数据上表现好</a:t>
+              <a:t>数据划分检验泛化，线性回归提供基线</a:t>
             </a:r>
           </a:p>
         </p:txBody>
@@ -8403,7 +8403,7 @@
     </p:spTree>
     <p:extLst>
       <p:ext uri="{BB962C8B-B14F-4D97-AF65-F5344CB8AC3E}">
-        <p14:creationId xmlns:p14="http://schemas.microsoft.com/office/powerpoint/2010/main" val="400588821"/>
+        <p14:creationId xmlns:p14="http://schemas.microsoft.com/office/powerpoint/2010/main" val="1612552"/>
       </p:ext>
     </p:extLst>
   </p:cSld>
@@ -8434,7 +8434,7 @@
           <p:cNvPr id="1" name="s5-rule">
             <a:extLst xmlns:a="http://schemas.openxmlformats.org/drawingml/2006/main">
               <a:ext uri="{FF2B5EF4-FFF2-40B4-BE49-F238E27FC236}">
-                <a16:creationId xmlns:a16="http://schemas.microsoft.com/office/drawing/2014/main" id="{78800EE4-427B-47AC-856B-1BEA4D34E4BF}"/>
+                <a16:creationId xmlns:a16="http://schemas.microsoft.com/office/drawing/2014/main" id="{35498A14-80E3-4A5F-BCC5-025B3034E626}"/>
               </a:ext>
             </a:extLst>
           </p:cNvPr>
@@ -8467,7 +8467,7 @@
           <p:cNvPr id="2" name="s5-eyebrow">
             <a:extLst xmlns:a="http://schemas.openxmlformats.org/drawingml/2006/main">
               <a:ext uri="{FF2B5EF4-FFF2-40B4-BE49-F238E27FC236}">
-                <a16:creationId xmlns:a16="http://schemas.microsoft.com/office/drawing/2014/main" id="{82B7669D-E8A7-4539-A9D2-BC973DF307FE}"/>
+                <a16:creationId xmlns:a16="http://schemas.microsoft.com/office/drawing/2014/main" id="{77BF5E07-BC99-4C62-8292-3A91081BA0EF}"/>
               </a:ext>
             </a:extLst>
           </p:cNvPr>
@@ -8525,7 +8525,7 @@
           <p:cNvPr id="3" name="s5-title">
             <a:extLst xmlns:a="http://schemas.openxmlformats.org/drawingml/2006/main">
               <a:ext uri="{FF2B5EF4-FFF2-40B4-BE49-F238E27FC236}">
-                <a16:creationId xmlns:a16="http://schemas.microsoft.com/office/drawing/2014/main" id="{D6D7BE52-91E6-4BFF-8FCD-272593A96046}"/>
+                <a16:creationId xmlns:a16="http://schemas.microsoft.com/office/drawing/2014/main" id="{DC786F90-F96E-4DA3-B15A-FFF76595131D}"/>
               </a:ext>
             </a:extLst>
           </p:cNvPr>
@@ -8550,7 +8550,7 @@
         </p:spPr>
         <p:txBody>
           <a:bodyPr xmlns:a="http://schemas.openxmlformats.org/drawingml/2006/main" lIns="0" tIns="0" rIns="0" bIns="0" anchor="ctr">
-            <a:normAutofit fontScale="76449"/>
+            <a:normAutofit fontScale="100000"/>
           </a:bodyPr>
           <a:lstStyle xmlns:a="http://schemas.openxmlformats.org/drawingml/2006/main"/>
           <a:p xmlns:a="http://schemas.openxmlformats.org/drawingml/2006/main">
@@ -8573,7 +8573,7 @@
                 <a:ea typeface="PingFang SC"/>
                 <a:cs typeface="PingFang SC"/>
               </a:rPr>
-              <a:t>回归输出连续数值，分类输出离散类别，监督学习的任务基本落在这两类里</a:t>
+              <a:t>任务类型决定分类或回归，经典模型各有偏置</a:t>
             </a:r>
           </a:p>
         </p:txBody>
@@ -8583,7 +8583,7 @@
           <p:cNvPr id="4" name="s5-footer">
             <a:extLst xmlns:a="http://schemas.openxmlformats.org/drawingml/2006/main">
               <a:ext uri="{FF2B5EF4-FFF2-40B4-BE49-F238E27FC236}">
-                <a16:creationId xmlns:a16="http://schemas.microsoft.com/office/drawing/2014/main" id="{276EDF7F-50EF-4835-B18B-5669A073C578}"/>
+                <a16:creationId xmlns:a16="http://schemas.microsoft.com/office/drawing/2014/main" id="{BE781C48-C3C9-437D-A5FD-660E899459FA}"/>
               </a:ext>
             </a:extLst>
           </p:cNvPr>
@@ -8614,7 +8614,7 @@
           <p:cNvPr id="5" name="s5-identity">
             <a:extLst xmlns:a="http://schemas.openxmlformats.org/drawingml/2006/main">
               <a:ext uri="{FF2B5EF4-FFF2-40B4-BE49-F238E27FC236}">
-                <a16:creationId xmlns:a16="http://schemas.microsoft.com/office/drawing/2014/main" id="{59FFB81B-51D0-4AC4-9D35-C044D881359A}"/>
+                <a16:creationId xmlns:a16="http://schemas.microsoft.com/office/drawing/2014/main" id="{04ABE1F9-630E-42F9-B3A3-AC5ADF8F9359}"/>
               </a:ext>
             </a:extLst>
           </p:cNvPr>
@@ -8672,7 +8672,7 @@
           <p:cNvPr id="6" name="core-no-0">
             <a:extLst xmlns:a="http://schemas.openxmlformats.org/drawingml/2006/main">
               <a:ext uri="{FF2B5EF4-FFF2-40B4-BE49-F238E27FC236}">
-                <a16:creationId xmlns:a16="http://schemas.microsoft.com/office/drawing/2014/main" id="{B2E18A96-866D-49A6-B87B-6349E2CF3D40}"/>
+                <a16:creationId xmlns:a16="http://schemas.microsoft.com/office/drawing/2014/main" id="{EA4C152C-11B7-442C-905B-0BC241B71050}"/>
               </a:ext>
             </a:extLst>
           </p:cNvPr>
@@ -8704,7 +8704,7 @@
             <a:pPr algn="l">
               <a:defRPr sz="2250" b="1">
                 <a:solidFill>
-                  <a:srgbClr val="D6A33A"/>
+                  <a:srgbClr val="8A5A00"/>
                 </a:solidFill>
                 <a:latin typeface="PingFang SC"/>
                 <a:ea typeface="PingFang SC"/>
@@ -8714,7 +8714,7 @@
             <a:r>
               <a:rPr sz="2250" b="1">
                 <a:solidFill>
-                  <a:srgbClr val="D6A33A"/>
+                  <a:srgbClr val="8A5A00"/>
                 </a:solidFill>
                 <a:latin typeface="PingFang SC"/>
                 <a:ea typeface="PingFang SC"/>
@@ -8730,7 +8730,7 @@
           <p:cNvPr id="7" name="core-label-0">
             <a:extLst xmlns:a="http://schemas.openxmlformats.org/drawingml/2006/main">
               <a:ext uri="{FF2B5EF4-FFF2-40B4-BE49-F238E27FC236}">
-                <a16:creationId xmlns:a16="http://schemas.microsoft.com/office/drawing/2014/main" id="{4D58DA6C-FAD1-4741-97F8-8CB17CEFAA2B}"/>
+                <a16:creationId xmlns:a16="http://schemas.microsoft.com/office/drawing/2014/main" id="{CDA48DF6-21E8-426C-B5A0-C5D97BD3DA5C}"/>
               </a:ext>
             </a:extLst>
           </p:cNvPr>
@@ -8788,7 +8788,7 @@
           <p:cNvPr id="8" name="core-body-0">
             <a:extLst xmlns:a="http://schemas.openxmlformats.org/drawingml/2006/main">
               <a:ext uri="{FF2B5EF4-FFF2-40B4-BE49-F238E27FC236}">
-                <a16:creationId xmlns:a16="http://schemas.microsoft.com/office/drawing/2014/main" id="{EEC3387B-E169-4D2B-B7C7-D53305230C8F}"/>
+                <a16:creationId xmlns:a16="http://schemas.microsoft.com/office/drawing/2014/main" id="{4768CC97-393C-4708-ADF5-32E7D5C4E653}"/>
               </a:ext>
             </a:extLst>
           </p:cNvPr>
@@ -8812,7 +8812,7 @@
           </a:solidFill>
           <a:ln xmlns:a="http://schemas.openxmlformats.org/drawingml/2006/main" w="19050">
             <a:solidFill>
-              <a:srgbClr val="D6A33A"/>
+              <a:srgbClr val="8A5A00"/>
             </a:solidFill>
             <a:prstDash val="solid"/>
           </a:ln>
@@ -8842,7 +8842,7 @@
                 <a:ea typeface="PingFang SC"/>
                 <a:cs typeface="PingFang SC"/>
               </a:rPr>
-              <a:t>回归输出连续数值，分类输出离散类别，监督学习的任务基本落在这两类里。想用普通线性回归直接做二分类会遇到一个根本问题：预测值没有被限制在 0 到 1 之间，也不对应适合二分类的似然模型…</a:t>
+              <a:t>回归输出连续数值，分类输出离散类别；监督学习的任务基本落在这两类里；想用普通线性回归直接做二分类会遇到一个根本问题；预测值没有被限制在 0 到 1 之间；也不对应适合二分类的似然模型</a:t>
             </a:r>
           </a:p>
         </p:txBody>
@@ -8852,7 +8852,7 @@
           <p:cNvPr id="9" name="core-no-1">
             <a:extLst xmlns:a="http://schemas.openxmlformats.org/drawingml/2006/main">
               <a:ext uri="{FF2B5EF4-FFF2-40B4-BE49-F238E27FC236}">
-                <a16:creationId xmlns:a16="http://schemas.microsoft.com/office/drawing/2014/main" id="{C966788D-B980-4935-84CF-26BB225878D9}"/>
+                <a16:creationId xmlns:a16="http://schemas.microsoft.com/office/drawing/2014/main" id="{FA2A809D-96D5-48CD-8067-AAAA2C90637C}"/>
               </a:ext>
             </a:extLst>
           </p:cNvPr>
@@ -8884,7 +8884,7 @@
             <a:pPr algn="l">
               <a:defRPr sz="2250" b="1">
                 <a:solidFill>
-                  <a:srgbClr val="D6A33A"/>
+                  <a:srgbClr val="8A5A00"/>
                 </a:solidFill>
                 <a:latin typeface="PingFang SC"/>
                 <a:ea typeface="PingFang SC"/>
@@ -8894,7 +8894,7 @@
             <a:r>
               <a:rPr sz="2250" b="1">
                 <a:solidFill>
-                  <a:srgbClr val="D6A33A"/>
+                  <a:srgbClr val="8A5A00"/>
                 </a:solidFill>
                 <a:latin typeface="PingFang SC"/>
                 <a:ea typeface="PingFang SC"/>
@@ -8910,7 +8910,7 @@
           <p:cNvPr id="10" name="core-label-1">
             <a:extLst xmlns:a="http://schemas.openxmlformats.org/drawingml/2006/main">
               <a:ext uri="{FF2B5EF4-FFF2-40B4-BE49-F238E27FC236}">
-                <a16:creationId xmlns:a16="http://schemas.microsoft.com/office/drawing/2014/main" id="{4352E685-4A1F-4AB9-A686-345A97D50BED}"/>
+                <a16:creationId xmlns:a16="http://schemas.microsoft.com/office/drawing/2014/main" id="{41144FCE-687B-4087-814F-2DE701A6FBDE}"/>
               </a:ext>
             </a:extLst>
           </p:cNvPr>
@@ -8968,7 +8968,7 @@
           <p:cNvPr id="11" name="core-body-1">
             <a:extLst xmlns:a="http://schemas.openxmlformats.org/drawingml/2006/main">
               <a:ext uri="{FF2B5EF4-FFF2-40B4-BE49-F238E27FC236}">
-                <a16:creationId xmlns:a16="http://schemas.microsoft.com/office/drawing/2014/main" id="{4B1424FE-886A-49D6-8337-95297EB576A1}"/>
+                <a16:creationId xmlns:a16="http://schemas.microsoft.com/office/drawing/2014/main" id="{205FCC28-BC60-43CC-98F4-AEADF772B8C6}"/>
               </a:ext>
             </a:extLst>
           </p:cNvPr>
@@ -9032,7 +9032,7 @@
           <p:cNvPr id="12" name="s5-takeaway-rule">
             <a:extLst xmlns:a="http://schemas.openxmlformats.org/drawingml/2006/main">
               <a:ext uri="{FF2B5EF4-FFF2-40B4-BE49-F238E27FC236}">
-                <a16:creationId xmlns:a16="http://schemas.microsoft.com/office/drawing/2014/main" id="{BBAA8A04-6143-4164-BA5F-9037DD42302A}"/>
+                <a16:creationId xmlns:a16="http://schemas.microsoft.com/office/drawing/2014/main" id="{A8E4F8EE-4824-4848-9587-B642DA3543B8}"/>
               </a:ext>
             </a:extLst>
           </p:cNvPr>
@@ -9065,7 +9065,7 @@
           <p:cNvPr id="13" name="s5-takeaway">
             <a:extLst xmlns:a="http://schemas.openxmlformats.org/drawingml/2006/main">
               <a:ext uri="{FF2B5EF4-FFF2-40B4-BE49-F238E27FC236}">
-                <a16:creationId xmlns:a16="http://schemas.microsoft.com/office/drawing/2014/main" id="{0631E65B-F22E-4642-AC3B-50B89351A416}"/>
+                <a16:creationId xmlns:a16="http://schemas.microsoft.com/office/drawing/2014/main" id="{06B94E91-91BE-431D-96D8-469C1BC26ACD}"/>
               </a:ext>
             </a:extLst>
           </p:cNvPr>
@@ -9113,7 +9113,7 @@
                 <a:ea typeface="PingFang SC"/>
                 <a:cs typeface="PingFang SC"/>
               </a:rPr>
-              <a:t>回归输出连续数值，分类输出离散类别，监督学习的任务基本落在这两类里</a:t>
+              <a:t>任务类型决定分类或回归，经典模型各有偏置</a:t>
             </a:r>
           </a:p>
         </p:txBody>
@@ -9121,7 +9121,7 @@
     </p:spTree>
     <p:extLst>
       <p:ext uri="{BB962C8B-B14F-4D97-AF65-F5344CB8AC3E}">
-        <p14:creationId xmlns:p14="http://schemas.microsoft.com/office/powerpoint/2010/main" val="1204774807"/>
+        <p14:creationId xmlns:p14="http://schemas.microsoft.com/office/powerpoint/2010/main" val="614236822"/>
       </p:ext>
     </p:extLst>
   </p:cSld>
@@ -9152,7 +9152,7 @@
           <p:cNvPr id="1" name="s6-rule">
             <a:extLst xmlns:a="http://schemas.openxmlformats.org/drawingml/2006/main">
               <a:ext uri="{FF2B5EF4-FFF2-40B4-BE49-F238E27FC236}">
-                <a16:creationId xmlns:a16="http://schemas.microsoft.com/office/drawing/2014/main" id="{861B76C2-FA9B-4B4D-9491-3E0C4A9B6F8E}"/>
+                <a16:creationId xmlns:a16="http://schemas.microsoft.com/office/drawing/2014/main" id="{3EF05959-5DE2-46D9-B3E2-C5CF0D1DC023}"/>
               </a:ext>
             </a:extLst>
           </p:cNvPr>
@@ -9185,7 +9185,7 @@
           <p:cNvPr id="2" name="s6-eyebrow">
             <a:extLst xmlns:a="http://schemas.openxmlformats.org/drawingml/2006/main">
               <a:ext uri="{FF2B5EF4-FFF2-40B4-BE49-F238E27FC236}">
-                <a16:creationId xmlns:a16="http://schemas.microsoft.com/office/drawing/2014/main" id="{FFA71E9B-F3F9-4A62-A25B-04974AF18F34}"/>
+                <a16:creationId xmlns:a16="http://schemas.microsoft.com/office/drawing/2014/main" id="{6218888F-DA62-4902-933B-827FB8F43134}"/>
               </a:ext>
             </a:extLst>
           </p:cNvPr>
@@ -9243,7 +9243,7 @@
           <p:cNvPr id="3" name="s6-title">
             <a:extLst xmlns:a="http://schemas.openxmlformats.org/drawingml/2006/main">
               <a:ext uri="{FF2B5EF4-FFF2-40B4-BE49-F238E27FC236}">
-                <a16:creationId xmlns:a16="http://schemas.microsoft.com/office/drawing/2014/main" id="{577459B6-4093-471D-93E4-0375D7EAC547}"/>
+                <a16:creationId xmlns:a16="http://schemas.microsoft.com/office/drawing/2014/main" id="{91FCED93-A8E8-432D-9975-24BA1B83B967}"/>
               </a:ext>
             </a:extLst>
           </p:cNvPr>
@@ -9301,7 +9301,7 @@
           <p:cNvPr id="4" name="s6-footer">
             <a:extLst xmlns:a="http://schemas.openxmlformats.org/drawingml/2006/main">
               <a:ext uri="{FF2B5EF4-FFF2-40B4-BE49-F238E27FC236}">
-                <a16:creationId xmlns:a16="http://schemas.microsoft.com/office/drawing/2014/main" id="{9776B11C-0728-492D-AB42-BE53582A5A00}"/>
+                <a16:creationId xmlns:a16="http://schemas.microsoft.com/office/drawing/2014/main" id="{27A1AF9C-114F-4BD1-B11E-87441C71E04F}"/>
               </a:ext>
             </a:extLst>
           </p:cNvPr>
@@ -9332,7 +9332,7 @@
           <p:cNvPr id="5" name="s6-identity">
             <a:extLst xmlns:a="http://schemas.openxmlformats.org/drawingml/2006/main">
               <a:ext uri="{FF2B5EF4-FFF2-40B4-BE49-F238E27FC236}">
-                <a16:creationId xmlns:a16="http://schemas.microsoft.com/office/drawing/2014/main" id="{47923685-6B5B-4684-8215-8DB4FABEAD2A}"/>
+                <a16:creationId xmlns:a16="http://schemas.microsoft.com/office/drawing/2014/main" id="{452A708D-032F-4B63-99EC-912EFE187346}"/>
               </a:ext>
             </a:extLst>
           </p:cNvPr>
@@ -9390,7 +9390,7 @@
           <p:cNvPr id="6" name="core-no-0">
             <a:extLst xmlns:a="http://schemas.openxmlformats.org/drawingml/2006/main">
               <a:ext uri="{FF2B5EF4-FFF2-40B4-BE49-F238E27FC236}">
-                <a16:creationId xmlns:a16="http://schemas.microsoft.com/office/drawing/2014/main" id="{0802B939-7C47-475F-B0F4-BEF4E63D6234}"/>
+                <a16:creationId xmlns:a16="http://schemas.microsoft.com/office/drawing/2014/main" id="{983F2207-C8E2-4A39-BFFA-33FF6B72A446}"/>
               </a:ext>
             </a:extLst>
           </p:cNvPr>
@@ -9422,7 +9422,7 @@
             <a:pPr algn="l">
               <a:defRPr sz="2250" b="1">
                 <a:solidFill>
-                  <a:srgbClr val="D6A33A"/>
+                  <a:srgbClr val="8A5A00"/>
                 </a:solidFill>
                 <a:latin typeface="PingFang SC"/>
                 <a:ea typeface="PingFang SC"/>
@@ -9432,7 +9432,7 @@
             <a:r>
               <a:rPr sz="2250" b="1">
                 <a:solidFill>
-                  <a:srgbClr val="D6A33A"/>
+                  <a:srgbClr val="8A5A00"/>
                 </a:solidFill>
                 <a:latin typeface="PingFang SC"/>
                 <a:ea typeface="PingFang SC"/>
@@ -9448,7 +9448,7 @@
           <p:cNvPr id="7" name="core-label-0">
             <a:extLst xmlns:a="http://schemas.openxmlformats.org/drawingml/2006/main">
               <a:ext uri="{FF2B5EF4-FFF2-40B4-BE49-F238E27FC236}">
-                <a16:creationId xmlns:a16="http://schemas.microsoft.com/office/drawing/2014/main" id="{D4A1EBA8-B1A0-4C09-BD5E-D2232EAAE210}"/>
+                <a16:creationId xmlns:a16="http://schemas.microsoft.com/office/drawing/2014/main" id="{A490435A-73F4-4600-9F98-D596838828DC}"/>
               </a:ext>
             </a:extLst>
           </p:cNvPr>
@@ -9506,7 +9506,7 @@
           <p:cNvPr id="8" name="core-body-0">
             <a:extLst xmlns:a="http://schemas.openxmlformats.org/drawingml/2006/main">
               <a:ext uri="{FF2B5EF4-FFF2-40B4-BE49-F238E27FC236}">
-                <a16:creationId xmlns:a16="http://schemas.microsoft.com/office/drawing/2014/main" id="{DE85F3A3-2D5E-42F1-B353-16C826D649B3}"/>
+                <a16:creationId xmlns:a16="http://schemas.microsoft.com/office/drawing/2014/main" id="{C2D6BA37-FBF2-4538-A0D1-A35DA3ECFBB1}"/>
               </a:ext>
             </a:extLst>
           </p:cNvPr>
@@ -9530,14 +9530,14 @@
           </a:solidFill>
           <a:ln xmlns:a="http://schemas.openxmlformats.org/drawingml/2006/main" w="19050">
             <a:solidFill>
-              <a:srgbClr val="D6A33A"/>
+              <a:srgbClr val="8A5A00"/>
             </a:solidFill>
             <a:prstDash val="solid"/>
           </a:ln>
         </p:spPr>
         <p:txBody>
           <a:bodyPr xmlns:a="http://schemas.openxmlformats.org/drawingml/2006/main" lIns="152400" tIns="133350" rIns="152400" bIns="133350" anchor="ctr">
-            <a:normAutofit fontScale="76545"/>
+            <a:normAutofit fontScale="89303"/>
           </a:bodyPr>
           <a:lstStyle xmlns:a="http://schemas.openxmlformats.org/drawingml/2006/main"/>
           <a:p xmlns:a="http://schemas.openxmlformats.org/drawingml/2006/main">
@@ -9560,7 +9560,7 @@
                 <a:ea typeface="PingFang SC"/>
                 <a:cs typeface="PingFang SC"/>
               </a:rPr>
-              <a:t>在深度学习之前，一个图像识别系统是"分段"组装的：人工设计特征提取（边缘、纹理、视觉词典），再接一个分类器，每一段单独调优。深度学习改成 端到端 ：原始像素直接进网络，识别结果直接出来…</a:t>
+              <a:t>在深度学习之前，一个图像识别系统是"分段"组装的；人工设计特征提取（边缘、纹理、视觉词典）；再接一个分类器，每一段单独调优；深度学习改成 端到端；原始像素直接进网络</a:t>
             </a:r>
           </a:p>
         </p:txBody>
@@ -9570,7 +9570,7 @@
           <p:cNvPr id="9" name="core-no-1">
             <a:extLst xmlns:a="http://schemas.openxmlformats.org/drawingml/2006/main">
               <a:ext uri="{FF2B5EF4-FFF2-40B4-BE49-F238E27FC236}">
-                <a16:creationId xmlns:a16="http://schemas.microsoft.com/office/drawing/2014/main" id="{8DD675E8-9C8D-417D-99A6-FB6E55979D9B}"/>
+                <a16:creationId xmlns:a16="http://schemas.microsoft.com/office/drawing/2014/main" id="{E8273060-E17C-4559-9F4B-7FF081A492B1}"/>
               </a:ext>
             </a:extLst>
           </p:cNvPr>
@@ -9602,7 +9602,7 @@
             <a:pPr algn="l">
               <a:defRPr sz="2250" b="1">
                 <a:solidFill>
-                  <a:srgbClr val="D6A33A"/>
+                  <a:srgbClr val="8A5A00"/>
                 </a:solidFill>
                 <a:latin typeface="PingFang SC"/>
                 <a:ea typeface="PingFang SC"/>
@@ -9612,7 +9612,7 @@
             <a:r>
               <a:rPr sz="2250" b="1">
                 <a:solidFill>
-                  <a:srgbClr val="D6A33A"/>
+                  <a:srgbClr val="8A5A00"/>
                 </a:solidFill>
                 <a:latin typeface="PingFang SC"/>
                 <a:ea typeface="PingFang SC"/>
@@ -9628,7 +9628,7 @@
           <p:cNvPr id="10" name="core-body-1">
             <a:extLst xmlns:a="http://schemas.openxmlformats.org/drawingml/2006/main">
               <a:ext uri="{FF2B5EF4-FFF2-40B4-BE49-F238E27FC236}">
-                <a16:creationId xmlns:a16="http://schemas.microsoft.com/office/drawing/2014/main" id="{1D0E830C-8E32-489E-B3EA-61080F938975}"/>
+                <a16:creationId xmlns:a16="http://schemas.microsoft.com/office/drawing/2014/main" id="{E3AB8DE7-EF44-4C27-A8D5-47466B89DD8A}"/>
               </a:ext>
             </a:extLst>
           </p:cNvPr>
@@ -9682,7 +9682,7 @@
                 <a:ea typeface="PingFang SC"/>
                 <a:cs typeface="PingFang SC"/>
               </a:rPr>
-              <a:t>网络内部发生的事情可以理解为 逐层抽象 ：低层单元常响应边缘和亮暗，中层组合出角点和部件，高层形成与对象类别相关的表示。这种层级处理受到生物视觉研究启发，也存在有限类比…</a:t>
+              <a:t>网络内部发生的事情可以理解为 逐层抽象；低层单元常响应边缘和亮暗；中层组合出角点和部件；高层形成与对象类别相关的表示；这种层级处理受到生物视觉研究启发</a:t>
             </a:r>
           </a:p>
         </p:txBody>
@@ -9692,7 +9692,7 @@
           <p:cNvPr id="11" name="core-no-2">
             <a:extLst xmlns:a="http://schemas.openxmlformats.org/drawingml/2006/main">
               <a:ext uri="{FF2B5EF4-FFF2-40B4-BE49-F238E27FC236}">
-                <a16:creationId xmlns:a16="http://schemas.microsoft.com/office/drawing/2014/main" id="{6198F294-C870-498E-AAC9-7EC0CC93D83C}"/>
+                <a16:creationId xmlns:a16="http://schemas.microsoft.com/office/drawing/2014/main" id="{77898684-2290-4D4C-B193-BB3422B28DDC}"/>
               </a:ext>
             </a:extLst>
           </p:cNvPr>
@@ -9724,7 +9724,7 @@
             <a:pPr algn="l">
               <a:defRPr sz="2250" b="1">
                 <a:solidFill>
-                  <a:srgbClr val="D6A33A"/>
+                  <a:srgbClr val="8A5A00"/>
                 </a:solidFill>
                 <a:latin typeface="PingFang SC"/>
                 <a:ea typeface="PingFang SC"/>
@@ -9734,7 +9734,7 @@
             <a:r>
               <a:rPr sz="2250" b="1">
                 <a:solidFill>
-                  <a:srgbClr val="D6A33A"/>
+                  <a:srgbClr val="8A5A00"/>
                 </a:solidFill>
                 <a:latin typeface="PingFang SC"/>
                 <a:ea typeface="PingFang SC"/>
@@ -9750,7 +9750,7 @@
           <p:cNvPr id="12" name="core-body-2">
             <a:extLst xmlns:a="http://schemas.openxmlformats.org/drawingml/2006/main">
               <a:ext uri="{FF2B5EF4-FFF2-40B4-BE49-F238E27FC236}">
-                <a16:creationId xmlns:a16="http://schemas.microsoft.com/office/drawing/2014/main" id="{CFFCF941-E1C0-489E-B4EB-52B0CB9C57B4}"/>
+                <a16:creationId xmlns:a16="http://schemas.microsoft.com/office/drawing/2014/main" id="{72A114ED-5204-4828-B889-9AF387D2B4CF}"/>
               </a:ext>
             </a:extLst>
           </p:cNvPr>
@@ -9804,7 +9804,7 @@
                 <a:ea typeface="PingFang SC"/>
                 <a:cs typeface="PingFang SC"/>
               </a:rPr>
-              <a:t>网络的基本单元常被称为 人工神经元 。1943 年 McCulloch 和 Pitts 受生物神经元"兴奋/抑制"机制启发提出 MCP 模型：对输入加权求和，再经过一个激活函数决定输出…</a:t>
+              <a:t>网络的基本单元常被称为 人工神经元；1943 年 McCulloch 和 Pitts 受生物神经元"兴奋/抑制"机制启发提出 MCP 模型；对输入加权求和，再经过一个激活函数决定输出</a:t>
             </a:r>
           </a:p>
         </p:txBody>
@@ -9814,7 +9814,7 @@
           <p:cNvPr id="13" name="s6-takeaway-rule">
             <a:extLst xmlns:a="http://schemas.openxmlformats.org/drawingml/2006/main">
               <a:ext uri="{FF2B5EF4-FFF2-40B4-BE49-F238E27FC236}">
-                <a16:creationId xmlns:a16="http://schemas.microsoft.com/office/drawing/2014/main" id="{3CCD9D44-0176-4DE2-863A-AC8DA7009918}"/>
+                <a16:creationId xmlns:a16="http://schemas.microsoft.com/office/drawing/2014/main" id="{A0ADFE05-2B19-412E-99A1-4F534779F3DE}"/>
               </a:ext>
             </a:extLst>
           </p:cNvPr>
@@ -9847,7 +9847,7 @@
           <p:cNvPr id="14" name="s6-takeaway">
             <a:extLst xmlns:a="http://schemas.openxmlformats.org/drawingml/2006/main">
               <a:ext uri="{FF2B5EF4-FFF2-40B4-BE49-F238E27FC236}">
-                <a16:creationId xmlns:a16="http://schemas.microsoft.com/office/drawing/2014/main" id="{9EA05236-D7F3-4DD4-A381-EDA4C75A64D3}"/>
+                <a16:creationId xmlns:a16="http://schemas.microsoft.com/office/drawing/2014/main" id="{7A55FA9C-6EDF-44FC-8133-AFB9184E202B}"/>
               </a:ext>
             </a:extLst>
           </p:cNvPr>
@@ -9903,7 +9903,7 @@
     </p:spTree>
     <p:extLst>
       <p:ext uri="{BB962C8B-B14F-4D97-AF65-F5344CB8AC3E}">
-        <p14:creationId xmlns:p14="http://schemas.microsoft.com/office/powerpoint/2010/main" val="2086876005"/>
+        <p14:creationId xmlns:p14="http://schemas.microsoft.com/office/powerpoint/2010/main" val="1180035139"/>
       </p:ext>
     </p:extLst>
   </p:cSld>
@@ -9934,7 +9934,7 @@
           <p:cNvPr id="1" name="s7-rule">
             <a:extLst xmlns:a="http://schemas.openxmlformats.org/drawingml/2006/main">
               <a:ext uri="{FF2B5EF4-FFF2-40B4-BE49-F238E27FC236}">
-                <a16:creationId xmlns:a16="http://schemas.microsoft.com/office/drawing/2014/main" id="{E1BE5BCC-B484-4433-812B-88C503BDF7E3}"/>
+                <a16:creationId xmlns:a16="http://schemas.microsoft.com/office/drawing/2014/main" id="{1751DCB9-B4DC-4C2B-A26A-16156867B5F4}"/>
               </a:ext>
             </a:extLst>
           </p:cNvPr>
@@ -9967,7 +9967,7 @@
           <p:cNvPr id="2" name="s7-eyebrow">
             <a:extLst xmlns:a="http://schemas.openxmlformats.org/drawingml/2006/main">
               <a:ext uri="{FF2B5EF4-FFF2-40B4-BE49-F238E27FC236}">
-                <a16:creationId xmlns:a16="http://schemas.microsoft.com/office/drawing/2014/main" id="{85501381-D302-4810-B1AD-DA776C8D7792}"/>
+                <a16:creationId xmlns:a16="http://schemas.microsoft.com/office/drawing/2014/main" id="{5744B374-69A5-417B-95CA-20B321228813}"/>
               </a:ext>
             </a:extLst>
           </p:cNvPr>
@@ -10025,7 +10025,7 @@
           <p:cNvPr id="3" name="s7-title">
             <a:extLst xmlns:a="http://schemas.openxmlformats.org/drawingml/2006/main">
               <a:ext uri="{FF2B5EF4-FFF2-40B4-BE49-F238E27FC236}">
-                <a16:creationId xmlns:a16="http://schemas.microsoft.com/office/drawing/2014/main" id="{C44242F4-1DB6-4511-BA30-3B2F2A5E5BDD}"/>
+                <a16:creationId xmlns:a16="http://schemas.microsoft.com/office/drawing/2014/main" id="{F904C52A-4B95-4EB3-8F1E-806CDB04D5C0}"/>
               </a:ext>
             </a:extLst>
           </p:cNvPr>
@@ -10083,7 +10083,7 @@
           <p:cNvPr id="4" name="s7-footer">
             <a:extLst xmlns:a="http://schemas.openxmlformats.org/drawingml/2006/main">
               <a:ext uri="{FF2B5EF4-FFF2-40B4-BE49-F238E27FC236}">
-                <a16:creationId xmlns:a16="http://schemas.microsoft.com/office/drawing/2014/main" id="{D099089C-BCD2-46D1-A83B-38FBAC2D19BD}"/>
+                <a16:creationId xmlns:a16="http://schemas.microsoft.com/office/drawing/2014/main" id="{A2E2ED6C-324F-4877-9333-29CF4700375A}"/>
               </a:ext>
             </a:extLst>
           </p:cNvPr>
@@ -10114,7 +10114,7 @@
           <p:cNvPr id="5" name="s7-identity">
             <a:extLst xmlns:a="http://schemas.openxmlformats.org/drawingml/2006/main">
               <a:ext uri="{FF2B5EF4-FFF2-40B4-BE49-F238E27FC236}">
-                <a16:creationId xmlns:a16="http://schemas.microsoft.com/office/drawing/2014/main" id="{9E5646C6-0E01-44DA-AA72-4CDAB0FFCDBB}"/>
+                <a16:creationId xmlns:a16="http://schemas.microsoft.com/office/drawing/2014/main" id="{1A282A69-9275-4BE4-96A8-772730FE2FE5}"/>
               </a:ext>
             </a:extLst>
           </p:cNvPr>
@@ -10172,7 +10172,7 @@
           <p:cNvPr id="6" name="core-no-0">
             <a:extLst xmlns:a="http://schemas.openxmlformats.org/drawingml/2006/main">
               <a:ext uri="{FF2B5EF4-FFF2-40B4-BE49-F238E27FC236}">
-                <a16:creationId xmlns:a16="http://schemas.microsoft.com/office/drawing/2014/main" id="{C5C49B09-8590-48F3-99FE-64DCAE3D2DCD}"/>
+                <a16:creationId xmlns:a16="http://schemas.microsoft.com/office/drawing/2014/main" id="{B6083B0E-1C0F-4F46-8F04-5FF10584C81B}"/>
               </a:ext>
             </a:extLst>
           </p:cNvPr>
@@ -10204,7 +10204,7 @@
             <a:pPr algn="l">
               <a:defRPr sz="2250" b="1">
                 <a:solidFill>
-                  <a:srgbClr val="D6A33A"/>
+                  <a:srgbClr val="8A5A00"/>
                 </a:solidFill>
                 <a:latin typeface="PingFang SC"/>
                 <a:ea typeface="PingFang SC"/>
@@ -10214,7 +10214,7 @@
             <a:r>
               <a:rPr sz="2250" b="1">
                 <a:solidFill>
-                  <a:srgbClr val="D6A33A"/>
+                  <a:srgbClr val="8A5A00"/>
                 </a:solidFill>
                 <a:latin typeface="PingFang SC"/>
                 <a:ea typeface="PingFang SC"/>
@@ -10230,7 +10230,7 @@
           <p:cNvPr id="7" name="core-label-0">
             <a:extLst xmlns:a="http://schemas.openxmlformats.org/drawingml/2006/main">
               <a:ext uri="{FF2B5EF4-FFF2-40B4-BE49-F238E27FC236}">
-                <a16:creationId xmlns:a16="http://schemas.microsoft.com/office/drawing/2014/main" id="{4FA33E1F-E352-4E88-8AAC-011D4A5BA310}"/>
+                <a16:creationId xmlns:a16="http://schemas.microsoft.com/office/drawing/2014/main" id="{59B1A286-163D-4E6F-B1EC-6B7BCB99D06A}"/>
               </a:ext>
             </a:extLst>
           </p:cNvPr>
@@ -10288,7 +10288,7 @@
           <p:cNvPr id="8" name="core-body-0">
             <a:extLst xmlns:a="http://schemas.openxmlformats.org/drawingml/2006/main">
               <a:ext uri="{FF2B5EF4-FFF2-40B4-BE49-F238E27FC236}">
-                <a16:creationId xmlns:a16="http://schemas.microsoft.com/office/drawing/2014/main" id="{94FC7AC3-50BC-4452-A2DC-C0A25265EE37}"/>
+                <a16:creationId xmlns:a16="http://schemas.microsoft.com/office/drawing/2014/main" id="{12EF17C2-A227-46B1-8DE5-DC2CC488A0A0}"/>
               </a:ext>
             </a:extLst>
           </p:cNvPr>
@@ -10312,7 +10312,7 @@
           </a:solidFill>
           <a:ln xmlns:a="http://schemas.openxmlformats.org/drawingml/2006/main" w="19050">
             <a:solidFill>
-              <a:srgbClr val="D6A33A"/>
+              <a:srgbClr val="8A5A00"/>
             </a:solidFill>
             <a:prstDash val="solid"/>
           </a:ln>
@@ -10352,7 +10352,7 @@
           <p:cNvPr id="9" name="core-no-1">
             <a:extLst xmlns:a="http://schemas.openxmlformats.org/drawingml/2006/main">
               <a:ext uri="{FF2B5EF4-FFF2-40B4-BE49-F238E27FC236}">
-                <a16:creationId xmlns:a16="http://schemas.microsoft.com/office/drawing/2014/main" id="{2A61C4DB-C1F9-4AA9-954F-3F4EF146CBF0}"/>
+                <a16:creationId xmlns:a16="http://schemas.microsoft.com/office/drawing/2014/main" id="{4045B7AE-55FB-4C2B-9689-C6D98B0DFE95}"/>
               </a:ext>
             </a:extLst>
           </p:cNvPr>
@@ -10384,7 +10384,7 @@
             <a:pPr algn="l">
               <a:defRPr sz="2250" b="1">
                 <a:solidFill>
-                  <a:srgbClr val="D6A33A"/>
+                  <a:srgbClr val="8A5A00"/>
                 </a:solidFill>
                 <a:latin typeface="PingFang SC"/>
                 <a:ea typeface="PingFang SC"/>
@@ -10394,7 +10394,7 @@
             <a:r>
               <a:rPr sz="2250" b="1">
                 <a:solidFill>
-                  <a:srgbClr val="D6A33A"/>
+                  <a:srgbClr val="8A5A00"/>
                 </a:solidFill>
                 <a:latin typeface="PingFang SC"/>
                 <a:ea typeface="PingFang SC"/>
@@ -10410,7 +10410,7 @@
           <p:cNvPr id="10" name="core-body-1">
             <a:extLst xmlns:a="http://schemas.openxmlformats.org/drawingml/2006/main">
               <a:ext uri="{FF2B5EF4-FFF2-40B4-BE49-F238E27FC236}">
-                <a16:creationId xmlns:a16="http://schemas.microsoft.com/office/drawing/2014/main" id="{5DBD7215-7174-45FB-90CB-5A252193C714}"/>
+                <a16:creationId xmlns:a16="http://schemas.microsoft.com/office/drawing/2014/main" id="{B3D66DAF-FB86-49B8-A229-6A2DDD45AD6B}"/>
               </a:ext>
             </a:extLst>
           </p:cNvPr>
@@ -10464,7 +10464,7 @@
                 <a:ea typeface="PingFang SC"/>
                 <a:cs typeface="PingFang SC"/>
               </a:rPr>
-              <a:t>优化的主力算法是 梯度下降 。把损失函数想象成参数空间里的一片山地，当前参数是站立的位置：梯度指向上坡最陡的方向，往梯度的反方向挪一小步，损失就下降最快。步子的大小叫学习率，一步步走下去…</a:t>
+              <a:t>优化的主力算法是 梯度下降；把损失函数想象成参数空间里的一片山地；当前参数是站立的位置；梯度指向上坡最陡的方向；往梯度的反方向挪一小步；损失就下降最快，步子的大小叫学习率</a:t>
             </a:r>
           </a:p>
         </p:txBody>
@@ -10474,7 +10474,7 @@
           <p:cNvPr id="11" name="core-no-2">
             <a:extLst xmlns:a="http://schemas.openxmlformats.org/drawingml/2006/main">
               <a:ext uri="{FF2B5EF4-FFF2-40B4-BE49-F238E27FC236}">
-                <a16:creationId xmlns:a16="http://schemas.microsoft.com/office/drawing/2014/main" id="{9EF43B78-0453-4F3C-81B6-8A34048E4577}"/>
+                <a16:creationId xmlns:a16="http://schemas.microsoft.com/office/drawing/2014/main" id="{658FACFC-4CDE-49F3-BC1E-16839DAFEE15}"/>
               </a:ext>
             </a:extLst>
           </p:cNvPr>
@@ -10506,7 +10506,7 @@
             <a:pPr algn="l">
               <a:defRPr sz="2250" b="1">
                 <a:solidFill>
-                  <a:srgbClr val="D6A33A"/>
+                  <a:srgbClr val="8A5A00"/>
                 </a:solidFill>
                 <a:latin typeface="PingFang SC"/>
                 <a:ea typeface="PingFang SC"/>
@@ -10516,7 +10516,7 @@
             <a:r>
               <a:rPr sz="2250" b="1">
                 <a:solidFill>
-                  <a:srgbClr val="D6A33A"/>
+                  <a:srgbClr val="8A5A00"/>
                 </a:solidFill>
                 <a:latin typeface="PingFang SC"/>
                 <a:ea typeface="PingFang SC"/>
@@ -10532,7 +10532,7 @@
           <p:cNvPr id="12" name="core-body-2">
             <a:extLst xmlns:a="http://schemas.openxmlformats.org/drawingml/2006/main">
               <a:ext uri="{FF2B5EF4-FFF2-40B4-BE49-F238E27FC236}">
-                <a16:creationId xmlns:a16="http://schemas.microsoft.com/office/drawing/2014/main" id="{73952A3A-6502-46B6-B300-7B52F0DB8605}"/>
+                <a16:creationId xmlns:a16="http://schemas.microsoft.com/office/drawing/2014/main" id="{AF8A1939-B90E-42C6-A12A-79DE03349CD4}"/>
               </a:ext>
             </a:extLst>
           </p:cNvPr>
@@ -10586,7 +10586,7 @@
                 <a:ea typeface="PingFang SC"/>
                 <a:cs typeface="PingFang SC"/>
               </a:rPr>
-              <a:t>深层网络的参数分布在一层层结构里，输出端算出的误差如何反馈给前面每一层？ 误差反向传播 （BP）解决了这件事：利用链式求导法则，把输出误差从后向前逐层传递，算出每个参数对总误差该负多大"责任"…</a:t>
+              <a:t>深层网络的参数分布在一层层结构里；输出端算出的误差如何反馈给前面每一层；误差反向传播 （BP）解决了这件事；利用链式求导法则，把输出误差从后向前逐层传递；算出每个参数对总误差该负多大"责任"</a:t>
             </a:r>
           </a:p>
         </p:txBody>
@@ -10596,7 +10596,7 @@
           <p:cNvPr id="13" name="s7-takeaway-rule">
             <a:extLst xmlns:a="http://schemas.openxmlformats.org/drawingml/2006/main">
               <a:ext uri="{FF2B5EF4-FFF2-40B4-BE49-F238E27FC236}">
-                <a16:creationId xmlns:a16="http://schemas.microsoft.com/office/drawing/2014/main" id="{590868C7-6D6C-4978-9A5F-BB1C2A60CF3C}"/>
+                <a16:creationId xmlns:a16="http://schemas.microsoft.com/office/drawing/2014/main" id="{4AD89652-D1F5-49FE-B5D9-EF1707B191F1}"/>
               </a:ext>
             </a:extLst>
           </p:cNvPr>
@@ -10629,7 +10629,7 @@
           <p:cNvPr id="14" name="s7-takeaway">
             <a:extLst xmlns:a="http://schemas.openxmlformats.org/drawingml/2006/main">
               <a:ext uri="{FF2B5EF4-FFF2-40B4-BE49-F238E27FC236}">
-                <a16:creationId xmlns:a16="http://schemas.microsoft.com/office/drawing/2014/main" id="{01626176-1417-41B3-9E8D-0B9C2CEE1BF3}"/>
+                <a16:creationId xmlns:a16="http://schemas.microsoft.com/office/drawing/2014/main" id="{82B15E5E-E127-432D-92F1-1EE7F82BD3FA}"/>
               </a:ext>
             </a:extLst>
           </p:cNvPr>
@@ -10685,7 +10685,7 @@
     </p:spTree>
     <p:extLst>
       <p:ext uri="{BB962C8B-B14F-4D97-AF65-F5344CB8AC3E}">
-        <p14:creationId xmlns:p14="http://schemas.microsoft.com/office/powerpoint/2010/main" val="1974472072"/>
+        <p14:creationId xmlns:p14="http://schemas.microsoft.com/office/powerpoint/2010/main" val="652959243"/>
       </p:ext>
     </p:extLst>
   </p:cSld>
@@ -10716,7 +10716,7 @@
           <p:cNvPr id="1" name="s8-rule">
             <a:extLst xmlns:a="http://schemas.openxmlformats.org/drawingml/2006/main">
               <a:ext uri="{FF2B5EF4-FFF2-40B4-BE49-F238E27FC236}">
-                <a16:creationId xmlns:a16="http://schemas.microsoft.com/office/drawing/2014/main" id="{FBFCC499-EDA9-4D76-96FD-5820930BAD46}"/>
+                <a16:creationId xmlns:a16="http://schemas.microsoft.com/office/drawing/2014/main" id="{82E15746-E739-4A10-9A48-F74BD859B931}"/>
               </a:ext>
             </a:extLst>
           </p:cNvPr>
@@ -10749,7 +10749,7 @@
           <p:cNvPr id="2" name="s8-eyebrow">
             <a:extLst xmlns:a="http://schemas.openxmlformats.org/drawingml/2006/main">
               <a:ext uri="{FF2B5EF4-FFF2-40B4-BE49-F238E27FC236}">
-                <a16:creationId xmlns:a16="http://schemas.microsoft.com/office/drawing/2014/main" id="{519887CD-0D7A-455E-897C-D1E164FE611E}"/>
+                <a16:creationId xmlns:a16="http://schemas.microsoft.com/office/drawing/2014/main" id="{9B0FC43B-E9D2-4067-81F3-0EBA69ACDAF9}"/>
               </a:ext>
             </a:extLst>
           </p:cNvPr>
@@ -10807,7 +10807,7 @@
           <p:cNvPr id="3" name="s8-title">
             <a:extLst xmlns:a="http://schemas.openxmlformats.org/drawingml/2006/main">
               <a:ext uri="{FF2B5EF4-FFF2-40B4-BE49-F238E27FC236}">
-                <a16:creationId xmlns:a16="http://schemas.microsoft.com/office/drawing/2014/main" id="{B07201CD-D981-4B92-B44A-FDEA50DF0C42}"/>
+                <a16:creationId xmlns:a16="http://schemas.microsoft.com/office/drawing/2014/main" id="{05E14907-C648-4353-AE51-B835A12BBC07}"/>
               </a:ext>
             </a:extLst>
           </p:cNvPr>
@@ -10865,7 +10865,7 @@
           <p:cNvPr id="4" name="s8-footer">
             <a:extLst xmlns:a="http://schemas.openxmlformats.org/drawingml/2006/main">
               <a:ext uri="{FF2B5EF4-FFF2-40B4-BE49-F238E27FC236}">
-                <a16:creationId xmlns:a16="http://schemas.microsoft.com/office/drawing/2014/main" id="{BA8CAA5A-7277-4AAC-905F-012DA95482BB}"/>
+                <a16:creationId xmlns:a16="http://schemas.microsoft.com/office/drawing/2014/main" id="{66A9B304-1C90-4BC7-86F4-B65AC6FEE3A5}"/>
               </a:ext>
             </a:extLst>
           </p:cNvPr>
@@ -10896,7 +10896,7 @@
           <p:cNvPr id="5" name="s8-identity">
             <a:extLst xmlns:a="http://schemas.openxmlformats.org/drawingml/2006/main">
               <a:ext uri="{FF2B5EF4-FFF2-40B4-BE49-F238E27FC236}">
-                <a16:creationId xmlns:a16="http://schemas.microsoft.com/office/drawing/2014/main" id="{2B69C49C-AD3D-4136-B1A5-4BF5FEB5B6C4}"/>
+                <a16:creationId xmlns:a16="http://schemas.microsoft.com/office/drawing/2014/main" id="{BB67CEDC-875B-4835-B554-D714FD67AB00}"/>
               </a:ext>
             </a:extLst>
           </p:cNvPr>
@@ -10954,7 +10954,7 @@
           <p:cNvPr id="6" name="core-no-0">
             <a:extLst xmlns:a="http://schemas.openxmlformats.org/drawingml/2006/main">
               <a:ext uri="{FF2B5EF4-FFF2-40B4-BE49-F238E27FC236}">
-                <a16:creationId xmlns:a16="http://schemas.microsoft.com/office/drawing/2014/main" id="{A2C597CA-8AC8-45A7-9538-2A467BEF9D3F}"/>
+                <a16:creationId xmlns:a16="http://schemas.microsoft.com/office/drawing/2014/main" id="{8AE2565F-2D9B-4CA8-85C1-3D221D00CD41}"/>
               </a:ext>
             </a:extLst>
           </p:cNvPr>
@@ -10986,7 +10986,7 @@
             <a:pPr algn="l">
               <a:defRPr sz="2250" b="1">
                 <a:solidFill>
-                  <a:srgbClr val="D6A33A"/>
+                  <a:srgbClr val="8A5A00"/>
                 </a:solidFill>
                 <a:latin typeface="PingFang SC"/>
                 <a:ea typeface="PingFang SC"/>
@@ -10996,7 +10996,7 @@
             <a:r>
               <a:rPr sz="2250" b="1">
                 <a:solidFill>
-                  <a:srgbClr val="D6A33A"/>
+                  <a:srgbClr val="8A5A00"/>
                 </a:solidFill>
                 <a:latin typeface="PingFang SC"/>
                 <a:ea typeface="PingFang SC"/>
@@ -11012,7 +11012,7 @@
           <p:cNvPr id="7" name="core-label-0">
             <a:extLst xmlns:a="http://schemas.openxmlformats.org/drawingml/2006/main">
               <a:ext uri="{FF2B5EF4-FFF2-40B4-BE49-F238E27FC236}">
-                <a16:creationId xmlns:a16="http://schemas.microsoft.com/office/drawing/2014/main" id="{1FAB4400-C487-48CA-BB6D-65921B97CEAE}"/>
+                <a16:creationId xmlns:a16="http://schemas.microsoft.com/office/drawing/2014/main" id="{C89D3720-879D-4415-A695-78AB4833D6BD}"/>
               </a:ext>
             </a:extLst>
           </p:cNvPr>
@@ -11070,7 +11070,7 @@
           <p:cNvPr id="8" name="core-body-0">
             <a:extLst xmlns:a="http://schemas.openxmlformats.org/drawingml/2006/main">
               <a:ext uri="{FF2B5EF4-FFF2-40B4-BE49-F238E27FC236}">
-                <a16:creationId xmlns:a16="http://schemas.microsoft.com/office/drawing/2014/main" id="{108FE7AB-0E66-4567-BB1A-5B11837DF688}"/>
+                <a16:creationId xmlns:a16="http://schemas.microsoft.com/office/drawing/2014/main" id="{2A74C634-01F6-4668-B42C-BBF1774B8503}"/>
               </a:ext>
             </a:extLst>
           </p:cNvPr>
@@ -11094,7 +11094,7 @@
           </a:solidFill>
           <a:ln xmlns:a="http://schemas.openxmlformats.org/drawingml/2006/main" w="19050">
             <a:solidFill>
-              <a:srgbClr val="D6A33A"/>
+              <a:srgbClr val="8A5A00"/>
             </a:solidFill>
             <a:prstDash val="solid"/>
           </a:ln>
@@ -11124,7 +11124,7 @@
                 <a:ea typeface="PingFang SC"/>
                 <a:cs typeface="PingFang SC"/>
               </a:rPr>
-              <a:t>把一张图像直接摊平接进全连接网络，参数会瞬间爆炸：一张 1000×1000 的图片仅一层就要处理百万维输入。图像有两个可以利用的特点—— 模式是局部的 （一条边缘只占几个像素）…</a:t>
+              <a:t>把一张图像直接摊平接进全连接网络；参数会瞬间爆炸，一张 1000×1000 的图片仅一层就要处理百万维输入；图像有两个可以利用的特点—— 模式是局部的 （一条边缘只占几个像素）</a:t>
             </a:r>
           </a:p>
         </p:txBody>
@@ -11134,7 +11134,7 @@
           <p:cNvPr id="9" name="core-no-1">
             <a:extLst xmlns:a="http://schemas.openxmlformats.org/drawingml/2006/main">
               <a:ext uri="{FF2B5EF4-FFF2-40B4-BE49-F238E27FC236}">
-                <a16:creationId xmlns:a16="http://schemas.microsoft.com/office/drawing/2014/main" id="{E1B7E567-6C46-4C69-ABEF-E6AD2B791F22}"/>
+                <a16:creationId xmlns:a16="http://schemas.microsoft.com/office/drawing/2014/main" id="{8D467459-BDE5-45F8-80C7-F29D438CE694}"/>
               </a:ext>
             </a:extLst>
           </p:cNvPr>
@@ -11166,7 +11166,7 @@
             <a:pPr algn="l">
               <a:defRPr sz="2250" b="1">
                 <a:solidFill>
-                  <a:srgbClr val="D6A33A"/>
+                  <a:srgbClr val="8A5A00"/>
                 </a:solidFill>
                 <a:latin typeface="PingFang SC"/>
                 <a:ea typeface="PingFang SC"/>
@@ -11176,7 +11176,7 @@
             <a:r>
               <a:rPr sz="2250" b="1">
                 <a:solidFill>
-                  <a:srgbClr val="D6A33A"/>
+                  <a:srgbClr val="8A5A00"/>
                 </a:solidFill>
                 <a:latin typeface="PingFang SC"/>
                 <a:ea typeface="PingFang SC"/>
@@ -11192,7 +11192,7 @@
           <p:cNvPr id="10" name="core-body-1">
             <a:extLst xmlns:a="http://schemas.openxmlformats.org/drawingml/2006/main">
               <a:ext uri="{FF2B5EF4-FFF2-40B4-BE49-F238E27FC236}">
-                <a16:creationId xmlns:a16="http://schemas.microsoft.com/office/drawing/2014/main" id="{BF5BFF0B-39E0-445B-96B4-953DFE6CBE2D}"/>
+                <a16:creationId xmlns:a16="http://schemas.microsoft.com/office/drawing/2014/main" id="{7D7E87F6-91FD-4FDD-A4F4-9ED0C42CDD26}"/>
               </a:ext>
             </a:extLst>
           </p:cNvPr>
@@ -11246,7 +11246,7 @@
                 <a:ea typeface="PingFang SC"/>
                 <a:cs typeface="PingFang SC"/>
               </a:rPr>
-              <a:t>核心是 卷积操作 ：用一个小小的卷积核（如 3×3 的权重矩阵）在图像上滑动，每停一处就与覆盖区域做加权求和，输出一张特征图。同一个卷积核的参数在整张图上 共享 ，参数量骤减…</a:t>
+              <a:t>核心是 卷积操作，用一个小小的卷积核（如 3×3 的权重矩阵）在图像上滑动；每停一处就与覆盖区域做加权求和；输出一张特征图，同一个卷积核的参数在整张图上 共享</a:t>
             </a:r>
           </a:p>
         </p:txBody>
@@ -11256,7 +11256,7 @@
           <p:cNvPr id="11" name="core-no-2">
             <a:extLst xmlns:a="http://schemas.openxmlformats.org/drawingml/2006/main">
               <a:ext uri="{FF2B5EF4-FFF2-40B4-BE49-F238E27FC236}">
-                <a16:creationId xmlns:a16="http://schemas.microsoft.com/office/drawing/2014/main" id="{1321BBD9-C28C-4741-817D-21229CBA318D}"/>
+                <a16:creationId xmlns:a16="http://schemas.microsoft.com/office/drawing/2014/main" id="{4902E244-3B67-47C2-B5B1-A9E15D8C0293}"/>
               </a:ext>
             </a:extLst>
           </p:cNvPr>
@@ -11288,7 +11288,7 @@
             <a:pPr algn="l">
               <a:defRPr sz="2250" b="1">
                 <a:solidFill>
-                  <a:srgbClr val="D6A33A"/>
+                  <a:srgbClr val="8A5A00"/>
                 </a:solidFill>
                 <a:latin typeface="PingFang SC"/>
                 <a:ea typeface="PingFang SC"/>
@@ -11298,7 +11298,7 @@
             <a:r>
               <a:rPr sz="2250" b="1">
                 <a:solidFill>
-                  <a:srgbClr val="D6A33A"/>
+                  <a:srgbClr val="8A5A00"/>
                 </a:solidFill>
                 <a:latin typeface="PingFang SC"/>
                 <a:ea typeface="PingFang SC"/>
@@ -11314,7 +11314,7 @@
           <p:cNvPr id="12" name="core-body-2">
             <a:extLst xmlns:a="http://schemas.openxmlformats.org/drawingml/2006/main">
               <a:ext uri="{FF2B5EF4-FFF2-40B4-BE49-F238E27FC236}">
-                <a16:creationId xmlns:a16="http://schemas.microsoft.com/office/drawing/2014/main" id="{1B68AF2E-BC05-48DF-8421-FB7A56255B6F}"/>
+                <a16:creationId xmlns:a16="http://schemas.microsoft.com/office/drawing/2014/main" id="{BD9ADAFD-3183-44BF-869E-125EF5CEDDE2}"/>
               </a:ext>
             </a:extLst>
           </p:cNvPr>
@@ -11378,7 +11378,7 @@
           <p:cNvPr id="13" name="s8-takeaway-rule">
             <a:extLst xmlns:a="http://schemas.openxmlformats.org/drawingml/2006/main">
               <a:ext uri="{FF2B5EF4-FFF2-40B4-BE49-F238E27FC236}">
-                <a16:creationId xmlns:a16="http://schemas.microsoft.com/office/drawing/2014/main" id="{7FBE5DE4-99CD-4BF7-AEE6-8F4DB48513A5}"/>
+                <a16:creationId xmlns:a16="http://schemas.microsoft.com/office/drawing/2014/main" id="{3D6D4D35-BB20-44D4-950F-0F22E7C2B798}"/>
               </a:ext>
             </a:extLst>
           </p:cNvPr>
@@ -11411,7 +11411,7 @@
           <p:cNvPr id="14" name="s8-takeaway">
             <a:extLst xmlns:a="http://schemas.openxmlformats.org/drawingml/2006/main">
               <a:ext uri="{FF2B5EF4-FFF2-40B4-BE49-F238E27FC236}">
-                <a16:creationId xmlns:a16="http://schemas.microsoft.com/office/drawing/2014/main" id="{2B331ADE-C982-4D0E-9853-0107D41FB706}"/>
+                <a16:creationId xmlns:a16="http://schemas.microsoft.com/office/drawing/2014/main" id="{4450F270-D785-4BED-B60B-ACF5BA85229C}"/>
               </a:ext>
             </a:extLst>
           </p:cNvPr>
@@ -11467,7 +11467,7 @@
     </p:spTree>
     <p:extLst>
       <p:ext uri="{BB962C8B-B14F-4D97-AF65-F5344CB8AC3E}">
-        <p14:creationId xmlns:p14="http://schemas.microsoft.com/office/powerpoint/2010/main" val="1749313833"/>
+        <p14:creationId xmlns:p14="http://schemas.microsoft.com/office/powerpoint/2010/main" val="220768410"/>
       </p:ext>
     </p:extLst>
   </p:cSld>
@@ -11498,7 +11498,7 @@
           <p:cNvPr id="1" name="s9-rule">
             <a:extLst xmlns:a="http://schemas.openxmlformats.org/drawingml/2006/main">
               <a:ext uri="{FF2B5EF4-FFF2-40B4-BE49-F238E27FC236}">
-                <a16:creationId xmlns:a16="http://schemas.microsoft.com/office/drawing/2014/main" id="{D13E02FC-CE70-418B-9192-6778C11797FA}"/>
+                <a16:creationId xmlns:a16="http://schemas.microsoft.com/office/drawing/2014/main" id="{1E70630D-776D-4096-A100-2922587A61B3}"/>
               </a:ext>
             </a:extLst>
           </p:cNvPr>
@@ -11531,7 +11531,7 @@
           <p:cNvPr id="2" name="s9-eyebrow">
             <a:extLst xmlns:a="http://schemas.openxmlformats.org/drawingml/2006/main">
               <a:ext uri="{FF2B5EF4-FFF2-40B4-BE49-F238E27FC236}">
-                <a16:creationId xmlns:a16="http://schemas.microsoft.com/office/drawing/2014/main" id="{45EC5818-FABB-456C-8E47-2F5855F6B64D}"/>
+                <a16:creationId xmlns:a16="http://schemas.microsoft.com/office/drawing/2014/main" id="{75A886DF-2AC6-4563-9CF7-D7857B5D5E86}"/>
               </a:ext>
             </a:extLst>
           </p:cNvPr>
@@ -11589,7 +11589,7 @@
           <p:cNvPr id="3" name="s9-title">
             <a:extLst xmlns:a="http://schemas.openxmlformats.org/drawingml/2006/main">
               <a:ext uri="{FF2B5EF4-FFF2-40B4-BE49-F238E27FC236}">
-                <a16:creationId xmlns:a16="http://schemas.microsoft.com/office/drawing/2014/main" id="{2BE0ACAB-9462-4C96-AE1E-7EB2E3142697}"/>
+                <a16:creationId xmlns:a16="http://schemas.microsoft.com/office/drawing/2014/main" id="{1441D758-DDFF-4D79-9DAA-BD3D5E96509D}"/>
               </a:ext>
             </a:extLst>
           </p:cNvPr>
@@ -11647,7 +11647,7 @@
           <p:cNvPr id="4" name="s9-footer">
             <a:extLst xmlns:a="http://schemas.openxmlformats.org/drawingml/2006/main">
               <a:ext uri="{FF2B5EF4-FFF2-40B4-BE49-F238E27FC236}">
-                <a16:creationId xmlns:a16="http://schemas.microsoft.com/office/drawing/2014/main" id="{0017E5FC-A0C0-47BC-BEA8-0C36F30DF644}"/>
+                <a16:creationId xmlns:a16="http://schemas.microsoft.com/office/drawing/2014/main" id="{00225490-9EC0-4AD6-ADF7-12D086CEC889}"/>
               </a:ext>
             </a:extLst>
           </p:cNvPr>
@@ -11678,7 +11678,7 @@
           <p:cNvPr id="5" name="s9-identity">
             <a:extLst xmlns:a="http://schemas.openxmlformats.org/drawingml/2006/main">
               <a:ext uri="{FF2B5EF4-FFF2-40B4-BE49-F238E27FC236}">
-                <a16:creationId xmlns:a16="http://schemas.microsoft.com/office/drawing/2014/main" id="{7A6249E0-A822-4FBC-AD68-9483EB7DC641}"/>
+                <a16:creationId xmlns:a16="http://schemas.microsoft.com/office/drawing/2014/main" id="{77C8888F-7AE7-4137-84C5-C12A5B5AAEB7}"/>
               </a:ext>
             </a:extLst>
           </p:cNvPr>
@@ -11736,7 +11736,7 @@
           <p:cNvPr id="6" name="core-no-0">
             <a:extLst xmlns:a="http://schemas.openxmlformats.org/drawingml/2006/main">
               <a:ext uri="{FF2B5EF4-FFF2-40B4-BE49-F238E27FC236}">
-                <a16:creationId xmlns:a16="http://schemas.microsoft.com/office/drawing/2014/main" id="{11895416-6B94-4C1D-8F4D-82853F794D6C}"/>
+                <a16:creationId xmlns:a16="http://schemas.microsoft.com/office/drawing/2014/main" id="{824C31EE-E0DF-4529-98A3-83047F09BFD3}"/>
               </a:ext>
             </a:extLst>
           </p:cNvPr>
@@ -11768,7 +11768,7 @@
             <a:pPr algn="l">
               <a:defRPr sz="2250" b="1">
                 <a:solidFill>
-                  <a:srgbClr val="D6A33A"/>
+                  <a:srgbClr val="8A5A00"/>
                 </a:solidFill>
                 <a:latin typeface="PingFang SC"/>
                 <a:ea typeface="PingFang SC"/>
@@ -11778,7 +11778,7 @@
             <a:r>
               <a:rPr sz="2250" b="1">
                 <a:solidFill>
-                  <a:srgbClr val="D6A33A"/>
+                  <a:srgbClr val="8A5A00"/>
                 </a:solidFill>
                 <a:latin typeface="PingFang SC"/>
                 <a:ea typeface="PingFang SC"/>
@@ -11794,7 +11794,7 @@
           <p:cNvPr id="7" name="core-label-0">
             <a:extLst xmlns:a="http://schemas.openxmlformats.org/drawingml/2006/main">
               <a:ext uri="{FF2B5EF4-FFF2-40B4-BE49-F238E27FC236}">
-                <a16:creationId xmlns:a16="http://schemas.microsoft.com/office/drawing/2014/main" id="{765C77C5-252D-46E4-B9A0-0FDDCD72A036}"/>
+                <a16:creationId xmlns:a16="http://schemas.microsoft.com/office/drawing/2014/main" id="{72F9549B-F884-40C0-8F57-A5AEC1BB4E5B}"/>
               </a:ext>
             </a:extLst>
           </p:cNvPr>
@@ -11852,7 +11852,7 @@
           <p:cNvPr id="8" name="core-body-0">
             <a:extLst xmlns:a="http://schemas.openxmlformats.org/drawingml/2006/main">
               <a:ext uri="{FF2B5EF4-FFF2-40B4-BE49-F238E27FC236}">
-                <a16:creationId xmlns:a16="http://schemas.microsoft.com/office/drawing/2014/main" id="{8B5DC136-75F7-480C-ABDE-A223691B8EBF}"/>
+                <a16:creationId xmlns:a16="http://schemas.microsoft.com/office/drawing/2014/main" id="{69D5C747-AA94-48E1-9814-44C04273A29A}"/>
               </a:ext>
             </a:extLst>
           </p:cNvPr>
@@ -11876,7 +11876,7 @@
           </a:solidFill>
           <a:ln xmlns:a="http://schemas.openxmlformats.org/drawingml/2006/main" w="19050">
             <a:solidFill>
-              <a:srgbClr val="D6A33A"/>
+              <a:srgbClr val="8A5A00"/>
             </a:solidFill>
             <a:prstDash val="solid"/>
           </a:ln>
@@ -11906,7 +11906,7 @@
                 <a:ea typeface="PingFang SC"/>
                 <a:cs typeface="PingFang SC"/>
               </a:rPr>
-              <a:t>图像一次性输入就好，语言、语音、时序数据却有前后依赖。 循环神经网络 （RNN）为此在网络里加了一条"记忆"通路：每读一个词，把当前输入和上一步的隐状态一起加工，隐状态就像一路携带的笔记…</a:t>
+              <a:t>图像一次性输入就好；语言、语音、时序数据却有前后依赖；循环神经网络 （RNN）为此在网络里加了一条"记忆"通路；每读一个词，把当前输入和上一步的隐状态一起加工；隐状态就像一路携带的笔记</a:t>
             </a:r>
           </a:p>
         </p:txBody>
@@ -11916,7 +11916,7 @@
           <p:cNvPr id="9" name="core-no-1">
             <a:extLst xmlns:a="http://schemas.openxmlformats.org/drawingml/2006/main">
               <a:ext uri="{FF2B5EF4-FFF2-40B4-BE49-F238E27FC236}">
-                <a16:creationId xmlns:a16="http://schemas.microsoft.com/office/drawing/2014/main" id="{B4C721B1-899A-4C84-8791-6E2C1C407E8A}"/>
+                <a16:creationId xmlns:a16="http://schemas.microsoft.com/office/drawing/2014/main" id="{501C5B65-EFBA-48AF-A7E6-A46BC5E7D3B4}"/>
               </a:ext>
             </a:extLst>
           </p:cNvPr>
@@ -11948,7 +11948,7 @@
             <a:pPr algn="l">
               <a:defRPr sz="2250" b="1">
                 <a:solidFill>
-                  <a:srgbClr val="D6A33A"/>
+                  <a:srgbClr val="8A5A00"/>
                 </a:solidFill>
                 <a:latin typeface="PingFang SC"/>
                 <a:ea typeface="PingFang SC"/>
@@ -11958,7 +11958,7 @@
             <a:r>
               <a:rPr sz="2250" b="1">
                 <a:solidFill>
-                  <a:srgbClr val="D6A33A"/>
+                  <a:srgbClr val="8A5A00"/>
                 </a:solidFill>
                 <a:latin typeface="PingFang SC"/>
                 <a:ea typeface="PingFang SC"/>
@@ -11974,7 +11974,7 @@
           <p:cNvPr id="10" name="core-body-1">
             <a:extLst xmlns:a="http://schemas.openxmlformats.org/drawingml/2006/main">
               <a:ext uri="{FF2B5EF4-FFF2-40B4-BE49-F238E27FC236}">
-                <a16:creationId xmlns:a16="http://schemas.microsoft.com/office/drawing/2014/main" id="{9DB45038-2897-47DA-BA36-A7A580DFF890}"/>
+                <a16:creationId xmlns:a16="http://schemas.microsoft.com/office/drawing/2014/main" id="{84D247A4-C12F-4FCD-9C02-309AC61696AA}"/>
               </a:ext>
             </a:extLst>
           </p:cNvPr>
@@ -12028,7 +12028,7 @@
                 <a:ea typeface="PingFang SC"/>
                 <a:cs typeface="PingFang SC"/>
               </a:rPr>
-              <a:t>序列一长，RNN 的梯度在层层回传中容易消失，早先的信息就被"忘掉"。 长短时记忆网络 （LSTM）用输入门、遗忘门、输出门管理一个内部记忆单元，学会该记什么、该忘什么，明显改善了长序列建模…</a:t>
+              <a:t>序列一长，RNN 的梯度在层层回传中容易消失；早先的信息就被"忘掉"；长短时记忆网络 （LSTM）用输入门、遗忘门、输出门管理一个内部记忆单元；学会该记什么、该忘什么；明显改善了长序列建模</a:t>
             </a:r>
           </a:p>
         </p:txBody>
@@ -12038,7 +12038,7 @@
           <p:cNvPr id="11" name="core-no-2">
             <a:extLst xmlns:a="http://schemas.openxmlformats.org/drawingml/2006/main">
               <a:ext uri="{FF2B5EF4-FFF2-40B4-BE49-F238E27FC236}">
-                <a16:creationId xmlns:a16="http://schemas.microsoft.com/office/drawing/2014/main" id="{D8E6957A-E580-40C5-93B2-2293A75F6447}"/>
+                <a16:creationId xmlns:a16="http://schemas.microsoft.com/office/drawing/2014/main" id="{E030EDDB-80EF-4B2D-B237-0FD5D819D7FC}"/>
               </a:ext>
             </a:extLst>
           </p:cNvPr>
@@ -12070,7 +12070,7 @@
             <a:pPr algn="l">
               <a:defRPr sz="2250" b="1">
                 <a:solidFill>
-                  <a:srgbClr val="D6A33A"/>
+                  <a:srgbClr val="8A5A00"/>
                 </a:solidFill>
                 <a:latin typeface="PingFang SC"/>
                 <a:ea typeface="PingFang SC"/>
@@ -12080,7 +12080,7 @@
             <a:r>
               <a:rPr sz="2250" b="1">
                 <a:solidFill>
-                  <a:srgbClr val="D6A33A"/>
+                  <a:srgbClr val="8A5A00"/>
                 </a:solidFill>
                 <a:latin typeface="PingFang SC"/>
                 <a:ea typeface="PingFang SC"/>
@@ -12096,7 +12096,7 @@
           <p:cNvPr id="12" name="core-body-2">
             <a:extLst xmlns:a="http://schemas.openxmlformats.org/drawingml/2006/main">
               <a:ext uri="{FF2B5EF4-FFF2-40B4-BE49-F238E27FC236}">
-                <a16:creationId xmlns:a16="http://schemas.microsoft.com/office/drawing/2014/main" id="{118ABFE2-AFE3-4150-8220-8BD936BD93A6}"/>
+                <a16:creationId xmlns:a16="http://schemas.microsoft.com/office/drawing/2014/main" id="{9C0A7D2F-071F-4D97-BAE4-000643EA39DD}"/>
               </a:ext>
             </a:extLst>
           </p:cNvPr>
@@ -12150,7 +12150,7 @@
                 <a:ea typeface="PingFang SC"/>
                 <a:cs typeface="PingFang SC"/>
               </a:rPr>
-              <a:t>前面讲的模型都在做判断， 深度生成学习 反过来让网络学会"创造"。 生成对抗网络 （GAN）的设计精彩之处在于左右互搏：生成器负责伪造数据，判别器负责鉴别真伪，两者在博弈中共同进步…</a:t>
+              <a:t>前面讲的模型都在做判断；深度生成学习 反过来让网络学会"创造"；生成对抗网络 （GAN）的设计精彩之处在于左右互搏；生成器负责伪造数据；判别器负责鉴别真伪；两者在博弈中共同进步</a:t>
             </a:r>
           </a:p>
         </p:txBody>
@@ -12160,7 +12160,7 @@
           <p:cNvPr id="13" name="s9-takeaway-rule">
             <a:extLst xmlns:a="http://schemas.openxmlformats.org/drawingml/2006/main">
               <a:ext uri="{FF2B5EF4-FFF2-40B4-BE49-F238E27FC236}">
-                <a16:creationId xmlns:a16="http://schemas.microsoft.com/office/drawing/2014/main" id="{16B87B1E-C7D9-4646-B7C6-0726D67ABB21}"/>
+                <a16:creationId xmlns:a16="http://schemas.microsoft.com/office/drawing/2014/main" id="{1239C7E9-1EF2-4984-8E7B-725262E1F6A1}"/>
               </a:ext>
             </a:extLst>
           </p:cNvPr>
@@ -12193,7 +12193,7 @@
           <p:cNvPr id="14" name="s9-takeaway">
             <a:extLst xmlns:a="http://schemas.openxmlformats.org/drawingml/2006/main">
               <a:ext uri="{FF2B5EF4-FFF2-40B4-BE49-F238E27FC236}">
-                <a16:creationId xmlns:a16="http://schemas.microsoft.com/office/drawing/2014/main" id="{090C6759-E132-41F2-8D70-1E4D0F48A940}"/>
+                <a16:creationId xmlns:a16="http://schemas.microsoft.com/office/drawing/2014/main" id="{ABF631BC-CDC1-414A-B99D-7BD04383C5E2}"/>
               </a:ext>
             </a:extLst>
           </p:cNvPr>
@@ -12249,7 +12249,7 @@
     </p:spTree>
     <p:extLst>
       <p:ext uri="{BB962C8B-B14F-4D97-AF65-F5344CB8AC3E}">
-        <p14:creationId xmlns:p14="http://schemas.microsoft.com/office/powerpoint/2010/main" val="87128251"/>
+        <p14:creationId xmlns:p14="http://schemas.microsoft.com/office/powerpoint/2010/main" val="1236692930"/>
       </p:ext>
     </p:extLst>
   </p:cSld>

--- a/docs/public/course-assets/course-pptx/ov-003.pptx
+++ b/docs/public/course-assets/course-pptx/ov-003.pptx
@@ -2,26 +2,26 @@
 <file path=ppt/presentation.xml><?xml version="1.0" encoding="utf-8"?>
 <p:presentation xmlns:p="http://schemas.openxmlformats.org/presentationml/2006/main">
   <p:sldMasterIdLst>
-    <p:sldMasterId xmlns:r="http://schemas.openxmlformats.org/officeDocument/2006/relationships" id="2147483648" r:id="R7ca35efcddb64ee1"/>
+    <p:sldMasterId xmlns:r="http://schemas.openxmlformats.org/officeDocument/2006/relationships" id="2147483648" r:id="Rcfc81b64b3d94269"/>
   </p:sldMasterIdLst>
   <p:notesMasterIdLst>
-    <p:notesMasterId xmlns:r="http://schemas.openxmlformats.org/officeDocument/2006/relationships" r:id="R0624a54418074c45"/>
+    <p:notesMasterId xmlns:r="http://schemas.openxmlformats.org/officeDocument/2006/relationships" r:id="R243c7bcd34464600"/>
   </p:notesMasterIdLst>
   <p:sldIdLst>
-    <p:sldId xmlns:r="http://schemas.openxmlformats.org/officeDocument/2006/relationships" id="256" r:id="Rad31b300cb654bd4"/>
-    <p:sldId xmlns:r="http://schemas.openxmlformats.org/officeDocument/2006/relationships" id="257" r:id="R782196030baa451e"/>
-    <p:sldId xmlns:r="http://schemas.openxmlformats.org/officeDocument/2006/relationships" id="258" r:id="R571a517215734a99"/>
-    <p:sldId xmlns:r="http://schemas.openxmlformats.org/officeDocument/2006/relationships" id="259" r:id="R690efdf495ed4be8"/>
-    <p:sldId xmlns:r="http://schemas.openxmlformats.org/officeDocument/2006/relationships" id="260" r:id="Rf5052ead54eb4100"/>
-    <p:sldId xmlns:r="http://schemas.openxmlformats.org/officeDocument/2006/relationships" id="261" r:id="R3fec75785f0745bb"/>
-    <p:sldId xmlns:r="http://schemas.openxmlformats.org/officeDocument/2006/relationships" id="262" r:id="Rf5eb693a795b4674"/>
-    <p:sldId xmlns:r="http://schemas.openxmlformats.org/officeDocument/2006/relationships" id="263" r:id="R715ea7f2f6d64fcb"/>
-    <p:sldId xmlns:r="http://schemas.openxmlformats.org/officeDocument/2006/relationships" id="264" r:id="R7badad541b63423d"/>
-    <p:sldId xmlns:r="http://schemas.openxmlformats.org/officeDocument/2006/relationships" id="265" r:id="R3dbdf08154b84a88"/>
-    <p:sldId xmlns:r="http://schemas.openxmlformats.org/officeDocument/2006/relationships" id="266" r:id="R0dfc587114994f96"/>
-    <p:sldId xmlns:r="http://schemas.openxmlformats.org/officeDocument/2006/relationships" id="267" r:id="R8735ac366bb24801"/>
-    <p:sldId xmlns:r="http://schemas.openxmlformats.org/officeDocument/2006/relationships" id="268" r:id="Raf72093498de44ca"/>
-    <p:sldId xmlns:r="http://schemas.openxmlformats.org/officeDocument/2006/relationships" id="269" r:id="R89f783522ebb4c54"/>
+    <p:sldId xmlns:r="http://schemas.openxmlformats.org/officeDocument/2006/relationships" id="256" r:id="R2de4c3288cdc475a"/>
+    <p:sldId xmlns:r="http://schemas.openxmlformats.org/officeDocument/2006/relationships" id="257" r:id="R03bffb98d6474492"/>
+    <p:sldId xmlns:r="http://schemas.openxmlformats.org/officeDocument/2006/relationships" id="258" r:id="Ra33b43021a264b6c"/>
+    <p:sldId xmlns:r="http://schemas.openxmlformats.org/officeDocument/2006/relationships" id="259" r:id="Rbaa4c7d6ff2548d1"/>
+    <p:sldId xmlns:r="http://schemas.openxmlformats.org/officeDocument/2006/relationships" id="260" r:id="R8c8ac955781a4e54"/>
+    <p:sldId xmlns:r="http://schemas.openxmlformats.org/officeDocument/2006/relationships" id="261" r:id="Ra8f2aaa8701c4ce0"/>
+    <p:sldId xmlns:r="http://schemas.openxmlformats.org/officeDocument/2006/relationships" id="262" r:id="R6474d10e72a148de"/>
+    <p:sldId xmlns:r="http://schemas.openxmlformats.org/officeDocument/2006/relationships" id="263" r:id="R19cc6c16804d4bf3"/>
+    <p:sldId xmlns:r="http://schemas.openxmlformats.org/officeDocument/2006/relationships" id="264" r:id="R6731e2afca7249a9"/>
+    <p:sldId xmlns:r="http://schemas.openxmlformats.org/officeDocument/2006/relationships" id="265" r:id="Rac2ec3fb6b4a4e26"/>
+    <p:sldId xmlns:r="http://schemas.openxmlformats.org/officeDocument/2006/relationships" id="266" r:id="R003932c8c9054bbc"/>
+    <p:sldId xmlns:r="http://schemas.openxmlformats.org/officeDocument/2006/relationships" id="267" r:id="R6adbc125ae0445d2"/>
+    <p:sldId xmlns:r="http://schemas.openxmlformats.org/officeDocument/2006/relationships" id="268" r:id="Rb2502055c4c74259"/>
+    <p:sldId xmlns:r="http://schemas.openxmlformats.org/officeDocument/2006/relationships" id="269" r:id="R95e47547a8ba477b"/>
   </p:sldIdLst>
   <p:sldSz cx="12192000" cy="6858000"/>
   <p:notesSz cx="6858000" cy="9144000"/>
@@ -1472,7 +1472,7 @@
   </p:cSld>
   <p:clrMap bg1="lt1" tx1="dk1" bg2="lt2" tx2="dk2" accent1="accent1" accent2="accent2" accent3="accent3" accent4="accent4" accent5="accent5" accent6="accent6" hlink="hlink" folHlink="folHlink"/>
   <p:sldLayoutIdLst>
-    <p:sldLayoutId xmlns:r="http://schemas.openxmlformats.org/officeDocument/2006/relationships" id="2147483649" r:id="R2291aef8f85e4ae0"/>
+    <p:sldLayoutId xmlns:r="http://schemas.openxmlformats.org/officeDocument/2006/relationships" id="2147483649" r:id="R010abd6b59334073"/>
   </p:sldLayoutIdLst>
   <p:txStyles>
     <p:titleStyle>
@@ -2023,7 +2023,7 @@
           <p:cNvPr id="1" name="cover-rule">
             <a:extLst xmlns:a="http://schemas.openxmlformats.org/drawingml/2006/main">
               <a:ext uri="{FF2B5EF4-FFF2-40B4-BE49-F238E27FC236}">
-                <a16:creationId xmlns:a16="http://schemas.microsoft.com/office/drawing/2014/main" id="{13833AD7-E226-4158-AEAF-F6F4474F2356}"/>
+                <a16:creationId xmlns:a16="http://schemas.microsoft.com/office/drawing/2014/main" id="{B4F22531-762C-446C-A11A-E2D407ADECFB}"/>
               </a:ext>
             </a:extLst>
           </p:cNvPr>
@@ -2056,7 +2056,7 @@
           <p:cNvPr id="2" name="cover-ring-1">
             <a:extLst xmlns:a="http://schemas.openxmlformats.org/drawingml/2006/main">
               <a:ext uri="{FF2B5EF4-FFF2-40B4-BE49-F238E27FC236}">
-                <a16:creationId xmlns:a16="http://schemas.microsoft.com/office/drawing/2014/main" id="{C6716A55-50D5-4234-B5AA-9274D39CFB34}"/>
+                <a16:creationId xmlns:a16="http://schemas.microsoft.com/office/drawing/2014/main" id="{2DFC64F7-F0C8-4DC4-877D-3D499974F0E5}"/>
               </a:ext>
             </a:extLst>
           </p:cNvPr>
@@ -2087,7 +2087,7 @@
           <p:cNvPr id="3" name="cover-ring-2">
             <a:extLst xmlns:a="http://schemas.openxmlformats.org/drawingml/2006/main">
               <a:ext uri="{FF2B5EF4-FFF2-40B4-BE49-F238E27FC236}">
-                <a16:creationId xmlns:a16="http://schemas.microsoft.com/office/drawing/2014/main" id="{8AC8F716-4A80-4974-88B6-2C706C6F94F6}"/>
+                <a16:creationId xmlns:a16="http://schemas.microsoft.com/office/drawing/2014/main" id="{1BB67CFF-3CE4-4EA2-ABB7-CE8F7ADCC5DA}"/>
               </a:ext>
             </a:extLst>
           </p:cNvPr>
@@ -2118,7 +2118,7 @@
           <p:cNvPr id="4" name="cover-core">
             <a:extLst xmlns:a="http://schemas.openxmlformats.org/drawingml/2006/main">
               <a:ext uri="{FF2B5EF4-FFF2-40B4-BE49-F238E27FC236}">
-                <a16:creationId xmlns:a16="http://schemas.microsoft.com/office/drawing/2014/main" id="{E735F7BA-D034-431C-A559-8B2113B8224C}"/>
+                <a16:creationId xmlns:a16="http://schemas.microsoft.com/office/drawing/2014/main" id="{4CCDD449-3DFA-4592-BCD0-C55F7A6CCBD1}"/>
               </a:ext>
             </a:extLst>
           </p:cNvPr>
@@ -2151,7 +2151,7 @@
           <p:cNvPr id="5" name="cover-line-1">
             <a:extLst xmlns:a="http://schemas.openxmlformats.org/drawingml/2006/main">
               <a:ext uri="{FF2B5EF4-FFF2-40B4-BE49-F238E27FC236}">
-                <a16:creationId xmlns:a16="http://schemas.microsoft.com/office/drawing/2014/main" id="{5A2F03F1-55C3-48B7-A7DA-A0A798C23B0E}"/>
+                <a16:creationId xmlns:a16="http://schemas.microsoft.com/office/drawing/2014/main" id="{DDA6E7D9-5771-457E-AB4D-9E5C6ED0E794}"/>
               </a:ext>
             </a:extLst>
           </p:cNvPr>
@@ -2182,7 +2182,7 @@
           <p:cNvPr id="6" name="cover-line-2">
             <a:extLst xmlns:a="http://schemas.openxmlformats.org/drawingml/2006/main">
               <a:ext uri="{FF2B5EF4-FFF2-40B4-BE49-F238E27FC236}">
-                <a16:creationId xmlns:a16="http://schemas.microsoft.com/office/drawing/2014/main" id="{356C7C69-C946-4F0E-81BB-67B3FFB8E893}"/>
+                <a16:creationId xmlns:a16="http://schemas.microsoft.com/office/drawing/2014/main" id="{0B081CBB-843A-4B79-8A7A-B95839F856B8}"/>
               </a:ext>
             </a:extLst>
           </p:cNvPr>
@@ -2213,7 +2213,7 @@
           <p:cNvPr id="7" name="cover-eyebrow">
             <a:extLst xmlns:a="http://schemas.openxmlformats.org/drawingml/2006/main">
               <a:ext uri="{FF2B5EF4-FFF2-40B4-BE49-F238E27FC236}">
-                <a16:creationId xmlns:a16="http://schemas.microsoft.com/office/drawing/2014/main" id="{6219719C-C608-4997-AA74-F1C1EE79A8C7}"/>
+                <a16:creationId xmlns:a16="http://schemas.microsoft.com/office/drawing/2014/main" id="{11C35DFD-159F-4EB1-83CB-06A9C0CF2EA0}"/>
               </a:ext>
             </a:extLst>
           </p:cNvPr>
@@ -2271,7 +2271,7 @@
           <p:cNvPr id="8" name="cover-title">
             <a:extLst xmlns:a="http://schemas.openxmlformats.org/drawingml/2006/main">
               <a:ext uri="{FF2B5EF4-FFF2-40B4-BE49-F238E27FC236}">
-                <a16:creationId xmlns:a16="http://schemas.microsoft.com/office/drawing/2014/main" id="{63FA1AA8-D58D-4C06-8588-8E261331CB1D}"/>
+                <a16:creationId xmlns:a16="http://schemas.microsoft.com/office/drawing/2014/main" id="{488DA9D3-BAF6-433A-8776-92A1D967B3E0}"/>
               </a:ext>
             </a:extLst>
           </p:cNvPr>
@@ -2329,7 +2329,7 @@
           <p:cNvPr id="9" name="cover-subtitle">
             <a:extLst xmlns:a="http://schemas.openxmlformats.org/drawingml/2006/main">
               <a:ext uri="{FF2B5EF4-FFF2-40B4-BE49-F238E27FC236}">
-                <a16:creationId xmlns:a16="http://schemas.microsoft.com/office/drawing/2014/main" id="{3AF767F3-8F22-4ED8-9CDC-F7F03034A7D1}"/>
+                <a16:creationId xmlns:a16="http://schemas.microsoft.com/office/drawing/2014/main" id="{48CC459B-9562-41C2-B0D4-AD295758689E}"/>
               </a:ext>
             </a:extLst>
           </p:cNvPr>
@@ -2391,7 +2391,7 @@
           <p:cNvPr id="10" name="cover-lead">
             <a:extLst xmlns:a="http://schemas.openxmlformats.org/drawingml/2006/main">
               <a:ext uri="{FF2B5EF4-FFF2-40B4-BE49-F238E27FC236}">
-                <a16:creationId xmlns:a16="http://schemas.microsoft.com/office/drawing/2014/main" id="{08222B5F-9E96-4927-86D6-6856BE875507}"/>
+                <a16:creationId xmlns:a16="http://schemas.microsoft.com/office/drawing/2014/main" id="{F43FD5E4-4696-41E2-8142-5AF973E4B750}"/>
               </a:ext>
             </a:extLst>
           </p:cNvPr>
@@ -2449,7 +2449,7 @@
           <p:cNvPr id="11" name="cover-course">
             <a:extLst xmlns:a="http://schemas.openxmlformats.org/drawingml/2006/main">
               <a:ext uri="{FF2B5EF4-FFF2-40B4-BE49-F238E27FC236}">
-                <a16:creationId xmlns:a16="http://schemas.microsoft.com/office/drawing/2014/main" id="{4BB26E3C-8CD2-4E3D-AE30-BEE26B6FB615}"/>
+                <a16:creationId xmlns:a16="http://schemas.microsoft.com/office/drawing/2014/main" id="{53E51C52-E215-4726-957C-F68E657F30F0}"/>
               </a:ext>
             </a:extLst>
           </p:cNvPr>
@@ -2507,7 +2507,7 @@
           <p:cNvPr id="12" name="cover-id">
             <a:extLst xmlns:a="http://schemas.openxmlformats.org/drawingml/2006/main">
               <a:ext uri="{FF2B5EF4-FFF2-40B4-BE49-F238E27FC236}">
-                <a16:creationId xmlns:a16="http://schemas.microsoft.com/office/drawing/2014/main" id="{EB0C23D0-9058-4047-A3FA-9B079A5B4A4C}"/>
+                <a16:creationId xmlns:a16="http://schemas.microsoft.com/office/drawing/2014/main" id="{23F179B5-442A-47CC-B0C5-33655B4277EE}"/>
               </a:ext>
             </a:extLst>
           </p:cNvPr>
@@ -2563,7 +2563,7 @@
     </p:spTree>
     <p:extLst>
       <p:ext uri="{BB962C8B-B14F-4D97-AF65-F5344CB8AC3E}">
-        <p14:creationId xmlns:p14="http://schemas.microsoft.com/office/powerpoint/2010/main" val="129982315"/>
+        <p14:creationId xmlns:p14="http://schemas.microsoft.com/office/powerpoint/2010/main" val="962215493"/>
       </p:ext>
     </p:extLst>
   </p:cSld>
@@ -2594,7 +2594,7 @@
           <p:cNvPr id="1" name="s10-rule">
             <a:extLst xmlns:a="http://schemas.openxmlformats.org/drawingml/2006/main">
               <a:ext uri="{FF2B5EF4-FFF2-40B4-BE49-F238E27FC236}">
-                <a16:creationId xmlns:a16="http://schemas.microsoft.com/office/drawing/2014/main" id="{66731149-D2F9-4A7C-B316-B81D43D94EED}"/>
+                <a16:creationId xmlns:a16="http://schemas.microsoft.com/office/drawing/2014/main" id="{B4F92569-0DD1-46A5-97EA-D5EE89B24999}"/>
               </a:ext>
             </a:extLst>
           </p:cNvPr>
@@ -2627,7 +2627,7 @@
           <p:cNvPr id="2" name="s10-eyebrow">
             <a:extLst xmlns:a="http://schemas.openxmlformats.org/drawingml/2006/main">
               <a:ext uri="{FF2B5EF4-FFF2-40B4-BE49-F238E27FC236}">
-                <a16:creationId xmlns:a16="http://schemas.microsoft.com/office/drawing/2014/main" id="{A6383310-E14C-4954-874C-5BBD912FBD17}"/>
+                <a16:creationId xmlns:a16="http://schemas.microsoft.com/office/drawing/2014/main" id="{F3FB1343-2E5B-4D81-90D7-A9DD0827A2A8}"/>
               </a:ext>
             </a:extLst>
           </p:cNvPr>
@@ -2685,7 +2685,7 @@
           <p:cNvPr id="3" name="s10-title">
             <a:extLst xmlns:a="http://schemas.openxmlformats.org/drawingml/2006/main">
               <a:ext uri="{FF2B5EF4-FFF2-40B4-BE49-F238E27FC236}">
-                <a16:creationId xmlns:a16="http://schemas.microsoft.com/office/drawing/2014/main" id="{D9BF1102-2309-4D11-8CCC-8FF7A265CC6C}"/>
+                <a16:creationId xmlns:a16="http://schemas.microsoft.com/office/drawing/2014/main" id="{C5C18806-6A48-4237-B064-0FC6B98C61D5}"/>
               </a:ext>
             </a:extLst>
           </p:cNvPr>
@@ -2743,7 +2743,7 @@
           <p:cNvPr id="4" name="s10-footer">
             <a:extLst xmlns:a="http://schemas.openxmlformats.org/drawingml/2006/main">
               <a:ext uri="{FF2B5EF4-FFF2-40B4-BE49-F238E27FC236}">
-                <a16:creationId xmlns:a16="http://schemas.microsoft.com/office/drawing/2014/main" id="{709A5B9A-7999-4F51-BDB0-76A4F936C7D0}"/>
+                <a16:creationId xmlns:a16="http://schemas.microsoft.com/office/drawing/2014/main" id="{6F1CAFA0-E004-4C03-9382-5C5024175414}"/>
               </a:ext>
             </a:extLst>
           </p:cNvPr>
@@ -2774,7 +2774,7 @@
           <p:cNvPr id="5" name="s10-identity">
             <a:extLst xmlns:a="http://schemas.openxmlformats.org/drawingml/2006/main">
               <a:ext uri="{FF2B5EF4-FFF2-40B4-BE49-F238E27FC236}">
-                <a16:creationId xmlns:a16="http://schemas.microsoft.com/office/drawing/2014/main" id="{94ED7DC0-D3B9-49B7-B5C2-E4A18F55E847}"/>
+                <a16:creationId xmlns:a16="http://schemas.microsoft.com/office/drawing/2014/main" id="{12FF27B3-38F2-4718-AD16-46852D48A785}"/>
               </a:ext>
             </a:extLst>
           </p:cNvPr>
@@ -2832,7 +2832,7 @@
           <p:cNvPr id="6" name="case-label-0">
             <a:extLst xmlns:a="http://schemas.openxmlformats.org/drawingml/2006/main">
               <a:ext uri="{FF2B5EF4-FFF2-40B4-BE49-F238E27FC236}">
-                <a16:creationId xmlns:a16="http://schemas.microsoft.com/office/drawing/2014/main" id="{A045E74E-B2C5-42A2-B0F7-EAB4376E652F}"/>
+                <a16:creationId xmlns:a16="http://schemas.microsoft.com/office/drawing/2014/main" id="{E80E319A-67BB-4707-9BF5-6992CBF08328}"/>
               </a:ext>
             </a:extLst>
           </p:cNvPr>
@@ -2890,7 +2890,7 @@
           <p:cNvPr id="7" name="case-0-row-0">
             <a:extLst xmlns:a="http://schemas.openxmlformats.org/drawingml/2006/main">
               <a:ext uri="{FF2B5EF4-FFF2-40B4-BE49-F238E27FC236}">
-                <a16:creationId xmlns:a16="http://schemas.microsoft.com/office/drawing/2014/main" id="{378828D1-1560-44C1-8E4B-AB4283601BCB}"/>
+                <a16:creationId xmlns:a16="http://schemas.microsoft.com/office/drawing/2014/main" id="{2660EF1B-4360-493D-AD3C-607CD526B43F}"/>
               </a:ext>
             </a:extLst>
           </p:cNvPr>
@@ -2977,7 +2977,7 @@
           <p:cNvPr id="8" name="case-0-row-1">
             <a:extLst xmlns:a="http://schemas.openxmlformats.org/drawingml/2006/main">
               <a:ext uri="{FF2B5EF4-FFF2-40B4-BE49-F238E27FC236}">
-                <a16:creationId xmlns:a16="http://schemas.microsoft.com/office/drawing/2014/main" id="{A674FBEE-3F30-4C54-9A44-553126CD0D82}"/>
+                <a16:creationId xmlns:a16="http://schemas.microsoft.com/office/drawing/2014/main" id="{1754F617-BF62-4E2A-95EA-113C763FCE94}"/>
               </a:ext>
             </a:extLst>
           </p:cNvPr>
@@ -3064,7 +3064,7 @@
           <p:cNvPr id="9" name="case-0-row-2">
             <a:extLst xmlns:a="http://schemas.openxmlformats.org/drawingml/2006/main">
               <a:ext uri="{FF2B5EF4-FFF2-40B4-BE49-F238E27FC236}">
-                <a16:creationId xmlns:a16="http://schemas.microsoft.com/office/drawing/2014/main" id="{86088E53-204E-4ECB-BEB6-16C78D0DF713}"/>
+                <a16:creationId xmlns:a16="http://schemas.microsoft.com/office/drawing/2014/main" id="{320D3BB9-DD8E-42AF-A86A-6EE48FF3E305}"/>
               </a:ext>
             </a:extLst>
           </p:cNvPr>
@@ -3151,7 +3151,7 @@
           <p:cNvPr id="10" name="case-label-1">
             <a:extLst xmlns:a="http://schemas.openxmlformats.org/drawingml/2006/main">
               <a:ext uri="{FF2B5EF4-FFF2-40B4-BE49-F238E27FC236}">
-                <a16:creationId xmlns:a16="http://schemas.microsoft.com/office/drawing/2014/main" id="{A93FBEAD-81FB-4DE0-A840-E7813A7B6D70}"/>
+                <a16:creationId xmlns:a16="http://schemas.microsoft.com/office/drawing/2014/main" id="{6E21ABC9-242F-4B47-AF86-C1E2356CD2B8}"/>
               </a:ext>
             </a:extLst>
           </p:cNvPr>
@@ -3209,7 +3209,7 @@
           <p:cNvPr id="11" name="case-1-row-0">
             <a:extLst xmlns:a="http://schemas.openxmlformats.org/drawingml/2006/main">
               <a:ext uri="{FF2B5EF4-FFF2-40B4-BE49-F238E27FC236}">
-                <a16:creationId xmlns:a16="http://schemas.microsoft.com/office/drawing/2014/main" id="{F41E2DBE-61CF-4DB8-897C-773FA2BB4EC3}"/>
+                <a16:creationId xmlns:a16="http://schemas.microsoft.com/office/drawing/2014/main" id="{6A05DB9E-D8F4-47E3-9CD3-91002EE45023}"/>
               </a:ext>
             </a:extLst>
           </p:cNvPr>
@@ -3296,7 +3296,7 @@
           <p:cNvPr id="12" name="case-1-row-1">
             <a:extLst xmlns:a="http://schemas.openxmlformats.org/drawingml/2006/main">
               <a:ext uri="{FF2B5EF4-FFF2-40B4-BE49-F238E27FC236}">
-                <a16:creationId xmlns:a16="http://schemas.microsoft.com/office/drawing/2014/main" id="{1F24C317-7DF1-4C2E-A77B-B51F8A5B852D}"/>
+                <a16:creationId xmlns:a16="http://schemas.microsoft.com/office/drawing/2014/main" id="{AB4C672F-8E69-4405-B81E-B28418A8FBF5}"/>
               </a:ext>
             </a:extLst>
           </p:cNvPr>
@@ -3383,7 +3383,7 @@
           <p:cNvPr id="13" name="case-1-row-2">
             <a:extLst xmlns:a="http://schemas.openxmlformats.org/drawingml/2006/main">
               <a:ext uri="{FF2B5EF4-FFF2-40B4-BE49-F238E27FC236}">
-                <a16:creationId xmlns:a16="http://schemas.microsoft.com/office/drawing/2014/main" id="{95B9BE56-5234-4DEE-BF6E-EE301624301F}"/>
+                <a16:creationId xmlns:a16="http://schemas.microsoft.com/office/drawing/2014/main" id="{DC2B74F4-D608-4830-B657-51FC1F804B4B}"/>
               </a:ext>
             </a:extLst>
           </p:cNvPr>
@@ -3470,7 +3470,7 @@
           <p:cNvPr id="14" name="s10-takeaway-rule">
             <a:extLst xmlns:a="http://schemas.openxmlformats.org/drawingml/2006/main">
               <a:ext uri="{FF2B5EF4-FFF2-40B4-BE49-F238E27FC236}">
-                <a16:creationId xmlns:a16="http://schemas.microsoft.com/office/drawing/2014/main" id="{791DE177-DC11-4911-8582-C65032E1D8AD}"/>
+                <a16:creationId xmlns:a16="http://schemas.microsoft.com/office/drawing/2014/main" id="{A5983DAF-8EFF-4F14-A69A-19F53B666F1A}"/>
               </a:ext>
             </a:extLst>
           </p:cNvPr>
@@ -3503,7 +3503,7 @@
           <p:cNvPr id="15" name="s10-takeaway">
             <a:extLst xmlns:a="http://schemas.openxmlformats.org/drawingml/2006/main">
               <a:ext uri="{FF2B5EF4-FFF2-40B4-BE49-F238E27FC236}">
-                <a16:creationId xmlns:a16="http://schemas.microsoft.com/office/drawing/2014/main" id="{7ED04938-6822-4FDC-BC4F-AF6BECCD8C47}"/>
+                <a16:creationId xmlns:a16="http://schemas.microsoft.com/office/drawing/2014/main" id="{7966DE75-591C-43F8-A7BA-11180E776304}"/>
               </a:ext>
             </a:extLst>
           </p:cNvPr>
@@ -3559,7 +3559,7 @@
     </p:spTree>
     <p:extLst>
       <p:ext uri="{BB962C8B-B14F-4D97-AF65-F5344CB8AC3E}">
-        <p14:creationId xmlns:p14="http://schemas.microsoft.com/office/powerpoint/2010/main" val="222683805"/>
+        <p14:creationId xmlns:p14="http://schemas.microsoft.com/office/powerpoint/2010/main" val="1538973472"/>
       </p:ext>
     </p:extLst>
   </p:cSld>
@@ -3590,7 +3590,7 @@
           <p:cNvPr id="1" name="s11-rule">
             <a:extLst xmlns:a="http://schemas.openxmlformats.org/drawingml/2006/main">
               <a:ext uri="{FF2B5EF4-FFF2-40B4-BE49-F238E27FC236}">
-                <a16:creationId xmlns:a16="http://schemas.microsoft.com/office/drawing/2014/main" id="{4A209369-0659-4781-BE31-097E3CAA433C}"/>
+                <a16:creationId xmlns:a16="http://schemas.microsoft.com/office/drawing/2014/main" id="{24BDFF7E-B1FA-4D8D-BFB6-C00AEA90B22B}"/>
               </a:ext>
             </a:extLst>
           </p:cNvPr>
@@ -3623,7 +3623,7 @@
           <p:cNvPr id="2" name="s11-eyebrow">
             <a:extLst xmlns:a="http://schemas.openxmlformats.org/drawingml/2006/main">
               <a:ext uri="{FF2B5EF4-FFF2-40B4-BE49-F238E27FC236}">
-                <a16:creationId xmlns:a16="http://schemas.microsoft.com/office/drawing/2014/main" id="{162F3B8B-043E-4937-B87B-05C3ED1A0D26}"/>
+                <a16:creationId xmlns:a16="http://schemas.microsoft.com/office/drawing/2014/main" id="{43355243-E7BF-45B8-B621-7377E926C706}"/>
               </a:ext>
             </a:extLst>
           </p:cNvPr>
@@ -3681,7 +3681,7 @@
           <p:cNvPr id="3" name="s11-title">
             <a:extLst xmlns:a="http://schemas.openxmlformats.org/drawingml/2006/main">
               <a:ext uri="{FF2B5EF4-FFF2-40B4-BE49-F238E27FC236}">
-                <a16:creationId xmlns:a16="http://schemas.microsoft.com/office/drawing/2014/main" id="{F5275C2F-87DE-44EE-A68B-0B1B83BD5048}"/>
+                <a16:creationId xmlns:a16="http://schemas.microsoft.com/office/drawing/2014/main" id="{BF3B79AD-D1C9-44DA-B33C-DEE54B441A6A}"/>
               </a:ext>
             </a:extLst>
           </p:cNvPr>
@@ -3739,7 +3739,7 @@
           <p:cNvPr id="4" name="s11-footer">
             <a:extLst xmlns:a="http://schemas.openxmlformats.org/drawingml/2006/main">
               <a:ext uri="{FF2B5EF4-FFF2-40B4-BE49-F238E27FC236}">
-                <a16:creationId xmlns:a16="http://schemas.microsoft.com/office/drawing/2014/main" id="{3C0126CA-D9C8-4FED-843E-7E7B46E49126}"/>
+                <a16:creationId xmlns:a16="http://schemas.microsoft.com/office/drawing/2014/main" id="{38A0312E-6599-46EA-92BA-7FC02FE4DF9F}"/>
               </a:ext>
             </a:extLst>
           </p:cNvPr>
@@ -3770,7 +3770,7 @@
           <p:cNvPr id="5" name="s11-identity">
             <a:extLst xmlns:a="http://schemas.openxmlformats.org/drawingml/2006/main">
               <a:ext uri="{FF2B5EF4-FFF2-40B4-BE49-F238E27FC236}">
-                <a16:creationId xmlns:a16="http://schemas.microsoft.com/office/drawing/2014/main" id="{01773B70-FC00-4F6F-A517-F56E9630C83F}"/>
+                <a16:creationId xmlns:a16="http://schemas.microsoft.com/office/drawing/2014/main" id="{ADC839FB-61A3-4A28-A65E-A42F4BA9FDFF}"/>
               </a:ext>
             </a:extLst>
           </p:cNvPr>
@@ -3828,7 +3828,7 @@
           <p:cNvPr id="6" name="case-title">
             <a:extLst xmlns:a="http://schemas.openxmlformats.org/drawingml/2006/main">
               <a:ext uri="{FF2B5EF4-FFF2-40B4-BE49-F238E27FC236}">
-                <a16:creationId xmlns:a16="http://schemas.microsoft.com/office/drawing/2014/main" id="{F0959CC6-AD8E-424C-8F6A-1C464F87DE04}"/>
+                <a16:creationId xmlns:a16="http://schemas.microsoft.com/office/drawing/2014/main" id="{8B36C190-CB7E-476E-B791-6BE5878D64B2}"/>
               </a:ext>
             </a:extLst>
           </p:cNvPr>
@@ -3892,7 +3892,7 @@
           <p:cNvPr id="7" name="case-row-0">
             <a:extLst xmlns:a="http://schemas.openxmlformats.org/drawingml/2006/main">
               <a:ext uri="{FF2B5EF4-FFF2-40B4-BE49-F238E27FC236}">
-                <a16:creationId xmlns:a16="http://schemas.microsoft.com/office/drawing/2014/main" id="{823967E4-A67C-49EC-B520-AAFBA4F9EC31}"/>
+                <a16:creationId xmlns:a16="http://schemas.microsoft.com/office/drawing/2014/main" id="{770D619F-2FEC-4013-A7CE-BF52A9153EFF}"/>
               </a:ext>
             </a:extLst>
           </p:cNvPr>
@@ -3956,7 +3956,7 @@
           <p:cNvPr id="8" name="case-row-1">
             <a:extLst xmlns:a="http://schemas.openxmlformats.org/drawingml/2006/main">
               <a:ext uri="{FF2B5EF4-FFF2-40B4-BE49-F238E27FC236}">
-                <a16:creationId xmlns:a16="http://schemas.microsoft.com/office/drawing/2014/main" id="{10A3ADA6-957F-42E7-AA27-50C662060C7F}"/>
+                <a16:creationId xmlns:a16="http://schemas.microsoft.com/office/drawing/2014/main" id="{FC51AEF5-69A5-4EA5-89AF-7DD62640A849}"/>
               </a:ext>
             </a:extLst>
           </p:cNvPr>
@@ -4020,7 +4020,7 @@
           <p:cNvPr id="9" name="case-row-2">
             <a:extLst xmlns:a="http://schemas.openxmlformats.org/drawingml/2006/main">
               <a:ext uri="{FF2B5EF4-FFF2-40B4-BE49-F238E27FC236}">
-                <a16:creationId xmlns:a16="http://schemas.microsoft.com/office/drawing/2014/main" id="{3C9A07BB-A6EE-4B60-B7D2-C8D8B4967E88}"/>
+                <a16:creationId xmlns:a16="http://schemas.microsoft.com/office/drawing/2014/main" id="{1399A8AB-A7C6-415B-8B3C-FEF0E66C0DDE}"/>
               </a:ext>
             </a:extLst>
           </p:cNvPr>
@@ -4084,7 +4084,7 @@
           <p:cNvPr id="10" name="case-row-3">
             <a:extLst xmlns:a="http://schemas.openxmlformats.org/drawingml/2006/main">
               <a:ext uri="{FF2B5EF4-FFF2-40B4-BE49-F238E27FC236}">
-                <a16:creationId xmlns:a16="http://schemas.microsoft.com/office/drawing/2014/main" id="{68975DE1-7C6E-4298-B724-78114CF7CF19}"/>
+                <a16:creationId xmlns:a16="http://schemas.microsoft.com/office/drawing/2014/main" id="{F689AFD2-6715-414B-A4EC-EF0324199BED}"/>
               </a:ext>
             </a:extLst>
           </p:cNvPr>
@@ -4148,7 +4148,7 @@
           <p:cNvPr id="11" name="case-row-4">
             <a:extLst xmlns:a="http://schemas.openxmlformats.org/drawingml/2006/main">
               <a:ext uri="{FF2B5EF4-FFF2-40B4-BE49-F238E27FC236}">
-                <a16:creationId xmlns:a16="http://schemas.microsoft.com/office/drawing/2014/main" id="{F42EB87F-E131-41B7-B8A9-FAAB4B699CD7}"/>
+                <a16:creationId xmlns:a16="http://schemas.microsoft.com/office/drawing/2014/main" id="{EF9E16DB-3D18-4462-A4A9-B1682329FC21}"/>
               </a:ext>
             </a:extLst>
           </p:cNvPr>
@@ -4212,7 +4212,7 @@
           <p:cNvPr id="12" name="s11-takeaway-rule">
             <a:extLst xmlns:a="http://schemas.openxmlformats.org/drawingml/2006/main">
               <a:ext uri="{FF2B5EF4-FFF2-40B4-BE49-F238E27FC236}">
-                <a16:creationId xmlns:a16="http://schemas.microsoft.com/office/drawing/2014/main" id="{68690E42-CD1F-4BF7-B43D-0574917DA673}"/>
+                <a16:creationId xmlns:a16="http://schemas.microsoft.com/office/drawing/2014/main" id="{0611EA21-7B9B-43CC-B60C-E0D7908AD1EB}"/>
               </a:ext>
             </a:extLst>
           </p:cNvPr>
@@ -4245,7 +4245,7 @@
           <p:cNvPr id="13" name="s11-takeaway">
             <a:extLst xmlns:a="http://schemas.openxmlformats.org/drawingml/2006/main">
               <a:ext uri="{FF2B5EF4-FFF2-40B4-BE49-F238E27FC236}">
-                <a16:creationId xmlns:a16="http://schemas.microsoft.com/office/drawing/2014/main" id="{C470F0F3-AF97-41FD-9F39-B19516765C9C}"/>
+                <a16:creationId xmlns:a16="http://schemas.microsoft.com/office/drawing/2014/main" id="{5A9D6159-4C30-4B12-99A5-107BCB485171}"/>
               </a:ext>
             </a:extLst>
           </p:cNvPr>
@@ -4301,7 +4301,7 @@
     </p:spTree>
     <p:extLst>
       <p:ext uri="{BB962C8B-B14F-4D97-AF65-F5344CB8AC3E}">
-        <p14:creationId xmlns:p14="http://schemas.microsoft.com/office/powerpoint/2010/main" val="1029969899"/>
+        <p14:creationId xmlns:p14="http://schemas.microsoft.com/office/powerpoint/2010/main" val="203904793"/>
       </p:ext>
     </p:extLst>
   </p:cSld>
@@ -4332,7 +4332,7 @@
           <p:cNvPr id="1" name="s12-rule">
             <a:extLst xmlns:a="http://schemas.openxmlformats.org/drawingml/2006/main">
               <a:ext uri="{FF2B5EF4-FFF2-40B4-BE49-F238E27FC236}">
-                <a16:creationId xmlns:a16="http://schemas.microsoft.com/office/drawing/2014/main" id="{D145F63C-FC71-4331-B08E-69A1320CA8E5}"/>
+                <a16:creationId xmlns:a16="http://schemas.microsoft.com/office/drawing/2014/main" id="{5A9514D3-708B-48F4-9A88-EE8159008721}"/>
               </a:ext>
             </a:extLst>
           </p:cNvPr>
@@ -4365,7 +4365,7 @@
           <p:cNvPr id="2" name="s12-eyebrow">
             <a:extLst xmlns:a="http://schemas.openxmlformats.org/drawingml/2006/main">
               <a:ext uri="{FF2B5EF4-FFF2-40B4-BE49-F238E27FC236}">
-                <a16:creationId xmlns:a16="http://schemas.microsoft.com/office/drawing/2014/main" id="{E1555771-5741-4DAB-A5CF-BA77FE9A1A28}"/>
+                <a16:creationId xmlns:a16="http://schemas.microsoft.com/office/drawing/2014/main" id="{B3A57EC4-E553-4690-BB96-224A56B6DDD0}"/>
               </a:ext>
             </a:extLst>
           </p:cNvPr>
@@ -4423,7 +4423,7 @@
           <p:cNvPr id="3" name="s12-title">
             <a:extLst xmlns:a="http://schemas.openxmlformats.org/drawingml/2006/main">
               <a:ext uri="{FF2B5EF4-FFF2-40B4-BE49-F238E27FC236}">
-                <a16:creationId xmlns:a16="http://schemas.microsoft.com/office/drawing/2014/main" id="{148435BD-AB44-45D7-9426-6D13737A0405}"/>
+                <a16:creationId xmlns:a16="http://schemas.microsoft.com/office/drawing/2014/main" id="{C305BFDC-256E-437F-A291-BB5BFF240CD9}"/>
               </a:ext>
             </a:extLst>
           </p:cNvPr>
@@ -4481,7 +4481,7 @@
           <p:cNvPr id="4" name="s12-footer">
             <a:extLst xmlns:a="http://schemas.openxmlformats.org/drawingml/2006/main">
               <a:ext uri="{FF2B5EF4-FFF2-40B4-BE49-F238E27FC236}">
-                <a16:creationId xmlns:a16="http://schemas.microsoft.com/office/drawing/2014/main" id="{38695893-09E2-4CF6-A941-D5FF7F6428A5}"/>
+                <a16:creationId xmlns:a16="http://schemas.microsoft.com/office/drawing/2014/main" id="{D8DFD7A7-2EB9-4B2D-AF77-08B99E38F699}"/>
               </a:ext>
             </a:extLst>
           </p:cNvPr>
@@ -4512,7 +4512,7 @@
           <p:cNvPr id="5" name="s12-identity">
             <a:extLst xmlns:a="http://schemas.openxmlformats.org/drawingml/2006/main">
               <a:ext uri="{FF2B5EF4-FFF2-40B4-BE49-F238E27FC236}">
-                <a16:creationId xmlns:a16="http://schemas.microsoft.com/office/drawing/2014/main" id="{7F67BBDF-7666-4E95-AE70-5FA64D3B50C0}"/>
+                <a16:creationId xmlns:a16="http://schemas.microsoft.com/office/drawing/2014/main" id="{15DEA56C-6F00-45BA-A559-9187B97AE828}"/>
               </a:ext>
             </a:extLst>
           </p:cNvPr>
@@ -4570,7 +4570,7 @@
           <p:cNvPr id="6" name="practice-circle-0">
             <a:extLst xmlns:a="http://schemas.openxmlformats.org/drawingml/2006/main">
               <a:ext uri="{FF2B5EF4-FFF2-40B4-BE49-F238E27FC236}">
-                <a16:creationId xmlns:a16="http://schemas.microsoft.com/office/drawing/2014/main" id="{48EE1544-9C31-45A7-9DC3-2C05D4817403}"/>
+                <a16:creationId xmlns:a16="http://schemas.microsoft.com/office/drawing/2014/main" id="{13A981E3-EDC1-4A2F-91D7-9B2FDEC85DFD}"/>
               </a:ext>
             </a:extLst>
           </p:cNvPr>
@@ -4603,7 +4603,7 @@
           <p:cNvPr id="7" name="practice-number-0">
             <a:extLst xmlns:a="http://schemas.openxmlformats.org/drawingml/2006/main">
               <a:ext uri="{FF2B5EF4-FFF2-40B4-BE49-F238E27FC236}">
-                <a16:creationId xmlns:a16="http://schemas.microsoft.com/office/drawing/2014/main" id="{B0CF24DF-8FEC-4C6A-B2AE-A4F1F3436EB4}"/>
+                <a16:creationId xmlns:a16="http://schemas.microsoft.com/office/drawing/2014/main" id="{1C03D06B-B91A-44DE-AA0F-371DD0E03B47}"/>
               </a:ext>
             </a:extLst>
           </p:cNvPr>
@@ -4661,7 +4661,7 @@
           <p:cNvPr id="8" name="practice-item-0">
             <a:extLst xmlns:a="http://schemas.openxmlformats.org/drawingml/2006/main">
               <a:ext uri="{FF2B5EF4-FFF2-40B4-BE49-F238E27FC236}">
-                <a16:creationId xmlns:a16="http://schemas.microsoft.com/office/drawing/2014/main" id="{02A6C3D3-B9DC-406D-973E-C9D41142ED6C}"/>
+                <a16:creationId xmlns:a16="http://schemas.microsoft.com/office/drawing/2014/main" id="{1F082480-54D8-446B-BC4C-83F7E2EC5CF1}"/>
               </a:ext>
             </a:extLst>
           </p:cNvPr>
@@ -4725,7 +4725,7 @@
           <p:cNvPr id="9" name="practice-connector-0">
             <a:extLst xmlns:a="http://schemas.openxmlformats.org/drawingml/2006/main">
               <a:ext uri="{FF2B5EF4-FFF2-40B4-BE49-F238E27FC236}">
-                <a16:creationId xmlns:a16="http://schemas.microsoft.com/office/drawing/2014/main" id="{9DBF33AD-1CCF-4C9A-BFB5-A26DE0DD624C}"/>
+                <a16:creationId xmlns:a16="http://schemas.microsoft.com/office/drawing/2014/main" id="{BC90A265-82CC-4F63-8293-BE45C4E0CB40}"/>
               </a:ext>
             </a:extLst>
           </p:cNvPr>
@@ -4756,7 +4756,7 @@
           <p:cNvPr id="10" name="practice-circle-1">
             <a:extLst xmlns:a="http://schemas.openxmlformats.org/drawingml/2006/main">
               <a:ext uri="{FF2B5EF4-FFF2-40B4-BE49-F238E27FC236}">
-                <a16:creationId xmlns:a16="http://schemas.microsoft.com/office/drawing/2014/main" id="{01E34527-1082-435E-8F91-4C0C303F84FF}"/>
+                <a16:creationId xmlns:a16="http://schemas.microsoft.com/office/drawing/2014/main" id="{FAA07B01-7576-44B2-9A0B-C40BCE57B06D}"/>
               </a:ext>
             </a:extLst>
           </p:cNvPr>
@@ -4789,7 +4789,7 @@
           <p:cNvPr id="11" name="practice-number-1">
             <a:extLst xmlns:a="http://schemas.openxmlformats.org/drawingml/2006/main">
               <a:ext uri="{FF2B5EF4-FFF2-40B4-BE49-F238E27FC236}">
-                <a16:creationId xmlns:a16="http://schemas.microsoft.com/office/drawing/2014/main" id="{E6EA2892-AE49-44AE-90F2-056E59E97E62}"/>
+                <a16:creationId xmlns:a16="http://schemas.microsoft.com/office/drawing/2014/main" id="{5E87C3C4-C977-4C55-BDBD-6DF3FDDC4B5A}"/>
               </a:ext>
             </a:extLst>
           </p:cNvPr>
@@ -4847,7 +4847,7 @@
           <p:cNvPr id="12" name="practice-item-1">
             <a:extLst xmlns:a="http://schemas.openxmlformats.org/drawingml/2006/main">
               <a:ext uri="{FF2B5EF4-FFF2-40B4-BE49-F238E27FC236}">
-                <a16:creationId xmlns:a16="http://schemas.microsoft.com/office/drawing/2014/main" id="{5FAF3CD4-8719-4638-B376-4407C1275838}"/>
+                <a16:creationId xmlns:a16="http://schemas.microsoft.com/office/drawing/2014/main" id="{58C59118-7B84-49DD-AA86-11EA50288A99}"/>
               </a:ext>
             </a:extLst>
           </p:cNvPr>
@@ -4911,7 +4911,7 @@
           <p:cNvPr id="13" name="practice-connector-1">
             <a:extLst xmlns:a="http://schemas.openxmlformats.org/drawingml/2006/main">
               <a:ext uri="{FF2B5EF4-FFF2-40B4-BE49-F238E27FC236}">
-                <a16:creationId xmlns:a16="http://schemas.microsoft.com/office/drawing/2014/main" id="{ADF20C3B-FC7B-4E86-A6B0-1551ABA28364}"/>
+                <a16:creationId xmlns:a16="http://schemas.microsoft.com/office/drawing/2014/main" id="{0DCBD3CC-BA4F-4598-B8DE-84203EF38AF3}"/>
               </a:ext>
             </a:extLst>
           </p:cNvPr>
@@ -4942,7 +4942,7 @@
           <p:cNvPr id="14" name="practice-circle-2">
             <a:extLst xmlns:a="http://schemas.openxmlformats.org/drawingml/2006/main">
               <a:ext uri="{FF2B5EF4-FFF2-40B4-BE49-F238E27FC236}">
-                <a16:creationId xmlns:a16="http://schemas.microsoft.com/office/drawing/2014/main" id="{3BF2EC43-63B6-45DF-890E-0BAA159639DC}"/>
+                <a16:creationId xmlns:a16="http://schemas.microsoft.com/office/drawing/2014/main" id="{369A0F5D-EB34-48D4-BA40-1D9687CDBF2C}"/>
               </a:ext>
             </a:extLst>
           </p:cNvPr>
@@ -4975,7 +4975,7 @@
           <p:cNvPr id="15" name="practice-number-2">
             <a:extLst xmlns:a="http://schemas.openxmlformats.org/drawingml/2006/main">
               <a:ext uri="{FF2B5EF4-FFF2-40B4-BE49-F238E27FC236}">
-                <a16:creationId xmlns:a16="http://schemas.microsoft.com/office/drawing/2014/main" id="{97F993F8-CBFA-42D5-8D2D-2BD723BBBCA8}"/>
+                <a16:creationId xmlns:a16="http://schemas.microsoft.com/office/drawing/2014/main" id="{2728B14E-AE93-459D-B710-414DA288798F}"/>
               </a:ext>
             </a:extLst>
           </p:cNvPr>
@@ -5033,7 +5033,7 @@
           <p:cNvPr id="16" name="practice-item-2">
             <a:extLst xmlns:a="http://schemas.openxmlformats.org/drawingml/2006/main">
               <a:ext uri="{FF2B5EF4-FFF2-40B4-BE49-F238E27FC236}">
-                <a16:creationId xmlns:a16="http://schemas.microsoft.com/office/drawing/2014/main" id="{8F0B7553-7950-42FB-A7AB-E2EAD0FE64B9}"/>
+                <a16:creationId xmlns:a16="http://schemas.microsoft.com/office/drawing/2014/main" id="{C584C8F6-CD00-4C7F-A41E-34CD3E86108F}"/>
               </a:ext>
             </a:extLst>
           </p:cNvPr>
@@ -5095,7 +5095,7 @@
     </p:spTree>
     <p:extLst>
       <p:ext uri="{BB962C8B-B14F-4D97-AF65-F5344CB8AC3E}">
-        <p14:creationId xmlns:p14="http://schemas.microsoft.com/office/powerpoint/2010/main" val="500328212"/>
+        <p14:creationId xmlns:p14="http://schemas.microsoft.com/office/powerpoint/2010/main" val="34514083"/>
       </p:ext>
     </p:extLst>
   </p:cSld>
@@ -5126,7 +5126,7 @@
           <p:cNvPr id="1" name="s13-rule">
             <a:extLst xmlns:a="http://schemas.openxmlformats.org/drawingml/2006/main">
               <a:ext uri="{FF2B5EF4-FFF2-40B4-BE49-F238E27FC236}">
-                <a16:creationId xmlns:a16="http://schemas.microsoft.com/office/drawing/2014/main" id="{F8BEA273-80ED-4D42-8A0B-13345BC42E7D}"/>
+                <a16:creationId xmlns:a16="http://schemas.microsoft.com/office/drawing/2014/main" id="{8E91A3C2-FC41-4486-BF9E-A643DF5C2FEC}"/>
               </a:ext>
             </a:extLst>
           </p:cNvPr>
@@ -5159,7 +5159,7 @@
           <p:cNvPr id="2" name="s13-eyebrow">
             <a:extLst xmlns:a="http://schemas.openxmlformats.org/drawingml/2006/main">
               <a:ext uri="{FF2B5EF4-FFF2-40B4-BE49-F238E27FC236}">
-                <a16:creationId xmlns:a16="http://schemas.microsoft.com/office/drawing/2014/main" id="{22BF3525-FF8E-41E8-9F5D-64B1D32F7A3D}"/>
+                <a16:creationId xmlns:a16="http://schemas.microsoft.com/office/drawing/2014/main" id="{C9449C8B-12A9-4141-9067-EABAD2EEE012}"/>
               </a:ext>
             </a:extLst>
           </p:cNvPr>
@@ -5217,7 +5217,7 @@
           <p:cNvPr id="3" name="s13-title">
             <a:extLst xmlns:a="http://schemas.openxmlformats.org/drawingml/2006/main">
               <a:ext uri="{FF2B5EF4-FFF2-40B4-BE49-F238E27FC236}">
-                <a16:creationId xmlns:a16="http://schemas.microsoft.com/office/drawing/2014/main" id="{98FAC361-335F-4808-B010-90E33934AB6C}"/>
+                <a16:creationId xmlns:a16="http://schemas.microsoft.com/office/drawing/2014/main" id="{AEB0164E-0720-461D-A112-13211665E180}"/>
               </a:ext>
             </a:extLst>
           </p:cNvPr>
@@ -5275,7 +5275,7 @@
           <p:cNvPr id="4" name="s13-footer">
             <a:extLst xmlns:a="http://schemas.openxmlformats.org/drawingml/2006/main">
               <a:ext uri="{FF2B5EF4-FFF2-40B4-BE49-F238E27FC236}">
-                <a16:creationId xmlns:a16="http://schemas.microsoft.com/office/drawing/2014/main" id="{E7529982-C941-43F7-9C54-95E89AE8CDC1}"/>
+                <a16:creationId xmlns:a16="http://schemas.microsoft.com/office/drawing/2014/main" id="{6E8CCB6F-63EF-42FF-99A3-F7420C2A10AE}"/>
               </a:ext>
             </a:extLst>
           </p:cNvPr>
@@ -5306,7 +5306,7 @@
           <p:cNvPr id="5" name="s13-identity">
             <a:extLst xmlns:a="http://schemas.openxmlformats.org/drawingml/2006/main">
               <a:ext uri="{FF2B5EF4-FFF2-40B4-BE49-F238E27FC236}">
-                <a16:creationId xmlns:a16="http://schemas.microsoft.com/office/drawing/2014/main" id="{FEC18911-FE26-4854-B3B8-76B5038D833C}"/>
+                <a16:creationId xmlns:a16="http://schemas.microsoft.com/office/drawing/2014/main" id="{A5DF428C-6B48-477A-A601-F93B3362A749}"/>
               </a:ext>
             </a:extLst>
           </p:cNvPr>
@@ -5364,7 +5364,7 @@
           <p:cNvPr id="6" name="recap-circle-0">
             <a:extLst xmlns:a="http://schemas.openxmlformats.org/drawingml/2006/main">
               <a:ext uri="{FF2B5EF4-FFF2-40B4-BE49-F238E27FC236}">
-                <a16:creationId xmlns:a16="http://schemas.microsoft.com/office/drawing/2014/main" id="{5DA3FAFE-F73D-4E24-9639-02B06B9620E0}"/>
+                <a16:creationId xmlns:a16="http://schemas.microsoft.com/office/drawing/2014/main" id="{2846C938-CB22-4BFF-B497-E6B72B3BFF92}"/>
               </a:ext>
             </a:extLst>
           </p:cNvPr>
@@ -5397,7 +5397,7 @@
           <p:cNvPr id="7" name="recap-number-0">
             <a:extLst xmlns:a="http://schemas.openxmlformats.org/drawingml/2006/main">
               <a:ext uri="{FF2B5EF4-FFF2-40B4-BE49-F238E27FC236}">
-                <a16:creationId xmlns:a16="http://schemas.microsoft.com/office/drawing/2014/main" id="{6C810821-49C1-43E9-9475-19481DFC376A}"/>
+                <a16:creationId xmlns:a16="http://schemas.microsoft.com/office/drawing/2014/main" id="{661CDACD-1AC5-462E-95F1-BD3F16E5478A}"/>
               </a:ext>
             </a:extLst>
           </p:cNvPr>
@@ -5455,7 +5455,7 @@
           <p:cNvPr id="8" name="recap-item-0">
             <a:extLst xmlns:a="http://schemas.openxmlformats.org/drawingml/2006/main">
               <a:ext uri="{FF2B5EF4-FFF2-40B4-BE49-F238E27FC236}">
-                <a16:creationId xmlns:a16="http://schemas.microsoft.com/office/drawing/2014/main" id="{177C7E18-1D4D-4CBB-B848-391AE1017BC1}"/>
+                <a16:creationId xmlns:a16="http://schemas.microsoft.com/office/drawing/2014/main" id="{3E3FBEF4-4533-474D-A118-5992863FE045}"/>
               </a:ext>
             </a:extLst>
           </p:cNvPr>
@@ -5519,7 +5519,7 @@
           <p:cNvPr id="9" name="recap-connector-0">
             <a:extLst xmlns:a="http://schemas.openxmlformats.org/drawingml/2006/main">
               <a:ext uri="{FF2B5EF4-FFF2-40B4-BE49-F238E27FC236}">
-                <a16:creationId xmlns:a16="http://schemas.microsoft.com/office/drawing/2014/main" id="{A980F610-C750-40BE-ABD0-8185D206BAA4}"/>
+                <a16:creationId xmlns:a16="http://schemas.microsoft.com/office/drawing/2014/main" id="{C0DF1EA7-4A54-4C32-BD78-42BD7062D224}"/>
               </a:ext>
             </a:extLst>
           </p:cNvPr>
@@ -5550,7 +5550,7 @@
           <p:cNvPr id="10" name="recap-circle-1">
             <a:extLst xmlns:a="http://schemas.openxmlformats.org/drawingml/2006/main">
               <a:ext uri="{FF2B5EF4-FFF2-40B4-BE49-F238E27FC236}">
-                <a16:creationId xmlns:a16="http://schemas.microsoft.com/office/drawing/2014/main" id="{0A0297A8-8FBF-4308-9D80-467C2C22B807}"/>
+                <a16:creationId xmlns:a16="http://schemas.microsoft.com/office/drawing/2014/main" id="{93C0926E-FBE9-48B8-9D1E-C0549AD283EB}"/>
               </a:ext>
             </a:extLst>
           </p:cNvPr>
@@ -5583,7 +5583,7 @@
           <p:cNvPr id="11" name="recap-number-1">
             <a:extLst xmlns:a="http://schemas.openxmlformats.org/drawingml/2006/main">
               <a:ext uri="{FF2B5EF4-FFF2-40B4-BE49-F238E27FC236}">
-                <a16:creationId xmlns:a16="http://schemas.microsoft.com/office/drawing/2014/main" id="{57C3758C-1216-4AD0-86E7-2EB8864115EB}"/>
+                <a16:creationId xmlns:a16="http://schemas.microsoft.com/office/drawing/2014/main" id="{6DF04D67-6D01-4EA5-A956-971DE2808381}"/>
               </a:ext>
             </a:extLst>
           </p:cNvPr>
@@ -5641,7 +5641,7 @@
           <p:cNvPr id="12" name="recap-item-1">
             <a:extLst xmlns:a="http://schemas.openxmlformats.org/drawingml/2006/main">
               <a:ext uri="{FF2B5EF4-FFF2-40B4-BE49-F238E27FC236}">
-                <a16:creationId xmlns:a16="http://schemas.microsoft.com/office/drawing/2014/main" id="{21665785-ED25-4210-89FC-DC2D361842FE}"/>
+                <a16:creationId xmlns:a16="http://schemas.microsoft.com/office/drawing/2014/main" id="{74ECEE9E-6807-4B79-98E9-0160423F58BC}"/>
               </a:ext>
             </a:extLst>
           </p:cNvPr>
@@ -5705,7 +5705,7 @@
           <p:cNvPr id="13" name="recap-connector-1">
             <a:extLst xmlns:a="http://schemas.openxmlformats.org/drawingml/2006/main">
               <a:ext uri="{FF2B5EF4-FFF2-40B4-BE49-F238E27FC236}">
-                <a16:creationId xmlns:a16="http://schemas.microsoft.com/office/drawing/2014/main" id="{DE5C4FD0-4A2D-4D18-971B-04C7ABB22F34}"/>
+                <a16:creationId xmlns:a16="http://schemas.microsoft.com/office/drawing/2014/main" id="{692334D0-FB54-439E-9A71-F835503DD20A}"/>
               </a:ext>
             </a:extLst>
           </p:cNvPr>
@@ -5736,7 +5736,7 @@
           <p:cNvPr id="14" name="recap-circle-2">
             <a:extLst xmlns:a="http://schemas.openxmlformats.org/drawingml/2006/main">
               <a:ext uri="{FF2B5EF4-FFF2-40B4-BE49-F238E27FC236}">
-                <a16:creationId xmlns:a16="http://schemas.microsoft.com/office/drawing/2014/main" id="{38E2F0C8-C250-4CC7-943C-B16E87577723}"/>
+                <a16:creationId xmlns:a16="http://schemas.microsoft.com/office/drawing/2014/main" id="{7EFCA929-83AA-4EE9-95FD-24CE51A6DA1A}"/>
               </a:ext>
             </a:extLst>
           </p:cNvPr>
@@ -5769,7 +5769,7 @@
           <p:cNvPr id="15" name="recap-number-2">
             <a:extLst xmlns:a="http://schemas.openxmlformats.org/drawingml/2006/main">
               <a:ext uri="{FF2B5EF4-FFF2-40B4-BE49-F238E27FC236}">
-                <a16:creationId xmlns:a16="http://schemas.microsoft.com/office/drawing/2014/main" id="{FD211958-14CE-4CFC-9961-364AC549E117}"/>
+                <a16:creationId xmlns:a16="http://schemas.microsoft.com/office/drawing/2014/main" id="{52252209-81C6-48F3-B4DA-CAB4AC6E16A4}"/>
               </a:ext>
             </a:extLst>
           </p:cNvPr>
@@ -5827,7 +5827,7 @@
           <p:cNvPr id="16" name="recap-item-2">
             <a:extLst xmlns:a="http://schemas.openxmlformats.org/drawingml/2006/main">
               <a:ext uri="{FF2B5EF4-FFF2-40B4-BE49-F238E27FC236}">
-                <a16:creationId xmlns:a16="http://schemas.microsoft.com/office/drawing/2014/main" id="{29C6B77E-BBB3-4611-AC0D-B2B9349068A7}"/>
+                <a16:creationId xmlns:a16="http://schemas.microsoft.com/office/drawing/2014/main" id="{EA6CA09D-01C3-44F6-A876-8CD937736567}"/>
               </a:ext>
             </a:extLst>
           </p:cNvPr>
@@ -5889,7 +5889,7 @@
     </p:spTree>
     <p:extLst>
       <p:ext uri="{BB962C8B-B14F-4D97-AF65-F5344CB8AC3E}">
-        <p14:creationId xmlns:p14="http://schemas.microsoft.com/office/powerpoint/2010/main" val="341549991"/>
+        <p14:creationId xmlns:p14="http://schemas.microsoft.com/office/powerpoint/2010/main" val="787377273"/>
       </p:ext>
     </p:extLst>
   </p:cSld>
@@ -5920,7 +5920,7 @@
           <p:cNvPr id="1" name="s14-rule">
             <a:extLst xmlns:a="http://schemas.openxmlformats.org/drawingml/2006/main">
               <a:ext uri="{FF2B5EF4-FFF2-40B4-BE49-F238E27FC236}">
-                <a16:creationId xmlns:a16="http://schemas.microsoft.com/office/drawing/2014/main" id="{3ACE1727-656F-416D-95E6-F16C2D6E0C2D}"/>
+                <a16:creationId xmlns:a16="http://schemas.microsoft.com/office/drawing/2014/main" id="{F7CC6FD2-B862-4AA9-B955-E0C418784021}"/>
               </a:ext>
             </a:extLst>
           </p:cNvPr>
@@ -5953,7 +5953,7 @@
           <p:cNvPr id="2" name="s14-eyebrow">
             <a:extLst xmlns:a="http://schemas.openxmlformats.org/drawingml/2006/main">
               <a:ext uri="{FF2B5EF4-FFF2-40B4-BE49-F238E27FC236}">
-                <a16:creationId xmlns:a16="http://schemas.microsoft.com/office/drawing/2014/main" id="{DD15896E-DE17-4417-83FE-91D7CC340332}"/>
+                <a16:creationId xmlns:a16="http://schemas.microsoft.com/office/drawing/2014/main" id="{90C9550D-B421-41B4-9ECF-797147E3D79D}"/>
               </a:ext>
             </a:extLst>
           </p:cNvPr>
@@ -6011,7 +6011,7 @@
           <p:cNvPr id="3" name="s14-title">
             <a:extLst xmlns:a="http://schemas.openxmlformats.org/drawingml/2006/main">
               <a:ext uri="{FF2B5EF4-FFF2-40B4-BE49-F238E27FC236}">
-                <a16:creationId xmlns:a16="http://schemas.microsoft.com/office/drawing/2014/main" id="{B9EE618C-1CE6-4E04-92AF-C81F83BF20C3}"/>
+                <a16:creationId xmlns:a16="http://schemas.microsoft.com/office/drawing/2014/main" id="{057613A2-D5EB-4A12-880E-BCFAC73ED6E7}"/>
               </a:ext>
             </a:extLst>
           </p:cNvPr>
@@ -6069,7 +6069,7 @@
           <p:cNvPr id="4" name="s14-footer">
             <a:extLst xmlns:a="http://schemas.openxmlformats.org/drawingml/2006/main">
               <a:ext uri="{FF2B5EF4-FFF2-40B4-BE49-F238E27FC236}">
-                <a16:creationId xmlns:a16="http://schemas.microsoft.com/office/drawing/2014/main" id="{D5DFDE48-9DD3-4E37-8DA2-ED8539E4ED07}"/>
+                <a16:creationId xmlns:a16="http://schemas.microsoft.com/office/drawing/2014/main" id="{B4354C67-9EFF-4411-AED0-59B92866CBA6}"/>
               </a:ext>
             </a:extLst>
           </p:cNvPr>
@@ -6100,7 +6100,7 @@
           <p:cNvPr id="5" name="s14-identity">
             <a:extLst xmlns:a="http://schemas.openxmlformats.org/drawingml/2006/main">
               <a:ext uri="{FF2B5EF4-FFF2-40B4-BE49-F238E27FC236}">
-                <a16:creationId xmlns:a16="http://schemas.microsoft.com/office/drawing/2014/main" id="{9EC099BA-757C-49E3-90C6-240425B9E65A}"/>
+                <a16:creationId xmlns:a16="http://schemas.microsoft.com/office/drawing/2014/main" id="{22AFC71E-E43F-4446-BA00-9BFD9F82777F}"/>
               </a:ext>
             </a:extLst>
           </p:cNvPr>
@@ -6158,7 +6158,7 @@
           <p:cNvPr id="6" name="source-0">
             <a:extLst xmlns:a="http://schemas.openxmlformats.org/drawingml/2006/main">
               <a:ext uri="{FF2B5EF4-FFF2-40B4-BE49-F238E27FC236}">
-                <a16:creationId xmlns:a16="http://schemas.microsoft.com/office/drawing/2014/main" id="{53834092-B89B-4D6D-9B24-05F641D23776}"/>
+                <a16:creationId xmlns:a16="http://schemas.microsoft.com/office/drawing/2014/main" id="{A6CF25CA-BA09-4931-8749-FDBEEECAC3C7}"/>
               </a:ext>
             </a:extLst>
           </p:cNvPr>
@@ -6222,7 +6222,7 @@
           <p:cNvPr id="7" name="source-1">
             <a:extLst xmlns:a="http://schemas.openxmlformats.org/drawingml/2006/main">
               <a:ext uri="{FF2B5EF4-FFF2-40B4-BE49-F238E27FC236}">
-                <a16:creationId xmlns:a16="http://schemas.microsoft.com/office/drawing/2014/main" id="{921CB756-7762-4C00-AF2F-9A4D7506587F}"/>
+                <a16:creationId xmlns:a16="http://schemas.microsoft.com/office/drawing/2014/main" id="{78ED7005-1CC6-4224-B28A-F7EF73CD414D}"/>
               </a:ext>
             </a:extLst>
           </p:cNvPr>
@@ -6286,7 +6286,7 @@
           <p:cNvPr id="8" name="source-2">
             <a:extLst xmlns:a="http://schemas.openxmlformats.org/drawingml/2006/main">
               <a:ext uri="{FF2B5EF4-FFF2-40B4-BE49-F238E27FC236}">
-                <a16:creationId xmlns:a16="http://schemas.microsoft.com/office/drawing/2014/main" id="{A5B8534C-9E93-4265-9460-142F05199B64}"/>
+                <a16:creationId xmlns:a16="http://schemas.microsoft.com/office/drawing/2014/main" id="{DFBC80D9-12C0-46E9-9580-CA9658CD23A6}"/>
               </a:ext>
             </a:extLst>
           </p:cNvPr>
@@ -6350,7 +6350,7 @@
           <p:cNvPr id="9" name="s14-takeaway-rule">
             <a:extLst xmlns:a="http://schemas.openxmlformats.org/drawingml/2006/main">
               <a:ext uri="{FF2B5EF4-FFF2-40B4-BE49-F238E27FC236}">
-                <a16:creationId xmlns:a16="http://schemas.microsoft.com/office/drawing/2014/main" id="{1C6986AE-DD4A-4C2F-85B6-781C63118B0D}"/>
+                <a16:creationId xmlns:a16="http://schemas.microsoft.com/office/drawing/2014/main" id="{4D4206A4-109F-431D-A9B8-D7A158751976}"/>
               </a:ext>
             </a:extLst>
           </p:cNvPr>
@@ -6383,7 +6383,7 @@
           <p:cNvPr id="10" name="s14-takeaway">
             <a:extLst xmlns:a="http://schemas.openxmlformats.org/drawingml/2006/main">
               <a:ext uri="{FF2B5EF4-FFF2-40B4-BE49-F238E27FC236}">
-                <a16:creationId xmlns:a16="http://schemas.microsoft.com/office/drawing/2014/main" id="{60A932A5-01CD-485B-8D28-FB1C80E75011}"/>
+                <a16:creationId xmlns:a16="http://schemas.microsoft.com/office/drawing/2014/main" id="{41033236-AFF1-4409-B483-C5C3C37C6767}"/>
               </a:ext>
             </a:extLst>
           </p:cNvPr>
@@ -6408,7 +6408,7 @@
         </p:spPr>
         <p:txBody>
           <a:bodyPr xmlns:a="http://schemas.openxmlformats.org/drawingml/2006/main" lIns="0" tIns="0" rIns="0" bIns="0" anchor="ctr">
-            <a:normAutofit fontScale="100000"/>
+            <a:normAutofit fontScale="95911"/>
           </a:bodyPr>
           <a:lstStyle xmlns:a="http://schemas.openxmlformats.org/drawingml/2006/main"/>
           <a:p xmlns:a="http://schemas.openxmlformats.org/drawingml/2006/main">
@@ -6431,7 +6431,7 @@
                 <a:ea typeface="PingFang SC"/>
                 <a:cs typeface="PingFang SC"/>
               </a:rPr>
-              <a:t>公开幻灯片只使用课程原创文字与原生图形；完整论证、链接和事实边界请见本节讲义。</a:t>
+              <a:t>课程精编页用于讲授主线；播放器中的“原课件”模式保留团队 PowerPoint 精选页、真实图片和可播放视频。</a:t>
             </a:r>
           </a:p>
         </p:txBody>
@@ -6439,7 +6439,7 @@
     </p:spTree>
     <p:extLst>
       <p:ext uri="{BB962C8B-B14F-4D97-AF65-F5344CB8AC3E}">
-        <p14:creationId xmlns:p14="http://schemas.microsoft.com/office/powerpoint/2010/main" val="1163066044"/>
+        <p14:creationId xmlns:p14="http://schemas.microsoft.com/office/powerpoint/2010/main" val="1056777239"/>
       </p:ext>
     </p:extLst>
   </p:cSld>
@@ -6470,7 +6470,7 @@
           <p:cNvPr id="1" name="s2-rule">
             <a:extLst xmlns:a="http://schemas.openxmlformats.org/drawingml/2006/main">
               <a:ext uri="{FF2B5EF4-FFF2-40B4-BE49-F238E27FC236}">
-                <a16:creationId xmlns:a16="http://schemas.microsoft.com/office/drawing/2014/main" id="{FF8ED62B-750C-48B1-AF0A-729914B593A2}"/>
+                <a16:creationId xmlns:a16="http://schemas.microsoft.com/office/drawing/2014/main" id="{24AFA55B-F442-44A0-92AA-19AAF08DBB1F}"/>
               </a:ext>
             </a:extLst>
           </p:cNvPr>
@@ -6503,7 +6503,7 @@
           <p:cNvPr id="2" name="s2-eyebrow">
             <a:extLst xmlns:a="http://schemas.openxmlformats.org/drawingml/2006/main">
               <a:ext uri="{FF2B5EF4-FFF2-40B4-BE49-F238E27FC236}">
-                <a16:creationId xmlns:a16="http://schemas.microsoft.com/office/drawing/2014/main" id="{E2416F80-121D-4D0E-8E82-299A0CDB0D84}"/>
+                <a16:creationId xmlns:a16="http://schemas.microsoft.com/office/drawing/2014/main" id="{23EFAF4D-5C73-48F8-BAB4-E936123F72E6}"/>
               </a:ext>
             </a:extLst>
           </p:cNvPr>
@@ -6561,7 +6561,7 @@
           <p:cNvPr id="3" name="s2-title">
             <a:extLst xmlns:a="http://schemas.openxmlformats.org/drawingml/2006/main">
               <a:ext uri="{FF2B5EF4-FFF2-40B4-BE49-F238E27FC236}">
-                <a16:creationId xmlns:a16="http://schemas.microsoft.com/office/drawing/2014/main" id="{26FBF80D-19AF-42E2-85D0-1F32DF550AB8}"/>
+                <a16:creationId xmlns:a16="http://schemas.microsoft.com/office/drawing/2014/main" id="{B41BF292-379E-43F5-B3E6-FC2BB06D6FFE}"/>
               </a:ext>
             </a:extLst>
           </p:cNvPr>
@@ -6619,7 +6619,7 @@
           <p:cNvPr id="4" name="s2-footer">
             <a:extLst xmlns:a="http://schemas.openxmlformats.org/drawingml/2006/main">
               <a:ext uri="{FF2B5EF4-FFF2-40B4-BE49-F238E27FC236}">
-                <a16:creationId xmlns:a16="http://schemas.microsoft.com/office/drawing/2014/main" id="{F5F03F2E-17B4-48DA-AEEC-54E14BA32B54}"/>
+                <a16:creationId xmlns:a16="http://schemas.microsoft.com/office/drawing/2014/main" id="{D85EDDDF-840C-4B24-AB5D-856F4162987A}"/>
               </a:ext>
             </a:extLst>
           </p:cNvPr>
@@ -6650,7 +6650,7 @@
           <p:cNvPr id="5" name="s2-identity">
             <a:extLst xmlns:a="http://schemas.openxmlformats.org/drawingml/2006/main">
               <a:ext uri="{FF2B5EF4-FFF2-40B4-BE49-F238E27FC236}">
-                <a16:creationId xmlns:a16="http://schemas.microsoft.com/office/drawing/2014/main" id="{46C8DB43-35D6-48B8-A438-2D0BBDEAF03D}"/>
+                <a16:creationId xmlns:a16="http://schemas.microsoft.com/office/drawing/2014/main" id="{419A4757-585C-4965-956F-2AE101BE4B80}"/>
               </a:ext>
             </a:extLst>
           </p:cNvPr>
@@ -6708,7 +6708,7 @@
           <p:cNvPr id="6" name="objective-1">
             <a:extLst xmlns:a="http://schemas.openxmlformats.org/drawingml/2006/main">
               <a:ext uri="{FF2B5EF4-FFF2-40B4-BE49-F238E27FC236}">
-                <a16:creationId xmlns:a16="http://schemas.microsoft.com/office/drawing/2014/main" id="{D8BDAF39-4D18-4B2A-A142-EF8899243D0B}"/>
+                <a16:creationId xmlns:a16="http://schemas.microsoft.com/office/drawing/2014/main" id="{1B6EB374-1E21-42A7-8F19-268C58D0607C}"/>
               </a:ext>
             </a:extLst>
           </p:cNvPr>
@@ -6795,7 +6795,7 @@
           <p:cNvPr id="7" name="objective-2">
             <a:extLst xmlns:a="http://schemas.openxmlformats.org/drawingml/2006/main">
               <a:ext uri="{FF2B5EF4-FFF2-40B4-BE49-F238E27FC236}">
-                <a16:creationId xmlns:a16="http://schemas.microsoft.com/office/drawing/2014/main" id="{198F16A8-B816-4EDD-AFB5-403CDCE2EC61}"/>
+                <a16:creationId xmlns:a16="http://schemas.microsoft.com/office/drawing/2014/main" id="{C8C685C0-88E5-4AE7-A579-C392591904E0}"/>
               </a:ext>
             </a:extLst>
           </p:cNvPr>
@@ -6882,7 +6882,7 @@
           <p:cNvPr id="8" name="objective-3">
             <a:extLst xmlns:a="http://schemas.openxmlformats.org/drawingml/2006/main">
               <a:ext uri="{FF2B5EF4-FFF2-40B4-BE49-F238E27FC236}">
-                <a16:creationId xmlns:a16="http://schemas.microsoft.com/office/drawing/2014/main" id="{892FD4D5-6F5E-4D8A-838B-98FF95CC08C3}"/>
+                <a16:creationId xmlns:a16="http://schemas.microsoft.com/office/drawing/2014/main" id="{91735F32-6168-4069-95A6-0A2DCC08A48B}"/>
               </a:ext>
             </a:extLst>
           </p:cNvPr>
@@ -6967,7 +6967,7 @@
     </p:spTree>
     <p:extLst>
       <p:ext uri="{BB962C8B-B14F-4D97-AF65-F5344CB8AC3E}">
-        <p14:creationId xmlns:p14="http://schemas.microsoft.com/office/powerpoint/2010/main" val="178878780"/>
+        <p14:creationId xmlns:p14="http://schemas.microsoft.com/office/powerpoint/2010/main" val="1113853505"/>
       </p:ext>
     </p:extLst>
   </p:cSld>
@@ -6998,7 +6998,7 @@
           <p:cNvPr id="1" name="s3-rule">
             <a:extLst xmlns:a="http://schemas.openxmlformats.org/drawingml/2006/main">
               <a:ext uri="{FF2B5EF4-FFF2-40B4-BE49-F238E27FC236}">
-                <a16:creationId xmlns:a16="http://schemas.microsoft.com/office/drawing/2014/main" id="{809F08FB-EB48-4764-B25A-B802E91253F8}"/>
+                <a16:creationId xmlns:a16="http://schemas.microsoft.com/office/drawing/2014/main" id="{811F66E6-88DC-421C-B1A0-6682FC9AF322}"/>
               </a:ext>
             </a:extLst>
           </p:cNvPr>
@@ -7031,7 +7031,7 @@
           <p:cNvPr id="2" name="s3-eyebrow">
             <a:extLst xmlns:a="http://schemas.openxmlformats.org/drawingml/2006/main">
               <a:ext uri="{FF2B5EF4-FFF2-40B4-BE49-F238E27FC236}">
-                <a16:creationId xmlns:a16="http://schemas.microsoft.com/office/drawing/2014/main" id="{C4E6A21A-B861-4DA6-884E-30AD24315D27}"/>
+                <a16:creationId xmlns:a16="http://schemas.microsoft.com/office/drawing/2014/main" id="{2C38CDCF-B7D8-4FD3-8EE1-7AB4603B9C10}"/>
               </a:ext>
             </a:extLst>
           </p:cNvPr>
@@ -7089,7 +7089,7 @@
           <p:cNvPr id="3" name="s3-title">
             <a:extLst xmlns:a="http://schemas.openxmlformats.org/drawingml/2006/main">
               <a:ext uri="{FF2B5EF4-FFF2-40B4-BE49-F238E27FC236}">
-                <a16:creationId xmlns:a16="http://schemas.microsoft.com/office/drawing/2014/main" id="{BFDFF999-B35C-47C0-BE41-729035BEF002}"/>
+                <a16:creationId xmlns:a16="http://schemas.microsoft.com/office/drawing/2014/main" id="{09F7DB4D-5A68-425E-BB38-DE7114BA7329}"/>
               </a:ext>
             </a:extLst>
           </p:cNvPr>
@@ -7147,7 +7147,7 @@
           <p:cNvPr id="4" name="s3-footer">
             <a:extLst xmlns:a="http://schemas.openxmlformats.org/drawingml/2006/main">
               <a:ext uri="{FF2B5EF4-FFF2-40B4-BE49-F238E27FC236}">
-                <a16:creationId xmlns:a16="http://schemas.microsoft.com/office/drawing/2014/main" id="{F57DD2F5-034E-47DD-BE33-F50C1448756E}"/>
+                <a16:creationId xmlns:a16="http://schemas.microsoft.com/office/drawing/2014/main" id="{9DDED9A6-3A00-4DC0-B998-4F7BE345FA1B}"/>
               </a:ext>
             </a:extLst>
           </p:cNvPr>
@@ -7178,7 +7178,7 @@
           <p:cNvPr id="5" name="s3-identity">
             <a:extLst xmlns:a="http://schemas.openxmlformats.org/drawingml/2006/main">
               <a:ext uri="{FF2B5EF4-FFF2-40B4-BE49-F238E27FC236}">
-                <a16:creationId xmlns:a16="http://schemas.microsoft.com/office/drawing/2014/main" id="{6745A473-A225-4EF2-8E62-CA0AA337DAB2}"/>
+                <a16:creationId xmlns:a16="http://schemas.microsoft.com/office/drawing/2014/main" id="{677E2652-CA59-4367-BF71-9DEA8BBD1CD0}"/>
               </a:ext>
             </a:extLst>
           </p:cNvPr>
@@ -7236,7 +7236,7 @@
           <p:cNvPr id="6" name="core-no-0">
             <a:extLst xmlns:a="http://schemas.openxmlformats.org/drawingml/2006/main">
               <a:ext uri="{FF2B5EF4-FFF2-40B4-BE49-F238E27FC236}">
-                <a16:creationId xmlns:a16="http://schemas.microsoft.com/office/drawing/2014/main" id="{E32E102D-6662-4224-A213-62372B8C1CD5}"/>
+                <a16:creationId xmlns:a16="http://schemas.microsoft.com/office/drawing/2014/main" id="{28CA0547-A6C8-4DA4-9A5A-368B119AD912}"/>
               </a:ext>
             </a:extLst>
           </p:cNvPr>
@@ -7294,7 +7294,7 @@
           <p:cNvPr id="7" name="core-label-0">
             <a:extLst xmlns:a="http://schemas.openxmlformats.org/drawingml/2006/main">
               <a:ext uri="{FF2B5EF4-FFF2-40B4-BE49-F238E27FC236}">
-                <a16:creationId xmlns:a16="http://schemas.microsoft.com/office/drawing/2014/main" id="{996BED72-85C5-42EF-A524-0EDCFC08D73F}"/>
+                <a16:creationId xmlns:a16="http://schemas.microsoft.com/office/drawing/2014/main" id="{50982668-437C-49E6-87CF-9E39AB45B45F}"/>
               </a:ext>
             </a:extLst>
           </p:cNvPr>
@@ -7352,7 +7352,7 @@
           <p:cNvPr id="8" name="core-body-0">
             <a:extLst xmlns:a="http://schemas.openxmlformats.org/drawingml/2006/main">
               <a:ext uri="{FF2B5EF4-FFF2-40B4-BE49-F238E27FC236}">
-                <a16:creationId xmlns:a16="http://schemas.microsoft.com/office/drawing/2014/main" id="{EC6C0961-0F2D-4B7E-B8B9-FFD647C859AB}"/>
+                <a16:creationId xmlns:a16="http://schemas.microsoft.com/office/drawing/2014/main" id="{DF127BA9-0818-412C-B880-25115CC406C3}"/>
               </a:ext>
             </a:extLst>
           </p:cNvPr>
@@ -7416,7 +7416,7 @@
           <p:cNvPr id="9" name="core-no-1">
             <a:extLst xmlns:a="http://schemas.openxmlformats.org/drawingml/2006/main">
               <a:ext uri="{FF2B5EF4-FFF2-40B4-BE49-F238E27FC236}">
-                <a16:creationId xmlns:a16="http://schemas.microsoft.com/office/drawing/2014/main" id="{AF3E3B79-9988-4700-A250-73518B98F73B}"/>
+                <a16:creationId xmlns:a16="http://schemas.microsoft.com/office/drawing/2014/main" id="{ABEAD7BA-B5FA-407A-A120-229A78615BF1}"/>
               </a:ext>
             </a:extLst>
           </p:cNvPr>
@@ -7474,7 +7474,7 @@
           <p:cNvPr id="10" name="core-label-1">
             <a:extLst xmlns:a="http://schemas.openxmlformats.org/drawingml/2006/main">
               <a:ext uri="{FF2B5EF4-FFF2-40B4-BE49-F238E27FC236}">
-                <a16:creationId xmlns:a16="http://schemas.microsoft.com/office/drawing/2014/main" id="{F3743CB5-3843-4EB9-B935-796B7DCEC0F8}"/>
+                <a16:creationId xmlns:a16="http://schemas.microsoft.com/office/drawing/2014/main" id="{04C55AAA-0357-49CC-8346-F76C8F25DEA2}"/>
               </a:ext>
             </a:extLst>
           </p:cNvPr>
@@ -7532,7 +7532,7 @@
           <p:cNvPr id="11" name="core-body-1">
             <a:extLst xmlns:a="http://schemas.openxmlformats.org/drawingml/2006/main">
               <a:ext uri="{FF2B5EF4-FFF2-40B4-BE49-F238E27FC236}">
-                <a16:creationId xmlns:a16="http://schemas.microsoft.com/office/drawing/2014/main" id="{39017744-CBEE-4D63-8F34-A63F54625186}"/>
+                <a16:creationId xmlns:a16="http://schemas.microsoft.com/office/drawing/2014/main" id="{F844BDFD-D3D3-42DE-9467-051F2B70C561}"/>
               </a:ext>
             </a:extLst>
           </p:cNvPr>
@@ -7596,7 +7596,7 @@
           <p:cNvPr id="12" name="s3-takeaway-rule">
             <a:extLst xmlns:a="http://schemas.openxmlformats.org/drawingml/2006/main">
               <a:ext uri="{FF2B5EF4-FFF2-40B4-BE49-F238E27FC236}">
-                <a16:creationId xmlns:a16="http://schemas.microsoft.com/office/drawing/2014/main" id="{8D8BBEE1-80AF-4EEA-B918-688D3809FB2E}"/>
+                <a16:creationId xmlns:a16="http://schemas.microsoft.com/office/drawing/2014/main" id="{4DBDF1A9-ED29-49DC-8156-20B91CCCB3E2}"/>
               </a:ext>
             </a:extLst>
           </p:cNvPr>
@@ -7629,7 +7629,7 @@
           <p:cNvPr id="13" name="s3-takeaway">
             <a:extLst xmlns:a="http://schemas.openxmlformats.org/drawingml/2006/main">
               <a:ext uri="{FF2B5EF4-FFF2-40B4-BE49-F238E27FC236}">
-                <a16:creationId xmlns:a16="http://schemas.microsoft.com/office/drawing/2014/main" id="{7A10A2A4-2481-40CB-A140-85CD04E6825C}"/>
+                <a16:creationId xmlns:a16="http://schemas.microsoft.com/office/drawing/2014/main" id="{BED7DA0C-6B28-49B1-BF68-5BAD3A4CEE20}"/>
               </a:ext>
             </a:extLst>
           </p:cNvPr>
@@ -7685,7 +7685,7 @@
     </p:spTree>
     <p:extLst>
       <p:ext uri="{BB962C8B-B14F-4D97-AF65-F5344CB8AC3E}">
-        <p14:creationId xmlns:p14="http://schemas.microsoft.com/office/powerpoint/2010/main" val="251995197"/>
+        <p14:creationId xmlns:p14="http://schemas.microsoft.com/office/powerpoint/2010/main" val="954955681"/>
       </p:ext>
     </p:extLst>
   </p:cSld>
@@ -7716,7 +7716,7 @@
           <p:cNvPr id="1" name="s4-rule">
             <a:extLst xmlns:a="http://schemas.openxmlformats.org/drawingml/2006/main">
               <a:ext uri="{FF2B5EF4-FFF2-40B4-BE49-F238E27FC236}">
-                <a16:creationId xmlns:a16="http://schemas.microsoft.com/office/drawing/2014/main" id="{BD4EEB67-7158-4426-8CB0-C05157098741}"/>
+                <a16:creationId xmlns:a16="http://schemas.microsoft.com/office/drawing/2014/main" id="{AD05E86E-12F4-43BE-8CA0-6DEBF4432CF7}"/>
               </a:ext>
             </a:extLst>
           </p:cNvPr>
@@ -7749,7 +7749,7 @@
           <p:cNvPr id="2" name="s4-eyebrow">
             <a:extLst xmlns:a="http://schemas.openxmlformats.org/drawingml/2006/main">
               <a:ext uri="{FF2B5EF4-FFF2-40B4-BE49-F238E27FC236}">
-                <a16:creationId xmlns:a16="http://schemas.microsoft.com/office/drawing/2014/main" id="{6CCF1760-38C3-4C21-BD5A-FCE3C20A9DC1}"/>
+                <a16:creationId xmlns:a16="http://schemas.microsoft.com/office/drawing/2014/main" id="{A7D780BB-305B-452D-95A4-00C55E9D2FAF}"/>
               </a:ext>
             </a:extLst>
           </p:cNvPr>
@@ -7807,7 +7807,7 @@
           <p:cNvPr id="3" name="s4-title">
             <a:extLst xmlns:a="http://schemas.openxmlformats.org/drawingml/2006/main">
               <a:ext uri="{FF2B5EF4-FFF2-40B4-BE49-F238E27FC236}">
-                <a16:creationId xmlns:a16="http://schemas.microsoft.com/office/drawing/2014/main" id="{CEAAB200-43CE-4832-ACD4-55240CD4E798}"/>
+                <a16:creationId xmlns:a16="http://schemas.microsoft.com/office/drawing/2014/main" id="{B9263076-0339-4029-B49C-75A824760CDA}"/>
               </a:ext>
             </a:extLst>
           </p:cNvPr>
@@ -7865,7 +7865,7 @@
           <p:cNvPr id="4" name="s4-footer">
             <a:extLst xmlns:a="http://schemas.openxmlformats.org/drawingml/2006/main">
               <a:ext uri="{FF2B5EF4-FFF2-40B4-BE49-F238E27FC236}">
-                <a16:creationId xmlns:a16="http://schemas.microsoft.com/office/drawing/2014/main" id="{935FD7A2-C434-4EF9-8691-26F35FF149FC}"/>
+                <a16:creationId xmlns:a16="http://schemas.microsoft.com/office/drawing/2014/main" id="{AAAE71E5-98C1-4897-A1CE-D55F405D8F09}"/>
               </a:ext>
             </a:extLst>
           </p:cNvPr>
@@ -7896,7 +7896,7 @@
           <p:cNvPr id="5" name="s4-identity">
             <a:extLst xmlns:a="http://schemas.openxmlformats.org/drawingml/2006/main">
               <a:ext uri="{FF2B5EF4-FFF2-40B4-BE49-F238E27FC236}">
-                <a16:creationId xmlns:a16="http://schemas.microsoft.com/office/drawing/2014/main" id="{4B761BA6-1E3D-4D9F-A98C-BDF29C2F374B}"/>
+                <a16:creationId xmlns:a16="http://schemas.microsoft.com/office/drawing/2014/main" id="{348B9A29-1F97-4BF9-87D7-C0B10D3B9797}"/>
               </a:ext>
             </a:extLst>
           </p:cNvPr>
@@ -7954,7 +7954,7 @@
           <p:cNvPr id="6" name="core-no-0">
             <a:extLst xmlns:a="http://schemas.openxmlformats.org/drawingml/2006/main">
               <a:ext uri="{FF2B5EF4-FFF2-40B4-BE49-F238E27FC236}">
-                <a16:creationId xmlns:a16="http://schemas.microsoft.com/office/drawing/2014/main" id="{047C0E3B-8600-4FF4-98CF-A059BDDE87F0}"/>
+                <a16:creationId xmlns:a16="http://schemas.microsoft.com/office/drawing/2014/main" id="{7FC4BD9E-C928-43F0-9491-0FFA43502427}"/>
               </a:ext>
             </a:extLst>
           </p:cNvPr>
@@ -8012,7 +8012,7 @@
           <p:cNvPr id="7" name="core-label-0">
             <a:extLst xmlns:a="http://schemas.openxmlformats.org/drawingml/2006/main">
               <a:ext uri="{FF2B5EF4-FFF2-40B4-BE49-F238E27FC236}">
-                <a16:creationId xmlns:a16="http://schemas.microsoft.com/office/drawing/2014/main" id="{B9BABC87-B444-4D04-963D-FBF211327E75}"/>
+                <a16:creationId xmlns:a16="http://schemas.microsoft.com/office/drawing/2014/main" id="{5C79245F-A346-442E-9A42-842E9832CC90}"/>
               </a:ext>
             </a:extLst>
           </p:cNvPr>
@@ -8070,7 +8070,7 @@
           <p:cNvPr id="8" name="core-body-0">
             <a:extLst xmlns:a="http://schemas.openxmlformats.org/drawingml/2006/main">
               <a:ext uri="{FF2B5EF4-FFF2-40B4-BE49-F238E27FC236}">
-                <a16:creationId xmlns:a16="http://schemas.microsoft.com/office/drawing/2014/main" id="{AAD77BA2-8F2F-4FFC-9F62-59BE8390A729}"/>
+                <a16:creationId xmlns:a16="http://schemas.microsoft.com/office/drawing/2014/main" id="{D0F14F0B-CA58-4710-BC26-F523B32F5FA5}"/>
               </a:ext>
             </a:extLst>
           </p:cNvPr>
@@ -8134,7 +8134,7 @@
           <p:cNvPr id="9" name="core-no-1">
             <a:extLst xmlns:a="http://schemas.openxmlformats.org/drawingml/2006/main">
               <a:ext uri="{FF2B5EF4-FFF2-40B4-BE49-F238E27FC236}">
-                <a16:creationId xmlns:a16="http://schemas.microsoft.com/office/drawing/2014/main" id="{31C1AA8A-F17C-4108-B41B-6B5CC6483F68}"/>
+                <a16:creationId xmlns:a16="http://schemas.microsoft.com/office/drawing/2014/main" id="{0E17A9EF-41AD-4329-AC5F-1EED2FBBF5E3}"/>
               </a:ext>
             </a:extLst>
           </p:cNvPr>
@@ -8192,7 +8192,7 @@
           <p:cNvPr id="10" name="core-label-1">
             <a:extLst xmlns:a="http://schemas.openxmlformats.org/drawingml/2006/main">
               <a:ext uri="{FF2B5EF4-FFF2-40B4-BE49-F238E27FC236}">
-                <a16:creationId xmlns:a16="http://schemas.microsoft.com/office/drawing/2014/main" id="{9455814E-02FB-4E2C-B39E-9D73E1B4C3DE}"/>
+                <a16:creationId xmlns:a16="http://schemas.microsoft.com/office/drawing/2014/main" id="{B00B322F-DF1B-431C-A849-C714CF028846}"/>
               </a:ext>
             </a:extLst>
           </p:cNvPr>
@@ -8250,7 +8250,7 @@
           <p:cNvPr id="11" name="core-body-1">
             <a:extLst xmlns:a="http://schemas.openxmlformats.org/drawingml/2006/main">
               <a:ext uri="{FF2B5EF4-FFF2-40B4-BE49-F238E27FC236}">
-                <a16:creationId xmlns:a16="http://schemas.microsoft.com/office/drawing/2014/main" id="{D4EC7AC6-53FD-4C65-BE54-70C7C65D5F70}"/>
+                <a16:creationId xmlns:a16="http://schemas.microsoft.com/office/drawing/2014/main" id="{0DCC5157-B071-428B-A3E6-CB4B12F62E13}"/>
               </a:ext>
             </a:extLst>
           </p:cNvPr>
@@ -8314,7 +8314,7 @@
           <p:cNvPr id="12" name="s4-takeaway-rule">
             <a:extLst xmlns:a="http://schemas.openxmlformats.org/drawingml/2006/main">
               <a:ext uri="{FF2B5EF4-FFF2-40B4-BE49-F238E27FC236}">
-                <a16:creationId xmlns:a16="http://schemas.microsoft.com/office/drawing/2014/main" id="{94E113CB-095C-481C-B96E-B08B35D32DCF}"/>
+                <a16:creationId xmlns:a16="http://schemas.microsoft.com/office/drawing/2014/main" id="{2112A49F-0805-4481-A449-AF792E8701BF}"/>
               </a:ext>
             </a:extLst>
           </p:cNvPr>
@@ -8347,7 +8347,7 @@
           <p:cNvPr id="13" name="s4-takeaway">
             <a:extLst xmlns:a="http://schemas.openxmlformats.org/drawingml/2006/main">
               <a:ext uri="{FF2B5EF4-FFF2-40B4-BE49-F238E27FC236}">
-                <a16:creationId xmlns:a16="http://schemas.microsoft.com/office/drawing/2014/main" id="{DB835978-CBA8-404D-8D35-053646AFA6BC}"/>
+                <a16:creationId xmlns:a16="http://schemas.microsoft.com/office/drawing/2014/main" id="{C0E67907-5E51-4F0D-981A-59F4F2EF70DA}"/>
               </a:ext>
             </a:extLst>
           </p:cNvPr>
@@ -8403,7 +8403,7 @@
     </p:spTree>
     <p:extLst>
       <p:ext uri="{BB962C8B-B14F-4D97-AF65-F5344CB8AC3E}">
-        <p14:creationId xmlns:p14="http://schemas.microsoft.com/office/powerpoint/2010/main" val="1612552"/>
+        <p14:creationId xmlns:p14="http://schemas.microsoft.com/office/powerpoint/2010/main" val="94807022"/>
       </p:ext>
     </p:extLst>
   </p:cSld>
@@ -8434,7 +8434,7 @@
           <p:cNvPr id="1" name="s5-rule">
             <a:extLst xmlns:a="http://schemas.openxmlformats.org/drawingml/2006/main">
               <a:ext uri="{FF2B5EF4-FFF2-40B4-BE49-F238E27FC236}">
-                <a16:creationId xmlns:a16="http://schemas.microsoft.com/office/drawing/2014/main" id="{35498A14-80E3-4A5F-BCC5-025B3034E626}"/>
+                <a16:creationId xmlns:a16="http://schemas.microsoft.com/office/drawing/2014/main" id="{C505AE22-A0F0-424F-B525-73419AD183BB}"/>
               </a:ext>
             </a:extLst>
           </p:cNvPr>
@@ -8467,7 +8467,7 @@
           <p:cNvPr id="2" name="s5-eyebrow">
             <a:extLst xmlns:a="http://schemas.openxmlformats.org/drawingml/2006/main">
               <a:ext uri="{FF2B5EF4-FFF2-40B4-BE49-F238E27FC236}">
-                <a16:creationId xmlns:a16="http://schemas.microsoft.com/office/drawing/2014/main" id="{77BF5E07-BC99-4C62-8292-3A91081BA0EF}"/>
+                <a16:creationId xmlns:a16="http://schemas.microsoft.com/office/drawing/2014/main" id="{20D3DA39-F864-4052-A0B5-C2F489CD3ABE}"/>
               </a:ext>
             </a:extLst>
           </p:cNvPr>
@@ -8525,7 +8525,7 @@
           <p:cNvPr id="3" name="s5-title">
             <a:extLst xmlns:a="http://schemas.openxmlformats.org/drawingml/2006/main">
               <a:ext uri="{FF2B5EF4-FFF2-40B4-BE49-F238E27FC236}">
-                <a16:creationId xmlns:a16="http://schemas.microsoft.com/office/drawing/2014/main" id="{DC786F90-F96E-4DA3-B15A-FFF76595131D}"/>
+                <a16:creationId xmlns:a16="http://schemas.microsoft.com/office/drawing/2014/main" id="{CD33E7DB-650F-4095-A075-67B80ACA177A}"/>
               </a:ext>
             </a:extLst>
           </p:cNvPr>
@@ -8583,7 +8583,7 @@
           <p:cNvPr id="4" name="s5-footer">
             <a:extLst xmlns:a="http://schemas.openxmlformats.org/drawingml/2006/main">
               <a:ext uri="{FF2B5EF4-FFF2-40B4-BE49-F238E27FC236}">
-                <a16:creationId xmlns:a16="http://schemas.microsoft.com/office/drawing/2014/main" id="{BE781C48-C3C9-437D-A5FD-660E899459FA}"/>
+                <a16:creationId xmlns:a16="http://schemas.microsoft.com/office/drawing/2014/main" id="{6A572E3F-8AA3-4EAA-B36D-B3CA7A1E693A}"/>
               </a:ext>
             </a:extLst>
           </p:cNvPr>
@@ -8614,7 +8614,7 @@
           <p:cNvPr id="5" name="s5-identity">
             <a:extLst xmlns:a="http://schemas.openxmlformats.org/drawingml/2006/main">
               <a:ext uri="{FF2B5EF4-FFF2-40B4-BE49-F238E27FC236}">
-                <a16:creationId xmlns:a16="http://schemas.microsoft.com/office/drawing/2014/main" id="{04ABE1F9-630E-42F9-B3A3-AC5ADF8F9359}"/>
+                <a16:creationId xmlns:a16="http://schemas.microsoft.com/office/drawing/2014/main" id="{4B0DE8CC-9B78-4E68-BBC3-BC244EF8DB26}"/>
               </a:ext>
             </a:extLst>
           </p:cNvPr>
@@ -8672,7 +8672,7 @@
           <p:cNvPr id="6" name="core-no-0">
             <a:extLst xmlns:a="http://schemas.openxmlformats.org/drawingml/2006/main">
               <a:ext uri="{FF2B5EF4-FFF2-40B4-BE49-F238E27FC236}">
-                <a16:creationId xmlns:a16="http://schemas.microsoft.com/office/drawing/2014/main" id="{EA4C152C-11B7-442C-905B-0BC241B71050}"/>
+                <a16:creationId xmlns:a16="http://schemas.microsoft.com/office/drawing/2014/main" id="{EC8AF9B6-201B-415E-84BF-33E502339DD7}"/>
               </a:ext>
             </a:extLst>
           </p:cNvPr>
@@ -8730,7 +8730,7 @@
           <p:cNvPr id="7" name="core-label-0">
             <a:extLst xmlns:a="http://schemas.openxmlformats.org/drawingml/2006/main">
               <a:ext uri="{FF2B5EF4-FFF2-40B4-BE49-F238E27FC236}">
-                <a16:creationId xmlns:a16="http://schemas.microsoft.com/office/drawing/2014/main" id="{CDA48DF6-21E8-426C-B5A0-C5D97BD3DA5C}"/>
+                <a16:creationId xmlns:a16="http://schemas.microsoft.com/office/drawing/2014/main" id="{520C132C-C8CF-4BDE-95FF-0A3958B2FA15}"/>
               </a:ext>
             </a:extLst>
           </p:cNvPr>
@@ -8788,7 +8788,7 @@
           <p:cNvPr id="8" name="core-body-0">
             <a:extLst xmlns:a="http://schemas.openxmlformats.org/drawingml/2006/main">
               <a:ext uri="{FF2B5EF4-FFF2-40B4-BE49-F238E27FC236}">
-                <a16:creationId xmlns:a16="http://schemas.microsoft.com/office/drawing/2014/main" id="{4768CC97-393C-4708-ADF5-32E7D5C4E653}"/>
+                <a16:creationId xmlns:a16="http://schemas.microsoft.com/office/drawing/2014/main" id="{1037EB6B-F2F3-455C-8E0D-F53E41B968D8}"/>
               </a:ext>
             </a:extLst>
           </p:cNvPr>
@@ -8852,7 +8852,7 @@
           <p:cNvPr id="9" name="core-no-1">
             <a:extLst xmlns:a="http://schemas.openxmlformats.org/drawingml/2006/main">
               <a:ext uri="{FF2B5EF4-FFF2-40B4-BE49-F238E27FC236}">
-                <a16:creationId xmlns:a16="http://schemas.microsoft.com/office/drawing/2014/main" id="{FA2A809D-96D5-48CD-8067-AAAA2C90637C}"/>
+                <a16:creationId xmlns:a16="http://schemas.microsoft.com/office/drawing/2014/main" id="{A3B34C28-964D-41A6-945E-09098AFCD8F4}"/>
               </a:ext>
             </a:extLst>
           </p:cNvPr>
@@ -8910,7 +8910,7 @@
           <p:cNvPr id="10" name="core-label-1">
             <a:extLst xmlns:a="http://schemas.openxmlformats.org/drawingml/2006/main">
               <a:ext uri="{FF2B5EF4-FFF2-40B4-BE49-F238E27FC236}">
-                <a16:creationId xmlns:a16="http://schemas.microsoft.com/office/drawing/2014/main" id="{41144FCE-687B-4087-814F-2DE701A6FBDE}"/>
+                <a16:creationId xmlns:a16="http://schemas.microsoft.com/office/drawing/2014/main" id="{C0D02A38-0A46-45A0-AEFE-8E14B20C303C}"/>
               </a:ext>
             </a:extLst>
           </p:cNvPr>
@@ -8968,7 +8968,7 @@
           <p:cNvPr id="11" name="core-body-1">
             <a:extLst xmlns:a="http://schemas.openxmlformats.org/drawingml/2006/main">
               <a:ext uri="{FF2B5EF4-FFF2-40B4-BE49-F238E27FC236}">
-                <a16:creationId xmlns:a16="http://schemas.microsoft.com/office/drawing/2014/main" id="{205FCC28-BC60-43CC-98F4-AEADF772B8C6}"/>
+                <a16:creationId xmlns:a16="http://schemas.microsoft.com/office/drawing/2014/main" id="{F98AE321-7C49-4153-9BED-FF4701DB3836}"/>
               </a:ext>
             </a:extLst>
           </p:cNvPr>
@@ -9032,7 +9032,7 @@
           <p:cNvPr id="12" name="s5-takeaway-rule">
             <a:extLst xmlns:a="http://schemas.openxmlformats.org/drawingml/2006/main">
               <a:ext uri="{FF2B5EF4-FFF2-40B4-BE49-F238E27FC236}">
-                <a16:creationId xmlns:a16="http://schemas.microsoft.com/office/drawing/2014/main" id="{A8E4F8EE-4824-4848-9587-B642DA3543B8}"/>
+                <a16:creationId xmlns:a16="http://schemas.microsoft.com/office/drawing/2014/main" id="{CEC2F227-F708-466F-A178-C3163D8C6A96}"/>
               </a:ext>
             </a:extLst>
           </p:cNvPr>
@@ -9065,7 +9065,7 @@
           <p:cNvPr id="13" name="s5-takeaway">
             <a:extLst xmlns:a="http://schemas.openxmlformats.org/drawingml/2006/main">
               <a:ext uri="{FF2B5EF4-FFF2-40B4-BE49-F238E27FC236}">
-                <a16:creationId xmlns:a16="http://schemas.microsoft.com/office/drawing/2014/main" id="{06B94E91-91BE-431D-96D8-469C1BC26ACD}"/>
+                <a16:creationId xmlns:a16="http://schemas.microsoft.com/office/drawing/2014/main" id="{FF26A018-89B0-408F-B122-6FF4725C039E}"/>
               </a:ext>
             </a:extLst>
           </p:cNvPr>
@@ -9121,7 +9121,7 @@
     </p:spTree>
     <p:extLst>
       <p:ext uri="{BB962C8B-B14F-4D97-AF65-F5344CB8AC3E}">
-        <p14:creationId xmlns:p14="http://schemas.microsoft.com/office/powerpoint/2010/main" val="614236822"/>
+        <p14:creationId xmlns:p14="http://schemas.microsoft.com/office/powerpoint/2010/main" val="314961547"/>
       </p:ext>
     </p:extLst>
   </p:cSld>
@@ -9152,7 +9152,7 @@
           <p:cNvPr id="1" name="s6-rule">
             <a:extLst xmlns:a="http://schemas.openxmlformats.org/drawingml/2006/main">
               <a:ext uri="{FF2B5EF4-FFF2-40B4-BE49-F238E27FC236}">
-                <a16:creationId xmlns:a16="http://schemas.microsoft.com/office/drawing/2014/main" id="{3EF05959-5DE2-46D9-B3E2-C5CF0D1DC023}"/>
+                <a16:creationId xmlns:a16="http://schemas.microsoft.com/office/drawing/2014/main" id="{C7815D9A-E73F-4A5D-9B2B-BB17AD7FB219}"/>
               </a:ext>
             </a:extLst>
           </p:cNvPr>
@@ -9185,7 +9185,7 @@
           <p:cNvPr id="2" name="s6-eyebrow">
             <a:extLst xmlns:a="http://schemas.openxmlformats.org/drawingml/2006/main">
               <a:ext uri="{FF2B5EF4-FFF2-40B4-BE49-F238E27FC236}">
-                <a16:creationId xmlns:a16="http://schemas.microsoft.com/office/drawing/2014/main" id="{6218888F-DA62-4902-933B-827FB8F43134}"/>
+                <a16:creationId xmlns:a16="http://schemas.microsoft.com/office/drawing/2014/main" id="{BAFDF140-9AEB-47C7-95C1-ED4FC59630E4}"/>
               </a:ext>
             </a:extLst>
           </p:cNvPr>
@@ -9243,7 +9243,7 @@
           <p:cNvPr id="3" name="s6-title">
             <a:extLst xmlns:a="http://schemas.openxmlformats.org/drawingml/2006/main">
               <a:ext uri="{FF2B5EF4-FFF2-40B4-BE49-F238E27FC236}">
-                <a16:creationId xmlns:a16="http://schemas.microsoft.com/office/drawing/2014/main" id="{91FCED93-A8E8-432D-9975-24BA1B83B967}"/>
+                <a16:creationId xmlns:a16="http://schemas.microsoft.com/office/drawing/2014/main" id="{87AEC01B-FCC9-420B-98CE-A3C3B5DCFB71}"/>
               </a:ext>
             </a:extLst>
           </p:cNvPr>
@@ -9301,7 +9301,7 @@
           <p:cNvPr id="4" name="s6-footer">
             <a:extLst xmlns:a="http://schemas.openxmlformats.org/drawingml/2006/main">
               <a:ext uri="{FF2B5EF4-FFF2-40B4-BE49-F238E27FC236}">
-                <a16:creationId xmlns:a16="http://schemas.microsoft.com/office/drawing/2014/main" id="{27A1AF9C-114F-4BD1-B11E-87441C71E04F}"/>
+                <a16:creationId xmlns:a16="http://schemas.microsoft.com/office/drawing/2014/main" id="{4F39368D-9F7F-45D1-9950-176CA8CB62F2}"/>
               </a:ext>
             </a:extLst>
           </p:cNvPr>
@@ -9332,7 +9332,7 @@
           <p:cNvPr id="5" name="s6-identity">
             <a:extLst xmlns:a="http://schemas.openxmlformats.org/drawingml/2006/main">
               <a:ext uri="{FF2B5EF4-FFF2-40B4-BE49-F238E27FC236}">
-                <a16:creationId xmlns:a16="http://schemas.microsoft.com/office/drawing/2014/main" id="{452A708D-032F-4B63-99EC-912EFE187346}"/>
+                <a16:creationId xmlns:a16="http://schemas.microsoft.com/office/drawing/2014/main" id="{069AB18F-E440-47F5-BFBA-57707F39F510}"/>
               </a:ext>
             </a:extLst>
           </p:cNvPr>
@@ -9390,7 +9390,7 @@
           <p:cNvPr id="6" name="core-no-0">
             <a:extLst xmlns:a="http://schemas.openxmlformats.org/drawingml/2006/main">
               <a:ext uri="{FF2B5EF4-FFF2-40B4-BE49-F238E27FC236}">
-                <a16:creationId xmlns:a16="http://schemas.microsoft.com/office/drawing/2014/main" id="{983F2207-C8E2-4A39-BFFA-33FF6B72A446}"/>
+                <a16:creationId xmlns:a16="http://schemas.microsoft.com/office/drawing/2014/main" id="{58EFE734-506E-4B45-BDC4-CEB451E8DB40}"/>
               </a:ext>
             </a:extLst>
           </p:cNvPr>
@@ -9448,7 +9448,7 @@
           <p:cNvPr id="7" name="core-label-0">
             <a:extLst xmlns:a="http://schemas.openxmlformats.org/drawingml/2006/main">
               <a:ext uri="{FF2B5EF4-FFF2-40B4-BE49-F238E27FC236}">
-                <a16:creationId xmlns:a16="http://schemas.microsoft.com/office/drawing/2014/main" id="{A490435A-73F4-4600-9F98-D596838828DC}"/>
+                <a16:creationId xmlns:a16="http://schemas.microsoft.com/office/drawing/2014/main" id="{C706809A-C43B-42C6-8D57-5DC5F4FF2358}"/>
               </a:ext>
             </a:extLst>
           </p:cNvPr>
@@ -9506,7 +9506,7 @@
           <p:cNvPr id="8" name="core-body-0">
             <a:extLst xmlns:a="http://schemas.openxmlformats.org/drawingml/2006/main">
               <a:ext uri="{FF2B5EF4-FFF2-40B4-BE49-F238E27FC236}">
-                <a16:creationId xmlns:a16="http://schemas.microsoft.com/office/drawing/2014/main" id="{C2D6BA37-FBF2-4538-A0D1-A35DA3ECFBB1}"/>
+                <a16:creationId xmlns:a16="http://schemas.microsoft.com/office/drawing/2014/main" id="{D4A8B588-0ED2-4BD7-A091-6A7B55B46CFF}"/>
               </a:ext>
             </a:extLst>
           </p:cNvPr>
@@ -9570,7 +9570,7 @@
           <p:cNvPr id="9" name="core-no-1">
             <a:extLst xmlns:a="http://schemas.openxmlformats.org/drawingml/2006/main">
               <a:ext uri="{FF2B5EF4-FFF2-40B4-BE49-F238E27FC236}">
-                <a16:creationId xmlns:a16="http://schemas.microsoft.com/office/drawing/2014/main" id="{E8273060-E17C-4559-9F4B-7FF081A492B1}"/>
+                <a16:creationId xmlns:a16="http://schemas.microsoft.com/office/drawing/2014/main" id="{4CBAC58E-C9A1-48E1-A2C8-0BEDA3661C72}"/>
               </a:ext>
             </a:extLst>
           </p:cNvPr>
@@ -9628,7 +9628,7 @@
           <p:cNvPr id="10" name="core-body-1">
             <a:extLst xmlns:a="http://schemas.openxmlformats.org/drawingml/2006/main">
               <a:ext uri="{FF2B5EF4-FFF2-40B4-BE49-F238E27FC236}">
-                <a16:creationId xmlns:a16="http://schemas.microsoft.com/office/drawing/2014/main" id="{E3AB8DE7-EF44-4C27-A8D5-47466B89DD8A}"/>
+                <a16:creationId xmlns:a16="http://schemas.microsoft.com/office/drawing/2014/main" id="{71D22ACB-98EE-43FE-9D81-86C8B86D1401}"/>
               </a:ext>
             </a:extLst>
           </p:cNvPr>
@@ -9692,7 +9692,7 @@
           <p:cNvPr id="11" name="core-no-2">
             <a:extLst xmlns:a="http://schemas.openxmlformats.org/drawingml/2006/main">
               <a:ext uri="{FF2B5EF4-FFF2-40B4-BE49-F238E27FC236}">
-                <a16:creationId xmlns:a16="http://schemas.microsoft.com/office/drawing/2014/main" id="{77898684-2290-4D4C-B193-BB3422B28DDC}"/>
+                <a16:creationId xmlns:a16="http://schemas.microsoft.com/office/drawing/2014/main" id="{BFE31064-636E-4606-8C11-F68AA77A0071}"/>
               </a:ext>
             </a:extLst>
           </p:cNvPr>
@@ -9750,7 +9750,7 @@
           <p:cNvPr id="12" name="core-body-2">
             <a:extLst xmlns:a="http://schemas.openxmlformats.org/drawingml/2006/main">
               <a:ext uri="{FF2B5EF4-FFF2-40B4-BE49-F238E27FC236}">
-                <a16:creationId xmlns:a16="http://schemas.microsoft.com/office/drawing/2014/main" id="{72A114ED-5204-4828-B889-9AF387D2B4CF}"/>
+                <a16:creationId xmlns:a16="http://schemas.microsoft.com/office/drawing/2014/main" id="{D580BC77-7552-445E-8397-49DD2D88113D}"/>
               </a:ext>
             </a:extLst>
           </p:cNvPr>
@@ -9814,7 +9814,7 @@
           <p:cNvPr id="13" name="s6-takeaway-rule">
             <a:extLst xmlns:a="http://schemas.openxmlformats.org/drawingml/2006/main">
               <a:ext uri="{FF2B5EF4-FFF2-40B4-BE49-F238E27FC236}">
-                <a16:creationId xmlns:a16="http://schemas.microsoft.com/office/drawing/2014/main" id="{A0ADFE05-2B19-412E-99A1-4F534779F3DE}"/>
+                <a16:creationId xmlns:a16="http://schemas.microsoft.com/office/drawing/2014/main" id="{6FDC305B-8142-4BA0-B121-F32C6DDF62E7}"/>
               </a:ext>
             </a:extLst>
           </p:cNvPr>
@@ -9847,7 +9847,7 @@
           <p:cNvPr id="14" name="s6-takeaway">
             <a:extLst xmlns:a="http://schemas.openxmlformats.org/drawingml/2006/main">
               <a:ext uri="{FF2B5EF4-FFF2-40B4-BE49-F238E27FC236}">
-                <a16:creationId xmlns:a16="http://schemas.microsoft.com/office/drawing/2014/main" id="{7A55FA9C-6EDF-44FC-8133-AFB9184E202B}"/>
+                <a16:creationId xmlns:a16="http://schemas.microsoft.com/office/drawing/2014/main" id="{934A3B10-2EF9-4122-BE22-72EFF440E3CE}"/>
               </a:ext>
             </a:extLst>
           </p:cNvPr>
@@ -9903,7 +9903,7 @@
     </p:spTree>
     <p:extLst>
       <p:ext uri="{BB962C8B-B14F-4D97-AF65-F5344CB8AC3E}">
-        <p14:creationId xmlns:p14="http://schemas.microsoft.com/office/powerpoint/2010/main" val="1180035139"/>
+        <p14:creationId xmlns:p14="http://schemas.microsoft.com/office/powerpoint/2010/main" val="1288380544"/>
       </p:ext>
     </p:extLst>
   </p:cSld>
@@ -9934,7 +9934,7 @@
           <p:cNvPr id="1" name="s7-rule">
             <a:extLst xmlns:a="http://schemas.openxmlformats.org/drawingml/2006/main">
               <a:ext uri="{FF2B5EF4-FFF2-40B4-BE49-F238E27FC236}">
-                <a16:creationId xmlns:a16="http://schemas.microsoft.com/office/drawing/2014/main" id="{1751DCB9-B4DC-4C2B-A26A-16156867B5F4}"/>
+                <a16:creationId xmlns:a16="http://schemas.microsoft.com/office/drawing/2014/main" id="{F3809C00-926F-4D5B-B54D-BFFB53244527}"/>
               </a:ext>
             </a:extLst>
           </p:cNvPr>
@@ -9967,7 +9967,7 @@
           <p:cNvPr id="2" name="s7-eyebrow">
             <a:extLst xmlns:a="http://schemas.openxmlformats.org/drawingml/2006/main">
               <a:ext uri="{FF2B5EF4-FFF2-40B4-BE49-F238E27FC236}">
-                <a16:creationId xmlns:a16="http://schemas.microsoft.com/office/drawing/2014/main" id="{5744B374-69A5-417B-95CA-20B321228813}"/>
+                <a16:creationId xmlns:a16="http://schemas.microsoft.com/office/drawing/2014/main" id="{4DD852A0-F8B9-4E43-B8A7-C2A81A3D4E9F}"/>
               </a:ext>
             </a:extLst>
           </p:cNvPr>
@@ -10025,7 +10025,7 @@
           <p:cNvPr id="3" name="s7-title">
             <a:extLst xmlns:a="http://schemas.openxmlformats.org/drawingml/2006/main">
               <a:ext uri="{FF2B5EF4-FFF2-40B4-BE49-F238E27FC236}">
-                <a16:creationId xmlns:a16="http://schemas.microsoft.com/office/drawing/2014/main" id="{F904C52A-4B95-4EB3-8F1E-806CDB04D5C0}"/>
+                <a16:creationId xmlns:a16="http://schemas.microsoft.com/office/drawing/2014/main" id="{5CBB4678-B291-433F-A92F-CD6E9F36B55E}"/>
               </a:ext>
             </a:extLst>
           </p:cNvPr>
@@ -10083,7 +10083,7 @@
           <p:cNvPr id="4" name="s7-footer">
             <a:extLst xmlns:a="http://schemas.openxmlformats.org/drawingml/2006/main">
               <a:ext uri="{FF2B5EF4-FFF2-40B4-BE49-F238E27FC236}">
-                <a16:creationId xmlns:a16="http://schemas.microsoft.com/office/drawing/2014/main" id="{A2E2ED6C-324F-4877-9333-29CF4700375A}"/>
+                <a16:creationId xmlns:a16="http://schemas.microsoft.com/office/drawing/2014/main" id="{83C65ED7-CC48-4091-834E-320FC9E6C79C}"/>
               </a:ext>
             </a:extLst>
           </p:cNvPr>
@@ -10114,7 +10114,7 @@
           <p:cNvPr id="5" name="s7-identity">
             <a:extLst xmlns:a="http://schemas.openxmlformats.org/drawingml/2006/main">
               <a:ext uri="{FF2B5EF4-FFF2-40B4-BE49-F238E27FC236}">
-                <a16:creationId xmlns:a16="http://schemas.microsoft.com/office/drawing/2014/main" id="{1A282A69-9275-4BE4-96A8-772730FE2FE5}"/>
+                <a16:creationId xmlns:a16="http://schemas.microsoft.com/office/drawing/2014/main" id="{DE3E8703-B9CC-4611-8BC1-58E9274B84BF}"/>
               </a:ext>
             </a:extLst>
           </p:cNvPr>
@@ -10172,7 +10172,7 @@
           <p:cNvPr id="6" name="core-no-0">
             <a:extLst xmlns:a="http://schemas.openxmlformats.org/drawingml/2006/main">
               <a:ext uri="{FF2B5EF4-FFF2-40B4-BE49-F238E27FC236}">
-                <a16:creationId xmlns:a16="http://schemas.microsoft.com/office/drawing/2014/main" id="{B6083B0E-1C0F-4F46-8F04-5FF10584C81B}"/>
+                <a16:creationId xmlns:a16="http://schemas.microsoft.com/office/drawing/2014/main" id="{4F7E3732-8D73-484A-96CB-1D5F050D18C3}"/>
               </a:ext>
             </a:extLst>
           </p:cNvPr>
@@ -10230,7 +10230,7 @@
           <p:cNvPr id="7" name="core-label-0">
             <a:extLst xmlns:a="http://schemas.openxmlformats.org/drawingml/2006/main">
               <a:ext uri="{FF2B5EF4-FFF2-40B4-BE49-F238E27FC236}">
-                <a16:creationId xmlns:a16="http://schemas.microsoft.com/office/drawing/2014/main" id="{59B1A286-163D-4E6F-B1EC-6B7BCB99D06A}"/>
+                <a16:creationId xmlns:a16="http://schemas.microsoft.com/office/drawing/2014/main" id="{CE0550BA-5D54-4907-89F5-4A9C0EAC8BD1}"/>
               </a:ext>
             </a:extLst>
           </p:cNvPr>
@@ -10288,7 +10288,7 @@
           <p:cNvPr id="8" name="core-body-0">
             <a:extLst xmlns:a="http://schemas.openxmlformats.org/drawingml/2006/main">
               <a:ext uri="{FF2B5EF4-FFF2-40B4-BE49-F238E27FC236}">
-                <a16:creationId xmlns:a16="http://schemas.microsoft.com/office/drawing/2014/main" id="{12EF17C2-A227-46B1-8DE5-DC2CC488A0A0}"/>
+                <a16:creationId xmlns:a16="http://schemas.microsoft.com/office/drawing/2014/main" id="{75C820D6-90F2-4FDF-B9B6-CA119DB5E06F}"/>
               </a:ext>
             </a:extLst>
           </p:cNvPr>
@@ -10352,7 +10352,7 @@
           <p:cNvPr id="9" name="core-no-1">
             <a:extLst xmlns:a="http://schemas.openxmlformats.org/drawingml/2006/main">
               <a:ext uri="{FF2B5EF4-FFF2-40B4-BE49-F238E27FC236}">
-                <a16:creationId xmlns:a16="http://schemas.microsoft.com/office/drawing/2014/main" id="{4045B7AE-55FB-4C2B-9689-C6D98B0DFE95}"/>
+                <a16:creationId xmlns:a16="http://schemas.microsoft.com/office/drawing/2014/main" id="{A4A8435C-8C3D-46CA-85E8-04ACC1720932}"/>
               </a:ext>
             </a:extLst>
           </p:cNvPr>
@@ -10410,7 +10410,7 @@
           <p:cNvPr id="10" name="core-body-1">
             <a:extLst xmlns:a="http://schemas.openxmlformats.org/drawingml/2006/main">
               <a:ext uri="{FF2B5EF4-FFF2-40B4-BE49-F238E27FC236}">
-                <a16:creationId xmlns:a16="http://schemas.microsoft.com/office/drawing/2014/main" id="{B3D66DAF-FB86-49B8-A229-6A2DDD45AD6B}"/>
+                <a16:creationId xmlns:a16="http://schemas.microsoft.com/office/drawing/2014/main" id="{789CEF42-A1E1-4E4F-80B6-2886715C8E3E}"/>
               </a:ext>
             </a:extLst>
           </p:cNvPr>
@@ -10474,7 +10474,7 @@
           <p:cNvPr id="11" name="core-no-2">
             <a:extLst xmlns:a="http://schemas.openxmlformats.org/drawingml/2006/main">
               <a:ext uri="{FF2B5EF4-FFF2-40B4-BE49-F238E27FC236}">
-                <a16:creationId xmlns:a16="http://schemas.microsoft.com/office/drawing/2014/main" id="{658FACFC-4CDE-49F3-BC1E-16839DAFEE15}"/>
+                <a16:creationId xmlns:a16="http://schemas.microsoft.com/office/drawing/2014/main" id="{B419125D-3E1A-417E-95D9-12CCBF4DB040}"/>
               </a:ext>
             </a:extLst>
           </p:cNvPr>
@@ -10532,7 +10532,7 @@
           <p:cNvPr id="12" name="core-body-2">
             <a:extLst xmlns:a="http://schemas.openxmlformats.org/drawingml/2006/main">
               <a:ext uri="{FF2B5EF4-FFF2-40B4-BE49-F238E27FC236}">
-                <a16:creationId xmlns:a16="http://schemas.microsoft.com/office/drawing/2014/main" id="{AF8A1939-B90E-42C6-A12A-79DE03349CD4}"/>
+                <a16:creationId xmlns:a16="http://schemas.microsoft.com/office/drawing/2014/main" id="{19CF1FC7-D65D-448F-8084-B89C34994FE4}"/>
               </a:ext>
             </a:extLst>
           </p:cNvPr>
@@ -10596,7 +10596,7 @@
           <p:cNvPr id="13" name="s7-takeaway-rule">
             <a:extLst xmlns:a="http://schemas.openxmlformats.org/drawingml/2006/main">
               <a:ext uri="{FF2B5EF4-FFF2-40B4-BE49-F238E27FC236}">
-                <a16:creationId xmlns:a16="http://schemas.microsoft.com/office/drawing/2014/main" id="{4AD89652-D1F5-49FE-B5D9-EF1707B191F1}"/>
+                <a16:creationId xmlns:a16="http://schemas.microsoft.com/office/drawing/2014/main" id="{0A0ED7A0-9A39-4C5D-9532-675A863512CD}"/>
               </a:ext>
             </a:extLst>
           </p:cNvPr>
@@ -10629,7 +10629,7 @@
           <p:cNvPr id="14" name="s7-takeaway">
             <a:extLst xmlns:a="http://schemas.openxmlformats.org/drawingml/2006/main">
               <a:ext uri="{FF2B5EF4-FFF2-40B4-BE49-F238E27FC236}">
-                <a16:creationId xmlns:a16="http://schemas.microsoft.com/office/drawing/2014/main" id="{82B15E5E-E127-432D-92F1-1EE7F82BD3FA}"/>
+                <a16:creationId xmlns:a16="http://schemas.microsoft.com/office/drawing/2014/main" id="{CE0AC6DD-010D-48B1-927E-BE061F31B9FE}"/>
               </a:ext>
             </a:extLst>
           </p:cNvPr>
@@ -10685,7 +10685,7 @@
     </p:spTree>
     <p:extLst>
       <p:ext uri="{BB962C8B-B14F-4D97-AF65-F5344CB8AC3E}">
-        <p14:creationId xmlns:p14="http://schemas.microsoft.com/office/powerpoint/2010/main" val="652959243"/>
+        <p14:creationId xmlns:p14="http://schemas.microsoft.com/office/powerpoint/2010/main" val="62528331"/>
       </p:ext>
     </p:extLst>
   </p:cSld>
@@ -10716,7 +10716,7 @@
           <p:cNvPr id="1" name="s8-rule">
             <a:extLst xmlns:a="http://schemas.openxmlformats.org/drawingml/2006/main">
               <a:ext uri="{FF2B5EF4-FFF2-40B4-BE49-F238E27FC236}">
-                <a16:creationId xmlns:a16="http://schemas.microsoft.com/office/drawing/2014/main" id="{82E15746-E739-4A10-9A48-F74BD859B931}"/>
+                <a16:creationId xmlns:a16="http://schemas.microsoft.com/office/drawing/2014/main" id="{B0BBDA6A-778E-421C-A34C-ECB62208E90A}"/>
               </a:ext>
             </a:extLst>
           </p:cNvPr>
@@ -10749,7 +10749,7 @@
           <p:cNvPr id="2" name="s8-eyebrow">
             <a:extLst xmlns:a="http://schemas.openxmlformats.org/drawingml/2006/main">
               <a:ext uri="{FF2B5EF4-FFF2-40B4-BE49-F238E27FC236}">
-                <a16:creationId xmlns:a16="http://schemas.microsoft.com/office/drawing/2014/main" id="{9B0FC43B-E9D2-4067-81F3-0EBA69ACDAF9}"/>
+                <a16:creationId xmlns:a16="http://schemas.microsoft.com/office/drawing/2014/main" id="{6372359C-D878-45E7-8C51-F150FE0361D0}"/>
               </a:ext>
             </a:extLst>
           </p:cNvPr>
@@ -10807,7 +10807,7 @@
           <p:cNvPr id="3" name="s8-title">
             <a:extLst xmlns:a="http://schemas.openxmlformats.org/drawingml/2006/main">
               <a:ext uri="{FF2B5EF4-FFF2-40B4-BE49-F238E27FC236}">
-                <a16:creationId xmlns:a16="http://schemas.microsoft.com/office/drawing/2014/main" id="{05E14907-C648-4353-AE51-B835A12BBC07}"/>
+                <a16:creationId xmlns:a16="http://schemas.microsoft.com/office/drawing/2014/main" id="{CB8FCAA5-61F4-41B4-963E-E54866DD58F4}"/>
               </a:ext>
             </a:extLst>
           </p:cNvPr>
@@ -10865,7 +10865,7 @@
           <p:cNvPr id="4" name="s8-footer">
             <a:extLst xmlns:a="http://schemas.openxmlformats.org/drawingml/2006/main">
               <a:ext uri="{FF2B5EF4-FFF2-40B4-BE49-F238E27FC236}">
-                <a16:creationId xmlns:a16="http://schemas.microsoft.com/office/drawing/2014/main" id="{66A9B304-1C90-4BC7-86F4-B65AC6FEE3A5}"/>
+                <a16:creationId xmlns:a16="http://schemas.microsoft.com/office/drawing/2014/main" id="{1789450A-13E2-4223-8899-14A2612E50F1}"/>
               </a:ext>
             </a:extLst>
           </p:cNvPr>
@@ -10896,7 +10896,7 @@
           <p:cNvPr id="5" name="s8-identity">
             <a:extLst xmlns:a="http://schemas.openxmlformats.org/drawingml/2006/main">
               <a:ext uri="{FF2B5EF4-FFF2-40B4-BE49-F238E27FC236}">
-                <a16:creationId xmlns:a16="http://schemas.microsoft.com/office/drawing/2014/main" id="{BB67CEDC-875B-4835-B554-D714FD67AB00}"/>
+                <a16:creationId xmlns:a16="http://schemas.microsoft.com/office/drawing/2014/main" id="{356F152A-60E0-408C-9646-AB56674E91DC}"/>
               </a:ext>
             </a:extLst>
           </p:cNvPr>
@@ -10954,7 +10954,7 @@
           <p:cNvPr id="6" name="core-no-0">
             <a:extLst xmlns:a="http://schemas.openxmlformats.org/drawingml/2006/main">
               <a:ext uri="{FF2B5EF4-FFF2-40B4-BE49-F238E27FC236}">
-                <a16:creationId xmlns:a16="http://schemas.microsoft.com/office/drawing/2014/main" id="{8AE2565F-2D9B-4CA8-85C1-3D221D00CD41}"/>
+                <a16:creationId xmlns:a16="http://schemas.microsoft.com/office/drawing/2014/main" id="{077A2C6F-C981-4E3C-B105-C0CD94C1B3DE}"/>
               </a:ext>
             </a:extLst>
           </p:cNvPr>
@@ -11012,7 +11012,7 @@
           <p:cNvPr id="7" name="core-label-0">
             <a:extLst xmlns:a="http://schemas.openxmlformats.org/drawingml/2006/main">
               <a:ext uri="{FF2B5EF4-FFF2-40B4-BE49-F238E27FC236}">
-                <a16:creationId xmlns:a16="http://schemas.microsoft.com/office/drawing/2014/main" id="{C89D3720-879D-4415-A695-78AB4833D6BD}"/>
+                <a16:creationId xmlns:a16="http://schemas.microsoft.com/office/drawing/2014/main" id="{3580A42D-8876-45F6-B3F3-AEA4988E85EC}"/>
               </a:ext>
             </a:extLst>
           </p:cNvPr>
@@ -11070,7 +11070,7 @@
           <p:cNvPr id="8" name="core-body-0">
             <a:extLst xmlns:a="http://schemas.openxmlformats.org/drawingml/2006/main">
               <a:ext uri="{FF2B5EF4-FFF2-40B4-BE49-F238E27FC236}">
-                <a16:creationId xmlns:a16="http://schemas.microsoft.com/office/drawing/2014/main" id="{2A74C634-01F6-4668-B42C-BBF1774B8503}"/>
+                <a16:creationId xmlns:a16="http://schemas.microsoft.com/office/drawing/2014/main" id="{56FF8978-507C-4286-AC41-5FCA427A69E4}"/>
               </a:ext>
             </a:extLst>
           </p:cNvPr>
@@ -11134,7 +11134,7 @@
           <p:cNvPr id="9" name="core-no-1">
             <a:extLst xmlns:a="http://schemas.openxmlformats.org/drawingml/2006/main">
               <a:ext uri="{FF2B5EF4-FFF2-40B4-BE49-F238E27FC236}">
-                <a16:creationId xmlns:a16="http://schemas.microsoft.com/office/drawing/2014/main" id="{8D467459-BDE5-45F8-80C7-F29D438CE694}"/>
+                <a16:creationId xmlns:a16="http://schemas.microsoft.com/office/drawing/2014/main" id="{C2BCEC5D-0220-41B2-9D07-4579FD04F511}"/>
               </a:ext>
             </a:extLst>
           </p:cNvPr>
@@ -11192,7 +11192,7 @@
           <p:cNvPr id="10" name="core-body-1">
             <a:extLst xmlns:a="http://schemas.openxmlformats.org/drawingml/2006/main">
               <a:ext uri="{FF2B5EF4-FFF2-40B4-BE49-F238E27FC236}">
-                <a16:creationId xmlns:a16="http://schemas.microsoft.com/office/drawing/2014/main" id="{7D7E87F6-91FD-4FDD-A4F4-9ED0C42CDD26}"/>
+                <a16:creationId xmlns:a16="http://schemas.microsoft.com/office/drawing/2014/main" id="{62ABBBA5-14E4-42EA-9F6E-744E16872663}"/>
               </a:ext>
             </a:extLst>
           </p:cNvPr>
@@ -11256,7 +11256,7 @@
           <p:cNvPr id="11" name="core-no-2">
             <a:extLst xmlns:a="http://schemas.openxmlformats.org/drawingml/2006/main">
               <a:ext uri="{FF2B5EF4-FFF2-40B4-BE49-F238E27FC236}">
-                <a16:creationId xmlns:a16="http://schemas.microsoft.com/office/drawing/2014/main" id="{4902E244-3B67-47C2-B5B1-A9E15D8C0293}"/>
+                <a16:creationId xmlns:a16="http://schemas.microsoft.com/office/drawing/2014/main" id="{F8F18D94-DC8A-460D-9C48-06247016D6EB}"/>
               </a:ext>
             </a:extLst>
           </p:cNvPr>
@@ -11314,7 +11314,7 @@
           <p:cNvPr id="12" name="core-body-2">
             <a:extLst xmlns:a="http://schemas.openxmlformats.org/drawingml/2006/main">
               <a:ext uri="{FF2B5EF4-FFF2-40B4-BE49-F238E27FC236}">
-                <a16:creationId xmlns:a16="http://schemas.microsoft.com/office/drawing/2014/main" id="{BD9ADAFD-3183-44BF-869E-125EF5CEDDE2}"/>
+                <a16:creationId xmlns:a16="http://schemas.microsoft.com/office/drawing/2014/main" id="{B3CABF2E-CD75-4FC6-9DCF-2C0E6F4CB354}"/>
               </a:ext>
             </a:extLst>
           </p:cNvPr>
@@ -11378,7 +11378,7 @@
           <p:cNvPr id="13" name="s8-takeaway-rule">
             <a:extLst xmlns:a="http://schemas.openxmlformats.org/drawingml/2006/main">
               <a:ext uri="{FF2B5EF4-FFF2-40B4-BE49-F238E27FC236}">
-                <a16:creationId xmlns:a16="http://schemas.microsoft.com/office/drawing/2014/main" id="{3D6D4D35-BB20-44D4-950F-0F22E7C2B798}"/>
+                <a16:creationId xmlns:a16="http://schemas.microsoft.com/office/drawing/2014/main" id="{59AC90BE-42F1-4604-8BB0-F8F83ACCFDC7}"/>
               </a:ext>
             </a:extLst>
           </p:cNvPr>
@@ -11411,7 +11411,7 @@
           <p:cNvPr id="14" name="s8-takeaway">
             <a:extLst xmlns:a="http://schemas.openxmlformats.org/drawingml/2006/main">
               <a:ext uri="{FF2B5EF4-FFF2-40B4-BE49-F238E27FC236}">
-                <a16:creationId xmlns:a16="http://schemas.microsoft.com/office/drawing/2014/main" id="{4450F270-D785-4BED-B60B-ACF5BA85229C}"/>
+                <a16:creationId xmlns:a16="http://schemas.microsoft.com/office/drawing/2014/main" id="{07794917-8135-4968-A8E1-22DC3C122681}"/>
               </a:ext>
             </a:extLst>
           </p:cNvPr>
@@ -11467,7 +11467,7 @@
     </p:spTree>
     <p:extLst>
       <p:ext uri="{BB962C8B-B14F-4D97-AF65-F5344CB8AC3E}">
-        <p14:creationId xmlns:p14="http://schemas.microsoft.com/office/powerpoint/2010/main" val="220768410"/>
+        <p14:creationId xmlns:p14="http://schemas.microsoft.com/office/powerpoint/2010/main" val="1026957826"/>
       </p:ext>
     </p:extLst>
   </p:cSld>
@@ -11498,7 +11498,7 @@
           <p:cNvPr id="1" name="s9-rule">
             <a:extLst xmlns:a="http://schemas.openxmlformats.org/drawingml/2006/main">
               <a:ext uri="{FF2B5EF4-FFF2-40B4-BE49-F238E27FC236}">
-                <a16:creationId xmlns:a16="http://schemas.microsoft.com/office/drawing/2014/main" id="{1E70630D-776D-4096-A100-2922587A61B3}"/>
+                <a16:creationId xmlns:a16="http://schemas.microsoft.com/office/drawing/2014/main" id="{463C5135-C6D8-4E36-9B23-570E90A2633B}"/>
               </a:ext>
             </a:extLst>
           </p:cNvPr>
@@ -11531,7 +11531,7 @@
           <p:cNvPr id="2" name="s9-eyebrow">
             <a:extLst xmlns:a="http://schemas.openxmlformats.org/drawingml/2006/main">
               <a:ext uri="{FF2B5EF4-FFF2-40B4-BE49-F238E27FC236}">
-                <a16:creationId xmlns:a16="http://schemas.microsoft.com/office/drawing/2014/main" id="{75A886DF-2AC6-4563-9CF7-D7857B5D5E86}"/>
+                <a16:creationId xmlns:a16="http://schemas.microsoft.com/office/drawing/2014/main" id="{965C0FFA-5A22-4D9C-89C5-DFA116EDD62A}"/>
               </a:ext>
             </a:extLst>
           </p:cNvPr>
@@ -11589,7 +11589,7 @@
           <p:cNvPr id="3" name="s9-title">
             <a:extLst xmlns:a="http://schemas.openxmlformats.org/drawingml/2006/main">
               <a:ext uri="{FF2B5EF4-FFF2-40B4-BE49-F238E27FC236}">
-                <a16:creationId xmlns:a16="http://schemas.microsoft.com/office/drawing/2014/main" id="{1441D758-DDFF-4D79-9DAA-BD3D5E96509D}"/>
+                <a16:creationId xmlns:a16="http://schemas.microsoft.com/office/drawing/2014/main" id="{98050603-F1B4-4F73-AD4C-98CE958AE559}"/>
               </a:ext>
             </a:extLst>
           </p:cNvPr>
@@ -11647,7 +11647,7 @@
           <p:cNvPr id="4" name="s9-footer">
             <a:extLst xmlns:a="http://schemas.openxmlformats.org/drawingml/2006/main">
               <a:ext uri="{FF2B5EF4-FFF2-40B4-BE49-F238E27FC236}">
-                <a16:creationId xmlns:a16="http://schemas.microsoft.com/office/drawing/2014/main" id="{00225490-9EC0-4AD6-ADF7-12D086CEC889}"/>
+                <a16:creationId xmlns:a16="http://schemas.microsoft.com/office/drawing/2014/main" id="{E9D5A375-979E-4981-B816-CEACCDD6213E}"/>
               </a:ext>
             </a:extLst>
           </p:cNvPr>
@@ -11678,7 +11678,7 @@
           <p:cNvPr id="5" name="s9-identity">
             <a:extLst xmlns:a="http://schemas.openxmlformats.org/drawingml/2006/main">
               <a:ext uri="{FF2B5EF4-FFF2-40B4-BE49-F238E27FC236}">
-                <a16:creationId xmlns:a16="http://schemas.microsoft.com/office/drawing/2014/main" id="{77C8888F-7AE7-4137-84C5-C12A5B5AAEB7}"/>
+                <a16:creationId xmlns:a16="http://schemas.microsoft.com/office/drawing/2014/main" id="{ADFC3BFF-BFEF-49E9-8453-B080B258F9C1}"/>
               </a:ext>
             </a:extLst>
           </p:cNvPr>
@@ -11736,7 +11736,7 @@
           <p:cNvPr id="6" name="core-no-0">
             <a:extLst xmlns:a="http://schemas.openxmlformats.org/drawingml/2006/main">
               <a:ext uri="{FF2B5EF4-FFF2-40B4-BE49-F238E27FC236}">
-                <a16:creationId xmlns:a16="http://schemas.microsoft.com/office/drawing/2014/main" id="{824C31EE-E0DF-4529-98A3-83047F09BFD3}"/>
+                <a16:creationId xmlns:a16="http://schemas.microsoft.com/office/drawing/2014/main" id="{801BA42F-801E-4096-8DD6-1ED5B3AEF826}"/>
               </a:ext>
             </a:extLst>
           </p:cNvPr>
@@ -11794,7 +11794,7 @@
           <p:cNvPr id="7" name="core-label-0">
             <a:extLst xmlns:a="http://schemas.openxmlformats.org/drawingml/2006/main">
               <a:ext uri="{FF2B5EF4-FFF2-40B4-BE49-F238E27FC236}">
-                <a16:creationId xmlns:a16="http://schemas.microsoft.com/office/drawing/2014/main" id="{72F9549B-F884-40C0-8F57-A5AEC1BB4E5B}"/>
+                <a16:creationId xmlns:a16="http://schemas.microsoft.com/office/drawing/2014/main" id="{8B04E66A-EDBE-45FB-B809-E87084B388E6}"/>
               </a:ext>
             </a:extLst>
           </p:cNvPr>
@@ -11852,7 +11852,7 @@
           <p:cNvPr id="8" name="core-body-0">
             <a:extLst xmlns:a="http://schemas.openxmlformats.org/drawingml/2006/main">
               <a:ext uri="{FF2B5EF4-FFF2-40B4-BE49-F238E27FC236}">
-                <a16:creationId xmlns:a16="http://schemas.microsoft.com/office/drawing/2014/main" id="{69D5C747-AA94-48E1-9814-44C04273A29A}"/>
+                <a16:creationId xmlns:a16="http://schemas.microsoft.com/office/drawing/2014/main" id="{025E28E0-A586-450D-B4FD-D2E5D7C72BCC}"/>
               </a:ext>
             </a:extLst>
           </p:cNvPr>
@@ -11916,7 +11916,7 @@
           <p:cNvPr id="9" name="core-no-1">
             <a:extLst xmlns:a="http://schemas.openxmlformats.org/drawingml/2006/main">
               <a:ext uri="{FF2B5EF4-FFF2-40B4-BE49-F238E27FC236}">
-                <a16:creationId xmlns:a16="http://schemas.microsoft.com/office/drawing/2014/main" id="{501C5B65-EFBA-48AF-A7E6-A46BC5E7D3B4}"/>
+                <a16:creationId xmlns:a16="http://schemas.microsoft.com/office/drawing/2014/main" id="{481E00F1-CEAA-4AA4-A49F-F01136481C52}"/>
               </a:ext>
             </a:extLst>
           </p:cNvPr>
@@ -11974,7 +11974,7 @@
           <p:cNvPr id="10" name="core-body-1">
             <a:extLst xmlns:a="http://schemas.openxmlformats.org/drawingml/2006/main">
               <a:ext uri="{FF2B5EF4-FFF2-40B4-BE49-F238E27FC236}">
-                <a16:creationId xmlns:a16="http://schemas.microsoft.com/office/drawing/2014/main" id="{84D247A4-C12F-4FCD-9C02-309AC61696AA}"/>
+                <a16:creationId xmlns:a16="http://schemas.microsoft.com/office/drawing/2014/main" id="{4A49CDF6-CEC3-4FBE-8551-0C1D3DAD17E0}"/>
               </a:ext>
             </a:extLst>
           </p:cNvPr>
@@ -12038,7 +12038,7 @@
           <p:cNvPr id="11" name="core-no-2">
             <a:extLst xmlns:a="http://schemas.openxmlformats.org/drawingml/2006/main">
               <a:ext uri="{FF2B5EF4-FFF2-40B4-BE49-F238E27FC236}">
-                <a16:creationId xmlns:a16="http://schemas.microsoft.com/office/drawing/2014/main" id="{E030EDDB-80EF-4B2D-B237-0FD5D819D7FC}"/>
+                <a16:creationId xmlns:a16="http://schemas.microsoft.com/office/drawing/2014/main" id="{57505594-6744-474F-AF8C-452C668F7A23}"/>
               </a:ext>
             </a:extLst>
           </p:cNvPr>
@@ -12096,7 +12096,7 @@
           <p:cNvPr id="12" name="core-body-2">
             <a:extLst xmlns:a="http://schemas.openxmlformats.org/drawingml/2006/main">
               <a:ext uri="{FF2B5EF4-FFF2-40B4-BE49-F238E27FC236}">
-                <a16:creationId xmlns:a16="http://schemas.microsoft.com/office/drawing/2014/main" id="{9C0A7D2F-071F-4D97-BAE4-000643EA39DD}"/>
+                <a16:creationId xmlns:a16="http://schemas.microsoft.com/office/drawing/2014/main" id="{5CA5CE50-ABA7-4578-A09D-51C3D432B758}"/>
               </a:ext>
             </a:extLst>
           </p:cNvPr>
@@ -12160,7 +12160,7 @@
           <p:cNvPr id="13" name="s9-takeaway-rule">
             <a:extLst xmlns:a="http://schemas.openxmlformats.org/drawingml/2006/main">
               <a:ext uri="{FF2B5EF4-FFF2-40B4-BE49-F238E27FC236}">
-                <a16:creationId xmlns:a16="http://schemas.microsoft.com/office/drawing/2014/main" id="{1239C7E9-1EF2-4984-8E7B-725262E1F6A1}"/>
+                <a16:creationId xmlns:a16="http://schemas.microsoft.com/office/drawing/2014/main" id="{F92398B8-7DCE-463B-B101-BBFABE9C0358}"/>
               </a:ext>
             </a:extLst>
           </p:cNvPr>
@@ -12193,7 +12193,7 @@
           <p:cNvPr id="14" name="s9-takeaway">
             <a:extLst xmlns:a="http://schemas.openxmlformats.org/drawingml/2006/main">
               <a:ext uri="{FF2B5EF4-FFF2-40B4-BE49-F238E27FC236}">
-                <a16:creationId xmlns:a16="http://schemas.microsoft.com/office/drawing/2014/main" id="{ABF631BC-CDC1-414A-B99D-7BD04383C5E2}"/>
+                <a16:creationId xmlns:a16="http://schemas.microsoft.com/office/drawing/2014/main" id="{342715B4-5DA5-4158-B3C0-F9A08FA49757}"/>
               </a:ext>
             </a:extLst>
           </p:cNvPr>
@@ -12249,7 +12249,7 @@
     </p:spTree>
     <p:extLst>
       <p:ext uri="{BB962C8B-B14F-4D97-AF65-F5344CB8AC3E}">
-        <p14:creationId xmlns:p14="http://schemas.microsoft.com/office/powerpoint/2010/main" val="1236692930"/>
+        <p14:creationId xmlns:p14="http://schemas.microsoft.com/office/powerpoint/2010/main" val="1246046177"/>
       </p:ext>
     </p:extLst>
   </p:cSld>

--- a/docs/public/course-assets/course-pptx/ov-003.pptx
+++ b/docs/public/course-assets/course-pptx/ov-003.pptx
@@ -2,26 +2,26 @@
 <file path=ppt/presentation.xml><?xml version="1.0" encoding="utf-8"?>
 <p:presentation xmlns:p="http://schemas.openxmlformats.org/presentationml/2006/main">
   <p:sldMasterIdLst>
-    <p:sldMasterId xmlns:r="http://schemas.openxmlformats.org/officeDocument/2006/relationships" id="2147483648" r:id="Rcfc81b64b3d94269"/>
+    <p:sldMasterId xmlns:r="http://schemas.openxmlformats.org/officeDocument/2006/relationships" id="2147483648" r:id="R6f729bcbfb00472d"/>
   </p:sldMasterIdLst>
   <p:notesMasterIdLst>
-    <p:notesMasterId xmlns:r="http://schemas.openxmlformats.org/officeDocument/2006/relationships" r:id="R243c7bcd34464600"/>
+    <p:notesMasterId xmlns:r="http://schemas.openxmlformats.org/officeDocument/2006/relationships" r:id="Rbee9011d5cb64c93"/>
   </p:notesMasterIdLst>
   <p:sldIdLst>
-    <p:sldId xmlns:r="http://schemas.openxmlformats.org/officeDocument/2006/relationships" id="256" r:id="R2de4c3288cdc475a"/>
-    <p:sldId xmlns:r="http://schemas.openxmlformats.org/officeDocument/2006/relationships" id="257" r:id="R03bffb98d6474492"/>
-    <p:sldId xmlns:r="http://schemas.openxmlformats.org/officeDocument/2006/relationships" id="258" r:id="Ra33b43021a264b6c"/>
-    <p:sldId xmlns:r="http://schemas.openxmlformats.org/officeDocument/2006/relationships" id="259" r:id="Rbaa4c7d6ff2548d1"/>
-    <p:sldId xmlns:r="http://schemas.openxmlformats.org/officeDocument/2006/relationships" id="260" r:id="R8c8ac955781a4e54"/>
-    <p:sldId xmlns:r="http://schemas.openxmlformats.org/officeDocument/2006/relationships" id="261" r:id="Ra8f2aaa8701c4ce0"/>
-    <p:sldId xmlns:r="http://schemas.openxmlformats.org/officeDocument/2006/relationships" id="262" r:id="R6474d10e72a148de"/>
-    <p:sldId xmlns:r="http://schemas.openxmlformats.org/officeDocument/2006/relationships" id="263" r:id="R19cc6c16804d4bf3"/>
-    <p:sldId xmlns:r="http://schemas.openxmlformats.org/officeDocument/2006/relationships" id="264" r:id="R6731e2afca7249a9"/>
-    <p:sldId xmlns:r="http://schemas.openxmlformats.org/officeDocument/2006/relationships" id="265" r:id="Rac2ec3fb6b4a4e26"/>
-    <p:sldId xmlns:r="http://schemas.openxmlformats.org/officeDocument/2006/relationships" id="266" r:id="R003932c8c9054bbc"/>
-    <p:sldId xmlns:r="http://schemas.openxmlformats.org/officeDocument/2006/relationships" id="267" r:id="R6adbc125ae0445d2"/>
-    <p:sldId xmlns:r="http://schemas.openxmlformats.org/officeDocument/2006/relationships" id="268" r:id="Rb2502055c4c74259"/>
-    <p:sldId xmlns:r="http://schemas.openxmlformats.org/officeDocument/2006/relationships" id="269" r:id="R95e47547a8ba477b"/>
+    <p:sldId xmlns:r="http://schemas.openxmlformats.org/officeDocument/2006/relationships" id="256" r:id="R404f1dd0e1334711"/>
+    <p:sldId xmlns:r="http://schemas.openxmlformats.org/officeDocument/2006/relationships" id="257" r:id="Raac5bd24da5049bd"/>
+    <p:sldId xmlns:r="http://schemas.openxmlformats.org/officeDocument/2006/relationships" id="258" r:id="Rd4c860b7fba44663"/>
+    <p:sldId xmlns:r="http://schemas.openxmlformats.org/officeDocument/2006/relationships" id="259" r:id="R692e0f15cb194751"/>
+    <p:sldId xmlns:r="http://schemas.openxmlformats.org/officeDocument/2006/relationships" id="260" r:id="R65182d0cf9d84263"/>
+    <p:sldId xmlns:r="http://schemas.openxmlformats.org/officeDocument/2006/relationships" id="261" r:id="R7b142f5b3e2944e1"/>
+    <p:sldId xmlns:r="http://schemas.openxmlformats.org/officeDocument/2006/relationships" id="262" r:id="R5e16a07845b942f4"/>
+    <p:sldId xmlns:r="http://schemas.openxmlformats.org/officeDocument/2006/relationships" id="263" r:id="R60bde9d6b9ad4f48"/>
+    <p:sldId xmlns:r="http://schemas.openxmlformats.org/officeDocument/2006/relationships" id="264" r:id="R83a3357bed5a477a"/>
+    <p:sldId xmlns:r="http://schemas.openxmlformats.org/officeDocument/2006/relationships" id="265" r:id="R01d7595d85fd4671"/>
+    <p:sldId xmlns:r="http://schemas.openxmlformats.org/officeDocument/2006/relationships" id="266" r:id="R11ab33a37296472a"/>
+    <p:sldId xmlns:r="http://schemas.openxmlformats.org/officeDocument/2006/relationships" id="267" r:id="R28a567bac6314947"/>
+    <p:sldId xmlns:r="http://schemas.openxmlformats.org/officeDocument/2006/relationships" id="268" r:id="R73e50f6d14f34ebf"/>
+    <p:sldId xmlns:r="http://schemas.openxmlformats.org/officeDocument/2006/relationships" id="269" r:id="R86c0d793134c42b8"/>
   </p:sldIdLst>
   <p:sldSz cx="12192000" cy="6858000"/>
   <p:notesSz cx="6858000" cy="9144000"/>
@@ -1472,7 +1472,7 @@
   </p:cSld>
   <p:clrMap bg1="lt1" tx1="dk1" bg2="lt2" tx2="dk2" accent1="accent1" accent2="accent2" accent3="accent3" accent4="accent4" accent5="accent5" accent6="accent6" hlink="hlink" folHlink="folHlink"/>
   <p:sldLayoutIdLst>
-    <p:sldLayoutId xmlns:r="http://schemas.openxmlformats.org/officeDocument/2006/relationships" id="2147483649" r:id="R010abd6b59334073"/>
+    <p:sldLayoutId xmlns:r="http://schemas.openxmlformats.org/officeDocument/2006/relationships" id="2147483649" r:id="Ra929795a60e64f0f"/>
   </p:sldLayoutIdLst>
   <p:txStyles>
     <p:titleStyle>
@@ -2023,7 +2023,7 @@
           <p:cNvPr id="1" name="cover-rule">
             <a:extLst xmlns:a="http://schemas.openxmlformats.org/drawingml/2006/main">
               <a:ext uri="{FF2B5EF4-FFF2-40B4-BE49-F238E27FC236}">
-                <a16:creationId xmlns:a16="http://schemas.microsoft.com/office/drawing/2014/main" id="{B4F22531-762C-446C-A11A-E2D407ADECFB}"/>
+                <a16:creationId xmlns:a16="http://schemas.microsoft.com/office/drawing/2014/main" id="{139A37F6-BEAE-456F-8F3C-F8C4F4F6BAAC}"/>
               </a:ext>
             </a:extLst>
           </p:cNvPr>
@@ -2056,7 +2056,7 @@
           <p:cNvPr id="2" name="cover-ring-1">
             <a:extLst xmlns:a="http://schemas.openxmlformats.org/drawingml/2006/main">
               <a:ext uri="{FF2B5EF4-FFF2-40B4-BE49-F238E27FC236}">
-                <a16:creationId xmlns:a16="http://schemas.microsoft.com/office/drawing/2014/main" id="{2DFC64F7-F0C8-4DC4-877D-3D499974F0E5}"/>
+                <a16:creationId xmlns:a16="http://schemas.microsoft.com/office/drawing/2014/main" id="{C438646A-9805-4052-B41E-D7DF2DF489C2}"/>
               </a:ext>
             </a:extLst>
           </p:cNvPr>
@@ -2087,7 +2087,7 @@
           <p:cNvPr id="3" name="cover-ring-2">
             <a:extLst xmlns:a="http://schemas.openxmlformats.org/drawingml/2006/main">
               <a:ext uri="{FF2B5EF4-FFF2-40B4-BE49-F238E27FC236}">
-                <a16:creationId xmlns:a16="http://schemas.microsoft.com/office/drawing/2014/main" id="{1BB67CFF-3CE4-4EA2-ABB7-CE8F7ADCC5DA}"/>
+                <a16:creationId xmlns:a16="http://schemas.microsoft.com/office/drawing/2014/main" id="{B7B2C433-B35F-48AE-9BF0-2F13DE4F178F}"/>
               </a:ext>
             </a:extLst>
           </p:cNvPr>
@@ -2118,7 +2118,7 @@
           <p:cNvPr id="4" name="cover-core">
             <a:extLst xmlns:a="http://schemas.openxmlformats.org/drawingml/2006/main">
               <a:ext uri="{FF2B5EF4-FFF2-40B4-BE49-F238E27FC236}">
-                <a16:creationId xmlns:a16="http://schemas.microsoft.com/office/drawing/2014/main" id="{4CCDD449-3DFA-4592-BCD0-C55F7A6CCBD1}"/>
+                <a16:creationId xmlns:a16="http://schemas.microsoft.com/office/drawing/2014/main" id="{6A40B0D7-398C-4A8B-8AEB-0C7C4BB098E4}"/>
               </a:ext>
             </a:extLst>
           </p:cNvPr>
@@ -2151,7 +2151,7 @@
           <p:cNvPr id="5" name="cover-line-1">
             <a:extLst xmlns:a="http://schemas.openxmlformats.org/drawingml/2006/main">
               <a:ext uri="{FF2B5EF4-FFF2-40B4-BE49-F238E27FC236}">
-                <a16:creationId xmlns:a16="http://schemas.microsoft.com/office/drawing/2014/main" id="{DDA6E7D9-5771-457E-AB4D-9E5C6ED0E794}"/>
+                <a16:creationId xmlns:a16="http://schemas.microsoft.com/office/drawing/2014/main" id="{E2FF045E-A6BB-4EE8-BEB1-7343ADEAF2CC}"/>
               </a:ext>
             </a:extLst>
           </p:cNvPr>
@@ -2182,7 +2182,7 @@
           <p:cNvPr id="6" name="cover-line-2">
             <a:extLst xmlns:a="http://schemas.openxmlformats.org/drawingml/2006/main">
               <a:ext uri="{FF2B5EF4-FFF2-40B4-BE49-F238E27FC236}">
-                <a16:creationId xmlns:a16="http://schemas.microsoft.com/office/drawing/2014/main" id="{0B081CBB-843A-4B79-8A7A-B95839F856B8}"/>
+                <a16:creationId xmlns:a16="http://schemas.microsoft.com/office/drawing/2014/main" id="{12A5CF22-DD94-472E-8291-A43E98149C42}"/>
               </a:ext>
             </a:extLst>
           </p:cNvPr>
@@ -2213,7 +2213,7 @@
           <p:cNvPr id="7" name="cover-eyebrow">
             <a:extLst xmlns:a="http://schemas.openxmlformats.org/drawingml/2006/main">
               <a:ext uri="{FF2B5EF4-FFF2-40B4-BE49-F238E27FC236}">
-                <a16:creationId xmlns:a16="http://schemas.microsoft.com/office/drawing/2014/main" id="{11C35DFD-159F-4EB1-83CB-06A9C0CF2EA0}"/>
+                <a16:creationId xmlns:a16="http://schemas.microsoft.com/office/drawing/2014/main" id="{EC8955EF-5C6F-488F-8E2B-6925E086D26C}"/>
               </a:ext>
             </a:extLst>
           </p:cNvPr>
@@ -2271,7 +2271,7 @@
           <p:cNvPr id="8" name="cover-title">
             <a:extLst xmlns:a="http://schemas.openxmlformats.org/drawingml/2006/main">
               <a:ext uri="{FF2B5EF4-FFF2-40B4-BE49-F238E27FC236}">
-                <a16:creationId xmlns:a16="http://schemas.microsoft.com/office/drawing/2014/main" id="{488DA9D3-BAF6-433A-8776-92A1D967B3E0}"/>
+                <a16:creationId xmlns:a16="http://schemas.microsoft.com/office/drawing/2014/main" id="{0AED6C74-27B3-4CDA-9964-77EE97B81543}"/>
               </a:ext>
             </a:extLst>
           </p:cNvPr>
@@ -2329,7 +2329,7 @@
           <p:cNvPr id="9" name="cover-subtitle">
             <a:extLst xmlns:a="http://schemas.openxmlformats.org/drawingml/2006/main">
               <a:ext uri="{FF2B5EF4-FFF2-40B4-BE49-F238E27FC236}">
-                <a16:creationId xmlns:a16="http://schemas.microsoft.com/office/drawing/2014/main" id="{48CC459B-9562-41C2-B0D4-AD295758689E}"/>
+                <a16:creationId xmlns:a16="http://schemas.microsoft.com/office/drawing/2014/main" id="{1314B6B8-94CD-42A9-9716-EC1E79DC824C}"/>
               </a:ext>
             </a:extLst>
           </p:cNvPr>
@@ -2391,7 +2391,7 @@
           <p:cNvPr id="10" name="cover-lead">
             <a:extLst xmlns:a="http://schemas.openxmlformats.org/drawingml/2006/main">
               <a:ext uri="{FF2B5EF4-FFF2-40B4-BE49-F238E27FC236}">
-                <a16:creationId xmlns:a16="http://schemas.microsoft.com/office/drawing/2014/main" id="{F43FD5E4-4696-41E2-8142-5AF973E4B750}"/>
+                <a16:creationId xmlns:a16="http://schemas.microsoft.com/office/drawing/2014/main" id="{2D4E61BD-924E-4DA8-ABF9-C7D88F5E5C61}"/>
               </a:ext>
             </a:extLst>
           </p:cNvPr>
@@ -2449,7 +2449,7 @@
           <p:cNvPr id="11" name="cover-course">
             <a:extLst xmlns:a="http://schemas.openxmlformats.org/drawingml/2006/main">
               <a:ext uri="{FF2B5EF4-FFF2-40B4-BE49-F238E27FC236}">
-                <a16:creationId xmlns:a16="http://schemas.microsoft.com/office/drawing/2014/main" id="{53E51C52-E215-4726-957C-F68E657F30F0}"/>
+                <a16:creationId xmlns:a16="http://schemas.microsoft.com/office/drawing/2014/main" id="{8E11A23C-9B0D-484A-B1B9-22CE58CD9DD1}"/>
               </a:ext>
             </a:extLst>
           </p:cNvPr>
@@ -2507,7 +2507,7 @@
           <p:cNvPr id="12" name="cover-id">
             <a:extLst xmlns:a="http://schemas.openxmlformats.org/drawingml/2006/main">
               <a:ext uri="{FF2B5EF4-FFF2-40B4-BE49-F238E27FC236}">
-                <a16:creationId xmlns:a16="http://schemas.microsoft.com/office/drawing/2014/main" id="{23F179B5-442A-47CC-B0C5-33655B4277EE}"/>
+                <a16:creationId xmlns:a16="http://schemas.microsoft.com/office/drawing/2014/main" id="{23BAB2BC-55AA-4B6C-9274-79A69F107FC9}"/>
               </a:ext>
             </a:extLst>
           </p:cNvPr>
@@ -2563,7 +2563,7 @@
     </p:spTree>
     <p:extLst>
       <p:ext uri="{BB962C8B-B14F-4D97-AF65-F5344CB8AC3E}">
-        <p14:creationId xmlns:p14="http://schemas.microsoft.com/office/powerpoint/2010/main" val="962215493"/>
+        <p14:creationId xmlns:p14="http://schemas.microsoft.com/office/powerpoint/2010/main" val="2138274735"/>
       </p:ext>
     </p:extLst>
   </p:cSld>
@@ -2594,7 +2594,7 @@
           <p:cNvPr id="1" name="s10-rule">
             <a:extLst xmlns:a="http://schemas.openxmlformats.org/drawingml/2006/main">
               <a:ext uri="{FF2B5EF4-FFF2-40B4-BE49-F238E27FC236}">
-                <a16:creationId xmlns:a16="http://schemas.microsoft.com/office/drawing/2014/main" id="{B4F92569-0DD1-46A5-97EA-D5EE89B24999}"/>
+                <a16:creationId xmlns:a16="http://schemas.microsoft.com/office/drawing/2014/main" id="{F5666E7C-D998-428A-8CC6-2333F316D7E1}"/>
               </a:ext>
             </a:extLst>
           </p:cNvPr>
@@ -2627,7 +2627,7 @@
           <p:cNvPr id="2" name="s10-eyebrow">
             <a:extLst xmlns:a="http://schemas.openxmlformats.org/drawingml/2006/main">
               <a:ext uri="{FF2B5EF4-FFF2-40B4-BE49-F238E27FC236}">
-                <a16:creationId xmlns:a16="http://schemas.microsoft.com/office/drawing/2014/main" id="{F3FB1343-2E5B-4D81-90D7-A9DD0827A2A8}"/>
+                <a16:creationId xmlns:a16="http://schemas.microsoft.com/office/drawing/2014/main" id="{D7C0D48B-ECA0-4275-90F5-44792DDAE881}"/>
               </a:ext>
             </a:extLst>
           </p:cNvPr>
@@ -2685,7 +2685,7 @@
           <p:cNvPr id="3" name="s10-title">
             <a:extLst xmlns:a="http://schemas.openxmlformats.org/drawingml/2006/main">
               <a:ext uri="{FF2B5EF4-FFF2-40B4-BE49-F238E27FC236}">
-                <a16:creationId xmlns:a16="http://schemas.microsoft.com/office/drawing/2014/main" id="{C5C18806-6A48-4237-B064-0FC6B98C61D5}"/>
+                <a16:creationId xmlns:a16="http://schemas.microsoft.com/office/drawing/2014/main" id="{878B3C0F-2577-4E85-B0EC-CFF6477CD235}"/>
               </a:ext>
             </a:extLst>
           </p:cNvPr>
@@ -2743,7 +2743,7 @@
           <p:cNvPr id="4" name="s10-footer">
             <a:extLst xmlns:a="http://schemas.openxmlformats.org/drawingml/2006/main">
               <a:ext uri="{FF2B5EF4-FFF2-40B4-BE49-F238E27FC236}">
-                <a16:creationId xmlns:a16="http://schemas.microsoft.com/office/drawing/2014/main" id="{6F1CAFA0-E004-4C03-9382-5C5024175414}"/>
+                <a16:creationId xmlns:a16="http://schemas.microsoft.com/office/drawing/2014/main" id="{4645F2FE-6050-4415-9221-8C46C7A60382}"/>
               </a:ext>
             </a:extLst>
           </p:cNvPr>
@@ -2774,7 +2774,7 @@
           <p:cNvPr id="5" name="s10-identity">
             <a:extLst xmlns:a="http://schemas.openxmlformats.org/drawingml/2006/main">
               <a:ext uri="{FF2B5EF4-FFF2-40B4-BE49-F238E27FC236}">
-                <a16:creationId xmlns:a16="http://schemas.microsoft.com/office/drawing/2014/main" id="{12FF27B3-38F2-4718-AD16-46852D48A785}"/>
+                <a16:creationId xmlns:a16="http://schemas.microsoft.com/office/drawing/2014/main" id="{31337957-B4C9-4898-8401-5626A7638A0C}"/>
               </a:ext>
             </a:extLst>
           </p:cNvPr>
@@ -2832,7 +2832,7 @@
           <p:cNvPr id="6" name="case-label-0">
             <a:extLst xmlns:a="http://schemas.openxmlformats.org/drawingml/2006/main">
               <a:ext uri="{FF2B5EF4-FFF2-40B4-BE49-F238E27FC236}">
-                <a16:creationId xmlns:a16="http://schemas.microsoft.com/office/drawing/2014/main" id="{E80E319A-67BB-4707-9BF5-6992CBF08328}"/>
+                <a16:creationId xmlns:a16="http://schemas.microsoft.com/office/drawing/2014/main" id="{6C39D5AE-5C2A-46EE-B79A-CF68AB06E6C2}"/>
               </a:ext>
             </a:extLst>
           </p:cNvPr>
@@ -2890,7 +2890,7 @@
           <p:cNvPr id="7" name="case-0-row-0">
             <a:extLst xmlns:a="http://schemas.openxmlformats.org/drawingml/2006/main">
               <a:ext uri="{FF2B5EF4-FFF2-40B4-BE49-F238E27FC236}">
-                <a16:creationId xmlns:a16="http://schemas.microsoft.com/office/drawing/2014/main" id="{2660EF1B-4360-493D-AD3C-607CD526B43F}"/>
+                <a16:creationId xmlns:a16="http://schemas.microsoft.com/office/drawing/2014/main" id="{7B4B392C-78D4-4C81-89CE-29D0AB147BD4}"/>
               </a:ext>
             </a:extLst>
           </p:cNvPr>
@@ -2977,7 +2977,7 @@
           <p:cNvPr id="8" name="case-0-row-1">
             <a:extLst xmlns:a="http://schemas.openxmlformats.org/drawingml/2006/main">
               <a:ext uri="{FF2B5EF4-FFF2-40B4-BE49-F238E27FC236}">
-                <a16:creationId xmlns:a16="http://schemas.microsoft.com/office/drawing/2014/main" id="{1754F617-BF62-4E2A-95EA-113C763FCE94}"/>
+                <a16:creationId xmlns:a16="http://schemas.microsoft.com/office/drawing/2014/main" id="{D4934584-764D-4660-9BC2-B64A7DF08936}"/>
               </a:ext>
             </a:extLst>
           </p:cNvPr>
@@ -3064,7 +3064,7 @@
           <p:cNvPr id="9" name="case-0-row-2">
             <a:extLst xmlns:a="http://schemas.openxmlformats.org/drawingml/2006/main">
               <a:ext uri="{FF2B5EF4-FFF2-40B4-BE49-F238E27FC236}">
-                <a16:creationId xmlns:a16="http://schemas.microsoft.com/office/drawing/2014/main" id="{320D3BB9-DD8E-42AF-A86A-6EE48FF3E305}"/>
+                <a16:creationId xmlns:a16="http://schemas.microsoft.com/office/drawing/2014/main" id="{9B740EC6-B143-49B4-B1C7-DAC90C0A3CE6}"/>
               </a:ext>
             </a:extLst>
           </p:cNvPr>
@@ -3151,7 +3151,7 @@
           <p:cNvPr id="10" name="case-label-1">
             <a:extLst xmlns:a="http://schemas.openxmlformats.org/drawingml/2006/main">
               <a:ext uri="{FF2B5EF4-FFF2-40B4-BE49-F238E27FC236}">
-                <a16:creationId xmlns:a16="http://schemas.microsoft.com/office/drawing/2014/main" id="{6E21ABC9-242F-4B47-AF86-C1E2356CD2B8}"/>
+                <a16:creationId xmlns:a16="http://schemas.microsoft.com/office/drawing/2014/main" id="{B3DB7CBF-5316-4592-AED5-FDFF14045FC4}"/>
               </a:ext>
             </a:extLst>
           </p:cNvPr>
@@ -3209,7 +3209,7 @@
           <p:cNvPr id="11" name="case-1-row-0">
             <a:extLst xmlns:a="http://schemas.openxmlformats.org/drawingml/2006/main">
               <a:ext uri="{FF2B5EF4-FFF2-40B4-BE49-F238E27FC236}">
-                <a16:creationId xmlns:a16="http://schemas.microsoft.com/office/drawing/2014/main" id="{6A05DB9E-D8F4-47E3-9CD3-91002EE45023}"/>
+                <a16:creationId xmlns:a16="http://schemas.microsoft.com/office/drawing/2014/main" id="{5409B7D1-6B61-4868-83EF-59C7C9FAC7BC}"/>
               </a:ext>
             </a:extLst>
           </p:cNvPr>
@@ -3296,7 +3296,7 @@
           <p:cNvPr id="12" name="case-1-row-1">
             <a:extLst xmlns:a="http://schemas.openxmlformats.org/drawingml/2006/main">
               <a:ext uri="{FF2B5EF4-FFF2-40B4-BE49-F238E27FC236}">
-                <a16:creationId xmlns:a16="http://schemas.microsoft.com/office/drawing/2014/main" id="{AB4C672F-8E69-4405-B81E-B28418A8FBF5}"/>
+                <a16:creationId xmlns:a16="http://schemas.microsoft.com/office/drawing/2014/main" id="{FF69E36D-8D39-46A7-AD5A-B67895BD1A7F}"/>
               </a:ext>
             </a:extLst>
           </p:cNvPr>
@@ -3383,7 +3383,7 @@
           <p:cNvPr id="13" name="case-1-row-2">
             <a:extLst xmlns:a="http://schemas.openxmlformats.org/drawingml/2006/main">
               <a:ext uri="{FF2B5EF4-FFF2-40B4-BE49-F238E27FC236}">
-                <a16:creationId xmlns:a16="http://schemas.microsoft.com/office/drawing/2014/main" id="{DC2B74F4-D608-4830-B657-51FC1F804B4B}"/>
+                <a16:creationId xmlns:a16="http://schemas.microsoft.com/office/drawing/2014/main" id="{B5621D36-A4E3-4091-97DD-6F5452F2614C}"/>
               </a:ext>
             </a:extLst>
           </p:cNvPr>
@@ -3470,7 +3470,7 @@
           <p:cNvPr id="14" name="s10-takeaway-rule">
             <a:extLst xmlns:a="http://schemas.openxmlformats.org/drawingml/2006/main">
               <a:ext uri="{FF2B5EF4-FFF2-40B4-BE49-F238E27FC236}">
-                <a16:creationId xmlns:a16="http://schemas.microsoft.com/office/drawing/2014/main" id="{A5983DAF-8EFF-4F14-A69A-19F53B666F1A}"/>
+                <a16:creationId xmlns:a16="http://schemas.microsoft.com/office/drawing/2014/main" id="{924327CD-2DA5-4A53-BF6D-A2BC567CB0AF}"/>
               </a:ext>
             </a:extLst>
           </p:cNvPr>
@@ -3503,7 +3503,7 @@
           <p:cNvPr id="15" name="s10-takeaway">
             <a:extLst xmlns:a="http://schemas.openxmlformats.org/drawingml/2006/main">
               <a:ext uri="{FF2B5EF4-FFF2-40B4-BE49-F238E27FC236}">
-                <a16:creationId xmlns:a16="http://schemas.microsoft.com/office/drawing/2014/main" id="{7966DE75-591C-43F8-A7BA-11180E776304}"/>
+                <a16:creationId xmlns:a16="http://schemas.microsoft.com/office/drawing/2014/main" id="{CDA26078-2F4E-4CC1-A3DD-F4D6BF622B58}"/>
               </a:ext>
             </a:extLst>
           </p:cNvPr>
@@ -3559,7 +3559,7 @@
     </p:spTree>
     <p:extLst>
       <p:ext uri="{BB962C8B-B14F-4D97-AF65-F5344CB8AC3E}">
-        <p14:creationId xmlns:p14="http://schemas.microsoft.com/office/powerpoint/2010/main" val="1538973472"/>
+        <p14:creationId xmlns:p14="http://schemas.microsoft.com/office/powerpoint/2010/main" val="700356044"/>
       </p:ext>
     </p:extLst>
   </p:cSld>
@@ -3590,7 +3590,7 @@
           <p:cNvPr id="1" name="s11-rule">
             <a:extLst xmlns:a="http://schemas.openxmlformats.org/drawingml/2006/main">
               <a:ext uri="{FF2B5EF4-FFF2-40B4-BE49-F238E27FC236}">
-                <a16:creationId xmlns:a16="http://schemas.microsoft.com/office/drawing/2014/main" id="{24BDFF7E-B1FA-4D8D-BFB6-C00AEA90B22B}"/>
+                <a16:creationId xmlns:a16="http://schemas.microsoft.com/office/drawing/2014/main" id="{9AE8E47D-EB54-422E-9B22-1D1C0E161B54}"/>
               </a:ext>
             </a:extLst>
           </p:cNvPr>
@@ -3623,7 +3623,7 @@
           <p:cNvPr id="2" name="s11-eyebrow">
             <a:extLst xmlns:a="http://schemas.openxmlformats.org/drawingml/2006/main">
               <a:ext uri="{FF2B5EF4-FFF2-40B4-BE49-F238E27FC236}">
-                <a16:creationId xmlns:a16="http://schemas.microsoft.com/office/drawing/2014/main" id="{43355243-E7BF-45B8-B621-7377E926C706}"/>
+                <a16:creationId xmlns:a16="http://schemas.microsoft.com/office/drawing/2014/main" id="{8A8409C3-9BBC-4CC3-9041-C0DC90BA79C3}"/>
               </a:ext>
             </a:extLst>
           </p:cNvPr>
@@ -3681,7 +3681,7 @@
           <p:cNvPr id="3" name="s11-title">
             <a:extLst xmlns:a="http://schemas.openxmlformats.org/drawingml/2006/main">
               <a:ext uri="{FF2B5EF4-FFF2-40B4-BE49-F238E27FC236}">
-                <a16:creationId xmlns:a16="http://schemas.microsoft.com/office/drawing/2014/main" id="{BF3B79AD-D1C9-44DA-B33C-DEE54B441A6A}"/>
+                <a16:creationId xmlns:a16="http://schemas.microsoft.com/office/drawing/2014/main" id="{7B09E4DD-3C41-4AB0-B3AB-ED6E2FEE0C6B}"/>
               </a:ext>
             </a:extLst>
           </p:cNvPr>
@@ -3739,7 +3739,7 @@
           <p:cNvPr id="4" name="s11-footer">
             <a:extLst xmlns:a="http://schemas.openxmlformats.org/drawingml/2006/main">
               <a:ext uri="{FF2B5EF4-FFF2-40B4-BE49-F238E27FC236}">
-                <a16:creationId xmlns:a16="http://schemas.microsoft.com/office/drawing/2014/main" id="{38A0312E-6599-46EA-92BA-7FC02FE4DF9F}"/>
+                <a16:creationId xmlns:a16="http://schemas.microsoft.com/office/drawing/2014/main" id="{C3CF956C-4903-4DDF-93A0-504018BA842E}"/>
               </a:ext>
             </a:extLst>
           </p:cNvPr>
@@ -3770,7 +3770,7 @@
           <p:cNvPr id="5" name="s11-identity">
             <a:extLst xmlns:a="http://schemas.openxmlformats.org/drawingml/2006/main">
               <a:ext uri="{FF2B5EF4-FFF2-40B4-BE49-F238E27FC236}">
-                <a16:creationId xmlns:a16="http://schemas.microsoft.com/office/drawing/2014/main" id="{ADC839FB-61A3-4A28-A65E-A42F4BA9FDFF}"/>
+                <a16:creationId xmlns:a16="http://schemas.microsoft.com/office/drawing/2014/main" id="{D44E61FF-2688-4021-AD21-88727C3108D1}"/>
               </a:ext>
             </a:extLst>
           </p:cNvPr>
@@ -3828,7 +3828,7 @@
           <p:cNvPr id="6" name="case-title">
             <a:extLst xmlns:a="http://schemas.openxmlformats.org/drawingml/2006/main">
               <a:ext uri="{FF2B5EF4-FFF2-40B4-BE49-F238E27FC236}">
-                <a16:creationId xmlns:a16="http://schemas.microsoft.com/office/drawing/2014/main" id="{8B36C190-CB7E-476E-B791-6BE5878D64B2}"/>
+                <a16:creationId xmlns:a16="http://schemas.microsoft.com/office/drawing/2014/main" id="{54B59309-661B-4A79-B5C6-9B8302508515}"/>
               </a:ext>
             </a:extLst>
           </p:cNvPr>
@@ -3892,7 +3892,7 @@
           <p:cNvPr id="7" name="case-row-0">
             <a:extLst xmlns:a="http://schemas.openxmlformats.org/drawingml/2006/main">
               <a:ext uri="{FF2B5EF4-FFF2-40B4-BE49-F238E27FC236}">
-                <a16:creationId xmlns:a16="http://schemas.microsoft.com/office/drawing/2014/main" id="{770D619F-2FEC-4013-A7CE-BF52A9153EFF}"/>
+                <a16:creationId xmlns:a16="http://schemas.microsoft.com/office/drawing/2014/main" id="{82119E19-187D-451C-BEC8-6039DB3D7D82}"/>
               </a:ext>
             </a:extLst>
           </p:cNvPr>
@@ -3956,7 +3956,7 @@
           <p:cNvPr id="8" name="case-row-1">
             <a:extLst xmlns:a="http://schemas.openxmlformats.org/drawingml/2006/main">
               <a:ext uri="{FF2B5EF4-FFF2-40B4-BE49-F238E27FC236}">
-                <a16:creationId xmlns:a16="http://schemas.microsoft.com/office/drawing/2014/main" id="{FC51AEF5-69A5-4EA5-89AF-7DD62640A849}"/>
+                <a16:creationId xmlns:a16="http://schemas.microsoft.com/office/drawing/2014/main" id="{33CB3D99-2AC4-40C2-918C-1D1A6E735C2A}"/>
               </a:ext>
             </a:extLst>
           </p:cNvPr>
@@ -4020,7 +4020,7 @@
           <p:cNvPr id="9" name="case-row-2">
             <a:extLst xmlns:a="http://schemas.openxmlformats.org/drawingml/2006/main">
               <a:ext uri="{FF2B5EF4-FFF2-40B4-BE49-F238E27FC236}">
-                <a16:creationId xmlns:a16="http://schemas.microsoft.com/office/drawing/2014/main" id="{1399A8AB-A7C6-415B-8B3C-FEF0E66C0DDE}"/>
+                <a16:creationId xmlns:a16="http://schemas.microsoft.com/office/drawing/2014/main" id="{BE30498A-84B7-4F2F-A69E-3CD575CB52C2}"/>
               </a:ext>
             </a:extLst>
           </p:cNvPr>
@@ -4084,7 +4084,7 @@
           <p:cNvPr id="10" name="case-row-3">
             <a:extLst xmlns:a="http://schemas.openxmlformats.org/drawingml/2006/main">
               <a:ext uri="{FF2B5EF4-FFF2-40B4-BE49-F238E27FC236}">
-                <a16:creationId xmlns:a16="http://schemas.microsoft.com/office/drawing/2014/main" id="{F689AFD2-6715-414B-A4EC-EF0324199BED}"/>
+                <a16:creationId xmlns:a16="http://schemas.microsoft.com/office/drawing/2014/main" id="{C0422B9D-7300-46B7-B087-2AA8E6B27105}"/>
               </a:ext>
             </a:extLst>
           </p:cNvPr>
@@ -4148,7 +4148,7 @@
           <p:cNvPr id="11" name="case-row-4">
             <a:extLst xmlns:a="http://schemas.openxmlformats.org/drawingml/2006/main">
               <a:ext uri="{FF2B5EF4-FFF2-40B4-BE49-F238E27FC236}">
-                <a16:creationId xmlns:a16="http://schemas.microsoft.com/office/drawing/2014/main" id="{EF9E16DB-3D18-4462-A4A9-B1682329FC21}"/>
+                <a16:creationId xmlns:a16="http://schemas.microsoft.com/office/drawing/2014/main" id="{9670582C-0EBF-4A18-B1E3-AC4F4A62C6CA}"/>
               </a:ext>
             </a:extLst>
           </p:cNvPr>
@@ -4212,7 +4212,7 @@
           <p:cNvPr id="12" name="s11-takeaway-rule">
             <a:extLst xmlns:a="http://schemas.openxmlformats.org/drawingml/2006/main">
               <a:ext uri="{FF2B5EF4-FFF2-40B4-BE49-F238E27FC236}">
-                <a16:creationId xmlns:a16="http://schemas.microsoft.com/office/drawing/2014/main" id="{0611EA21-7B9B-43CC-B60C-E0D7908AD1EB}"/>
+                <a16:creationId xmlns:a16="http://schemas.microsoft.com/office/drawing/2014/main" id="{6536302A-B9D0-4497-AC76-51E6D5702B17}"/>
               </a:ext>
             </a:extLst>
           </p:cNvPr>
@@ -4245,7 +4245,7 @@
           <p:cNvPr id="13" name="s11-takeaway">
             <a:extLst xmlns:a="http://schemas.openxmlformats.org/drawingml/2006/main">
               <a:ext uri="{FF2B5EF4-FFF2-40B4-BE49-F238E27FC236}">
-                <a16:creationId xmlns:a16="http://schemas.microsoft.com/office/drawing/2014/main" id="{5A9D6159-4C30-4B12-99A5-107BCB485171}"/>
+                <a16:creationId xmlns:a16="http://schemas.microsoft.com/office/drawing/2014/main" id="{C8684CBC-E99C-480E-A302-4766479DAD44}"/>
               </a:ext>
             </a:extLst>
           </p:cNvPr>
@@ -4301,7 +4301,7 @@
     </p:spTree>
     <p:extLst>
       <p:ext uri="{BB962C8B-B14F-4D97-AF65-F5344CB8AC3E}">
-        <p14:creationId xmlns:p14="http://schemas.microsoft.com/office/powerpoint/2010/main" val="203904793"/>
+        <p14:creationId xmlns:p14="http://schemas.microsoft.com/office/powerpoint/2010/main" val="1662377362"/>
       </p:ext>
     </p:extLst>
   </p:cSld>
@@ -4332,7 +4332,7 @@
           <p:cNvPr id="1" name="s12-rule">
             <a:extLst xmlns:a="http://schemas.openxmlformats.org/drawingml/2006/main">
               <a:ext uri="{FF2B5EF4-FFF2-40B4-BE49-F238E27FC236}">
-                <a16:creationId xmlns:a16="http://schemas.microsoft.com/office/drawing/2014/main" id="{5A9514D3-708B-48F4-9A88-EE8159008721}"/>
+                <a16:creationId xmlns:a16="http://schemas.microsoft.com/office/drawing/2014/main" id="{AFFEC7A3-B190-4E17-8C8A-2579AE5CDE0B}"/>
               </a:ext>
             </a:extLst>
           </p:cNvPr>
@@ -4365,7 +4365,7 @@
           <p:cNvPr id="2" name="s12-eyebrow">
             <a:extLst xmlns:a="http://schemas.openxmlformats.org/drawingml/2006/main">
               <a:ext uri="{FF2B5EF4-FFF2-40B4-BE49-F238E27FC236}">
-                <a16:creationId xmlns:a16="http://schemas.microsoft.com/office/drawing/2014/main" id="{B3A57EC4-E553-4690-BB96-224A56B6DDD0}"/>
+                <a16:creationId xmlns:a16="http://schemas.microsoft.com/office/drawing/2014/main" id="{2953444D-3DE2-4984-965C-E50C13689339}"/>
               </a:ext>
             </a:extLst>
           </p:cNvPr>
@@ -4423,7 +4423,7 @@
           <p:cNvPr id="3" name="s12-title">
             <a:extLst xmlns:a="http://schemas.openxmlformats.org/drawingml/2006/main">
               <a:ext uri="{FF2B5EF4-FFF2-40B4-BE49-F238E27FC236}">
-                <a16:creationId xmlns:a16="http://schemas.microsoft.com/office/drawing/2014/main" id="{C305BFDC-256E-437F-A291-BB5BFF240CD9}"/>
+                <a16:creationId xmlns:a16="http://schemas.microsoft.com/office/drawing/2014/main" id="{E3B5F6AB-9761-4E41-8A40-28DCADCB7956}"/>
               </a:ext>
             </a:extLst>
           </p:cNvPr>
@@ -4481,7 +4481,7 @@
           <p:cNvPr id="4" name="s12-footer">
             <a:extLst xmlns:a="http://schemas.openxmlformats.org/drawingml/2006/main">
               <a:ext uri="{FF2B5EF4-FFF2-40B4-BE49-F238E27FC236}">
-                <a16:creationId xmlns:a16="http://schemas.microsoft.com/office/drawing/2014/main" id="{D8DFD7A7-2EB9-4B2D-AF77-08B99E38F699}"/>
+                <a16:creationId xmlns:a16="http://schemas.microsoft.com/office/drawing/2014/main" id="{D6934AA2-59D5-4677-A01A-AC943F47FF29}"/>
               </a:ext>
             </a:extLst>
           </p:cNvPr>
@@ -4512,7 +4512,7 @@
           <p:cNvPr id="5" name="s12-identity">
             <a:extLst xmlns:a="http://schemas.openxmlformats.org/drawingml/2006/main">
               <a:ext uri="{FF2B5EF4-FFF2-40B4-BE49-F238E27FC236}">
-                <a16:creationId xmlns:a16="http://schemas.microsoft.com/office/drawing/2014/main" id="{15DEA56C-6F00-45BA-A559-9187B97AE828}"/>
+                <a16:creationId xmlns:a16="http://schemas.microsoft.com/office/drawing/2014/main" id="{F561FBA3-CB0B-46B3-BD29-21294F06D4F1}"/>
               </a:ext>
             </a:extLst>
           </p:cNvPr>
@@ -4570,7 +4570,7 @@
           <p:cNvPr id="6" name="practice-circle-0">
             <a:extLst xmlns:a="http://schemas.openxmlformats.org/drawingml/2006/main">
               <a:ext uri="{FF2B5EF4-FFF2-40B4-BE49-F238E27FC236}">
-                <a16:creationId xmlns:a16="http://schemas.microsoft.com/office/drawing/2014/main" id="{13A981E3-EDC1-4A2F-91D7-9B2FDEC85DFD}"/>
+                <a16:creationId xmlns:a16="http://schemas.microsoft.com/office/drawing/2014/main" id="{008E2E56-71EF-4616-A121-BDCDA5135994}"/>
               </a:ext>
             </a:extLst>
           </p:cNvPr>
@@ -4603,7 +4603,7 @@
           <p:cNvPr id="7" name="practice-number-0">
             <a:extLst xmlns:a="http://schemas.openxmlformats.org/drawingml/2006/main">
               <a:ext uri="{FF2B5EF4-FFF2-40B4-BE49-F238E27FC236}">
-                <a16:creationId xmlns:a16="http://schemas.microsoft.com/office/drawing/2014/main" id="{1C03D06B-B91A-44DE-AA0F-371DD0E03B47}"/>
+                <a16:creationId xmlns:a16="http://schemas.microsoft.com/office/drawing/2014/main" id="{0452C6D7-A137-4790-871C-F15B00423822}"/>
               </a:ext>
             </a:extLst>
           </p:cNvPr>
@@ -4661,7 +4661,7 @@
           <p:cNvPr id="8" name="practice-item-0">
             <a:extLst xmlns:a="http://schemas.openxmlformats.org/drawingml/2006/main">
               <a:ext uri="{FF2B5EF4-FFF2-40B4-BE49-F238E27FC236}">
-                <a16:creationId xmlns:a16="http://schemas.microsoft.com/office/drawing/2014/main" id="{1F082480-54D8-446B-BC4C-83F7E2EC5CF1}"/>
+                <a16:creationId xmlns:a16="http://schemas.microsoft.com/office/drawing/2014/main" id="{9A42D3C4-39AF-4DBE-810F-635920810CD8}"/>
               </a:ext>
             </a:extLst>
           </p:cNvPr>
@@ -4725,7 +4725,7 @@
           <p:cNvPr id="9" name="practice-connector-0">
             <a:extLst xmlns:a="http://schemas.openxmlformats.org/drawingml/2006/main">
               <a:ext uri="{FF2B5EF4-FFF2-40B4-BE49-F238E27FC236}">
-                <a16:creationId xmlns:a16="http://schemas.microsoft.com/office/drawing/2014/main" id="{BC90A265-82CC-4F63-8293-BE45C4E0CB40}"/>
+                <a16:creationId xmlns:a16="http://schemas.microsoft.com/office/drawing/2014/main" id="{D0E3CA9E-D7C9-4D62-9606-8BA997B00699}"/>
               </a:ext>
             </a:extLst>
           </p:cNvPr>
@@ -4756,7 +4756,7 @@
           <p:cNvPr id="10" name="practice-circle-1">
             <a:extLst xmlns:a="http://schemas.openxmlformats.org/drawingml/2006/main">
               <a:ext uri="{FF2B5EF4-FFF2-40B4-BE49-F238E27FC236}">
-                <a16:creationId xmlns:a16="http://schemas.microsoft.com/office/drawing/2014/main" id="{FAA07B01-7576-44B2-9A0B-C40BCE57B06D}"/>
+                <a16:creationId xmlns:a16="http://schemas.microsoft.com/office/drawing/2014/main" id="{8A2448E9-78EF-4793-9A1F-8A1E6D381CAD}"/>
               </a:ext>
             </a:extLst>
           </p:cNvPr>
@@ -4789,7 +4789,7 @@
           <p:cNvPr id="11" name="practice-number-1">
             <a:extLst xmlns:a="http://schemas.openxmlformats.org/drawingml/2006/main">
               <a:ext uri="{FF2B5EF4-FFF2-40B4-BE49-F238E27FC236}">
-                <a16:creationId xmlns:a16="http://schemas.microsoft.com/office/drawing/2014/main" id="{5E87C3C4-C977-4C55-BDBD-6DF3FDDC4B5A}"/>
+                <a16:creationId xmlns:a16="http://schemas.microsoft.com/office/drawing/2014/main" id="{C5E7120C-4485-419D-9FA5-F774D6F7F295}"/>
               </a:ext>
             </a:extLst>
           </p:cNvPr>
@@ -4847,7 +4847,7 @@
           <p:cNvPr id="12" name="practice-item-1">
             <a:extLst xmlns:a="http://schemas.openxmlformats.org/drawingml/2006/main">
               <a:ext uri="{FF2B5EF4-FFF2-40B4-BE49-F238E27FC236}">
-                <a16:creationId xmlns:a16="http://schemas.microsoft.com/office/drawing/2014/main" id="{58C59118-7B84-49DD-AA86-11EA50288A99}"/>
+                <a16:creationId xmlns:a16="http://schemas.microsoft.com/office/drawing/2014/main" id="{669A872B-67DD-4E7B-BBDC-2D4E5BFAEF3D}"/>
               </a:ext>
             </a:extLst>
           </p:cNvPr>
@@ -4911,7 +4911,7 @@
           <p:cNvPr id="13" name="practice-connector-1">
             <a:extLst xmlns:a="http://schemas.openxmlformats.org/drawingml/2006/main">
               <a:ext uri="{FF2B5EF4-FFF2-40B4-BE49-F238E27FC236}">
-                <a16:creationId xmlns:a16="http://schemas.microsoft.com/office/drawing/2014/main" id="{0DCBD3CC-BA4F-4598-B8DE-84203EF38AF3}"/>
+                <a16:creationId xmlns:a16="http://schemas.microsoft.com/office/drawing/2014/main" id="{424172AA-E88B-41BA-9E75-7F62EFBE4C61}"/>
               </a:ext>
             </a:extLst>
           </p:cNvPr>
@@ -4942,7 +4942,7 @@
           <p:cNvPr id="14" name="practice-circle-2">
             <a:extLst xmlns:a="http://schemas.openxmlformats.org/drawingml/2006/main">
               <a:ext uri="{FF2B5EF4-FFF2-40B4-BE49-F238E27FC236}">
-                <a16:creationId xmlns:a16="http://schemas.microsoft.com/office/drawing/2014/main" id="{369A0F5D-EB34-48D4-BA40-1D9687CDBF2C}"/>
+                <a16:creationId xmlns:a16="http://schemas.microsoft.com/office/drawing/2014/main" id="{69A42EF9-F06C-4562-B917-D842673420EB}"/>
               </a:ext>
             </a:extLst>
           </p:cNvPr>
@@ -4975,7 +4975,7 @@
           <p:cNvPr id="15" name="practice-number-2">
             <a:extLst xmlns:a="http://schemas.openxmlformats.org/drawingml/2006/main">
               <a:ext uri="{FF2B5EF4-FFF2-40B4-BE49-F238E27FC236}">
-                <a16:creationId xmlns:a16="http://schemas.microsoft.com/office/drawing/2014/main" id="{2728B14E-AE93-459D-B710-414DA288798F}"/>
+                <a16:creationId xmlns:a16="http://schemas.microsoft.com/office/drawing/2014/main" id="{BD8D2EED-9643-43A4-A0A4-FE803CB577A7}"/>
               </a:ext>
             </a:extLst>
           </p:cNvPr>
@@ -5033,7 +5033,7 @@
           <p:cNvPr id="16" name="practice-item-2">
             <a:extLst xmlns:a="http://schemas.openxmlformats.org/drawingml/2006/main">
               <a:ext uri="{FF2B5EF4-FFF2-40B4-BE49-F238E27FC236}">
-                <a16:creationId xmlns:a16="http://schemas.microsoft.com/office/drawing/2014/main" id="{C584C8F6-CD00-4C7F-A41E-34CD3E86108F}"/>
+                <a16:creationId xmlns:a16="http://schemas.microsoft.com/office/drawing/2014/main" id="{A588622C-0AA8-48CC-B6D0-F149B422AF3E}"/>
               </a:ext>
             </a:extLst>
           </p:cNvPr>
@@ -5095,7 +5095,7 @@
     </p:spTree>
     <p:extLst>
       <p:ext uri="{BB962C8B-B14F-4D97-AF65-F5344CB8AC3E}">
-        <p14:creationId xmlns:p14="http://schemas.microsoft.com/office/powerpoint/2010/main" val="34514083"/>
+        <p14:creationId xmlns:p14="http://schemas.microsoft.com/office/powerpoint/2010/main" val="1055206112"/>
       </p:ext>
     </p:extLst>
   </p:cSld>
@@ -5126,7 +5126,7 @@
           <p:cNvPr id="1" name="s13-rule">
             <a:extLst xmlns:a="http://schemas.openxmlformats.org/drawingml/2006/main">
               <a:ext uri="{FF2B5EF4-FFF2-40B4-BE49-F238E27FC236}">
-                <a16:creationId xmlns:a16="http://schemas.microsoft.com/office/drawing/2014/main" id="{8E91A3C2-FC41-4486-BF9E-A643DF5C2FEC}"/>
+                <a16:creationId xmlns:a16="http://schemas.microsoft.com/office/drawing/2014/main" id="{F7FDFDAB-7B06-431D-97BB-FC543506334A}"/>
               </a:ext>
             </a:extLst>
           </p:cNvPr>
@@ -5159,7 +5159,7 @@
           <p:cNvPr id="2" name="s13-eyebrow">
             <a:extLst xmlns:a="http://schemas.openxmlformats.org/drawingml/2006/main">
               <a:ext uri="{FF2B5EF4-FFF2-40B4-BE49-F238E27FC236}">
-                <a16:creationId xmlns:a16="http://schemas.microsoft.com/office/drawing/2014/main" id="{C9449C8B-12A9-4141-9067-EABAD2EEE012}"/>
+                <a16:creationId xmlns:a16="http://schemas.microsoft.com/office/drawing/2014/main" id="{F85B7A73-9AC9-409F-8CCF-1007F261C23C}"/>
               </a:ext>
             </a:extLst>
           </p:cNvPr>
@@ -5217,7 +5217,7 @@
           <p:cNvPr id="3" name="s13-title">
             <a:extLst xmlns:a="http://schemas.openxmlformats.org/drawingml/2006/main">
               <a:ext uri="{FF2B5EF4-FFF2-40B4-BE49-F238E27FC236}">
-                <a16:creationId xmlns:a16="http://schemas.microsoft.com/office/drawing/2014/main" id="{AEB0164E-0720-461D-A112-13211665E180}"/>
+                <a16:creationId xmlns:a16="http://schemas.microsoft.com/office/drawing/2014/main" id="{FCC6550F-0AC6-470A-91A8-1FFF99F8649C}"/>
               </a:ext>
             </a:extLst>
           </p:cNvPr>
@@ -5275,7 +5275,7 @@
           <p:cNvPr id="4" name="s13-footer">
             <a:extLst xmlns:a="http://schemas.openxmlformats.org/drawingml/2006/main">
               <a:ext uri="{FF2B5EF4-FFF2-40B4-BE49-F238E27FC236}">
-                <a16:creationId xmlns:a16="http://schemas.microsoft.com/office/drawing/2014/main" id="{6E8CCB6F-63EF-42FF-99A3-F7420C2A10AE}"/>
+                <a16:creationId xmlns:a16="http://schemas.microsoft.com/office/drawing/2014/main" id="{627ED54C-7EDC-4B3B-AFF2-D70CB2425B27}"/>
               </a:ext>
             </a:extLst>
           </p:cNvPr>
@@ -5306,7 +5306,7 @@
           <p:cNvPr id="5" name="s13-identity">
             <a:extLst xmlns:a="http://schemas.openxmlformats.org/drawingml/2006/main">
               <a:ext uri="{FF2B5EF4-FFF2-40B4-BE49-F238E27FC236}">
-                <a16:creationId xmlns:a16="http://schemas.microsoft.com/office/drawing/2014/main" id="{A5DF428C-6B48-477A-A601-F93B3362A749}"/>
+                <a16:creationId xmlns:a16="http://schemas.microsoft.com/office/drawing/2014/main" id="{C9614C18-F2F7-46EA-936E-86485A7220E8}"/>
               </a:ext>
             </a:extLst>
           </p:cNvPr>
@@ -5364,7 +5364,7 @@
           <p:cNvPr id="6" name="recap-circle-0">
             <a:extLst xmlns:a="http://schemas.openxmlformats.org/drawingml/2006/main">
               <a:ext uri="{FF2B5EF4-FFF2-40B4-BE49-F238E27FC236}">
-                <a16:creationId xmlns:a16="http://schemas.microsoft.com/office/drawing/2014/main" id="{2846C938-CB22-4BFF-B497-E6B72B3BFF92}"/>
+                <a16:creationId xmlns:a16="http://schemas.microsoft.com/office/drawing/2014/main" id="{63DAD8AA-C805-42BC-B827-E11DE6EB21C6}"/>
               </a:ext>
             </a:extLst>
           </p:cNvPr>
@@ -5397,7 +5397,7 @@
           <p:cNvPr id="7" name="recap-number-0">
             <a:extLst xmlns:a="http://schemas.openxmlformats.org/drawingml/2006/main">
               <a:ext uri="{FF2B5EF4-FFF2-40B4-BE49-F238E27FC236}">
-                <a16:creationId xmlns:a16="http://schemas.microsoft.com/office/drawing/2014/main" id="{661CDACD-1AC5-462E-95F1-BD3F16E5478A}"/>
+                <a16:creationId xmlns:a16="http://schemas.microsoft.com/office/drawing/2014/main" id="{866F6F8F-2916-4C6E-8DF9-7B4084EB37BC}"/>
               </a:ext>
             </a:extLst>
           </p:cNvPr>
@@ -5455,7 +5455,7 @@
           <p:cNvPr id="8" name="recap-item-0">
             <a:extLst xmlns:a="http://schemas.openxmlformats.org/drawingml/2006/main">
               <a:ext uri="{FF2B5EF4-FFF2-40B4-BE49-F238E27FC236}">
-                <a16:creationId xmlns:a16="http://schemas.microsoft.com/office/drawing/2014/main" id="{3E3FBEF4-4533-474D-A118-5992863FE045}"/>
+                <a16:creationId xmlns:a16="http://schemas.microsoft.com/office/drawing/2014/main" id="{267D134B-82DE-4217-906F-9A841BB99BB7}"/>
               </a:ext>
             </a:extLst>
           </p:cNvPr>
@@ -5519,7 +5519,7 @@
           <p:cNvPr id="9" name="recap-connector-0">
             <a:extLst xmlns:a="http://schemas.openxmlformats.org/drawingml/2006/main">
               <a:ext uri="{FF2B5EF4-FFF2-40B4-BE49-F238E27FC236}">
-                <a16:creationId xmlns:a16="http://schemas.microsoft.com/office/drawing/2014/main" id="{C0DF1EA7-4A54-4C32-BD78-42BD7062D224}"/>
+                <a16:creationId xmlns:a16="http://schemas.microsoft.com/office/drawing/2014/main" id="{6421C617-EFD9-4DBC-8E2E-6257BBB78018}"/>
               </a:ext>
             </a:extLst>
           </p:cNvPr>
@@ -5550,7 +5550,7 @@
           <p:cNvPr id="10" name="recap-circle-1">
             <a:extLst xmlns:a="http://schemas.openxmlformats.org/drawingml/2006/main">
               <a:ext uri="{FF2B5EF4-FFF2-40B4-BE49-F238E27FC236}">
-                <a16:creationId xmlns:a16="http://schemas.microsoft.com/office/drawing/2014/main" id="{93C0926E-FBE9-48B8-9D1E-C0549AD283EB}"/>
+                <a16:creationId xmlns:a16="http://schemas.microsoft.com/office/drawing/2014/main" id="{191EB506-9081-4954-A6A0-7DC79F046570}"/>
               </a:ext>
             </a:extLst>
           </p:cNvPr>
@@ -5583,7 +5583,7 @@
           <p:cNvPr id="11" name="recap-number-1">
             <a:extLst xmlns:a="http://schemas.openxmlformats.org/drawingml/2006/main">
               <a:ext uri="{FF2B5EF4-FFF2-40B4-BE49-F238E27FC236}">
-                <a16:creationId xmlns:a16="http://schemas.microsoft.com/office/drawing/2014/main" id="{6DF04D67-6D01-4EA5-A956-971DE2808381}"/>
+                <a16:creationId xmlns:a16="http://schemas.microsoft.com/office/drawing/2014/main" id="{DFECB4AD-5035-441F-9551-842701952EE5}"/>
               </a:ext>
             </a:extLst>
           </p:cNvPr>
@@ -5641,7 +5641,7 @@
           <p:cNvPr id="12" name="recap-item-1">
             <a:extLst xmlns:a="http://schemas.openxmlformats.org/drawingml/2006/main">
               <a:ext uri="{FF2B5EF4-FFF2-40B4-BE49-F238E27FC236}">
-                <a16:creationId xmlns:a16="http://schemas.microsoft.com/office/drawing/2014/main" id="{74ECEE9E-6807-4B79-98E9-0160423F58BC}"/>
+                <a16:creationId xmlns:a16="http://schemas.microsoft.com/office/drawing/2014/main" id="{1521EBA5-19BD-41A0-BCE0-FD7A13893D69}"/>
               </a:ext>
             </a:extLst>
           </p:cNvPr>
@@ -5705,7 +5705,7 @@
           <p:cNvPr id="13" name="recap-connector-1">
             <a:extLst xmlns:a="http://schemas.openxmlformats.org/drawingml/2006/main">
               <a:ext uri="{FF2B5EF4-FFF2-40B4-BE49-F238E27FC236}">
-                <a16:creationId xmlns:a16="http://schemas.microsoft.com/office/drawing/2014/main" id="{692334D0-FB54-439E-9A71-F835503DD20A}"/>
+                <a16:creationId xmlns:a16="http://schemas.microsoft.com/office/drawing/2014/main" id="{1FACFFAF-4C65-4EBA-9F2C-DB99A11996F3}"/>
               </a:ext>
             </a:extLst>
           </p:cNvPr>
@@ -5736,7 +5736,7 @@
           <p:cNvPr id="14" name="recap-circle-2">
             <a:extLst xmlns:a="http://schemas.openxmlformats.org/drawingml/2006/main">
               <a:ext uri="{FF2B5EF4-FFF2-40B4-BE49-F238E27FC236}">
-                <a16:creationId xmlns:a16="http://schemas.microsoft.com/office/drawing/2014/main" id="{7EFCA929-83AA-4EE9-95FD-24CE51A6DA1A}"/>
+                <a16:creationId xmlns:a16="http://schemas.microsoft.com/office/drawing/2014/main" id="{BA8B454B-1634-458E-BA31-7F334AE6E5BD}"/>
               </a:ext>
             </a:extLst>
           </p:cNvPr>
@@ -5769,7 +5769,7 @@
           <p:cNvPr id="15" name="recap-number-2">
             <a:extLst xmlns:a="http://schemas.openxmlformats.org/drawingml/2006/main">
               <a:ext uri="{FF2B5EF4-FFF2-40B4-BE49-F238E27FC236}">
-                <a16:creationId xmlns:a16="http://schemas.microsoft.com/office/drawing/2014/main" id="{52252209-81C6-48F3-B4DA-CAB4AC6E16A4}"/>
+                <a16:creationId xmlns:a16="http://schemas.microsoft.com/office/drawing/2014/main" id="{0ED4D668-7855-4EEE-AB92-11389DD03D6E}"/>
               </a:ext>
             </a:extLst>
           </p:cNvPr>
@@ -5827,7 +5827,7 @@
           <p:cNvPr id="16" name="recap-item-2">
             <a:extLst xmlns:a="http://schemas.openxmlformats.org/drawingml/2006/main">
               <a:ext uri="{FF2B5EF4-FFF2-40B4-BE49-F238E27FC236}">
-                <a16:creationId xmlns:a16="http://schemas.microsoft.com/office/drawing/2014/main" id="{EA6CA09D-01C3-44F6-A876-8CD937736567}"/>
+                <a16:creationId xmlns:a16="http://schemas.microsoft.com/office/drawing/2014/main" id="{80E18E96-81FD-47EE-A855-86C8C33013C6}"/>
               </a:ext>
             </a:extLst>
           </p:cNvPr>
@@ -5889,7 +5889,7 @@
     </p:spTree>
     <p:extLst>
       <p:ext uri="{BB962C8B-B14F-4D97-AF65-F5344CB8AC3E}">
-        <p14:creationId xmlns:p14="http://schemas.microsoft.com/office/powerpoint/2010/main" val="787377273"/>
+        <p14:creationId xmlns:p14="http://schemas.microsoft.com/office/powerpoint/2010/main" val="1195725604"/>
       </p:ext>
     </p:extLst>
   </p:cSld>
@@ -5920,7 +5920,7 @@
           <p:cNvPr id="1" name="s14-rule">
             <a:extLst xmlns:a="http://schemas.openxmlformats.org/drawingml/2006/main">
               <a:ext uri="{FF2B5EF4-FFF2-40B4-BE49-F238E27FC236}">
-                <a16:creationId xmlns:a16="http://schemas.microsoft.com/office/drawing/2014/main" id="{F7CC6FD2-B862-4AA9-B955-E0C418784021}"/>
+                <a16:creationId xmlns:a16="http://schemas.microsoft.com/office/drawing/2014/main" id="{BC42DB81-7197-46A6-B3C7-F5076C53A1EC}"/>
               </a:ext>
             </a:extLst>
           </p:cNvPr>
@@ -5953,7 +5953,7 @@
           <p:cNvPr id="2" name="s14-eyebrow">
             <a:extLst xmlns:a="http://schemas.openxmlformats.org/drawingml/2006/main">
               <a:ext uri="{FF2B5EF4-FFF2-40B4-BE49-F238E27FC236}">
-                <a16:creationId xmlns:a16="http://schemas.microsoft.com/office/drawing/2014/main" id="{90C9550D-B421-41B4-9ECF-797147E3D79D}"/>
+                <a16:creationId xmlns:a16="http://schemas.microsoft.com/office/drawing/2014/main" id="{42C7478C-0533-4998-B43A-5FAAE92EDA52}"/>
               </a:ext>
             </a:extLst>
           </p:cNvPr>
@@ -6011,7 +6011,7 @@
           <p:cNvPr id="3" name="s14-title">
             <a:extLst xmlns:a="http://schemas.openxmlformats.org/drawingml/2006/main">
               <a:ext uri="{FF2B5EF4-FFF2-40B4-BE49-F238E27FC236}">
-                <a16:creationId xmlns:a16="http://schemas.microsoft.com/office/drawing/2014/main" id="{057613A2-D5EB-4A12-880E-BCFAC73ED6E7}"/>
+                <a16:creationId xmlns:a16="http://schemas.microsoft.com/office/drawing/2014/main" id="{F76C2B64-95BA-4CD0-9E6B-844496976043}"/>
               </a:ext>
             </a:extLst>
           </p:cNvPr>
@@ -6069,7 +6069,7 @@
           <p:cNvPr id="4" name="s14-footer">
             <a:extLst xmlns:a="http://schemas.openxmlformats.org/drawingml/2006/main">
               <a:ext uri="{FF2B5EF4-FFF2-40B4-BE49-F238E27FC236}">
-                <a16:creationId xmlns:a16="http://schemas.microsoft.com/office/drawing/2014/main" id="{B4354C67-9EFF-4411-AED0-59B92866CBA6}"/>
+                <a16:creationId xmlns:a16="http://schemas.microsoft.com/office/drawing/2014/main" id="{CF0EB4B3-9C8C-42F7-9901-754140BD0D3F}"/>
               </a:ext>
             </a:extLst>
           </p:cNvPr>
@@ -6100,7 +6100,7 @@
           <p:cNvPr id="5" name="s14-identity">
             <a:extLst xmlns:a="http://schemas.openxmlformats.org/drawingml/2006/main">
               <a:ext uri="{FF2B5EF4-FFF2-40B4-BE49-F238E27FC236}">
-                <a16:creationId xmlns:a16="http://schemas.microsoft.com/office/drawing/2014/main" id="{22AFC71E-E43F-4446-BA00-9BFD9F82777F}"/>
+                <a16:creationId xmlns:a16="http://schemas.microsoft.com/office/drawing/2014/main" id="{65EF88EE-671C-4F00-A901-98C42461EF41}"/>
               </a:ext>
             </a:extLst>
           </p:cNvPr>
@@ -6158,7 +6158,7 @@
           <p:cNvPr id="6" name="source-0">
             <a:extLst xmlns:a="http://schemas.openxmlformats.org/drawingml/2006/main">
               <a:ext uri="{FF2B5EF4-FFF2-40B4-BE49-F238E27FC236}">
-                <a16:creationId xmlns:a16="http://schemas.microsoft.com/office/drawing/2014/main" id="{A6CF25CA-BA09-4931-8749-FDBEEECAC3C7}"/>
+                <a16:creationId xmlns:a16="http://schemas.microsoft.com/office/drawing/2014/main" id="{86EC6307-C05D-4D45-9714-AE7EB8326EDA}"/>
               </a:ext>
             </a:extLst>
           </p:cNvPr>
@@ -6222,7 +6222,7 @@
           <p:cNvPr id="7" name="source-1">
             <a:extLst xmlns:a="http://schemas.openxmlformats.org/drawingml/2006/main">
               <a:ext uri="{FF2B5EF4-FFF2-40B4-BE49-F238E27FC236}">
-                <a16:creationId xmlns:a16="http://schemas.microsoft.com/office/drawing/2014/main" id="{78ED7005-1CC6-4224-B28A-F7EF73CD414D}"/>
+                <a16:creationId xmlns:a16="http://schemas.microsoft.com/office/drawing/2014/main" id="{17865CD4-1CE1-4DEF-8EE4-56D7631D93C3}"/>
               </a:ext>
             </a:extLst>
           </p:cNvPr>
@@ -6286,7 +6286,7 @@
           <p:cNvPr id="8" name="source-2">
             <a:extLst xmlns:a="http://schemas.openxmlformats.org/drawingml/2006/main">
               <a:ext uri="{FF2B5EF4-FFF2-40B4-BE49-F238E27FC236}">
-                <a16:creationId xmlns:a16="http://schemas.microsoft.com/office/drawing/2014/main" id="{DFBC80D9-12C0-46E9-9580-CA9658CD23A6}"/>
+                <a16:creationId xmlns:a16="http://schemas.microsoft.com/office/drawing/2014/main" id="{79A819C5-129A-4546-A294-F8B1564704CF}"/>
               </a:ext>
             </a:extLst>
           </p:cNvPr>
@@ -6350,7 +6350,7 @@
           <p:cNvPr id="9" name="s14-takeaway-rule">
             <a:extLst xmlns:a="http://schemas.openxmlformats.org/drawingml/2006/main">
               <a:ext uri="{FF2B5EF4-FFF2-40B4-BE49-F238E27FC236}">
-                <a16:creationId xmlns:a16="http://schemas.microsoft.com/office/drawing/2014/main" id="{4D4206A4-109F-431D-A9B8-D7A158751976}"/>
+                <a16:creationId xmlns:a16="http://schemas.microsoft.com/office/drawing/2014/main" id="{C31D69BC-40BB-4537-A0D2-5E3E05E37116}"/>
               </a:ext>
             </a:extLst>
           </p:cNvPr>
@@ -6383,7 +6383,7 @@
           <p:cNvPr id="10" name="s14-takeaway">
             <a:extLst xmlns:a="http://schemas.openxmlformats.org/drawingml/2006/main">
               <a:ext uri="{FF2B5EF4-FFF2-40B4-BE49-F238E27FC236}">
-                <a16:creationId xmlns:a16="http://schemas.microsoft.com/office/drawing/2014/main" id="{41033236-AFF1-4409-B483-C5C3C37C6767}"/>
+                <a16:creationId xmlns:a16="http://schemas.microsoft.com/office/drawing/2014/main" id="{242F6AA5-0E33-4654-9875-7712FD600B0C}"/>
               </a:ext>
             </a:extLst>
           </p:cNvPr>
@@ -6408,7 +6408,7 @@
         </p:spPr>
         <p:txBody>
           <a:bodyPr xmlns:a="http://schemas.openxmlformats.org/drawingml/2006/main" lIns="0" tIns="0" rIns="0" bIns="0" anchor="ctr">
-            <a:normAutofit fontScale="95911"/>
+            <a:normAutofit fontScale="100000"/>
           </a:bodyPr>
           <a:lstStyle xmlns:a="http://schemas.openxmlformats.org/drawingml/2006/main"/>
           <a:p xmlns:a="http://schemas.openxmlformats.org/drawingml/2006/main">
@@ -6431,7 +6431,7 @@
                 <a:ea typeface="PingFang SC"/>
                 <a:cs typeface="PingFang SC"/>
               </a:rPr>
-              <a:t>课程精编页用于讲授主线；播放器中的“原课件”模式保留团队 PowerPoint 精选页、真实图片和可播放视频。</a:t>
+              <a:t>课程正文与幻灯片共享同一知识主线，图片和视频用于帮助理解本节概念与案例。</a:t>
             </a:r>
           </a:p>
         </p:txBody>
@@ -6439,7 +6439,7 @@
     </p:spTree>
     <p:extLst>
       <p:ext uri="{BB962C8B-B14F-4D97-AF65-F5344CB8AC3E}">
-        <p14:creationId xmlns:p14="http://schemas.microsoft.com/office/powerpoint/2010/main" val="1056777239"/>
+        <p14:creationId xmlns:p14="http://schemas.microsoft.com/office/powerpoint/2010/main" val="787055308"/>
       </p:ext>
     </p:extLst>
   </p:cSld>
@@ -6470,7 +6470,7 @@
           <p:cNvPr id="1" name="s2-rule">
             <a:extLst xmlns:a="http://schemas.openxmlformats.org/drawingml/2006/main">
               <a:ext uri="{FF2B5EF4-FFF2-40B4-BE49-F238E27FC236}">
-                <a16:creationId xmlns:a16="http://schemas.microsoft.com/office/drawing/2014/main" id="{24AFA55B-F442-44A0-92AA-19AAF08DBB1F}"/>
+                <a16:creationId xmlns:a16="http://schemas.microsoft.com/office/drawing/2014/main" id="{D0B6E2D1-3F18-43FB-8C8D-0C0375C459E1}"/>
               </a:ext>
             </a:extLst>
           </p:cNvPr>
@@ -6503,7 +6503,7 @@
           <p:cNvPr id="2" name="s2-eyebrow">
             <a:extLst xmlns:a="http://schemas.openxmlformats.org/drawingml/2006/main">
               <a:ext uri="{FF2B5EF4-FFF2-40B4-BE49-F238E27FC236}">
-                <a16:creationId xmlns:a16="http://schemas.microsoft.com/office/drawing/2014/main" id="{23EFAF4D-5C73-48F8-BAB4-E936123F72E6}"/>
+                <a16:creationId xmlns:a16="http://schemas.microsoft.com/office/drawing/2014/main" id="{342FED83-153D-4F48-8599-8106C93A4F13}"/>
               </a:ext>
             </a:extLst>
           </p:cNvPr>
@@ -6561,7 +6561,7 @@
           <p:cNvPr id="3" name="s2-title">
             <a:extLst xmlns:a="http://schemas.openxmlformats.org/drawingml/2006/main">
               <a:ext uri="{FF2B5EF4-FFF2-40B4-BE49-F238E27FC236}">
-                <a16:creationId xmlns:a16="http://schemas.microsoft.com/office/drawing/2014/main" id="{B41BF292-379E-43F5-B3E6-FC2BB06D6FFE}"/>
+                <a16:creationId xmlns:a16="http://schemas.microsoft.com/office/drawing/2014/main" id="{3F19C6E1-D7E0-4BDC-A52F-5939E50E0993}"/>
               </a:ext>
             </a:extLst>
           </p:cNvPr>
@@ -6619,7 +6619,7 @@
           <p:cNvPr id="4" name="s2-footer">
             <a:extLst xmlns:a="http://schemas.openxmlformats.org/drawingml/2006/main">
               <a:ext uri="{FF2B5EF4-FFF2-40B4-BE49-F238E27FC236}">
-                <a16:creationId xmlns:a16="http://schemas.microsoft.com/office/drawing/2014/main" id="{D85EDDDF-840C-4B24-AB5D-856F4162987A}"/>
+                <a16:creationId xmlns:a16="http://schemas.microsoft.com/office/drawing/2014/main" id="{A359FE2C-80B5-43F6-B275-903CC7EE4C33}"/>
               </a:ext>
             </a:extLst>
           </p:cNvPr>
@@ -6650,7 +6650,7 @@
           <p:cNvPr id="5" name="s2-identity">
             <a:extLst xmlns:a="http://schemas.openxmlformats.org/drawingml/2006/main">
               <a:ext uri="{FF2B5EF4-FFF2-40B4-BE49-F238E27FC236}">
-                <a16:creationId xmlns:a16="http://schemas.microsoft.com/office/drawing/2014/main" id="{419A4757-585C-4965-956F-2AE101BE4B80}"/>
+                <a16:creationId xmlns:a16="http://schemas.microsoft.com/office/drawing/2014/main" id="{EB04283A-77A6-4BAE-9ABC-0C9D15A78E93}"/>
               </a:ext>
             </a:extLst>
           </p:cNvPr>
@@ -6708,7 +6708,7 @@
           <p:cNvPr id="6" name="objective-1">
             <a:extLst xmlns:a="http://schemas.openxmlformats.org/drawingml/2006/main">
               <a:ext uri="{FF2B5EF4-FFF2-40B4-BE49-F238E27FC236}">
-                <a16:creationId xmlns:a16="http://schemas.microsoft.com/office/drawing/2014/main" id="{1B6EB374-1E21-42A7-8F19-268C58D0607C}"/>
+                <a16:creationId xmlns:a16="http://schemas.microsoft.com/office/drawing/2014/main" id="{7DB0CA5E-068B-4243-AA4D-D70EF3072115}"/>
               </a:ext>
             </a:extLst>
           </p:cNvPr>
@@ -6795,7 +6795,7 @@
           <p:cNvPr id="7" name="objective-2">
             <a:extLst xmlns:a="http://schemas.openxmlformats.org/drawingml/2006/main">
               <a:ext uri="{FF2B5EF4-FFF2-40B4-BE49-F238E27FC236}">
-                <a16:creationId xmlns:a16="http://schemas.microsoft.com/office/drawing/2014/main" id="{C8C685C0-88E5-4AE7-A579-C392591904E0}"/>
+                <a16:creationId xmlns:a16="http://schemas.microsoft.com/office/drawing/2014/main" id="{23CEE0D1-0BFE-4ADE-AD35-69F4A066AEB2}"/>
               </a:ext>
             </a:extLst>
           </p:cNvPr>
@@ -6882,7 +6882,7 @@
           <p:cNvPr id="8" name="objective-3">
             <a:extLst xmlns:a="http://schemas.openxmlformats.org/drawingml/2006/main">
               <a:ext uri="{FF2B5EF4-FFF2-40B4-BE49-F238E27FC236}">
-                <a16:creationId xmlns:a16="http://schemas.microsoft.com/office/drawing/2014/main" id="{91735F32-6168-4069-95A6-0A2DCC08A48B}"/>
+                <a16:creationId xmlns:a16="http://schemas.microsoft.com/office/drawing/2014/main" id="{E2BE532A-99FF-47F3-A818-39DDE4AB0959}"/>
               </a:ext>
             </a:extLst>
           </p:cNvPr>
@@ -6967,7 +6967,7 @@
     </p:spTree>
     <p:extLst>
       <p:ext uri="{BB962C8B-B14F-4D97-AF65-F5344CB8AC3E}">
-        <p14:creationId xmlns:p14="http://schemas.microsoft.com/office/powerpoint/2010/main" val="1113853505"/>
+        <p14:creationId xmlns:p14="http://schemas.microsoft.com/office/powerpoint/2010/main" val="1700115299"/>
       </p:ext>
     </p:extLst>
   </p:cSld>
@@ -6998,7 +6998,7 @@
           <p:cNvPr id="1" name="s3-rule">
             <a:extLst xmlns:a="http://schemas.openxmlformats.org/drawingml/2006/main">
               <a:ext uri="{FF2B5EF4-FFF2-40B4-BE49-F238E27FC236}">
-                <a16:creationId xmlns:a16="http://schemas.microsoft.com/office/drawing/2014/main" id="{811F66E6-88DC-421C-B1A0-6682FC9AF322}"/>
+                <a16:creationId xmlns:a16="http://schemas.microsoft.com/office/drawing/2014/main" id="{DF57CE47-6EFD-4C9F-BABC-D9B0D52D1E36}"/>
               </a:ext>
             </a:extLst>
           </p:cNvPr>
@@ -7031,7 +7031,7 @@
           <p:cNvPr id="2" name="s3-eyebrow">
             <a:extLst xmlns:a="http://schemas.openxmlformats.org/drawingml/2006/main">
               <a:ext uri="{FF2B5EF4-FFF2-40B4-BE49-F238E27FC236}">
-                <a16:creationId xmlns:a16="http://schemas.microsoft.com/office/drawing/2014/main" id="{2C38CDCF-B7D8-4FD3-8EE1-7AB4603B9C10}"/>
+                <a16:creationId xmlns:a16="http://schemas.microsoft.com/office/drawing/2014/main" id="{78139ACC-ADC4-4941-B794-81A8D3CCFC1C}"/>
               </a:ext>
             </a:extLst>
           </p:cNvPr>
@@ -7089,7 +7089,7 @@
           <p:cNvPr id="3" name="s3-title">
             <a:extLst xmlns:a="http://schemas.openxmlformats.org/drawingml/2006/main">
               <a:ext uri="{FF2B5EF4-FFF2-40B4-BE49-F238E27FC236}">
-                <a16:creationId xmlns:a16="http://schemas.microsoft.com/office/drawing/2014/main" id="{09F7DB4D-5A68-425E-BB38-DE7114BA7329}"/>
+                <a16:creationId xmlns:a16="http://schemas.microsoft.com/office/drawing/2014/main" id="{56253FBB-5D38-4DEC-8990-66289FB29E73}"/>
               </a:ext>
             </a:extLst>
           </p:cNvPr>
@@ -7147,7 +7147,7 @@
           <p:cNvPr id="4" name="s3-footer">
             <a:extLst xmlns:a="http://schemas.openxmlformats.org/drawingml/2006/main">
               <a:ext uri="{FF2B5EF4-FFF2-40B4-BE49-F238E27FC236}">
-                <a16:creationId xmlns:a16="http://schemas.microsoft.com/office/drawing/2014/main" id="{9DDED9A6-3A00-4DC0-B998-4F7BE345FA1B}"/>
+                <a16:creationId xmlns:a16="http://schemas.microsoft.com/office/drawing/2014/main" id="{88B1B67E-A8DE-4011-877C-BDE717AE11AF}"/>
               </a:ext>
             </a:extLst>
           </p:cNvPr>
@@ -7178,7 +7178,7 @@
           <p:cNvPr id="5" name="s3-identity">
             <a:extLst xmlns:a="http://schemas.openxmlformats.org/drawingml/2006/main">
               <a:ext uri="{FF2B5EF4-FFF2-40B4-BE49-F238E27FC236}">
-                <a16:creationId xmlns:a16="http://schemas.microsoft.com/office/drawing/2014/main" id="{677E2652-CA59-4367-BF71-9DEA8BBD1CD0}"/>
+                <a16:creationId xmlns:a16="http://schemas.microsoft.com/office/drawing/2014/main" id="{29BFB1CA-08BE-4E25-BFA0-ECF9CD82B1D4}"/>
               </a:ext>
             </a:extLst>
           </p:cNvPr>
@@ -7236,7 +7236,7 @@
           <p:cNvPr id="6" name="core-no-0">
             <a:extLst xmlns:a="http://schemas.openxmlformats.org/drawingml/2006/main">
               <a:ext uri="{FF2B5EF4-FFF2-40B4-BE49-F238E27FC236}">
-                <a16:creationId xmlns:a16="http://schemas.microsoft.com/office/drawing/2014/main" id="{28CA0547-A6C8-4DA4-9A5A-368B119AD912}"/>
+                <a16:creationId xmlns:a16="http://schemas.microsoft.com/office/drawing/2014/main" id="{1950A831-732D-4C86-AF46-DAF4EB75BCAC}"/>
               </a:ext>
             </a:extLst>
           </p:cNvPr>
@@ -7294,7 +7294,7 @@
           <p:cNvPr id="7" name="core-label-0">
             <a:extLst xmlns:a="http://schemas.openxmlformats.org/drawingml/2006/main">
               <a:ext uri="{FF2B5EF4-FFF2-40B4-BE49-F238E27FC236}">
-                <a16:creationId xmlns:a16="http://schemas.microsoft.com/office/drawing/2014/main" id="{50982668-437C-49E6-87CF-9E39AB45B45F}"/>
+                <a16:creationId xmlns:a16="http://schemas.microsoft.com/office/drawing/2014/main" id="{CDA29078-1F6E-4336-8527-B201DF4A12AE}"/>
               </a:ext>
             </a:extLst>
           </p:cNvPr>
@@ -7352,7 +7352,7 @@
           <p:cNvPr id="8" name="core-body-0">
             <a:extLst xmlns:a="http://schemas.openxmlformats.org/drawingml/2006/main">
               <a:ext uri="{FF2B5EF4-FFF2-40B4-BE49-F238E27FC236}">
-                <a16:creationId xmlns:a16="http://schemas.microsoft.com/office/drawing/2014/main" id="{DF127BA9-0818-412C-B880-25115CC406C3}"/>
+                <a16:creationId xmlns:a16="http://schemas.microsoft.com/office/drawing/2014/main" id="{0D628C4C-095B-4559-A37D-A255E20D1F25}"/>
               </a:ext>
             </a:extLst>
           </p:cNvPr>
@@ -7416,7 +7416,7 @@
           <p:cNvPr id="9" name="core-no-1">
             <a:extLst xmlns:a="http://schemas.openxmlformats.org/drawingml/2006/main">
               <a:ext uri="{FF2B5EF4-FFF2-40B4-BE49-F238E27FC236}">
-                <a16:creationId xmlns:a16="http://schemas.microsoft.com/office/drawing/2014/main" id="{ABEAD7BA-B5FA-407A-A120-229A78615BF1}"/>
+                <a16:creationId xmlns:a16="http://schemas.microsoft.com/office/drawing/2014/main" id="{CA580F0D-1448-499C-ABC0-E64B3C7FB445}"/>
               </a:ext>
             </a:extLst>
           </p:cNvPr>
@@ -7474,7 +7474,7 @@
           <p:cNvPr id="10" name="core-label-1">
             <a:extLst xmlns:a="http://schemas.openxmlformats.org/drawingml/2006/main">
               <a:ext uri="{FF2B5EF4-FFF2-40B4-BE49-F238E27FC236}">
-                <a16:creationId xmlns:a16="http://schemas.microsoft.com/office/drawing/2014/main" id="{04C55AAA-0357-49CC-8346-F76C8F25DEA2}"/>
+                <a16:creationId xmlns:a16="http://schemas.microsoft.com/office/drawing/2014/main" id="{317BF4DD-8A15-4245-B136-AFCE500EB873}"/>
               </a:ext>
             </a:extLst>
           </p:cNvPr>
@@ -7532,7 +7532,7 @@
           <p:cNvPr id="11" name="core-body-1">
             <a:extLst xmlns:a="http://schemas.openxmlformats.org/drawingml/2006/main">
               <a:ext uri="{FF2B5EF4-FFF2-40B4-BE49-F238E27FC236}">
-                <a16:creationId xmlns:a16="http://schemas.microsoft.com/office/drawing/2014/main" id="{F844BDFD-D3D3-42DE-9467-051F2B70C561}"/>
+                <a16:creationId xmlns:a16="http://schemas.microsoft.com/office/drawing/2014/main" id="{4D396B71-5362-4C3F-AD33-8A6507415310}"/>
               </a:ext>
             </a:extLst>
           </p:cNvPr>
@@ -7596,7 +7596,7 @@
           <p:cNvPr id="12" name="s3-takeaway-rule">
             <a:extLst xmlns:a="http://schemas.openxmlformats.org/drawingml/2006/main">
               <a:ext uri="{FF2B5EF4-FFF2-40B4-BE49-F238E27FC236}">
-                <a16:creationId xmlns:a16="http://schemas.microsoft.com/office/drawing/2014/main" id="{4DBDF1A9-ED29-49DC-8156-20B91CCCB3E2}"/>
+                <a16:creationId xmlns:a16="http://schemas.microsoft.com/office/drawing/2014/main" id="{13CED845-0B53-4D86-8D22-E0751A216165}"/>
               </a:ext>
             </a:extLst>
           </p:cNvPr>
@@ -7629,7 +7629,7 @@
           <p:cNvPr id="13" name="s3-takeaway">
             <a:extLst xmlns:a="http://schemas.openxmlformats.org/drawingml/2006/main">
               <a:ext uri="{FF2B5EF4-FFF2-40B4-BE49-F238E27FC236}">
-                <a16:creationId xmlns:a16="http://schemas.microsoft.com/office/drawing/2014/main" id="{BED7DA0C-6B28-49B1-BF68-5BAD3A4CEE20}"/>
+                <a16:creationId xmlns:a16="http://schemas.microsoft.com/office/drawing/2014/main" id="{66B44776-DC3E-42BF-AD5C-FF365791A274}"/>
               </a:ext>
             </a:extLst>
           </p:cNvPr>
@@ -7685,7 +7685,7 @@
     </p:spTree>
     <p:extLst>
       <p:ext uri="{BB962C8B-B14F-4D97-AF65-F5344CB8AC3E}">
-        <p14:creationId xmlns:p14="http://schemas.microsoft.com/office/powerpoint/2010/main" val="954955681"/>
+        <p14:creationId xmlns:p14="http://schemas.microsoft.com/office/powerpoint/2010/main" val="1086564296"/>
       </p:ext>
     </p:extLst>
   </p:cSld>
@@ -7716,7 +7716,7 @@
           <p:cNvPr id="1" name="s4-rule">
             <a:extLst xmlns:a="http://schemas.openxmlformats.org/drawingml/2006/main">
               <a:ext uri="{FF2B5EF4-FFF2-40B4-BE49-F238E27FC236}">
-                <a16:creationId xmlns:a16="http://schemas.microsoft.com/office/drawing/2014/main" id="{AD05E86E-12F4-43BE-8CA0-6DEBF4432CF7}"/>
+                <a16:creationId xmlns:a16="http://schemas.microsoft.com/office/drawing/2014/main" id="{A47F41C7-7909-45E6-B195-9AF5D1B4392B}"/>
               </a:ext>
             </a:extLst>
           </p:cNvPr>
@@ -7749,7 +7749,7 @@
           <p:cNvPr id="2" name="s4-eyebrow">
             <a:extLst xmlns:a="http://schemas.openxmlformats.org/drawingml/2006/main">
               <a:ext uri="{FF2B5EF4-FFF2-40B4-BE49-F238E27FC236}">
-                <a16:creationId xmlns:a16="http://schemas.microsoft.com/office/drawing/2014/main" id="{A7D780BB-305B-452D-95A4-00C55E9D2FAF}"/>
+                <a16:creationId xmlns:a16="http://schemas.microsoft.com/office/drawing/2014/main" id="{154DE841-6345-46E0-8360-F25A37845748}"/>
               </a:ext>
             </a:extLst>
           </p:cNvPr>
@@ -7807,7 +7807,7 @@
           <p:cNvPr id="3" name="s4-title">
             <a:extLst xmlns:a="http://schemas.openxmlformats.org/drawingml/2006/main">
               <a:ext uri="{FF2B5EF4-FFF2-40B4-BE49-F238E27FC236}">
-                <a16:creationId xmlns:a16="http://schemas.microsoft.com/office/drawing/2014/main" id="{B9263076-0339-4029-B49C-75A824760CDA}"/>
+                <a16:creationId xmlns:a16="http://schemas.microsoft.com/office/drawing/2014/main" id="{8F7EC801-AA24-4702-A17E-53C2B3F450C6}"/>
               </a:ext>
             </a:extLst>
           </p:cNvPr>
@@ -7865,7 +7865,7 @@
           <p:cNvPr id="4" name="s4-footer">
             <a:extLst xmlns:a="http://schemas.openxmlformats.org/drawingml/2006/main">
               <a:ext uri="{FF2B5EF4-FFF2-40B4-BE49-F238E27FC236}">
-                <a16:creationId xmlns:a16="http://schemas.microsoft.com/office/drawing/2014/main" id="{AAAE71E5-98C1-4897-A1CE-D55F405D8F09}"/>
+                <a16:creationId xmlns:a16="http://schemas.microsoft.com/office/drawing/2014/main" id="{A7CDEFE8-9F66-44F2-9CBD-08939D3E86D3}"/>
               </a:ext>
             </a:extLst>
           </p:cNvPr>
@@ -7896,7 +7896,7 @@
           <p:cNvPr id="5" name="s4-identity">
             <a:extLst xmlns:a="http://schemas.openxmlformats.org/drawingml/2006/main">
               <a:ext uri="{FF2B5EF4-FFF2-40B4-BE49-F238E27FC236}">
-                <a16:creationId xmlns:a16="http://schemas.microsoft.com/office/drawing/2014/main" id="{348B9A29-1F97-4BF9-87D7-C0B10D3B9797}"/>
+                <a16:creationId xmlns:a16="http://schemas.microsoft.com/office/drawing/2014/main" id="{BE85B250-26E2-4610-A4DC-B9CF21D9DEAC}"/>
               </a:ext>
             </a:extLst>
           </p:cNvPr>
@@ -7954,7 +7954,7 @@
           <p:cNvPr id="6" name="core-no-0">
             <a:extLst xmlns:a="http://schemas.openxmlformats.org/drawingml/2006/main">
               <a:ext uri="{FF2B5EF4-FFF2-40B4-BE49-F238E27FC236}">
-                <a16:creationId xmlns:a16="http://schemas.microsoft.com/office/drawing/2014/main" id="{7FC4BD9E-C928-43F0-9491-0FFA43502427}"/>
+                <a16:creationId xmlns:a16="http://schemas.microsoft.com/office/drawing/2014/main" id="{7827789B-218A-48D5-A369-7C999F22B5D9}"/>
               </a:ext>
             </a:extLst>
           </p:cNvPr>
@@ -8012,7 +8012,7 @@
           <p:cNvPr id="7" name="core-label-0">
             <a:extLst xmlns:a="http://schemas.openxmlformats.org/drawingml/2006/main">
               <a:ext uri="{FF2B5EF4-FFF2-40B4-BE49-F238E27FC236}">
-                <a16:creationId xmlns:a16="http://schemas.microsoft.com/office/drawing/2014/main" id="{5C79245F-A346-442E-9A42-842E9832CC90}"/>
+                <a16:creationId xmlns:a16="http://schemas.microsoft.com/office/drawing/2014/main" id="{BCD1A9D9-8829-4B90-B33D-59607281F98B}"/>
               </a:ext>
             </a:extLst>
           </p:cNvPr>
@@ -8070,7 +8070,7 @@
           <p:cNvPr id="8" name="core-body-0">
             <a:extLst xmlns:a="http://schemas.openxmlformats.org/drawingml/2006/main">
               <a:ext uri="{FF2B5EF4-FFF2-40B4-BE49-F238E27FC236}">
-                <a16:creationId xmlns:a16="http://schemas.microsoft.com/office/drawing/2014/main" id="{D0F14F0B-CA58-4710-BC26-F523B32F5FA5}"/>
+                <a16:creationId xmlns:a16="http://schemas.microsoft.com/office/drawing/2014/main" id="{937273CF-6BCB-410E-984D-76ABDDD5401A}"/>
               </a:ext>
             </a:extLst>
           </p:cNvPr>
@@ -8134,7 +8134,7 @@
           <p:cNvPr id="9" name="core-no-1">
             <a:extLst xmlns:a="http://schemas.openxmlformats.org/drawingml/2006/main">
               <a:ext uri="{FF2B5EF4-FFF2-40B4-BE49-F238E27FC236}">
-                <a16:creationId xmlns:a16="http://schemas.microsoft.com/office/drawing/2014/main" id="{0E17A9EF-41AD-4329-AC5F-1EED2FBBF5E3}"/>
+                <a16:creationId xmlns:a16="http://schemas.microsoft.com/office/drawing/2014/main" id="{0848C775-6A4F-48C3-9FA2-8DFD801FDAEF}"/>
               </a:ext>
             </a:extLst>
           </p:cNvPr>
@@ -8192,7 +8192,7 @@
           <p:cNvPr id="10" name="core-label-1">
             <a:extLst xmlns:a="http://schemas.openxmlformats.org/drawingml/2006/main">
               <a:ext uri="{FF2B5EF4-FFF2-40B4-BE49-F238E27FC236}">
-                <a16:creationId xmlns:a16="http://schemas.microsoft.com/office/drawing/2014/main" id="{B00B322F-DF1B-431C-A849-C714CF028846}"/>
+                <a16:creationId xmlns:a16="http://schemas.microsoft.com/office/drawing/2014/main" id="{E5766C25-D775-4604-BDC6-E57CB2C88297}"/>
               </a:ext>
             </a:extLst>
           </p:cNvPr>
@@ -8250,7 +8250,7 @@
           <p:cNvPr id="11" name="core-body-1">
             <a:extLst xmlns:a="http://schemas.openxmlformats.org/drawingml/2006/main">
               <a:ext uri="{FF2B5EF4-FFF2-40B4-BE49-F238E27FC236}">
-                <a16:creationId xmlns:a16="http://schemas.microsoft.com/office/drawing/2014/main" id="{0DCC5157-B071-428B-A3E6-CB4B12F62E13}"/>
+                <a16:creationId xmlns:a16="http://schemas.microsoft.com/office/drawing/2014/main" id="{85FF592C-5DF0-4498-9927-C1B7C48EE30D}"/>
               </a:ext>
             </a:extLst>
           </p:cNvPr>
@@ -8314,7 +8314,7 @@
           <p:cNvPr id="12" name="s4-takeaway-rule">
             <a:extLst xmlns:a="http://schemas.openxmlformats.org/drawingml/2006/main">
               <a:ext uri="{FF2B5EF4-FFF2-40B4-BE49-F238E27FC236}">
-                <a16:creationId xmlns:a16="http://schemas.microsoft.com/office/drawing/2014/main" id="{2112A49F-0805-4481-A449-AF792E8701BF}"/>
+                <a16:creationId xmlns:a16="http://schemas.microsoft.com/office/drawing/2014/main" id="{73E57158-225C-4CBB-B6DA-3F1CD8D7D44C}"/>
               </a:ext>
             </a:extLst>
           </p:cNvPr>
@@ -8347,7 +8347,7 @@
           <p:cNvPr id="13" name="s4-takeaway">
             <a:extLst xmlns:a="http://schemas.openxmlformats.org/drawingml/2006/main">
               <a:ext uri="{FF2B5EF4-FFF2-40B4-BE49-F238E27FC236}">
-                <a16:creationId xmlns:a16="http://schemas.microsoft.com/office/drawing/2014/main" id="{C0E67907-5E51-4F0D-981A-59F4F2EF70DA}"/>
+                <a16:creationId xmlns:a16="http://schemas.microsoft.com/office/drawing/2014/main" id="{4F8ED9B9-A4EE-4F1F-955C-16AF42514439}"/>
               </a:ext>
             </a:extLst>
           </p:cNvPr>
@@ -8403,7 +8403,7 @@
     </p:spTree>
     <p:extLst>
       <p:ext uri="{BB962C8B-B14F-4D97-AF65-F5344CB8AC3E}">
-        <p14:creationId xmlns:p14="http://schemas.microsoft.com/office/powerpoint/2010/main" val="94807022"/>
+        <p14:creationId xmlns:p14="http://schemas.microsoft.com/office/powerpoint/2010/main" val="575174541"/>
       </p:ext>
     </p:extLst>
   </p:cSld>
@@ -8434,7 +8434,7 @@
           <p:cNvPr id="1" name="s5-rule">
             <a:extLst xmlns:a="http://schemas.openxmlformats.org/drawingml/2006/main">
               <a:ext uri="{FF2B5EF4-FFF2-40B4-BE49-F238E27FC236}">
-                <a16:creationId xmlns:a16="http://schemas.microsoft.com/office/drawing/2014/main" id="{C505AE22-A0F0-424F-B525-73419AD183BB}"/>
+                <a16:creationId xmlns:a16="http://schemas.microsoft.com/office/drawing/2014/main" id="{F081F4D9-F349-43BA-ACDB-090BB4FB077F}"/>
               </a:ext>
             </a:extLst>
           </p:cNvPr>
@@ -8467,7 +8467,7 @@
           <p:cNvPr id="2" name="s5-eyebrow">
             <a:extLst xmlns:a="http://schemas.openxmlformats.org/drawingml/2006/main">
               <a:ext uri="{FF2B5EF4-FFF2-40B4-BE49-F238E27FC236}">
-                <a16:creationId xmlns:a16="http://schemas.microsoft.com/office/drawing/2014/main" id="{20D3DA39-F864-4052-A0B5-C2F489CD3ABE}"/>
+                <a16:creationId xmlns:a16="http://schemas.microsoft.com/office/drawing/2014/main" id="{B4B66B84-39BD-4D6B-ACF0-35CE3AEDA86A}"/>
               </a:ext>
             </a:extLst>
           </p:cNvPr>
@@ -8525,7 +8525,7 @@
           <p:cNvPr id="3" name="s5-title">
             <a:extLst xmlns:a="http://schemas.openxmlformats.org/drawingml/2006/main">
               <a:ext uri="{FF2B5EF4-FFF2-40B4-BE49-F238E27FC236}">
-                <a16:creationId xmlns:a16="http://schemas.microsoft.com/office/drawing/2014/main" id="{CD33E7DB-650F-4095-A075-67B80ACA177A}"/>
+                <a16:creationId xmlns:a16="http://schemas.microsoft.com/office/drawing/2014/main" id="{CD87F0A8-CB0E-4F68-B45C-D3420BEC182B}"/>
               </a:ext>
             </a:extLst>
           </p:cNvPr>
@@ -8583,7 +8583,7 @@
           <p:cNvPr id="4" name="s5-footer">
             <a:extLst xmlns:a="http://schemas.openxmlformats.org/drawingml/2006/main">
               <a:ext uri="{FF2B5EF4-FFF2-40B4-BE49-F238E27FC236}">
-                <a16:creationId xmlns:a16="http://schemas.microsoft.com/office/drawing/2014/main" id="{6A572E3F-8AA3-4EAA-B36D-B3CA7A1E693A}"/>
+                <a16:creationId xmlns:a16="http://schemas.microsoft.com/office/drawing/2014/main" id="{16174BC6-4A5B-4330-A940-2607ACDFF152}"/>
               </a:ext>
             </a:extLst>
           </p:cNvPr>
@@ -8614,7 +8614,7 @@
           <p:cNvPr id="5" name="s5-identity">
             <a:extLst xmlns:a="http://schemas.openxmlformats.org/drawingml/2006/main">
               <a:ext uri="{FF2B5EF4-FFF2-40B4-BE49-F238E27FC236}">
-                <a16:creationId xmlns:a16="http://schemas.microsoft.com/office/drawing/2014/main" id="{4B0DE8CC-9B78-4E68-BBC3-BC244EF8DB26}"/>
+                <a16:creationId xmlns:a16="http://schemas.microsoft.com/office/drawing/2014/main" id="{DDC6FAE4-00C1-4601-B4E9-B2D342FF776A}"/>
               </a:ext>
             </a:extLst>
           </p:cNvPr>
@@ -8672,7 +8672,7 @@
           <p:cNvPr id="6" name="core-no-0">
             <a:extLst xmlns:a="http://schemas.openxmlformats.org/drawingml/2006/main">
               <a:ext uri="{FF2B5EF4-FFF2-40B4-BE49-F238E27FC236}">
-                <a16:creationId xmlns:a16="http://schemas.microsoft.com/office/drawing/2014/main" id="{EC8AF9B6-201B-415E-84BF-33E502339DD7}"/>
+                <a16:creationId xmlns:a16="http://schemas.microsoft.com/office/drawing/2014/main" id="{9D4FC3CB-BD2B-4E12-A5A6-90099B292364}"/>
               </a:ext>
             </a:extLst>
           </p:cNvPr>
@@ -8730,7 +8730,7 @@
           <p:cNvPr id="7" name="core-label-0">
             <a:extLst xmlns:a="http://schemas.openxmlformats.org/drawingml/2006/main">
               <a:ext uri="{FF2B5EF4-FFF2-40B4-BE49-F238E27FC236}">
-                <a16:creationId xmlns:a16="http://schemas.microsoft.com/office/drawing/2014/main" id="{520C132C-C8CF-4BDE-95FF-0A3958B2FA15}"/>
+                <a16:creationId xmlns:a16="http://schemas.microsoft.com/office/drawing/2014/main" id="{3FE855AD-C956-4785-A904-91982851A528}"/>
               </a:ext>
             </a:extLst>
           </p:cNvPr>
@@ -8788,7 +8788,7 @@
           <p:cNvPr id="8" name="core-body-0">
             <a:extLst xmlns:a="http://schemas.openxmlformats.org/drawingml/2006/main">
               <a:ext uri="{FF2B5EF4-FFF2-40B4-BE49-F238E27FC236}">
-                <a16:creationId xmlns:a16="http://schemas.microsoft.com/office/drawing/2014/main" id="{1037EB6B-F2F3-455C-8E0D-F53E41B968D8}"/>
+                <a16:creationId xmlns:a16="http://schemas.microsoft.com/office/drawing/2014/main" id="{4503CE96-3C41-4866-AD66-9DFC4212E414}"/>
               </a:ext>
             </a:extLst>
           </p:cNvPr>
@@ -8852,7 +8852,7 @@
           <p:cNvPr id="9" name="core-no-1">
             <a:extLst xmlns:a="http://schemas.openxmlformats.org/drawingml/2006/main">
               <a:ext uri="{FF2B5EF4-FFF2-40B4-BE49-F238E27FC236}">
-                <a16:creationId xmlns:a16="http://schemas.microsoft.com/office/drawing/2014/main" id="{A3B34C28-964D-41A6-945E-09098AFCD8F4}"/>
+                <a16:creationId xmlns:a16="http://schemas.microsoft.com/office/drawing/2014/main" id="{3346A87A-3C6C-455B-9443-F33095302A62}"/>
               </a:ext>
             </a:extLst>
           </p:cNvPr>
@@ -8910,7 +8910,7 @@
           <p:cNvPr id="10" name="core-label-1">
             <a:extLst xmlns:a="http://schemas.openxmlformats.org/drawingml/2006/main">
               <a:ext uri="{FF2B5EF4-FFF2-40B4-BE49-F238E27FC236}">
-                <a16:creationId xmlns:a16="http://schemas.microsoft.com/office/drawing/2014/main" id="{C0D02A38-0A46-45A0-AEFE-8E14B20C303C}"/>
+                <a16:creationId xmlns:a16="http://schemas.microsoft.com/office/drawing/2014/main" id="{2A41B72F-A5E0-4AAD-AFDF-348E52273B18}"/>
               </a:ext>
             </a:extLst>
           </p:cNvPr>
@@ -8968,7 +8968,7 @@
           <p:cNvPr id="11" name="core-body-1">
             <a:extLst xmlns:a="http://schemas.openxmlformats.org/drawingml/2006/main">
               <a:ext uri="{FF2B5EF4-FFF2-40B4-BE49-F238E27FC236}">
-                <a16:creationId xmlns:a16="http://schemas.microsoft.com/office/drawing/2014/main" id="{F98AE321-7C49-4153-9BED-FF4701DB3836}"/>
+                <a16:creationId xmlns:a16="http://schemas.microsoft.com/office/drawing/2014/main" id="{47BF88EF-33B5-428B-BBA5-356E1468625F}"/>
               </a:ext>
             </a:extLst>
           </p:cNvPr>
@@ -9032,7 +9032,7 @@
           <p:cNvPr id="12" name="s5-takeaway-rule">
             <a:extLst xmlns:a="http://schemas.openxmlformats.org/drawingml/2006/main">
               <a:ext uri="{FF2B5EF4-FFF2-40B4-BE49-F238E27FC236}">
-                <a16:creationId xmlns:a16="http://schemas.microsoft.com/office/drawing/2014/main" id="{CEC2F227-F708-466F-A178-C3163D8C6A96}"/>
+                <a16:creationId xmlns:a16="http://schemas.microsoft.com/office/drawing/2014/main" id="{D67B4306-A97E-4202-9F10-3102750285A4}"/>
               </a:ext>
             </a:extLst>
           </p:cNvPr>
@@ -9065,7 +9065,7 @@
           <p:cNvPr id="13" name="s5-takeaway">
             <a:extLst xmlns:a="http://schemas.openxmlformats.org/drawingml/2006/main">
               <a:ext uri="{FF2B5EF4-FFF2-40B4-BE49-F238E27FC236}">
-                <a16:creationId xmlns:a16="http://schemas.microsoft.com/office/drawing/2014/main" id="{FF26A018-89B0-408F-B122-6FF4725C039E}"/>
+                <a16:creationId xmlns:a16="http://schemas.microsoft.com/office/drawing/2014/main" id="{16915530-6895-4232-89A7-8A7A8EE5D583}"/>
               </a:ext>
             </a:extLst>
           </p:cNvPr>
@@ -9121,7 +9121,7 @@
     </p:spTree>
     <p:extLst>
       <p:ext uri="{BB962C8B-B14F-4D97-AF65-F5344CB8AC3E}">
-        <p14:creationId xmlns:p14="http://schemas.microsoft.com/office/powerpoint/2010/main" val="314961547"/>
+        <p14:creationId xmlns:p14="http://schemas.microsoft.com/office/powerpoint/2010/main" val="1628922368"/>
       </p:ext>
     </p:extLst>
   </p:cSld>
@@ -9152,7 +9152,7 @@
           <p:cNvPr id="1" name="s6-rule">
             <a:extLst xmlns:a="http://schemas.openxmlformats.org/drawingml/2006/main">
               <a:ext uri="{FF2B5EF4-FFF2-40B4-BE49-F238E27FC236}">
-                <a16:creationId xmlns:a16="http://schemas.microsoft.com/office/drawing/2014/main" id="{C7815D9A-E73F-4A5D-9B2B-BB17AD7FB219}"/>
+                <a16:creationId xmlns:a16="http://schemas.microsoft.com/office/drawing/2014/main" id="{EF63794F-F195-4138-8E14-B8EE90B99E29}"/>
               </a:ext>
             </a:extLst>
           </p:cNvPr>
@@ -9185,7 +9185,7 @@
           <p:cNvPr id="2" name="s6-eyebrow">
             <a:extLst xmlns:a="http://schemas.openxmlformats.org/drawingml/2006/main">
               <a:ext uri="{FF2B5EF4-FFF2-40B4-BE49-F238E27FC236}">
-                <a16:creationId xmlns:a16="http://schemas.microsoft.com/office/drawing/2014/main" id="{BAFDF140-9AEB-47C7-95C1-ED4FC59630E4}"/>
+                <a16:creationId xmlns:a16="http://schemas.microsoft.com/office/drawing/2014/main" id="{353392B3-1B54-452C-A189-24B853D916C0}"/>
               </a:ext>
             </a:extLst>
           </p:cNvPr>
@@ -9243,7 +9243,7 @@
           <p:cNvPr id="3" name="s6-title">
             <a:extLst xmlns:a="http://schemas.openxmlformats.org/drawingml/2006/main">
               <a:ext uri="{FF2B5EF4-FFF2-40B4-BE49-F238E27FC236}">
-                <a16:creationId xmlns:a16="http://schemas.microsoft.com/office/drawing/2014/main" id="{87AEC01B-FCC9-420B-98CE-A3C3B5DCFB71}"/>
+                <a16:creationId xmlns:a16="http://schemas.microsoft.com/office/drawing/2014/main" id="{414F03CA-9C61-45C0-8676-C72DC328541A}"/>
               </a:ext>
             </a:extLst>
           </p:cNvPr>
@@ -9301,7 +9301,7 @@
           <p:cNvPr id="4" name="s6-footer">
             <a:extLst xmlns:a="http://schemas.openxmlformats.org/drawingml/2006/main">
               <a:ext uri="{FF2B5EF4-FFF2-40B4-BE49-F238E27FC236}">
-                <a16:creationId xmlns:a16="http://schemas.microsoft.com/office/drawing/2014/main" id="{4F39368D-9F7F-45D1-9950-176CA8CB62F2}"/>
+                <a16:creationId xmlns:a16="http://schemas.microsoft.com/office/drawing/2014/main" id="{57CE6488-0FA6-4934-AB54-921922E6BBBE}"/>
               </a:ext>
             </a:extLst>
           </p:cNvPr>
@@ -9332,7 +9332,7 @@
           <p:cNvPr id="5" name="s6-identity">
             <a:extLst xmlns:a="http://schemas.openxmlformats.org/drawingml/2006/main">
               <a:ext uri="{FF2B5EF4-FFF2-40B4-BE49-F238E27FC236}">
-                <a16:creationId xmlns:a16="http://schemas.microsoft.com/office/drawing/2014/main" id="{069AB18F-E440-47F5-BFBA-57707F39F510}"/>
+                <a16:creationId xmlns:a16="http://schemas.microsoft.com/office/drawing/2014/main" id="{41C1333C-B485-47D6-863A-49835BAFFBA0}"/>
               </a:ext>
             </a:extLst>
           </p:cNvPr>
@@ -9390,7 +9390,7 @@
           <p:cNvPr id="6" name="core-no-0">
             <a:extLst xmlns:a="http://schemas.openxmlformats.org/drawingml/2006/main">
               <a:ext uri="{FF2B5EF4-FFF2-40B4-BE49-F238E27FC236}">
-                <a16:creationId xmlns:a16="http://schemas.microsoft.com/office/drawing/2014/main" id="{58EFE734-506E-4B45-BDC4-CEB451E8DB40}"/>
+                <a16:creationId xmlns:a16="http://schemas.microsoft.com/office/drawing/2014/main" id="{88C2EEE5-915D-4D71-9FF9-8BBE8B34393E}"/>
               </a:ext>
             </a:extLst>
           </p:cNvPr>
@@ -9448,7 +9448,7 @@
           <p:cNvPr id="7" name="core-label-0">
             <a:extLst xmlns:a="http://schemas.openxmlformats.org/drawingml/2006/main">
               <a:ext uri="{FF2B5EF4-FFF2-40B4-BE49-F238E27FC236}">
-                <a16:creationId xmlns:a16="http://schemas.microsoft.com/office/drawing/2014/main" id="{C706809A-C43B-42C6-8D57-5DC5F4FF2358}"/>
+                <a16:creationId xmlns:a16="http://schemas.microsoft.com/office/drawing/2014/main" id="{58DE187C-5373-4D37-81A8-C1C1D0EFA879}"/>
               </a:ext>
             </a:extLst>
           </p:cNvPr>
@@ -9506,7 +9506,7 @@
           <p:cNvPr id="8" name="core-body-0">
             <a:extLst xmlns:a="http://schemas.openxmlformats.org/drawingml/2006/main">
               <a:ext uri="{FF2B5EF4-FFF2-40B4-BE49-F238E27FC236}">
-                <a16:creationId xmlns:a16="http://schemas.microsoft.com/office/drawing/2014/main" id="{D4A8B588-0ED2-4BD7-A091-6A7B55B46CFF}"/>
+                <a16:creationId xmlns:a16="http://schemas.microsoft.com/office/drawing/2014/main" id="{EEA4D205-F8C5-44E2-AA2A-58AC9919AE21}"/>
               </a:ext>
             </a:extLst>
           </p:cNvPr>
@@ -9570,7 +9570,7 @@
           <p:cNvPr id="9" name="core-no-1">
             <a:extLst xmlns:a="http://schemas.openxmlformats.org/drawingml/2006/main">
               <a:ext uri="{FF2B5EF4-FFF2-40B4-BE49-F238E27FC236}">
-                <a16:creationId xmlns:a16="http://schemas.microsoft.com/office/drawing/2014/main" id="{4CBAC58E-C9A1-48E1-A2C8-0BEDA3661C72}"/>
+                <a16:creationId xmlns:a16="http://schemas.microsoft.com/office/drawing/2014/main" id="{FCB1102E-C38D-42FD-94CE-0C2BBC47039E}"/>
               </a:ext>
             </a:extLst>
           </p:cNvPr>
@@ -9628,7 +9628,7 @@
           <p:cNvPr id="10" name="core-body-1">
             <a:extLst xmlns:a="http://schemas.openxmlformats.org/drawingml/2006/main">
               <a:ext uri="{FF2B5EF4-FFF2-40B4-BE49-F238E27FC236}">
-                <a16:creationId xmlns:a16="http://schemas.microsoft.com/office/drawing/2014/main" id="{71D22ACB-98EE-43FE-9D81-86C8B86D1401}"/>
+                <a16:creationId xmlns:a16="http://schemas.microsoft.com/office/drawing/2014/main" id="{6B4FE347-6D28-4CAD-A669-7B14F3CAC040}"/>
               </a:ext>
             </a:extLst>
           </p:cNvPr>
@@ -9692,7 +9692,7 @@
           <p:cNvPr id="11" name="core-no-2">
             <a:extLst xmlns:a="http://schemas.openxmlformats.org/drawingml/2006/main">
               <a:ext uri="{FF2B5EF4-FFF2-40B4-BE49-F238E27FC236}">
-                <a16:creationId xmlns:a16="http://schemas.microsoft.com/office/drawing/2014/main" id="{BFE31064-636E-4606-8C11-F68AA77A0071}"/>
+                <a16:creationId xmlns:a16="http://schemas.microsoft.com/office/drawing/2014/main" id="{05832294-9DB8-40D1-A5CC-6EB498A9CE63}"/>
               </a:ext>
             </a:extLst>
           </p:cNvPr>
@@ -9750,7 +9750,7 @@
           <p:cNvPr id="12" name="core-body-2">
             <a:extLst xmlns:a="http://schemas.openxmlformats.org/drawingml/2006/main">
               <a:ext uri="{FF2B5EF4-FFF2-40B4-BE49-F238E27FC236}">
-                <a16:creationId xmlns:a16="http://schemas.microsoft.com/office/drawing/2014/main" id="{D580BC77-7552-445E-8397-49DD2D88113D}"/>
+                <a16:creationId xmlns:a16="http://schemas.microsoft.com/office/drawing/2014/main" id="{A2C43C17-023C-49AB-87F8-37DD83B14ECD}"/>
               </a:ext>
             </a:extLst>
           </p:cNvPr>
@@ -9814,7 +9814,7 @@
           <p:cNvPr id="13" name="s6-takeaway-rule">
             <a:extLst xmlns:a="http://schemas.openxmlformats.org/drawingml/2006/main">
               <a:ext uri="{FF2B5EF4-FFF2-40B4-BE49-F238E27FC236}">
-                <a16:creationId xmlns:a16="http://schemas.microsoft.com/office/drawing/2014/main" id="{6FDC305B-8142-4BA0-B121-F32C6DDF62E7}"/>
+                <a16:creationId xmlns:a16="http://schemas.microsoft.com/office/drawing/2014/main" id="{9FF1F60C-A911-4481-97F0-4E09BD9DF16F}"/>
               </a:ext>
             </a:extLst>
           </p:cNvPr>
@@ -9847,7 +9847,7 @@
           <p:cNvPr id="14" name="s6-takeaway">
             <a:extLst xmlns:a="http://schemas.openxmlformats.org/drawingml/2006/main">
               <a:ext uri="{FF2B5EF4-FFF2-40B4-BE49-F238E27FC236}">
-                <a16:creationId xmlns:a16="http://schemas.microsoft.com/office/drawing/2014/main" id="{934A3B10-2EF9-4122-BE22-72EFF440E3CE}"/>
+                <a16:creationId xmlns:a16="http://schemas.microsoft.com/office/drawing/2014/main" id="{618CA829-F362-4F5A-A63E-533487563459}"/>
               </a:ext>
             </a:extLst>
           </p:cNvPr>
@@ -9903,7 +9903,7 @@
     </p:spTree>
     <p:extLst>
       <p:ext uri="{BB962C8B-B14F-4D97-AF65-F5344CB8AC3E}">
-        <p14:creationId xmlns:p14="http://schemas.microsoft.com/office/powerpoint/2010/main" val="1288380544"/>
+        <p14:creationId xmlns:p14="http://schemas.microsoft.com/office/powerpoint/2010/main" val="276102620"/>
       </p:ext>
     </p:extLst>
   </p:cSld>
@@ -9934,7 +9934,7 @@
           <p:cNvPr id="1" name="s7-rule">
             <a:extLst xmlns:a="http://schemas.openxmlformats.org/drawingml/2006/main">
               <a:ext uri="{FF2B5EF4-FFF2-40B4-BE49-F238E27FC236}">
-                <a16:creationId xmlns:a16="http://schemas.microsoft.com/office/drawing/2014/main" id="{F3809C00-926F-4D5B-B54D-BFFB53244527}"/>
+                <a16:creationId xmlns:a16="http://schemas.microsoft.com/office/drawing/2014/main" id="{21FF2C88-03D7-4EBE-B641-C20B9F852245}"/>
               </a:ext>
             </a:extLst>
           </p:cNvPr>
@@ -9967,7 +9967,7 @@
           <p:cNvPr id="2" name="s7-eyebrow">
             <a:extLst xmlns:a="http://schemas.openxmlformats.org/drawingml/2006/main">
               <a:ext uri="{FF2B5EF4-FFF2-40B4-BE49-F238E27FC236}">
-                <a16:creationId xmlns:a16="http://schemas.microsoft.com/office/drawing/2014/main" id="{4DD852A0-F8B9-4E43-B8A7-C2A81A3D4E9F}"/>
+                <a16:creationId xmlns:a16="http://schemas.microsoft.com/office/drawing/2014/main" id="{DCB66BBB-F9AD-493D-976D-213A9B4462D7}"/>
               </a:ext>
             </a:extLst>
           </p:cNvPr>
@@ -10025,7 +10025,7 @@
           <p:cNvPr id="3" name="s7-title">
             <a:extLst xmlns:a="http://schemas.openxmlformats.org/drawingml/2006/main">
               <a:ext uri="{FF2B5EF4-FFF2-40B4-BE49-F238E27FC236}">
-                <a16:creationId xmlns:a16="http://schemas.microsoft.com/office/drawing/2014/main" id="{5CBB4678-B291-433F-A92F-CD6E9F36B55E}"/>
+                <a16:creationId xmlns:a16="http://schemas.microsoft.com/office/drawing/2014/main" id="{43ED2B92-0639-4B24-A9F8-964CD0C85690}"/>
               </a:ext>
             </a:extLst>
           </p:cNvPr>
@@ -10083,7 +10083,7 @@
           <p:cNvPr id="4" name="s7-footer">
             <a:extLst xmlns:a="http://schemas.openxmlformats.org/drawingml/2006/main">
               <a:ext uri="{FF2B5EF4-FFF2-40B4-BE49-F238E27FC236}">
-                <a16:creationId xmlns:a16="http://schemas.microsoft.com/office/drawing/2014/main" id="{83C65ED7-CC48-4091-834E-320FC9E6C79C}"/>
+                <a16:creationId xmlns:a16="http://schemas.microsoft.com/office/drawing/2014/main" id="{B37F2BDE-DB19-48E9-85E0-56DB5EF01FBD}"/>
               </a:ext>
             </a:extLst>
           </p:cNvPr>
@@ -10114,7 +10114,7 @@
           <p:cNvPr id="5" name="s7-identity">
             <a:extLst xmlns:a="http://schemas.openxmlformats.org/drawingml/2006/main">
               <a:ext uri="{FF2B5EF4-FFF2-40B4-BE49-F238E27FC236}">
-                <a16:creationId xmlns:a16="http://schemas.microsoft.com/office/drawing/2014/main" id="{DE3E8703-B9CC-4611-8BC1-58E9274B84BF}"/>
+                <a16:creationId xmlns:a16="http://schemas.microsoft.com/office/drawing/2014/main" id="{4CE664FA-CF7C-4232-AC2C-8A0F7C54E0F7}"/>
               </a:ext>
             </a:extLst>
           </p:cNvPr>
@@ -10172,7 +10172,7 @@
           <p:cNvPr id="6" name="core-no-0">
             <a:extLst xmlns:a="http://schemas.openxmlformats.org/drawingml/2006/main">
               <a:ext uri="{FF2B5EF4-FFF2-40B4-BE49-F238E27FC236}">
-                <a16:creationId xmlns:a16="http://schemas.microsoft.com/office/drawing/2014/main" id="{4F7E3732-8D73-484A-96CB-1D5F050D18C3}"/>
+                <a16:creationId xmlns:a16="http://schemas.microsoft.com/office/drawing/2014/main" id="{293C039B-01D9-4DE3-A5A8-EB35F80D5734}"/>
               </a:ext>
             </a:extLst>
           </p:cNvPr>
@@ -10230,7 +10230,7 @@
           <p:cNvPr id="7" name="core-label-0">
             <a:extLst xmlns:a="http://schemas.openxmlformats.org/drawingml/2006/main">
               <a:ext uri="{FF2B5EF4-FFF2-40B4-BE49-F238E27FC236}">
-                <a16:creationId xmlns:a16="http://schemas.microsoft.com/office/drawing/2014/main" id="{CE0550BA-5D54-4907-89F5-4A9C0EAC8BD1}"/>
+                <a16:creationId xmlns:a16="http://schemas.microsoft.com/office/drawing/2014/main" id="{EDC9ACA6-5A44-4D9C-945C-142829FE64E6}"/>
               </a:ext>
             </a:extLst>
           </p:cNvPr>
@@ -10288,7 +10288,7 @@
           <p:cNvPr id="8" name="core-body-0">
             <a:extLst xmlns:a="http://schemas.openxmlformats.org/drawingml/2006/main">
               <a:ext uri="{FF2B5EF4-FFF2-40B4-BE49-F238E27FC236}">
-                <a16:creationId xmlns:a16="http://schemas.microsoft.com/office/drawing/2014/main" id="{75C820D6-90F2-4FDF-B9B6-CA119DB5E06F}"/>
+                <a16:creationId xmlns:a16="http://schemas.microsoft.com/office/drawing/2014/main" id="{DC5398A2-F4E7-473E-9868-1EBC2157B176}"/>
               </a:ext>
             </a:extLst>
           </p:cNvPr>
@@ -10352,7 +10352,7 @@
           <p:cNvPr id="9" name="core-no-1">
             <a:extLst xmlns:a="http://schemas.openxmlformats.org/drawingml/2006/main">
               <a:ext uri="{FF2B5EF4-FFF2-40B4-BE49-F238E27FC236}">
-                <a16:creationId xmlns:a16="http://schemas.microsoft.com/office/drawing/2014/main" id="{A4A8435C-8C3D-46CA-85E8-04ACC1720932}"/>
+                <a16:creationId xmlns:a16="http://schemas.microsoft.com/office/drawing/2014/main" id="{3A430C3F-1D84-40AB-BD45-70388E8B725A}"/>
               </a:ext>
             </a:extLst>
           </p:cNvPr>
@@ -10410,7 +10410,7 @@
           <p:cNvPr id="10" name="core-body-1">
             <a:extLst xmlns:a="http://schemas.openxmlformats.org/drawingml/2006/main">
               <a:ext uri="{FF2B5EF4-FFF2-40B4-BE49-F238E27FC236}">
-                <a16:creationId xmlns:a16="http://schemas.microsoft.com/office/drawing/2014/main" id="{789CEF42-A1E1-4E4F-80B6-2886715C8E3E}"/>
+                <a16:creationId xmlns:a16="http://schemas.microsoft.com/office/drawing/2014/main" id="{953F909C-1A8A-4965-A346-1C4010A45A12}"/>
               </a:ext>
             </a:extLst>
           </p:cNvPr>
@@ -10474,7 +10474,7 @@
           <p:cNvPr id="11" name="core-no-2">
             <a:extLst xmlns:a="http://schemas.openxmlformats.org/drawingml/2006/main">
               <a:ext uri="{FF2B5EF4-FFF2-40B4-BE49-F238E27FC236}">
-                <a16:creationId xmlns:a16="http://schemas.microsoft.com/office/drawing/2014/main" id="{B419125D-3E1A-417E-95D9-12CCBF4DB040}"/>
+                <a16:creationId xmlns:a16="http://schemas.microsoft.com/office/drawing/2014/main" id="{109134DC-26AE-4A0F-A6AD-A793AD7F211A}"/>
               </a:ext>
             </a:extLst>
           </p:cNvPr>
@@ -10532,7 +10532,7 @@
           <p:cNvPr id="12" name="core-body-2">
             <a:extLst xmlns:a="http://schemas.openxmlformats.org/drawingml/2006/main">
               <a:ext uri="{FF2B5EF4-FFF2-40B4-BE49-F238E27FC236}">
-                <a16:creationId xmlns:a16="http://schemas.microsoft.com/office/drawing/2014/main" id="{19CF1FC7-D65D-448F-8084-B89C34994FE4}"/>
+                <a16:creationId xmlns:a16="http://schemas.microsoft.com/office/drawing/2014/main" id="{5D99BA57-6A8E-4C71-9CCF-D2842AE81722}"/>
               </a:ext>
             </a:extLst>
           </p:cNvPr>
@@ -10596,7 +10596,7 @@
           <p:cNvPr id="13" name="s7-takeaway-rule">
             <a:extLst xmlns:a="http://schemas.openxmlformats.org/drawingml/2006/main">
               <a:ext uri="{FF2B5EF4-FFF2-40B4-BE49-F238E27FC236}">
-                <a16:creationId xmlns:a16="http://schemas.microsoft.com/office/drawing/2014/main" id="{0A0ED7A0-9A39-4C5D-9532-675A863512CD}"/>
+                <a16:creationId xmlns:a16="http://schemas.microsoft.com/office/drawing/2014/main" id="{025E7AB4-2CBC-4B62-A377-A0833BABCC2C}"/>
               </a:ext>
             </a:extLst>
           </p:cNvPr>
@@ -10629,7 +10629,7 @@
           <p:cNvPr id="14" name="s7-takeaway">
             <a:extLst xmlns:a="http://schemas.openxmlformats.org/drawingml/2006/main">
               <a:ext uri="{FF2B5EF4-FFF2-40B4-BE49-F238E27FC236}">
-                <a16:creationId xmlns:a16="http://schemas.microsoft.com/office/drawing/2014/main" id="{CE0AC6DD-010D-48B1-927E-BE061F31B9FE}"/>
+                <a16:creationId xmlns:a16="http://schemas.microsoft.com/office/drawing/2014/main" id="{6EA2645D-9471-4E0C-8B9B-3735A6258480}"/>
               </a:ext>
             </a:extLst>
           </p:cNvPr>
@@ -10685,7 +10685,7 @@
     </p:spTree>
     <p:extLst>
       <p:ext uri="{BB962C8B-B14F-4D97-AF65-F5344CB8AC3E}">
-        <p14:creationId xmlns:p14="http://schemas.microsoft.com/office/powerpoint/2010/main" val="62528331"/>
+        <p14:creationId xmlns:p14="http://schemas.microsoft.com/office/powerpoint/2010/main" val="884624954"/>
       </p:ext>
     </p:extLst>
   </p:cSld>
@@ -10716,7 +10716,7 @@
           <p:cNvPr id="1" name="s8-rule">
             <a:extLst xmlns:a="http://schemas.openxmlformats.org/drawingml/2006/main">
               <a:ext uri="{FF2B5EF4-FFF2-40B4-BE49-F238E27FC236}">
-                <a16:creationId xmlns:a16="http://schemas.microsoft.com/office/drawing/2014/main" id="{B0BBDA6A-778E-421C-A34C-ECB62208E90A}"/>
+                <a16:creationId xmlns:a16="http://schemas.microsoft.com/office/drawing/2014/main" id="{B34BDABF-FBD5-4146-B60A-FADDA2777E3B}"/>
               </a:ext>
             </a:extLst>
           </p:cNvPr>
@@ -10749,7 +10749,7 @@
           <p:cNvPr id="2" name="s8-eyebrow">
             <a:extLst xmlns:a="http://schemas.openxmlformats.org/drawingml/2006/main">
               <a:ext uri="{FF2B5EF4-FFF2-40B4-BE49-F238E27FC236}">
-                <a16:creationId xmlns:a16="http://schemas.microsoft.com/office/drawing/2014/main" id="{6372359C-D878-45E7-8C51-F150FE0361D0}"/>
+                <a16:creationId xmlns:a16="http://schemas.microsoft.com/office/drawing/2014/main" id="{63D1F2AF-CD74-49C2-ACEB-F8C3E4201364}"/>
               </a:ext>
             </a:extLst>
           </p:cNvPr>
@@ -10807,7 +10807,7 @@
           <p:cNvPr id="3" name="s8-title">
             <a:extLst xmlns:a="http://schemas.openxmlformats.org/drawingml/2006/main">
               <a:ext uri="{FF2B5EF4-FFF2-40B4-BE49-F238E27FC236}">
-                <a16:creationId xmlns:a16="http://schemas.microsoft.com/office/drawing/2014/main" id="{CB8FCAA5-61F4-41B4-963E-E54866DD58F4}"/>
+                <a16:creationId xmlns:a16="http://schemas.microsoft.com/office/drawing/2014/main" id="{CFCFEAE5-315D-49F9-A37F-7A78966B51E5}"/>
               </a:ext>
             </a:extLst>
           </p:cNvPr>
@@ -10865,7 +10865,7 @@
           <p:cNvPr id="4" name="s8-footer">
             <a:extLst xmlns:a="http://schemas.openxmlformats.org/drawingml/2006/main">
               <a:ext uri="{FF2B5EF4-FFF2-40B4-BE49-F238E27FC236}">
-                <a16:creationId xmlns:a16="http://schemas.microsoft.com/office/drawing/2014/main" id="{1789450A-13E2-4223-8899-14A2612E50F1}"/>
+                <a16:creationId xmlns:a16="http://schemas.microsoft.com/office/drawing/2014/main" id="{200D67DF-9EC8-4FF5-B379-E8000CA86B7D}"/>
               </a:ext>
             </a:extLst>
           </p:cNvPr>
@@ -10896,7 +10896,7 @@
           <p:cNvPr id="5" name="s8-identity">
             <a:extLst xmlns:a="http://schemas.openxmlformats.org/drawingml/2006/main">
               <a:ext uri="{FF2B5EF4-FFF2-40B4-BE49-F238E27FC236}">
-                <a16:creationId xmlns:a16="http://schemas.microsoft.com/office/drawing/2014/main" id="{356F152A-60E0-408C-9646-AB56674E91DC}"/>
+                <a16:creationId xmlns:a16="http://schemas.microsoft.com/office/drawing/2014/main" id="{CB2A74A5-8ED4-4B1E-8210-7013D6726724}"/>
               </a:ext>
             </a:extLst>
           </p:cNvPr>
@@ -10954,7 +10954,7 @@
           <p:cNvPr id="6" name="core-no-0">
             <a:extLst xmlns:a="http://schemas.openxmlformats.org/drawingml/2006/main">
               <a:ext uri="{FF2B5EF4-FFF2-40B4-BE49-F238E27FC236}">
-                <a16:creationId xmlns:a16="http://schemas.microsoft.com/office/drawing/2014/main" id="{077A2C6F-C981-4E3C-B105-C0CD94C1B3DE}"/>
+                <a16:creationId xmlns:a16="http://schemas.microsoft.com/office/drawing/2014/main" id="{C8293C89-8ECC-44BA-8A0B-D8E0389E628C}"/>
               </a:ext>
             </a:extLst>
           </p:cNvPr>
@@ -11012,7 +11012,7 @@
           <p:cNvPr id="7" name="core-label-0">
             <a:extLst xmlns:a="http://schemas.openxmlformats.org/drawingml/2006/main">
               <a:ext uri="{FF2B5EF4-FFF2-40B4-BE49-F238E27FC236}">
-                <a16:creationId xmlns:a16="http://schemas.microsoft.com/office/drawing/2014/main" id="{3580A42D-8876-45F6-B3F3-AEA4988E85EC}"/>
+                <a16:creationId xmlns:a16="http://schemas.microsoft.com/office/drawing/2014/main" id="{AF8E51E4-9731-4A7A-8D64-89C11FE8BE0C}"/>
               </a:ext>
             </a:extLst>
           </p:cNvPr>
@@ -11070,7 +11070,7 @@
           <p:cNvPr id="8" name="core-body-0">
             <a:extLst xmlns:a="http://schemas.openxmlformats.org/drawingml/2006/main">
               <a:ext uri="{FF2B5EF4-FFF2-40B4-BE49-F238E27FC236}">
-                <a16:creationId xmlns:a16="http://schemas.microsoft.com/office/drawing/2014/main" id="{56FF8978-507C-4286-AC41-5FCA427A69E4}"/>
+                <a16:creationId xmlns:a16="http://schemas.microsoft.com/office/drawing/2014/main" id="{5A186719-2D9F-43DC-9728-A32A636DEFB7}"/>
               </a:ext>
             </a:extLst>
           </p:cNvPr>
@@ -11134,7 +11134,7 @@
           <p:cNvPr id="9" name="core-no-1">
             <a:extLst xmlns:a="http://schemas.openxmlformats.org/drawingml/2006/main">
               <a:ext uri="{FF2B5EF4-FFF2-40B4-BE49-F238E27FC236}">
-                <a16:creationId xmlns:a16="http://schemas.microsoft.com/office/drawing/2014/main" id="{C2BCEC5D-0220-41B2-9D07-4579FD04F511}"/>
+                <a16:creationId xmlns:a16="http://schemas.microsoft.com/office/drawing/2014/main" id="{4ACD784F-ACAA-4B89-B9C7-4FF1139F9C0F}"/>
               </a:ext>
             </a:extLst>
           </p:cNvPr>
@@ -11192,7 +11192,7 @@
           <p:cNvPr id="10" name="core-body-1">
             <a:extLst xmlns:a="http://schemas.openxmlformats.org/drawingml/2006/main">
               <a:ext uri="{FF2B5EF4-FFF2-40B4-BE49-F238E27FC236}">
-                <a16:creationId xmlns:a16="http://schemas.microsoft.com/office/drawing/2014/main" id="{62ABBBA5-14E4-42EA-9F6E-744E16872663}"/>
+                <a16:creationId xmlns:a16="http://schemas.microsoft.com/office/drawing/2014/main" id="{8F6B6E17-A258-42C0-B0E1-03AC7ADBEDF2}"/>
               </a:ext>
             </a:extLst>
           </p:cNvPr>
@@ -11256,7 +11256,7 @@
           <p:cNvPr id="11" name="core-no-2">
             <a:extLst xmlns:a="http://schemas.openxmlformats.org/drawingml/2006/main">
               <a:ext uri="{FF2B5EF4-FFF2-40B4-BE49-F238E27FC236}">
-                <a16:creationId xmlns:a16="http://schemas.microsoft.com/office/drawing/2014/main" id="{F8F18D94-DC8A-460D-9C48-06247016D6EB}"/>
+                <a16:creationId xmlns:a16="http://schemas.microsoft.com/office/drawing/2014/main" id="{8486B2A9-F37F-47BF-A92F-80392F744DB6}"/>
               </a:ext>
             </a:extLst>
           </p:cNvPr>
@@ -11314,7 +11314,7 @@
           <p:cNvPr id="12" name="core-body-2">
             <a:extLst xmlns:a="http://schemas.openxmlformats.org/drawingml/2006/main">
               <a:ext uri="{FF2B5EF4-FFF2-40B4-BE49-F238E27FC236}">
-                <a16:creationId xmlns:a16="http://schemas.microsoft.com/office/drawing/2014/main" id="{B3CABF2E-CD75-4FC6-9DCF-2C0E6F4CB354}"/>
+                <a16:creationId xmlns:a16="http://schemas.microsoft.com/office/drawing/2014/main" id="{6D6EA28B-3125-4D0D-826D-16E8B79749FF}"/>
               </a:ext>
             </a:extLst>
           </p:cNvPr>
@@ -11378,7 +11378,7 @@
           <p:cNvPr id="13" name="s8-takeaway-rule">
             <a:extLst xmlns:a="http://schemas.openxmlformats.org/drawingml/2006/main">
               <a:ext uri="{FF2B5EF4-FFF2-40B4-BE49-F238E27FC236}">
-                <a16:creationId xmlns:a16="http://schemas.microsoft.com/office/drawing/2014/main" id="{59AC90BE-42F1-4604-8BB0-F8F83ACCFDC7}"/>
+                <a16:creationId xmlns:a16="http://schemas.microsoft.com/office/drawing/2014/main" id="{E94208E1-977F-48A7-8334-CDD347D792FE}"/>
               </a:ext>
             </a:extLst>
           </p:cNvPr>
@@ -11411,7 +11411,7 @@
           <p:cNvPr id="14" name="s8-takeaway">
             <a:extLst xmlns:a="http://schemas.openxmlformats.org/drawingml/2006/main">
               <a:ext uri="{FF2B5EF4-FFF2-40B4-BE49-F238E27FC236}">
-                <a16:creationId xmlns:a16="http://schemas.microsoft.com/office/drawing/2014/main" id="{07794917-8135-4968-A8E1-22DC3C122681}"/>
+                <a16:creationId xmlns:a16="http://schemas.microsoft.com/office/drawing/2014/main" id="{A6E2749B-AD04-4D8F-A875-2EBC3353A272}"/>
               </a:ext>
             </a:extLst>
           </p:cNvPr>
@@ -11467,7 +11467,7 @@
     </p:spTree>
     <p:extLst>
       <p:ext uri="{BB962C8B-B14F-4D97-AF65-F5344CB8AC3E}">
-        <p14:creationId xmlns:p14="http://schemas.microsoft.com/office/powerpoint/2010/main" val="1026957826"/>
+        <p14:creationId xmlns:p14="http://schemas.microsoft.com/office/powerpoint/2010/main" val="2032341865"/>
       </p:ext>
     </p:extLst>
   </p:cSld>
@@ -11498,7 +11498,7 @@
           <p:cNvPr id="1" name="s9-rule">
             <a:extLst xmlns:a="http://schemas.openxmlformats.org/drawingml/2006/main">
               <a:ext uri="{FF2B5EF4-FFF2-40B4-BE49-F238E27FC236}">
-                <a16:creationId xmlns:a16="http://schemas.microsoft.com/office/drawing/2014/main" id="{463C5135-C6D8-4E36-9B23-570E90A2633B}"/>
+                <a16:creationId xmlns:a16="http://schemas.microsoft.com/office/drawing/2014/main" id="{DF39ABF8-CDE0-4E3D-A53D-BE46B2860AC2}"/>
               </a:ext>
             </a:extLst>
           </p:cNvPr>
@@ -11531,7 +11531,7 @@
           <p:cNvPr id="2" name="s9-eyebrow">
             <a:extLst xmlns:a="http://schemas.openxmlformats.org/drawingml/2006/main">
               <a:ext uri="{FF2B5EF4-FFF2-40B4-BE49-F238E27FC236}">
-                <a16:creationId xmlns:a16="http://schemas.microsoft.com/office/drawing/2014/main" id="{965C0FFA-5A22-4D9C-89C5-DFA116EDD62A}"/>
+                <a16:creationId xmlns:a16="http://schemas.microsoft.com/office/drawing/2014/main" id="{37351902-70FD-4E44-9C5A-FC06BE087820}"/>
               </a:ext>
             </a:extLst>
           </p:cNvPr>
@@ -11589,7 +11589,7 @@
           <p:cNvPr id="3" name="s9-title">
             <a:extLst xmlns:a="http://schemas.openxmlformats.org/drawingml/2006/main">
               <a:ext uri="{FF2B5EF4-FFF2-40B4-BE49-F238E27FC236}">
-                <a16:creationId xmlns:a16="http://schemas.microsoft.com/office/drawing/2014/main" id="{98050603-F1B4-4F73-AD4C-98CE958AE559}"/>
+                <a16:creationId xmlns:a16="http://schemas.microsoft.com/office/drawing/2014/main" id="{7A8AD989-B53C-423F-AB76-B187C8CCA22E}"/>
               </a:ext>
             </a:extLst>
           </p:cNvPr>
@@ -11647,7 +11647,7 @@
           <p:cNvPr id="4" name="s9-footer">
             <a:extLst xmlns:a="http://schemas.openxmlformats.org/drawingml/2006/main">
               <a:ext uri="{FF2B5EF4-FFF2-40B4-BE49-F238E27FC236}">
-                <a16:creationId xmlns:a16="http://schemas.microsoft.com/office/drawing/2014/main" id="{E9D5A375-979E-4981-B816-CEACCDD6213E}"/>
+                <a16:creationId xmlns:a16="http://schemas.microsoft.com/office/drawing/2014/main" id="{C387A00F-156F-4A22-874E-64498815C7FB}"/>
               </a:ext>
             </a:extLst>
           </p:cNvPr>
@@ -11678,7 +11678,7 @@
           <p:cNvPr id="5" name="s9-identity">
             <a:extLst xmlns:a="http://schemas.openxmlformats.org/drawingml/2006/main">
               <a:ext uri="{FF2B5EF4-FFF2-40B4-BE49-F238E27FC236}">
-                <a16:creationId xmlns:a16="http://schemas.microsoft.com/office/drawing/2014/main" id="{ADFC3BFF-BFEF-49E9-8453-B080B258F9C1}"/>
+                <a16:creationId xmlns:a16="http://schemas.microsoft.com/office/drawing/2014/main" id="{51729FC5-EF37-43CF-9E4C-C3DDF6EFDB35}"/>
               </a:ext>
             </a:extLst>
           </p:cNvPr>
@@ -11736,7 +11736,7 @@
           <p:cNvPr id="6" name="core-no-0">
             <a:extLst xmlns:a="http://schemas.openxmlformats.org/drawingml/2006/main">
               <a:ext uri="{FF2B5EF4-FFF2-40B4-BE49-F238E27FC236}">
-                <a16:creationId xmlns:a16="http://schemas.microsoft.com/office/drawing/2014/main" id="{801BA42F-801E-4096-8DD6-1ED5B3AEF826}"/>
+                <a16:creationId xmlns:a16="http://schemas.microsoft.com/office/drawing/2014/main" id="{DD51233C-E607-4C11-842A-5C86C2D6497A}"/>
               </a:ext>
             </a:extLst>
           </p:cNvPr>
@@ -11794,7 +11794,7 @@
           <p:cNvPr id="7" name="core-label-0">
             <a:extLst xmlns:a="http://schemas.openxmlformats.org/drawingml/2006/main">
               <a:ext uri="{FF2B5EF4-FFF2-40B4-BE49-F238E27FC236}">
-                <a16:creationId xmlns:a16="http://schemas.microsoft.com/office/drawing/2014/main" id="{8B04E66A-EDBE-45FB-B809-E87084B388E6}"/>
+                <a16:creationId xmlns:a16="http://schemas.microsoft.com/office/drawing/2014/main" id="{95685069-826C-4345-8CD7-CE0EC8A531B2}"/>
               </a:ext>
             </a:extLst>
           </p:cNvPr>
@@ -11852,7 +11852,7 @@
           <p:cNvPr id="8" name="core-body-0">
             <a:extLst xmlns:a="http://schemas.openxmlformats.org/drawingml/2006/main">
               <a:ext uri="{FF2B5EF4-FFF2-40B4-BE49-F238E27FC236}">
-                <a16:creationId xmlns:a16="http://schemas.microsoft.com/office/drawing/2014/main" id="{025E28E0-A586-450D-B4FD-D2E5D7C72BCC}"/>
+                <a16:creationId xmlns:a16="http://schemas.microsoft.com/office/drawing/2014/main" id="{E756DCD5-790A-48A1-9803-578CDA4D9A35}"/>
               </a:ext>
             </a:extLst>
           </p:cNvPr>
@@ -11916,7 +11916,7 @@
           <p:cNvPr id="9" name="core-no-1">
             <a:extLst xmlns:a="http://schemas.openxmlformats.org/drawingml/2006/main">
               <a:ext uri="{FF2B5EF4-FFF2-40B4-BE49-F238E27FC236}">
-                <a16:creationId xmlns:a16="http://schemas.microsoft.com/office/drawing/2014/main" id="{481E00F1-CEAA-4AA4-A49F-F01136481C52}"/>
+                <a16:creationId xmlns:a16="http://schemas.microsoft.com/office/drawing/2014/main" id="{E2624260-EE1D-4376-AB4E-13AD36D21C57}"/>
               </a:ext>
             </a:extLst>
           </p:cNvPr>
@@ -11974,7 +11974,7 @@
           <p:cNvPr id="10" name="core-body-1">
             <a:extLst xmlns:a="http://schemas.openxmlformats.org/drawingml/2006/main">
               <a:ext uri="{FF2B5EF4-FFF2-40B4-BE49-F238E27FC236}">
-                <a16:creationId xmlns:a16="http://schemas.microsoft.com/office/drawing/2014/main" id="{4A49CDF6-CEC3-4FBE-8551-0C1D3DAD17E0}"/>
+                <a16:creationId xmlns:a16="http://schemas.microsoft.com/office/drawing/2014/main" id="{82C9AA02-BEC9-44C4-8026-35C071DE7B00}"/>
               </a:ext>
             </a:extLst>
           </p:cNvPr>
@@ -12038,7 +12038,7 @@
           <p:cNvPr id="11" name="core-no-2">
             <a:extLst xmlns:a="http://schemas.openxmlformats.org/drawingml/2006/main">
               <a:ext uri="{FF2B5EF4-FFF2-40B4-BE49-F238E27FC236}">
-                <a16:creationId xmlns:a16="http://schemas.microsoft.com/office/drawing/2014/main" id="{57505594-6744-474F-AF8C-452C668F7A23}"/>
+                <a16:creationId xmlns:a16="http://schemas.microsoft.com/office/drawing/2014/main" id="{FD180C5C-7530-4361-BE66-0AEB5B576906}"/>
               </a:ext>
             </a:extLst>
           </p:cNvPr>
@@ -12096,7 +12096,7 @@
           <p:cNvPr id="12" name="core-body-2">
             <a:extLst xmlns:a="http://schemas.openxmlformats.org/drawingml/2006/main">
               <a:ext uri="{FF2B5EF4-FFF2-40B4-BE49-F238E27FC236}">
-                <a16:creationId xmlns:a16="http://schemas.microsoft.com/office/drawing/2014/main" id="{5CA5CE50-ABA7-4578-A09D-51C3D432B758}"/>
+                <a16:creationId xmlns:a16="http://schemas.microsoft.com/office/drawing/2014/main" id="{C42438B2-C6B3-405A-BF95-BEB0A9D91049}"/>
               </a:ext>
             </a:extLst>
           </p:cNvPr>
@@ -12160,7 +12160,7 @@
           <p:cNvPr id="13" name="s9-takeaway-rule">
             <a:extLst xmlns:a="http://schemas.openxmlformats.org/drawingml/2006/main">
               <a:ext uri="{FF2B5EF4-FFF2-40B4-BE49-F238E27FC236}">
-                <a16:creationId xmlns:a16="http://schemas.microsoft.com/office/drawing/2014/main" id="{F92398B8-7DCE-463B-B101-BBFABE9C0358}"/>
+                <a16:creationId xmlns:a16="http://schemas.microsoft.com/office/drawing/2014/main" id="{0874B2F7-521C-4CDE-8B41-4FC6A59FF7C2}"/>
               </a:ext>
             </a:extLst>
           </p:cNvPr>
@@ -12193,7 +12193,7 @@
           <p:cNvPr id="14" name="s9-takeaway">
             <a:extLst xmlns:a="http://schemas.openxmlformats.org/drawingml/2006/main">
               <a:ext uri="{FF2B5EF4-FFF2-40B4-BE49-F238E27FC236}">
-                <a16:creationId xmlns:a16="http://schemas.microsoft.com/office/drawing/2014/main" id="{342715B4-5DA5-4158-B3C0-F9A08FA49757}"/>
+                <a16:creationId xmlns:a16="http://schemas.microsoft.com/office/drawing/2014/main" id="{7D0BB559-EB16-486C-9C03-75057DB55DCE}"/>
               </a:ext>
             </a:extLst>
           </p:cNvPr>
@@ -12249,7 +12249,7 @@
     </p:spTree>
     <p:extLst>
       <p:ext uri="{BB962C8B-B14F-4D97-AF65-F5344CB8AC3E}">
-        <p14:creationId xmlns:p14="http://schemas.microsoft.com/office/powerpoint/2010/main" val="1246046177"/>
+        <p14:creationId xmlns:p14="http://schemas.microsoft.com/office/powerpoint/2010/main" val="410650679"/>
       </p:ext>
     </p:extLst>
   </p:cSld>
